--- a/ksadeck/INK_IT_Visa_and_Permits_KSA.pptx
+++ b/ksadeck/INK_IT_Visa_and_Permits_KSA.pptx
@@ -15,9 +15,11 @@
     <p:sldId id="263" r:id="rId9"/>
     <p:sldId id="264" r:id="rId10"/>
     <p:sldId id="265" r:id="rId11"/>
+    <p:sldId id="266" r:id="rId12"/>
+    <p:sldId id="267" r:id="rId13"/>
   </p:sldIdLst>
   <p:notesMasterIdLst>
-    <p:notesMasterId r:id="rId12"/>
+    <p:notesMasterId r:id="rId14"/>
   </p:notesMasterIdLst>
   <p:sldSz cx="12192000" cy="6858000"/>
   <p:notesSz cx="6858000" cy="12192000"/>
@@ -599,7 +601,7 @@
           <a:p>
             <a:r>
               <a:rPr lang="en-US" dirty="0"/>
-              <a:t>Close on provisioning and the three questions a Saudi buyer always asks: where does the data sit, is there Arabic, and how long does it take. Have answers ready rather than promises.</a:t>
+              <a:t>The technical slide. Walk the four sides, then land the dashed arrows. Being straight that government API access belongs to the employer is what earns credibility with a Saudi CIO, and it is the question they will ask.</a:t>
             </a:r>
             <a:endParaRPr lang="en-US" dirty="0"/>
           </a:p>
@@ -623,6 +625,182 @@
             <a:fld id="{F7021451-1387-4CA6-816F-3879F97B5CBC}" type="slidenum">
               <a:rPr lang="en-US"/>
               <a:t>10</a:t>
+            </a:fld>
+            <a:endParaRPr lang="en-US"/>
+          </a:p>
+        </p:txBody>
+      </p:sp>
+    </p:spTree>
+    <p:extLst>
+      <p:ext uri="{BB962C8B-B14F-4D97-AF65-F5344CB8AC3E}">
+        <p14:creationId xmlns:p14="http://schemas.microsoft.com/office/powerpoint/2010/main" val="1024086991"/>
+      </p:ext>
+    </p:extLst>
+  </p:cSld>
+  <p:clrMapOvr>
+    <a:masterClrMapping/>
+  </p:clrMapOvr>
+</p:notes>
+</file>
+
+<file path=ppt/notesSlides/notesSlide11.xml><?xml version="1.0" encoding="utf-8"?>
+<p:notes xmlns:a="http://schemas.openxmlformats.org/drawingml/2006/main" xmlns:r="http://schemas.openxmlformats.org/officeDocument/2006/relationships" xmlns:p="http://schemas.openxmlformats.org/presentationml/2006/main">
+  <p:cSld>
+    <p:spTree>
+      <p:nvGrpSpPr>
+        <p:cNvPr id="1" name=""/>
+        <p:cNvGrpSpPr/>
+        <p:nvPr/>
+      </p:nvGrpSpPr>
+      <p:grpSpPr>
+        <a:xfrm>
+          <a:off x="0" y="0"/>
+          <a:ext cx="0" cy="0"/>
+          <a:chOff x="0" y="0"/>
+          <a:chExt cx="0" cy="0"/>
+        </a:xfrm>
+      </p:grpSpPr>
+      <p:sp>
+        <p:nvSpPr>
+          <p:cNvPr id="2" name="Slide Image Placeholder 1"/>
+          <p:cNvSpPr>
+            <a:spLocks noGrp="1" noRot="1" noChangeAspect="1"/>
+          </p:cNvSpPr>
+          <p:nvPr>
+            <p:ph type="sldImg"/>
+          </p:nvPr>
+        </p:nvSpPr>
+        <p:spPr/>
+      </p:sp>
+      <p:sp>
+        <p:nvSpPr>
+          <p:cNvPr id="3" name="Notes Placeholder 2"/>
+          <p:cNvSpPr>
+            <a:spLocks noGrp="1"/>
+          </p:cNvSpPr>
+          <p:nvPr>
+            <p:ph type="body" idx="1"/>
+          </p:nvPr>
+        </p:nvSpPr>
+        <p:spPr/>
+        <p:txBody>
+          <a:bodyPr/>
+          <a:lstStyle/>
+          <a:p>
+            <a:r>
+              <a:rPr lang="en-US" dirty="0"/>
+              <a:t>Close on provisioning and the three questions a Saudi buyer always asks: where does the data sit, is there Arabic, and how long does it take. Have answers ready rather than promises.</a:t>
+            </a:r>
+            <a:endParaRPr lang="en-US" dirty="0"/>
+          </a:p>
+        </p:txBody>
+      </p:sp>
+      <p:sp>
+        <p:nvSpPr>
+          <p:cNvPr id="4" name="Slide Number Placeholder 3"/>
+          <p:cNvSpPr>
+            <a:spLocks noGrp="1"/>
+          </p:cNvSpPr>
+          <p:nvPr>
+            <p:ph type="sldNum" sz="quarter" idx="10"/>
+          </p:nvPr>
+        </p:nvSpPr>
+        <p:spPr/>
+        <p:txBody>
+          <a:bodyPr/>
+          <a:lstStyle/>
+          <a:p>
+            <a:fld id="{F7021451-1387-4CA6-816F-3879F97B5CBC}" type="slidenum">
+              <a:rPr lang="en-US"/>
+              <a:t>11</a:t>
+            </a:fld>
+            <a:endParaRPr lang="en-US"/>
+          </a:p>
+        </p:txBody>
+      </p:sp>
+    </p:spTree>
+    <p:extLst>
+      <p:ext uri="{BB962C8B-B14F-4D97-AF65-F5344CB8AC3E}">
+        <p14:creationId xmlns:p14="http://schemas.microsoft.com/office/powerpoint/2010/main" val="1024086991"/>
+      </p:ext>
+    </p:extLst>
+  </p:cSld>
+  <p:clrMapOvr>
+    <a:masterClrMapping/>
+  </p:clrMapOvr>
+</p:notes>
+</file>
+
+<file path=ppt/notesSlides/notesSlide12.xml><?xml version="1.0" encoding="utf-8"?>
+<p:notes xmlns:a="http://schemas.openxmlformats.org/drawingml/2006/main" xmlns:r="http://schemas.openxmlformats.org/officeDocument/2006/relationships" xmlns:p="http://schemas.openxmlformats.org/presentationml/2006/main">
+  <p:cSld>
+    <p:spTree>
+      <p:nvGrpSpPr>
+        <p:cNvPr id="1" name=""/>
+        <p:cNvGrpSpPr/>
+        <p:nvPr/>
+      </p:nvGrpSpPr>
+      <p:grpSpPr>
+        <a:xfrm>
+          <a:off x="0" y="0"/>
+          <a:ext cx="0" cy="0"/>
+          <a:chOff x="0" y="0"/>
+          <a:chExt cx="0" cy="0"/>
+        </a:xfrm>
+      </p:grpSpPr>
+      <p:sp>
+        <p:nvSpPr>
+          <p:cNvPr id="2" name="Slide Image Placeholder 1"/>
+          <p:cNvSpPr>
+            <a:spLocks noGrp="1" noRot="1" noChangeAspect="1"/>
+          </p:cNvSpPr>
+          <p:nvPr>
+            <p:ph type="sldImg"/>
+          </p:nvPr>
+        </p:nvSpPr>
+        <p:spPr/>
+      </p:sp>
+      <p:sp>
+        <p:nvSpPr>
+          <p:cNvPr id="3" name="Notes Placeholder 2"/>
+          <p:cNvSpPr>
+            <a:spLocks noGrp="1"/>
+          </p:cNvSpPr>
+          <p:nvPr>
+            <p:ph type="body" idx="1"/>
+          </p:nvPr>
+        </p:nvSpPr>
+        <p:spPr/>
+        <p:txBody>
+          <a:bodyPr/>
+          <a:lstStyle/>
+          <a:p>
+            <a:r>
+              <a:rPr lang="en-US" dirty="0"/>
+              <a:t>Close by widening. The Saudi deal is the entry point; the platform argument is that the second and third country cost configuration rather than another project. For an SAP account executive this is the slide that turns one country into a regional account plan.</a:t>
+            </a:r>
+            <a:endParaRPr lang="en-US" dirty="0"/>
+          </a:p>
+        </p:txBody>
+      </p:sp>
+      <p:sp>
+        <p:nvSpPr>
+          <p:cNvPr id="4" name="Slide Number Placeholder 3"/>
+          <p:cNvSpPr>
+            <a:spLocks noGrp="1"/>
+          </p:cNvSpPr>
+          <p:nvPr>
+            <p:ph type="sldNum" sz="quarter" idx="10"/>
+          </p:nvPr>
+        </p:nvSpPr>
+        <p:spPr/>
+        <p:txBody>
+          <a:bodyPr/>
+          <a:lstStyle/>
+          <a:p>
+            <a:fld id="{F7021451-1387-4CA6-816F-3879F97B5CBC}" type="slidenum">
+              <a:rPr lang="en-US"/>
+              <a:t>12</a:t>
             </a:fld>
             <a:endParaRPr lang="en-US"/>
           </a:p>
@@ -1127,7 +1305,7 @@
           <a:p>
             <a:r>
               <a:rPr lang="en-US" dirty="0"/>
-              <a:t>With a mixed audience, let people find their own row. The GRO row is the operational win; the Head of HR row is the one an SAP account executive should point at when the conversation turns to platform value.</a:t>
+              <a:t>The integration slide a Saudi CIO is waiting for. Be precise: access is granted to the employer under their establishment registration, not to a software vendor, so the credentials have to come from the customer. Saying that plainly earns more trust than promising automation you cannot deliver.</a:t>
             </a:r>
             <a:endParaRPr lang="en-US" dirty="0"/>
           </a:p>
@@ -1215,7 +1393,7 @@
           <a:p>
             <a:r>
               <a:rPr lang="en-US" dirty="0"/>
-              <a:t>Two buyers on one slide. The ladder is for the HR operations lead, the levy box is for the CFO. The levy is usually the number that turns this from a nice-to-have into a budgeted project.</a:t>
+              <a:t>With a mixed audience, let people find their own row. The GRO row is the operational win; the Head of HR row is the one an SAP account executive should point at when the conversation turns to platform value.</a:t>
             </a:r>
             <a:endParaRPr lang="en-US" dirty="0"/>
           </a:p>
@@ -1303,7 +1481,7 @@
           <a:p>
             <a:r>
               <a:rPr lang="en-US" dirty="0"/>
-              <a:t>The technical slide. Walk the four sides, then land the dashed arrows. Being straight that government API access belongs to the employer is what earns credibility with a Saudi CIO, and it is the question they will ask.</a:t>
+              <a:t>Two buyers on one slide. The ladder is for the HR operations lead, the levy box is for the CFO. The levy is usually the number that turns this from a nice-to-have into a budgeted project.</a:t>
             </a:r>
             <a:endParaRPr lang="en-US" dirty="0"/>
           </a:p>
@@ -2480,6 +2658,650 @@
     <p:bg>
       <p:bgPr>
         <a:solidFill>
+          <a:srgbClr val="FFFFFF"/>
+        </a:solidFill>
+      </p:bgPr>
+    </p:bg>
+    <p:spTree>
+      <p:nvGrpSpPr>
+        <p:cNvPr id="1" name=""/>
+        <p:cNvGrpSpPr/>
+        <p:nvPr/>
+      </p:nvGrpSpPr>
+      <p:grpSpPr>
+        <a:xfrm>
+          <a:off x="0" y="0"/>
+          <a:ext cx="0" cy="0"/>
+          <a:chOff x="0" y="0"/>
+          <a:chExt cx="0" cy="0"/>
+        </a:xfrm>
+      </p:grpSpPr>
+      <p:sp>
+        <p:nvSpPr>
+          <p:cNvPr id="2" name="Text 0"/>
+          <p:cNvSpPr txBox="1"/>
+          <p:nvPr/>
+        </p:nvSpPr>
+        <p:spPr>
+          <a:xfrm>
+            <a:off x="548640" y="402336"/>
+            <a:ext cx="11064240" cy="237744"/>
+          </a:xfrm>
+          <a:prstGeom prst="rect">
+            <a:avLst/>
+          </a:prstGeom>
+          <a:noFill/>
+          <a:ln/>
+        </p:spPr>
+        <p:txBody>
+          <a:bodyPr wrap="square" lIns="0" tIns="0" rIns="0" bIns="0" rtlCol="0" anchor="ctr"/>
+          <a:lstStyle/>
+          <a:p>
+            <a:pPr indent="0" marL="0">
+              <a:buNone/>
+            </a:pPr>
+            <a:r>
+              <a:rPr lang="en-US" sz="1100" b="1" spc="220" kern="0" dirty="0">
+                <a:solidFill>
+                  <a:srgbClr val="20A098"/>
+                </a:solidFill>
+                <a:latin typeface="Calibri" pitchFamily="34" charset="0"/>
+                <a:ea typeface="Calibri" pitchFamily="34" charset="-122"/>
+                <a:cs typeface="Calibri" pitchFamily="34" charset="-120"/>
+              </a:rPr>
+              <a:t>SOLUTION ARCHITECTURE</a:t>
+            </a:r>
+            <a:endParaRPr lang="en-US" sz="1100" dirty="0"/>
+          </a:p>
+        </p:txBody>
+      </p:sp>
+      <p:sp>
+        <p:nvSpPr>
+          <p:cNvPr id="3" name="Text 1"/>
+          <p:cNvSpPr txBox="1"/>
+          <p:nvPr/>
+        </p:nvSpPr>
+        <p:spPr>
+          <a:xfrm>
+            <a:off x="548640" y="658368"/>
+            <a:ext cx="11064240" cy="566928"/>
+          </a:xfrm>
+          <a:prstGeom prst="rect">
+            <a:avLst/>
+          </a:prstGeom>
+          <a:noFill/>
+          <a:ln/>
+        </p:spPr>
+        <p:txBody>
+          <a:bodyPr wrap="square" lIns="0" tIns="0" rIns="0" bIns="0" rtlCol="0" anchor="ctr"/>
+          <a:lstStyle/>
+          <a:p>
+            <a:pPr indent="0" marL="0">
+              <a:buNone/>
+            </a:pPr>
+            <a:r>
+              <a:rPr lang="en-US" sz="3000" b="1" dirty="0">
+                <a:solidFill>
+                  <a:srgbClr val="0C1E33"/>
+                </a:solidFill>
+                <a:latin typeface="Arial" pitchFamily="34" charset="0"/>
+                <a:ea typeface="Arial" pitchFamily="34" charset="-122"/>
+                <a:cs typeface="Arial" pitchFamily="34" charset="-120"/>
+              </a:rPr>
+              <a:t>Every system, and what moves between them.</a:t>
+            </a:r>
+            <a:endParaRPr lang="en-US" sz="3000" dirty="0"/>
+          </a:p>
+        </p:txBody>
+      </p:sp>
+      <p:pic>
+        <p:nvPicPr>
+          <p:cNvPr id="4" name="Image 0" descr="./img/architecture.png">    </p:cNvPr>
+          <p:cNvPicPr>
+            <a:picLocks noChangeAspect="1"/>
+          </p:cNvPicPr>
+          <p:nvPr/>
+        </p:nvPicPr>
+        <p:blipFill>
+          <a:blip r:embed="rId1"/>
+          <a:stretch>
+            <a:fillRect/>
+          </a:stretch>
+        </p:blipFill>
+        <p:spPr>
+          <a:xfrm>
+            <a:off x="548640" y="1152144"/>
+            <a:ext cx="7543800" cy="5120640"/>
+          </a:xfrm>
+          <a:prstGeom prst="rect">
+            <a:avLst/>
+          </a:prstGeom>
+        </p:spPr>
+      </p:pic>
+      <p:sp>
+        <p:nvSpPr>
+          <p:cNvPr id="5" name="Shape 2"/>
+          <p:cNvSpPr/>
+          <p:nvPr/>
+        </p:nvSpPr>
+        <p:spPr>
+          <a:xfrm>
+            <a:off x="8275320" y="1152144"/>
+            <a:ext cx="3364992" cy="1188720"/>
+          </a:xfrm>
+          <a:prstGeom prst="roundRect">
+            <a:avLst>
+              <a:gd name="adj" fmla="val 5385"/>
+            </a:avLst>
+          </a:prstGeom>
+          <a:solidFill>
+            <a:srgbClr val="F4F6F7"/>
+          </a:solidFill>
+          <a:ln w="11430">
+            <a:solidFill>
+              <a:srgbClr val="E3E7EA"/>
+            </a:solidFill>
+            <a:prstDash val="solid"/>
+          </a:ln>
+        </p:spPr>
+      </p:sp>
+      <p:sp>
+        <p:nvSpPr>
+          <p:cNvPr id="6" name="Text 3"/>
+          <p:cNvSpPr txBox="1"/>
+          <p:nvPr/>
+        </p:nvSpPr>
+        <p:spPr>
+          <a:xfrm>
+            <a:off x="8449056" y="1252728"/>
+            <a:ext cx="3017520" cy="219456"/>
+          </a:xfrm>
+          <a:prstGeom prst="rect">
+            <a:avLst/>
+          </a:prstGeom>
+          <a:noFill/>
+          <a:ln/>
+        </p:spPr>
+        <p:txBody>
+          <a:bodyPr wrap="square" lIns="0" tIns="0" rIns="0" bIns="0" rtlCol="0" anchor="ctr"/>
+          <a:lstStyle/>
+          <a:p>
+            <a:pPr indent="0" marL="0">
+              <a:buNone/>
+            </a:pPr>
+            <a:r>
+              <a:rPr lang="en-US" sz="1150" b="1" dirty="0">
+                <a:solidFill>
+                  <a:srgbClr val="0C1E33"/>
+                </a:solidFill>
+                <a:latin typeface="Arial" pitchFamily="34" charset="0"/>
+                <a:ea typeface="Arial" pitchFamily="34" charset="-122"/>
+                <a:cs typeface="Arial" pitchFamily="34" charset="-120"/>
+              </a:rPr>
+              <a:t>What flows in</a:t>
+            </a:r>
+            <a:endParaRPr lang="en-US" sz="1150" dirty="0"/>
+          </a:p>
+        </p:txBody>
+      </p:sp>
+      <p:sp>
+        <p:nvSpPr>
+          <p:cNvPr id="7" name="Text 4"/>
+          <p:cNvSpPr txBox="1"/>
+          <p:nvPr/>
+        </p:nvSpPr>
+        <p:spPr>
+          <a:xfrm>
+            <a:off x="8449056" y="1481328"/>
+            <a:ext cx="3035808" cy="786384"/>
+          </a:xfrm>
+          <a:prstGeom prst="rect">
+            <a:avLst/>
+          </a:prstGeom>
+          <a:noFill/>
+          <a:ln/>
+        </p:spPr>
+        <p:txBody>
+          <a:bodyPr wrap="square" lIns="0" tIns="0" rIns="0" bIns="0" rtlCol="0" anchor="ctr"/>
+          <a:lstStyle/>
+          <a:p>
+            <a:pPr indent="0" marL="0">
+              <a:lnSpc>
+                <a:spcPts val="1140"/>
+              </a:lnSpc>
+              <a:buNone/>
+            </a:pPr>
+            <a:r>
+              <a:rPr lang="en-US" sz="850" dirty="0">
+                <a:solidFill>
+                  <a:srgbClr val="5A6C82"/>
+                </a:solidFill>
+                <a:latin typeface="Calibri" pitchFamily="34" charset="0"/>
+                <a:ea typeface="Calibri" pitchFamily="34" charset="-122"/>
+                <a:cs typeface="Calibri" pitchFamily="34" charset="-120"/>
+              </a:rPr>
+              <a:t>Candidates who accepted an offer, the employee master, separations and the Iqama expiry dates that start a renewal. All through SAP Integration Suite, monitored and retried like any other SAP integration.</a:t>
+            </a:r>
+            <a:endParaRPr lang="en-US" sz="850" dirty="0"/>
+          </a:p>
+        </p:txBody>
+      </p:sp>
+      <p:sp>
+        <p:nvSpPr>
+          <p:cNvPr id="8" name="Shape 5"/>
+          <p:cNvSpPr/>
+          <p:nvPr/>
+        </p:nvSpPr>
+        <p:spPr>
+          <a:xfrm>
+            <a:off x="8275320" y="2450592"/>
+            <a:ext cx="3364992" cy="1188720"/>
+          </a:xfrm>
+          <a:prstGeom prst="roundRect">
+            <a:avLst>
+              <a:gd name="adj" fmla="val 5385"/>
+            </a:avLst>
+          </a:prstGeom>
+          <a:solidFill>
+            <a:srgbClr val="F4F6F7"/>
+          </a:solidFill>
+          <a:ln w="11430">
+            <a:solidFill>
+              <a:srgbClr val="E3E7EA"/>
+            </a:solidFill>
+            <a:prstDash val="solid"/>
+          </a:ln>
+        </p:spPr>
+      </p:sp>
+      <p:sp>
+        <p:nvSpPr>
+          <p:cNvPr id="9" name="Text 6"/>
+          <p:cNvSpPr txBox="1"/>
+          <p:nvPr/>
+        </p:nvSpPr>
+        <p:spPr>
+          <a:xfrm>
+            <a:off x="8449056" y="2551176"/>
+            <a:ext cx="3017520" cy="219456"/>
+          </a:xfrm>
+          <a:prstGeom prst="rect">
+            <a:avLst/>
+          </a:prstGeom>
+          <a:noFill/>
+          <a:ln/>
+        </p:spPr>
+        <p:txBody>
+          <a:bodyPr wrap="square" lIns="0" tIns="0" rIns="0" bIns="0" rtlCol="0" anchor="ctr"/>
+          <a:lstStyle/>
+          <a:p>
+            <a:pPr indent="0" marL="0">
+              <a:buNone/>
+            </a:pPr>
+            <a:r>
+              <a:rPr lang="en-US" sz="1150" b="1" dirty="0">
+                <a:solidFill>
+                  <a:srgbClr val="0C1E33"/>
+                </a:solidFill>
+                <a:latin typeface="Arial" pitchFamily="34" charset="0"/>
+                <a:ea typeface="Arial" pitchFamily="34" charset="-122"/>
+                <a:cs typeface="Arial" pitchFamily="34" charset="-120"/>
+              </a:rPr>
+              <a:t>What flows back</a:t>
+            </a:r>
+            <a:endParaRPr lang="en-US" sz="1150" dirty="0"/>
+          </a:p>
+        </p:txBody>
+      </p:sp>
+      <p:sp>
+        <p:nvSpPr>
+          <p:cNvPr id="10" name="Text 7"/>
+          <p:cNvSpPr txBox="1"/>
+          <p:nvPr/>
+        </p:nvSpPr>
+        <p:spPr>
+          <a:xfrm>
+            <a:off x="8449056" y="2779776"/>
+            <a:ext cx="3035808" cy="786384"/>
+          </a:xfrm>
+          <a:prstGeom prst="rect">
+            <a:avLst/>
+          </a:prstGeom>
+          <a:noFill/>
+          <a:ln/>
+        </p:spPr>
+        <p:txBody>
+          <a:bodyPr wrap="square" lIns="0" tIns="0" rIns="0" bIns="0" rtlCol="0" anchor="ctr"/>
+          <a:lstStyle/>
+          <a:p>
+            <a:pPr indent="0" marL="0">
+              <a:lnSpc>
+                <a:spcPts val="1140"/>
+              </a:lnSpc>
+              <a:buNone/>
+            </a:pPr>
+            <a:r>
+              <a:rPr lang="en-US" sz="850" dirty="0">
+                <a:solidFill>
+                  <a:srgbClr val="5A6C82"/>
+                </a:solidFill>
+                <a:latin typeface="Calibri" pitchFamily="34" charset="0"/>
+                <a:ea typeface="Calibri" pitchFamily="34" charset="-122"/>
+                <a:cs typeface="Calibri" pitchFamily="34" charset="-120"/>
+              </a:rPr>
+              <a:t>Iqama number, expiry, profession as registered in Qiwa and work permit status, straight into Employee Central. Nobody re-types anything.</a:t>
+            </a:r>
+            <a:endParaRPr lang="en-US" sz="850" dirty="0"/>
+          </a:p>
+        </p:txBody>
+      </p:sp>
+      <p:sp>
+        <p:nvSpPr>
+          <p:cNvPr id="11" name="Shape 8"/>
+          <p:cNvSpPr/>
+          <p:nvPr/>
+        </p:nvSpPr>
+        <p:spPr>
+          <a:xfrm>
+            <a:off x="8275320" y="3749040"/>
+            <a:ext cx="3364992" cy="1188720"/>
+          </a:xfrm>
+          <a:prstGeom prst="roundRect">
+            <a:avLst>
+              <a:gd name="adj" fmla="val 5385"/>
+            </a:avLst>
+          </a:prstGeom>
+          <a:solidFill>
+            <a:srgbClr val="F4F6F7"/>
+          </a:solidFill>
+          <a:ln w="11430">
+            <a:solidFill>
+              <a:srgbClr val="E3E7EA"/>
+            </a:solidFill>
+            <a:prstDash val="solid"/>
+          </a:ln>
+        </p:spPr>
+      </p:sp>
+      <p:sp>
+        <p:nvSpPr>
+          <p:cNvPr id="12" name="Text 9"/>
+          <p:cNvSpPr txBox="1"/>
+          <p:nvPr/>
+        </p:nvSpPr>
+        <p:spPr>
+          <a:xfrm>
+            <a:off x="8449056" y="3849624"/>
+            <a:ext cx="3017520" cy="219456"/>
+          </a:xfrm>
+          <a:prstGeom prst="rect">
+            <a:avLst/>
+          </a:prstGeom>
+          <a:noFill/>
+          <a:ln/>
+        </p:spPr>
+        <p:txBody>
+          <a:bodyPr wrap="square" lIns="0" tIns="0" rIns="0" bIns="0" rtlCol="0" anchor="ctr"/>
+          <a:lstStyle/>
+          <a:p>
+            <a:pPr indent="0" marL="0">
+              <a:buNone/>
+            </a:pPr>
+            <a:r>
+              <a:rPr lang="en-US" sz="1150" b="1" dirty="0">
+                <a:solidFill>
+                  <a:srgbClr val="0C1E33"/>
+                </a:solidFill>
+                <a:latin typeface="Arial" pitchFamily="34" charset="0"/>
+                <a:ea typeface="Arial" pitchFamily="34" charset="-122"/>
+                <a:cs typeface="Arial" pitchFamily="34" charset="-120"/>
+              </a:rPr>
+              <a:t>What flows down</a:t>
+            </a:r>
+            <a:endParaRPr lang="en-US" sz="1150" dirty="0"/>
+          </a:p>
+        </p:txBody>
+      </p:sp>
+      <p:sp>
+        <p:nvSpPr>
+          <p:cNvPr id="13" name="Text 10"/>
+          <p:cNvSpPr txBox="1"/>
+          <p:nvPr/>
+        </p:nvSpPr>
+        <p:spPr>
+          <a:xfrm>
+            <a:off x="8449056" y="4078224"/>
+            <a:ext cx="3035808" cy="786384"/>
+          </a:xfrm>
+          <a:prstGeom prst="rect">
+            <a:avLst/>
+          </a:prstGeom>
+          <a:noFill/>
+          <a:ln/>
+        </p:spPr>
+        <p:txBody>
+          <a:bodyPr wrap="square" lIns="0" tIns="0" rIns="0" bIns="0" rtlCol="0" anchor="ctr"/>
+          <a:lstStyle/>
+          <a:p>
+            <a:pPr indent="0" marL="0">
+              <a:lnSpc>
+                <a:spcPts val="1140"/>
+              </a:lnSpc>
+              <a:buNone/>
+            </a:pPr>
+            <a:r>
+              <a:rPr lang="en-US" sz="850" dirty="0">
+                <a:solidFill>
+                  <a:srgbClr val="5A6C82"/>
+                </a:solidFill>
+                <a:latin typeface="Calibri" pitchFamily="34" charset="0"/>
+                <a:ea typeface="Calibri" pitchFamily="34" charset="-122"/>
+                <a:cs typeface="Calibri" pitchFamily="34" charset="-120"/>
+              </a:rPr>
+              <a:t>Every payment with its amount, VAT, SADAD reference, receipt and GL account, posted to S/4HANA as a journal. Levy accruals included.</a:t>
+            </a:r>
+            <a:endParaRPr lang="en-US" sz="850" dirty="0"/>
+          </a:p>
+        </p:txBody>
+      </p:sp>
+      <p:sp>
+        <p:nvSpPr>
+          <p:cNvPr id="14" name="Shape 11"/>
+          <p:cNvSpPr/>
+          <p:nvPr/>
+        </p:nvSpPr>
+        <p:spPr>
+          <a:xfrm>
+            <a:off x="8275320" y="5047488"/>
+            <a:ext cx="3364992" cy="1188720"/>
+          </a:xfrm>
+          <a:prstGeom prst="roundRect">
+            <a:avLst>
+              <a:gd name="adj" fmla="val 5385"/>
+            </a:avLst>
+          </a:prstGeom>
+          <a:solidFill>
+            <a:srgbClr val="FCF6E4"/>
+          </a:solidFill>
+          <a:ln w="11430">
+            <a:solidFill>
+              <a:srgbClr val="C9A227"/>
+            </a:solidFill>
+            <a:prstDash val="solid"/>
+          </a:ln>
+        </p:spPr>
+      </p:sp>
+      <p:sp>
+        <p:nvSpPr>
+          <p:cNvPr id="15" name="Text 12"/>
+          <p:cNvSpPr txBox="1"/>
+          <p:nvPr/>
+        </p:nvSpPr>
+        <p:spPr>
+          <a:xfrm>
+            <a:off x="8449056" y="5148072"/>
+            <a:ext cx="3017520" cy="219456"/>
+          </a:xfrm>
+          <a:prstGeom prst="rect">
+            <a:avLst/>
+          </a:prstGeom>
+          <a:noFill/>
+          <a:ln/>
+        </p:spPr>
+        <p:txBody>
+          <a:bodyPr wrap="square" lIns="0" tIns="0" rIns="0" bIns="0" rtlCol="0" anchor="ctr"/>
+          <a:lstStyle/>
+          <a:p>
+            <a:pPr indent="0" marL="0">
+              <a:buNone/>
+            </a:pPr>
+            <a:r>
+              <a:rPr lang="en-US" sz="1150" b="1" dirty="0">
+                <a:solidFill>
+                  <a:srgbClr val="7A6410"/>
+                </a:solidFill>
+                <a:latin typeface="Arial" pitchFamily="34" charset="0"/>
+                <a:ea typeface="Arial" pitchFamily="34" charset="-122"/>
+                <a:cs typeface="Arial" pitchFamily="34" charset="-120"/>
+              </a:rPr>
+              <a:t>The dashed arrows</a:t>
+            </a:r>
+            <a:endParaRPr lang="en-US" sz="1150" dirty="0"/>
+          </a:p>
+        </p:txBody>
+      </p:sp>
+      <p:sp>
+        <p:nvSpPr>
+          <p:cNvPr id="16" name="Text 13"/>
+          <p:cNvSpPr txBox="1"/>
+          <p:nvPr/>
+        </p:nvSpPr>
+        <p:spPr>
+          <a:xfrm>
+            <a:off x="8449056" y="5376672"/>
+            <a:ext cx="3035808" cy="786384"/>
+          </a:xfrm>
+          <a:prstGeom prst="rect">
+            <a:avLst/>
+          </a:prstGeom>
+          <a:noFill/>
+          <a:ln/>
+        </p:spPr>
+        <p:txBody>
+          <a:bodyPr wrap="square" lIns="0" tIns="0" rIns="0" bIns="0" rtlCol="0" anchor="ctr"/>
+          <a:lstStyle/>
+          <a:p>
+            <a:pPr indent="0" marL="0">
+              <a:lnSpc>
+                <a:spcPts val="1140"/>
+              </a:lnSpc>
+              <a:buNone/>
+            </a:pPr>
+            <a:r>
+              <a:rPr lang="en-US" sz="850" dirty="0">
+                <a:solidFill>
+                  <a:srgbClr val="5A6C82"/>
+                </a:solidFill>
+                <a:latin typeface="Calibri" pitchFamily="34" charset="0"/>
+                <a:ea typeface="Calibri" pitchFamily="34" charset="-122"/>
+                <a:cs typeface="Calibri" pitchFamily="34" charset="-120"/>
+              </a:rPr>
+              <a:t>Qiwa and Muqeem grant API access to the employer under their own establishment registration, never to a software vendor. Those credentials come from you. The connectors are already built.</a:t>
+            </a:r>
+            <a:endParaRPr lang="en-US" sz="850" dirty="0"/>
+          </a:p>
+        </p:txBody>
+      </p:sp>
+      <p:sp>
+        <p:nvSpPr>
+          <p:cNvPr id="17" name="Text 14"/>
+          <p:cNvSpPr txBox="1"/>
+          <p:nvPr/>
+        </p:nvSpPr>
+        <p:spPr>
+          <a:xfrm>
+            <a:off x="548640" y="6419088"/>
+            <a:ext cx="8595360" cy="237744"/>
+          </a:xfrm>
+          <a:prstGeom prst="rect">
+            <a:avLst/>
+          </a:prstGeom>
+          <a:noFill/>
+          <a:ln/>
+        </p:spPr>
+        <p:txBody>
+          <a:bodyPr wrap="square" lIns="0" tIns="0" rIns="0" bIns="0" rtlCol="0" anchor="ctr"/>
+          <a:lstStyle/>
+          <a:p>
+            <a:pPr indent="0" marL="0">
+              <a:buNone/>
+            </a:pPr>
+            <a:r>
+              <a:rPr lang="en-US" sz="900" dirty="0">
+                <a:solidFill>
+                  <a:srgbClr val="96A3AE"/>
+                </a:solidFill>
+                <a:latin typeface="Calibri" pitchFamily="34" charset="0"/>
+                <a:ea typeface="Calibri" pitchFamily="34" charset="-122"/>
+                <a:cs typeface="Calibri" pitchFamily="34" charset="-120"/>
+              </a:rPr>
+              <a:t>INK IT Business Solutions  ·  Visa &amp; Permits Management  ·  Kingdom of Saudi Arabia</a:t>
+            </a:r>
+            <a:endParaRPr lang="en-US" sz="900" dirty="0"/>
+          </a:p>
+        </p:txBody>
+      </p:sp>
+      <p:sp>
+        <p:nvSpPr>
+          <p:cNvPr id="18" name="Text 15"/>
+          <p:cNvSpPr txBox="1"/>
+          <p:nvPr/>
+        </p:nvSpPr>
+        <p:spPr>
+          <a:xfrm>
+            <a:off x="11155680" y="6419088"/>
+            <a:ext cx="457200" cy="237744"/>
+          </a:xfrm>
+          <a:prstGeom prst="rect">
+            <a:avLst/>
+          </a:prstGeom>
+          <a:noFill/>
+          <a:ln/>
+        </p:spPr>
+        <p:txBody>
+          <a:bodyPr wrap="square" lIns="0" tIns="0" rIns="0" bIns="0" rtlCol="0" anchor="ctr"/>
+          <a:lstStyle/>
+          <a:p>
+            <a:pPr algn="r" indent="0" marL="0">
+              <a:buNone/>
+            </a:pPr>
+            <a:r>
+              <a:rPr lang="en-US" sz="900" dirty="0">
+                <a:solidFill>
+                  <a:srgbClr val="96A3AE"/>
+                </a:solidFill>
+                <a:latin typeface="Calibri" pitchFamily="34" charset="0"/>
+                <a:ea typeface="Calibri" pitchFamily="34" charset="-122"/>
+                <a:cs typeface="Calibri" pitchFamily="34" charset="-120"/>
+              </a:rPr>
+              <a:t>10</a:t>
+            </a:r>
+            <a:endParaRPr lang="en-US" sz="900" dirty="0"/>
+          </a:p>
+        </p:txBody>
+      </p:sp>
+    </p:spTree>
+  </p:cSld>
+  <p:clrMapOvr>
+    <a:masterClrMapping/>
+  </p:clrMapOvr>
+</p:sld>
+</file>
+
+<file path=ppt/slides/slide11.xml><?xml version="1.0" encoding="utf-8"?>
+<p:sld xmlns:a="http://schemas.openxmlformats.org/drawingml/2006/main" xmlns:r="http://schemas.openxmlformats.org/officeDocument/2006/relationships" xmlns:p="http://schemas.openxmlformats.org/presentationml/2006/main">
+  <p:cSld name="Slide 11">
+    <p:bg>
+      <p:bgPr>
+        <a:solidFill>
           <a:srgbClr val="0C1E33"/>
         </a:solidFill>
       </p:bgPr>
@@ -4478,24 +5300,195 @@
         </p:nvSpPr>
         <p:spPr>
           <a:xfrm>
-            <a:off x="548640" y="5779008"/>
-            <a:ext cx="5852160" cy="329184"/>
-          </a:xfrm>
-          <a:prstGeom prst="rect">
-            <a:avLst/>
-          </a:prstGeom>
-          <a:noFill/>
-          <a:ln/>
-        </p:spPr>
-        <p:txBody>
-          <a:bodyPr wrap="square" lIns="0" tIns="0" rIns="0" bIns="0" rtlCol="0" anchor="ctr"/>
-          <a:lstStyle/>
-          <a:p>
-            <a:pPr indent="0" marL="0">
-              <a:buNone/>
-            </a:pPr>
-            <a:r>
-              <a:rPr lang="en-US" sz="2000" b="1" dirty="0">
+            <a:off x="548640" y="6419088"/>
+            <a:ext cx="8595360" cy="237744"/>
+          </a:xfrm>
+          <a:prstGeom prst="rect">
+            <a:avLst/>
+          </a:prstGeom>
+          <a:noFill/>
+          <a:ln/>
+        </p:spPr>
+        <p:txBody>
+          <a:bodyPr wrap="square" lIns="0" tIns="0" rIns="0" bIns="0" rtlCol="0" anchor="ctr"/>
+          <a:lstStyle/>
+          <a:p>
+            <a:pPr indent="0" marL="0">
+              <a:buNone/>
+            </a:pPr>
+            <a:r>
+              <a:rPr lang="en-US" sz="900" dirty="0">
+                <a:solidFill>
+                  <a:srgbClr val="7E99B4"/>
+                </a:solidFill>
+                <a:latin typeface="Calibri" pitchFamily="34" charset="0"/>
+                <a:ea typeface="Calibri" pitchFamily="34" charset="-122"/>
+                <a:cs typeface="Calibri" pitchFamily="34" charset="-120"/>
+              </a:rPr>
+              <a:t>INK IT Business Solutions  ·  Visa &amp; Permits Management  ·  Kingdom of Saudi Arabia</a:t>
+            </a:r>
+            <a:endParaRPr lang="en-US" sz="900" dirty="0"/>
+          </a:p>
+        </p:txBody>
+      </p:sp>
+      <p:sp>
+        <p:nvSpPr>
+          <p:cNvPr id="63" name="Text 61"/>
+          <p:cNvSpPr txBox="1"/>
+          <p:nvPr/>
+        </p:nvSpPr>
+        <p:spPr>
+          <a:xfrm>
+            <a:off x="11155680" y="6419088"/>
+            <a:ext cx="457200" cy="237744"/>
+          </a:xfrm>
+          <a:prstGeom prst="rect">
+            <a:avLst/>
+          </a:prstGeom>
+          <a:noFill/>
+          <a:ln/>
+        </p:spPr>
+        <p:txBody>
+          <a:bodyPr wrap="square" lIns="0" tIns="0" rIns="0" bIns="0" rtlCol="0" anchor="ctr"/>
+          <a:lstStyle/>
+          <a:p>
+            <a:pPr algn="r" indent="0" marL="0">
+              <a:buNone/>
+            </a:pPr>
+            <a:r>
+              <a:rPr lang="en-US" sz="900" dirty="0">
+                <a:solidFill>
+                  <a:srgbClr val="7E99B4"/>
+                </a:solidFill>
+                <a:latin typeface="Calibri" pitchFamily="34" charset="0"/>
+                <a:ea typeface="Calibri" pitchFamily="34" charset="-122"/>
+                <a:cs typeface="Calibri" pitchFamily="34" charset="-120"/>
+              </a:rPr>
+              <a:t>11</a:t>
+            </a:r>
+            <a:endParaRPr lang="en-US" sz="900" dirty="0"/>
+          </a:p>
+        </p:txBody>
+      </p:sp>
+    </p:spTree>
+  </p:cSld>
+  <p:clrMapOvr>
+    <a:masterClrMapping/>
+  </p:clrMapOvr>
+</p:sld>
+</file>
+
+<file path=ppt/slides/slide12.xml><?xml version="1.0" encoding="utf-8"?>
+<p:sld xmlns:a="http://schemas.openxmlformats.org/drawingml/2006/main" xmlns:r="http://schemas.openxmlformats.org/officeDocument/2006/relationships" xmlns:p="http://schemas.openxmlformats.org/presentationml/2006/main">
+  <p:cSld name="Slide 12">
+    <p:bg>
+      <p:bgPr>
+        <a:solidFill>
+          <a:srgbClr val="0C1E33"/>
+        </a:solidFill>
+      </p:bgPr>
+    </p:bg>
+    <p:spTree>
+      <p:nvGrpSpPr>
+        <p:cNvPr id="1" name=""/>
+        <p:cNvGrpSpPr/>
+        <p:nvPr/>
+      </p:nvGrpSpPr>
+      <p:grpSpPr>
+        <a:xfrm>
+          <a:off x="0" y="0"/>
+          <a:ext cx="0" cy="0"/>
+          <a:chOff x="0" y="0"/>
+          <a:chExt cx="0" cy="0"/>
+        </a:xfrm>
+      </p:grpSpPr>
+      <p:sp>
+        <p:nvSpPr>
+          <p:cNvPr id="2" name="Shape 0"/>
+          <p:cNvSpPr/>
+          <p:nvPr/>
+        </p:nvSpPr>
+        <p:spPr>
+          <a:xfrm>
+            <a:off x="8961120" y="-2194560"/>
+            <a:ext cx="6217920" cy="6217920"/>
+          </a:xfrm>
+          <a:prstGeom prst="ellipse">
+            <a:avLst/>
+          </a:prstGeom>
+          <a:solidFill>
+            <a:srgbClr val="20A098">
+              <a:alpha val="11000"/>
+            </a:srgbClr>
+          </a:solidFill>
+          <a:ln/>
+        </p:spPr>
+      </p:sp>
+      <p:sp>
+        <p:nvSpPr>
+          <p:cNvPr id="3" name="Text 1"/>
+          <p:cNvSpPr txBox="1"/>
+          <p:nvPr/>
+        </p:nvSpPr>
+        <p:spPr>
+          <a:xfrm>
+            <a:off x="548640" y="402336"/>
+            <a:ext cx="11064240" cy="237744"/>
+          </a:xfrm>
+          <a:prstGeom prst="rect">
+            <a:avLst/>
+          </a:prstGeom>
+          <a:noFill/>
+          <a:ln/>
+        </p:spPr>
+        <p:txBody>
+          <a:bodyPr wrap="square" lIns="0" tIns="0" rIns="0" bIns="0" rtlCol="0" anchor="ctr"/>
+          <a:lstStyle/>
+          <a:p>
+            <a:pPr indent="0" marL="0">
+              <a:buNone/>
+            </a:pPr>
+            <a:r>
+              <a:rPr lang="en-US" sz="1100" b="1" spc="220" kern="0" dirty="0">
+                <a:solidFill>
+                  <a:srgbClr val="C9A227"/>
+                </a:solidFill>
+                <a:latin typeface="Calibri" pitchFamily="34" charset="0"/>
+                <a:ea typeface="Calibri" pitchFamily="34" charset="-122"/>
+                <a:cs typeface="Calibri" pitchFamily="34" charset="-120"/>
+              </a:rPr>
+              <a:t>BEYOND THE KINGDOM</a:t>
+            </a:r>
+            <a:endParaRPr lang="en-US" sz="1100" dirty="0"/>
+          </a:p>
+        </p:txBody>
+      </p:sp>
+      <p:sp>
+        <p:nvSpPr>
+          <p:cNvPr id="4" name="Text 2"/>
+          <p:cNvSpPr txBox="1"/>
+          <p:nvPr/>
+        </p:nvSpPr>
+        <p:spPr>
+          <a:xfrm>
+            <a:off x="548640" y="658368"/>
+            <a:ext cx="11064240" cy="566928"/>
+          </a:xfrm>
+          <a:prstGeom prst="rect">
+            <a:avLst/>
+          </a:prstGeom>
+          <a:noFill/>
+          <a:ln/>
+        </p:spPr>
+        <p:txBody>
+          <a:bodyPr wrap="square" lIns="0" tIns="0" rIns="0" bIns="0" rtlCol="0" anchor="ctr"/>
+          <a:lstStyle/>
+          <a:p>
+            <a:pPr indent="0" marL="0">
+              <a:buNone/>
+            </a:pPr>
+            <a:r>
+              <a:rPr lang="en-US" sz="3000" b="1" dirty="0">
                 <a:solidFill>
                   <a:srgbClr val="FFFFFF"/>
                 </a:solidFill>
@@ -4503,22 +5496,1622 @@
                 <a:ea typeface="Arial" pitchFamily="34" charset="-122"/>
                 <a:cs typeface="Arial" pitchFamily="34" charset="-120"/>
               </a:rPr>
-              <a:t>Built for the Kingdom.</a:t>
-            </a:r>
-            <a:endParaRPr lang="en-US" sz="2000" dirty="0"/>
-          </a:p>
-        </p:txBody>
-      </p:sp>
-      <p:sp>
-        <p:nvSpPr>
-          <p:cNvPr id="63" name="Text 61"/>
-          <p:cNvSpPr txBox="1"/>
-          <p:nvPr/>
-        </p:nvSpPr>
-        <p:spPr>
-          <a:xfrm>
-            <a:off x="548640" y="6126480"/>
-            <a:ext cx="8046720" cy="274320"/>
+              <a:t>Saudi Arabia is one pack. There are seven.</a:t>
+            </a:r>
+            <a:endParaRPr lang="en-US" sz="3000" dirty="0"/>
+          </a:p>
+        </p:txBody>
+      </p:sp>
+      <p:sp>
+        <p:nvSpPr>
+          <p:cNvPr id="5" name="Text 3"/>
+          <p:cNvSpPr txBox="1"/>
+          <p:nvPr/>
+        </p:nvSpPr>
+        <p:spPr>
+          <a:xfrm>
+            <a:off x="548640" y="1243584"/>
+            <a:ext cx="10424160" cy="310896"/>
+          </a:xfrm>
+          <a:prstGeom prst="rect">
+            <a:avLst/>
+          </a:prstGeom>
+          <a:noFill/>
+          <a:ln/>
+        </p:spPr>
+        <p:txBody>
+          <a:bodyPr wrap="square" lIns="0" tIns="0" rIns="0" bIns="0" rtlCol="0" anchor="ctr"/>
+          <a:lstStyle/>
+          <a:p>
+            <a:pPr indent="0" marL="0">
+              <a:buNone/>
+            </a:pPr>
+            <a:r>
+              <a:rPr lang="en-US" sz="1250" dirty="0">
+                <a:solidFill>
+                  <a:srgbClr val="A9C2DA"/>
+                </a:solidFill>
+                <a:latin typeface="Calibri" pitchFamily="34" charset="0"/>
+                <a:ea typeface="Calibri" pitchFamily="34" charset="-122"/>
+                <a:cs typeface="Calibri" pitchFamily="34" charset="-120"/>
+              </a:rPr>
+              <a:t>The engine underneath runs six more markets, so your second country is a configuration, not another project.</a:t>
+            </a:r>
+            <a:endParaRPr lang="en-US" sz="1250" dirty="0"/>
+          </a:p>
+        </p:txBody>
+      </p:sp>
+      <p:sp>
+        <p:nvSpPr>
+          <p:cNvPr id="6" name="Shape 4"/>
+          <p:cNvSpPr/>
+          <p:nvPr/>
+        </p:nvSpPr>
+        <p:spPr>
+          <a:xfrm>
+            <a:off x="548640" y="1773936"/>
+            <a:ext cx="2670048" cy="1207008"/>
+          </a:xfrm>
+          <a:prstGeom prst="roundRect">
+            <a:avLst>
+              <a:gd name="adj" fmla="val 6061"/>
+            </a:avLst>
+          </a:prstGeom>
+          <a:solidFill>
+            <a:srgbClr val="123A4E"/>
+          </a:solidFill>
+          <a:ln w="20320">
+            <a:solidFill>
+              <a:srgbClr val="20A098"/>
+            </a:solidFill>
+            <a:prstDash val="solid"/>
+          </a:ln>
+        </p:spPr>
+      </p:sp>
+      <p:sp>
+        <p:nvSpPr>
+          <p:cNvPr id="7" name="Text 5"/>
+          <p:cNvSpPr txBox="1"/>
+          <p:nvPr/>
+        </p:nvSpPr>
+        <p:spPr>
+          <a:xfrm>
+            <a:off x="704088" y="1883664"/>
+            <a:ext cx="1463040" cy="237744"/>
+          </a:xfrm>
+          <a:prstGeom prst="rect">
+            <a:avLst/>
+          </a:prstGeom>
+          <a:noFill/>
+          <a:ln/>
+        </p:spPr>
+        <p:txBody>
+          <a:bodyPr wrap="square" lIns="0" tIns="0" rIns="0" bIns="0" rtlCol="0" anchor="ctr"/>
+          <a:lstStyle/>
+          <a:p>
+            <a:pPr indent="0" marL="0">
+              <a:buNone/>
+            </a:pPr>
+            <a:r>
+              <a:rPr lang="en-US" sz="1250" b="1" dirty="0">
+                <a:solidFill>
+                  <a:srgbClr val="FFFFFF"/>
+                </a:solidFill>
+                <a:latin typeface="Arial" pitchFamily="34" charset="0"/>
+                <a:ea typeface="Arial" pitchFamily="34" charset="-122"/>
+                <a:cs typeface="Arial" pitchFamily="34" charset="-120"/>
+              </a:rPr>
+              <a:t>Saudi Arabia</a:t>
+            </a:r>
+            <a:endParaRPr lang="en-US" sz="1250" dirty="0"/>
+          </a:p>
+        </p:txBody>
+      </p:sp>
+      <p:sp>
+        <p:nvSpPr>
+          <p:cNvPr id="8" name="Text 6"/>
+          <p:cNvSpPr txBox="1"/>
+          <p:nvPr/>
+        </p:nvSpPr>
+        <p:spPr>
+          <a:xfrm>
+            <a:off x="704088" y="2157984"/>
+            <a:ext cx="2359152" cy="201168"/>
+          </a:xfrm>
+          <a:prstGeom prst="rect">
+            <a:avLst/>
+          </a:prstGeom>
+          <a:noFill/>
+          <a:ln/>
+        </p:spPr>
+        <p:txBody>
+          <a:bodyPr wrap="square" lIns="0" tIns="0" rIns="0" bIns="0" rtlCol="0" anchor="ctr"/>
+          <a:lstStyle/>
+          <a:p>
+            <a:pPr indent="0" marL="0">
+              <a:buNone/>
+            </a:pPr>
+            <a:r>
+              <a:rPr lang="en-US" sz="900" dirty="0">
+                <a:solidFill>
+                  <a:srgbClr val="20A098"/>
+                </a:solidFill>
+                <a:latin typeface="Calibri" pitchFamily="34" charset="0"/>
+                <a:ea typeface="Calibri" pitchFamily="34" charset="-122"/>
+                <a:cs typeface="Calibri" pitchFamily="34" charset="-120"/>
+              </a:rPr>
+              <a:t>Qiwa / Muqeem / Absher</a:t>
+            </a:r>
+            <a:endParaRPr lang="en-US" sz="900" dirty="0"/>
+          </a:p>
+        </p:txBody>
+      </p:sp>
+      <p:sp>
+        <p:nvSpPr>
+          <p:cNvPr id="9" name="Text 7"/>
+          <p:cNvSpPr txBox="1"/>
+          <p:nvPr/>
+        </p:nvSpPr>
+        <p:spPr>
+          <a:xfrm>
+            <a:off x="704088" y="2377440"/>
+            <a:ext cx="2359152" cy="493776"/>
+          </a:xfrm>
+          <a:prstGeom prst="rect">
+            <a:avLst/>
+          </a:prstGeom>
+          <a:noFill/>
+          <a:ln/>
+        </p:spPr>
+        <p:txBody>
+          <a:bodyPr wrap="square" lIns="0" tIns="0" rIns="0" bIns="0" rtlCol="0" anchor="ctr"/>
+          <a:lstStyle/>
+          <a:p>
+            <a:pPr indent="0" marL="0">
+              <a:lnSpc>
+                <a:spcPts val="1220"/>
+              </a:lnSpc>
+              <a:buNone/>
+            </a:pPr>
+            <a:r>
+              <a:rPr lang="en-US" sz="920" dirty="0">
+                <a:solidFill>
+                  <a:srgbClr val="A9C2DA"/>
+                </a:solidFill>
+                <a:latin typeface="Calibri" pitchFamily="34" charset="0"/>
+                <a:ea typeface="Calibri" pitchFamily="34" charset="-122"/>
+                <a:cs typeface="Calibri" pitchFamily="34" charset="-120"/>
+              </a:rPr>
+              <a:t>Nitaqat gates everything. Exit and re-entry is the trap.</a:t>
+            </a:r>
+            <a:endParaRPr lang="en-US" sz="920" dirty="0"/>
+          </a:p>
+        </p:txBody>
+      </p:sp>
+      <p:sp>
+        <p:nvSpPr>
+          <p:cNvPr id="10" name="Shape 8"/>
+          <p:cNvSpPr/>
+          <p:nvPr/>
+        </p:nvSpPr>
+        <p:spPr>
+          <a:xfrm>
+            <a:off x="2212848" y="1892808"/>
+            <a:ext cx="850392" cy="201168"/>
+          </a:xfrm>
+          <a:prstGeom prst="roundRect">
+            <a:avLst>
+              <a:gd name="adj" fmla="val 50000"/>
+            </a:avLst>
+          </a:prstGeom>
+          <a:solidFill>
+            <a:srgbClr val="20A098"/>
+          </a:solidFill>
+          <a:ln/>
+        </p:spPr>
+      </p:sp>
+      <p:sp>
+        <p:nvSpPr>
+          <p:cNvPr id="11" name="Text 9"/>
+          <p:cNvSpPr txBox="1"/>
+          <p:nvPr/>
+        </p:nvSpPr>
+        <p:spPr>
+          <a:xfrm>
+            <a:off x="2212848" y="1892808"/>
+            <a:ext cx="850392" cy="201168"/>
+          </a:xfrm>
+          <a:prstGeom prst="rect">
+            <a:avLst/>
+          </a:prstGeom>
+          <a:noFill/>
+          <a:ln/>
+        </p:spPr>
+        <p:txBody>
+          <a:bodyPr wrap="square" lIns="0" tIns="0" rIns="0" bIns="0" rtlCol="0" anchor="ctr"/>
+          <a:lstStyle/>
+          <a:p>
+            <a:pPr algn="ctr" indent="0" marL="0">
+              <a:buNone/>
+            </a:pPr>
+            <a:r>
+              <a:rPr lang="en-US" sz="740" b="1" dirty="0">
+                <a:solidFill>
+                  <a:srgbClr val="0C1E33"/>
+                </a:solidFill>
+                <a:latin typeface="Calibri" pitchFamily="34" charset="0"/>
+                <a:ea typeface="Calibri" pitchFamily="34" charset="-122"/>
+                <a:cs typeface="Calibri" pitchFamily="34" charset="-120"/>
+              </a:rPr>
+              <a:t>You are here</a:t>
+            </a:r>
+            <a:endParaRPr lang="en-US" sz="740" dirty="0"/>
+          </a:p>
+        </p:txBody>
+      </p:sp>
+      <p:sp>
+        <p:nvSpPr>
+          <p:cNvPr id="12" name="Shape 10"/>
+          <p:cNvSpPr/>
+          <p:nvPr/>
+        </p:nvSpPr>
+        <p:spPr>
+          <a:xfrm>
+            <a:off x="3374136" y="1773936"/>
+            <a:ext cx="2670048" cy="1207008"/>
+          </a:xfrm>
+          <a:prstGeom prst="roundRect">
+            <a:avLst>
+              <a:gd name="adj" fmla="val 6061"/>
+            </a:avLst>
+          </a:prstGeom>
+          <a:solidFill>
+            <a:srgbClr val="16304C"/>
+          </a:solidFill>
+          <a:ln w="10160">
+            <a:solidFill>
+              <a:srgbClr val="27415C"/>
+            </a:solidFill>
+            <a:prstDash val="solid"/>
+          </a:ln>
+        </p:spPr>
+      </p:sp>
+      <p:sp>
+        <p:nvSpPr>
+          <p:cNvPr id="13" name="Text 11"/>
+          <p:cNvSpPr txBox="1"/>
+          <p:nvPr/>
+        </p:nvSpPr>
+        <p:spPr>
+          <a:xfrm>
+            <a:off x="3529584" y="1883664"/>
+            <a:ext cx="2359152" cy="237744"/>
+          </a:xfrm>
+          <a:prstGeom prst="rect">
+            <a:avLst/>
+          </a:prstGeom>
+          <a:noFill/>
+          <a:ln/>
+        </p:spPr>
+        <p:txBody>
+          <a:bodyPr wrap="square" lIns="0" tIns="0" rIns="0" bIns="0" rtlCol="0" anchor="ctr"/>
+          <a:lstStyle/>
+          <a:p>
+            <a:pPr indent="0" marL="0">
+              <a:buNone/>
+            </a:pPr>
+            <a:r>
+              <a:rPr lang="en-US" sz="1250" b="1" dirty="0">
+                <a:solidFill>
+                  <a:srgbClr val="FFFFFF"/>
+                </a:solidFill>
+                <a:latin typeface="Arial" pitchFamily="34" charset="0"/>
+                <a:ea typeface="Arial" pitchFamily="34" charset="-122"/>
+                <a:cs typeface="Arial" pitchFamily="34" charset="-120"/>
+              </a:rPr>
+              <a:t>United Arab Emirates</a:t>
+            </a:r>
+            <a:endParaRPr lang="en-US" sz="1250" dirty="0"/>
+          </a:p>
+        </p:txBody>
+      </p:sp>
+      <p:sp>
+        <p:nvSpPr>
+          <p:cNvPr id="14" name="Text 12"/>
+          <p:cNvSpPr txBox="1"/>
+          <p:nvPr/>
+        </p:nvSpPr>
+        <p:spPr>
+          <a:xfrm>
+            <a:off x="3529584" y="2157984"/>
+            <a:ext cx="2359152" cy="201168"/>
+          </a:xfrm>
+          <a:prstGeom prst="rect">
+            <a:avLst/>
+          </a:prstGeom>
+          <a:noFill/>
+          <a:ln/>
+        </p:spPr>
+        <p:txBody>
+          <a:bodyPr wrap="square" lIns="0" tIns="0" rIns="0" bIns="0" rtlCol="0" anchor="ctr"/>
+          <a:lstStyle/>
+          <a:p>
+            <a:pPr indent="0" marL="0">
+              <a:buNone/>
+            </a:pPr>
+            <a:r>
+              <a:rPr lang="en-US" sz="900" dirty="0">
+                <a:solidFill>
+                  <a:srgbClr val="20A098"/>
+                </a:solidFill>
+                <a:latin typeface="Calibri" pitchFamily="34" charset="0"/>
+                <a:ea typeface="Calibri" pitchFamily="34" charset="-122"/>
+                <a:cs typeface="Calibri" pitchFamily="34" charset="-120"/>
+              </a:rPr>
+              <a:t>MOHRE / ICP / GDRFA</a:t>
+            </a:r>
+            <a:endParaRPr lang="en-US" sz="900" dirty="0"/>
+          </a:p>
+        </p:txBody>
+      </p:sp>
+      <p:sp>
+        <p:nvSpPr>
+          <p:cNvPr id="15" name="Text 13"/>
+          <p:cNvSpPr txBox="1"/>
+          <p:nvPr/>
+        </p:nvSpPr>
+        <p:spPr>
+          <a:xfrm>
+            <a:off x="3529584" y="2377440"/>
+            <a:ext cx="2359152" cy="493776"/>
+          </a:xfrm>
+          <a:prstGeom prst="rect">
+            <a:avLst/>
+          </a:prstGeom>
+          <a:noFill/>
+          <a:ln/>
+        </p:spPr>
+        <p:txBody>
+          <a:bodyPr wrap="square" lIns="0" tIns="0" rIns="0" bIns="0" rtlCol="0" anchor="ctr"/>
+          <a:lstStyle/>
+          <a:p>
+            <a:pPr indent="0" marL="0">
+              <a:lnSpc>
+                <a:spcPts val="1220"/>
+              </a:lnSpc>
+              <a:buNone/>
+            </a:pPr>
+            <a:r>
+              <a:rPr lang="en-US" sz="920" dirty="0">
+                <a:solidFill>
+                  <a:srgbClr val="A9C2DA"/>
+                </a:solidFill>
+                <a:latin typeface="Calibri" pitchFamily="34" charset="0"/>
+                <a:ea typeface="Calibri" pitchFamily="34" charset="-122"/>
+                <a:cs typeface="Calibri" pitchFamily="34" charset="-120"/>
+              </a:rPr>
+              <a:t>Golden Visa splits residence from work permit. Two clocks.</a:t>
+            </a:r>
+            <a:endParaRPr lang="en-US" sz="920" dirty="0"/>
+          </a:p>
+        </p:txBody>
+      </p:sp>
+      <p:sp>
+        <p:nvSpPr>
+          <p:cNvPr id="16" name="Shape 14"/>
+          <p:cNvSpPr/>
+          <p:nvPr/>
+        </p:nvSpPr>
+        <p:spPr>
+          <a:xfrm>
+            <a:off x="6199632" y="1773936"/>
+            <a:ext cx="2670048" cy="1207008"/>
+          </a:xfrm>
+          <a:prstGeom prst="roundRect">
+            <a:avLst>
+              <a:gd name="adj" fmla="val 6061"/>
+            </a:avLst>
+          </a:prstGeom>
+          <a:solidFill>
+            <a:srgbClr val="16304C"/>
+          </a:solidFill>
+          <a:ln w="10160">
+            <a:solidFill>
+              <a:srgbClr val="27415C"/>
+            </a:solidFill>
+            <a:prstDash val="solid"/>
+          </a:ln>
+        </p:spPr>
+      </p:sp>
+      <p:sp>
+        <p:nvSpPr>
+          <p:cNvPr id="17" name="Text 15"/>
+          <p:cNvSpPr txBox="1"/>
+          <p:nvPr/>
+        </p:nvSpPr>
+        <p:spPr>
+          <a:xfrm>
+            <a:off x="6355080" y="1883664"/>
+            <a:ext cx="2359152" cy="237744"/>
+          </a:xfrm>
+          <a:prstGeom prst="rect">
+            <a:avLst/>
+          </a:prstGeom>
+          <a:noFill/>
+          <a:ln/>
+        </p:spPr>
+        <p:txBody>
+          <a:bodyPr wrap="square" lIns="0" tIns="0" rIns="0" bIns="0" rtlCol="0" anchor="ctr"/>
+          <a:lstStyle/>
+          <a:p>
+            <a:pPr indent="0" marL="0">
+              <a:buNone/>
+            </a:pPr>
+            <a:r>
+              <a:rPr lang="en-US" sz="1250" b="1" dirty="0">
+                <a:solidFill>
+                  <a:srgbClr val="FFFFFF"/>
+                </a:solidFill>
+                <a:latin typeface="Arial" pitchFamily="34" charset="0"/>
+                <a:ea typeface="Arial" pitchFamily="34" charset="-122"/>
+                <a:cs typeface="Arial" pitchFamily="34" charset="-120"/>
+              </a:rPr>
+              <a:t>Qatar</a:t>
+            </a:r>
+            <a:endParaRPr lang="en-US" sz="1250" dirty="0"/>
+          </a:p>
+        </p:txBody>
+      </p:sp>
+      <p:sp>
+        <p:nvSpPr>
+          <p:cNvPr id="18" name="Text 16"/>
+          <p:cNvSpPr txBox="1"/>
+          <p:nvPr/>
+        </p:nvSpPr>
+        <p:spPr>
+          <a:xfrm>
+            <a:off x="6355080" y="2157984"/>
+            <a:ext cx="2359152" cy="201168"/>
+          </a:xfrm>
+          <a:prstGeom prst="rect">
+            <a:avLst/>
+          </a:prstGeom>
+          <a:noFill/>
+          <a:ln/>
+        </p:spPr>
+        <p:txBody>
+          <a:bodyPr wrap="square" lIns="0" tIns="0" rIns="0" bIns="0" rtlCol="0" anchor="ctr"/>
+          <a:lstStyle/>
+          <a:p>
+            <a:pPr indent="0" marL="0">
+              <a:buNone/>
+            </a:pPr>
+            <a:r>
+              <a:rPr lang="en-US" sz="900" dirty="0">
+                <a:solidFill>
+                  <a:srgbClr val="20A098"/>
+                </a:solidFill>
+                <a:latin typeface="Calibri" pitchFamily="34" charset="0"/>
+                <a:ea typeface="Calibri" pitchFamily="34" charset="-122"/>
+                <a:cs typeface="Calibri" pitchFamily="34" charset="-120"/>
+              </a:rPr>
+              <a:t>ADLSA / MOI / QVC</a:t>
+            </a:r>
+            <a:endParaRPr lang="en-US" sz="900" dirty="0"/>
+          </a:p>
+        </p:txBody>
+      </p:sp>
+      <p:sp>
+        <p:nvSpPr>
+          <p:cNvPr id="19" name="Text 17"/>
+          <p:cNvSpPr txBox="1"/>
+          <p:nvPr/>
+        </p:nvSpPr>
+        <p:spPr>
+          <a:xfrm>
+            <a:off x="6355080" y="2377440"/>
+            <a:ext cx="2359152" cy="493776"/>
+          </a:xfrm>
+          <a:prstGeom prst="rect">
+            <a:avLst/>
+          </a:prstGeom>
+          <a:noFill/>
+          <a:ln/>
+        </p:spPr>
+        <p:txBody>
+          <a:bodyPr wrap="square" lIns="0" tIns="0" rIns="0" bIns="0" rtlCol="0" anchor="ctr"/>
+          <a:lstStyle/>
+          <a:p>
+            <a:pPr indent="0" marL="0">
+              <a:lnSpc>
+                <a:spcPts val="1220"/>
+              </a:lnSpc>
+              <a:buNone/>
+            </a:pPr>
+            <a:r>
+              <a:rPr lang="en-US" sz="920" dirty="0">
+                <a:solidFill>
+                  <a:srgbClr val="A9C2DA"/>
+                </a:solidFill>
+                <a:latin typeface="Calibri" pitchFamily="34" charset="0"/>
+                <a:ea typeface="Calibri" pitchFamily="34" charset="-122"/>
+                <a:cs typeface="Calibri" pitchFamily="34" charset="-120"/>
+              </a:rPr>
+              <a:t>Most of the work happens before the employee travels.</a:t>
+            </a:r>
+            <a:endParaRPr lang="en-US" sz="920" dirty="0"/>
+          </a:p>
+        </p:txBody>
+      </p:sp>
+      <p:sp>
+        <p:nvSpPr>
+          <p:cNvPr id="20" name="Shape 18"/>
+          <p:cNvSpPr/>
+          <p:nvPr/>
+        </p:nvSpPr>
+        <p:spPr>
+          <a:xfrm>
+            <a:off x="9025128" y="1773936"/>
+            <a:ext cx="2670048" cy="1207008"/>
+          </a:xfrm>
+          <a:prstGeom prst="roundRect">
+            <a:avLst>
+              <a:gd name="adj" fmla="val 6061"/>
+            </a:avLst>
+          </a:prstGeom>
+          <a:solidFill>
+            <a:srgbClr val="16304C"/>
+          </a:solidFill>
+          <a:ln w="10160">
+            <a:solidFill>
+              <a:srgbClr val="27415C"/>
+            </a:solidFill>
+            <a:prstDash val="solid"/>
+          </a:ln>
+        </p:spPr>
+      </p:sp>
+      <p:sp>
+        <p:nvSpPr>
+          <p:cNvPr id="21" name="Text 19"/>
+          <p:cNvSpPr txBox="1"/>
+          <p:nvPr/>
+        </p:nvSpPr>
+        <p:spPr>
+          <a:xfrm>
+            <a:off x="9180576" y="1883664"/>
+            <a:ext cx="2359152" cy="237744"/>
+          </a:xfrm>
+          <a:prstGeom prst="rect">
+            <a:avLst/>
+          </a:prstGeom>
+          <a:noFill/>
+          <a:ln/>
+        </p:spPr>
+        <p:txBody>
+          <a:bodyPr wrap="square" lIns="0" tIns="0" rIns="0" bIns="0" rtlCol="0" anchor="ctr"/>
+          <a:lstStyle/>
+          <a:p>
+            <a:pPr indent="0" marL="0">
+              <a:buNone/>
+            </a:pPr>
+            <a:r>
+              <a:rPr lang="en-US" sz="1250" b="1" dirty="0">
+                <a:solidFill>
+                  <a:srgbClr val="FFFFFF"/>
+                </a:solidFill>
+                <a:latin typeface="Arial" pitchFamily="34" charset="0"/>
+                <a:ea typeface="Arial" pitchFamily="34" charset="-122"/>
+                <a:cs typeface="Arial" pitchFamily="34" charset="-120"/>
+              </a:rPr>
+              <a:t>Kuwait</a:t>
+            </a:r>
+            <a:endParaRPr lang="en-US" sz="1250" dirty="0"/>
+          </a:p>
+        </p:txBody>
+      </p:sp>
+      <p:sp>
+        <p:nvSpPr>
+          <p:cNvPr id="22" name="Text 20"/>
+          <p:cNvSpPr txBox="1"/>
+          <p:nvPr/>
+        </p:nvSpPr>
+        <p:spPr>
+          <a:xfrm>
+            <a:off x="9180576" y="2157984"/>
+            <a:ext cx="2359152" cy="201168"/>
+          </a:xfrm>
+          <a:prstGeom prst="rect">
+            <a:avLst/>
+          </a:prstGeom>
+          <a:noFill/>
+          <a:ln/>
+        </p:spPr>
+        <p:txBody>
+          <a:bodyPr wrap="square" lIns="0" tIns="0" rIns="0" bIns="0" rtlCol="0" anchor="ctr"/>
+          <a:lstStyle/>
+          <a:p>
+            <a:pPr indent="0" marL="0">
+              <a:buNone/>
+            </a:pPr>
+            <a:r>
+              <a:rPr lang="en-US" sz="900" dirty="0">
+                <a:solidFill>
+                  <a:srgbClr val="20A098"/>
+                </a:solidFill>
+                <a:latin typeface="Calibri" pitchFamily="34" charset="0"/>
+                <a:ea typeface="Calibri" pitchFamily="34" charset="-122"/>
+                <a:cs typeface="Calibri" pitchFamily="34" charset="-120"/>
+              </a:rPr>
+              <a:t>PAM / MOI / PACI</a:t>
+            </a:r>
+            <a:endParaRPr lang="en-US" sz="900" dirty="0"/>
+          </a:p>
+        </p:txBody>
+      </p:sp>
+      <p:sp>
+        <p:nvSpPr>
+          <p:cNvPr id="23" name="Text 21"/>
+          <p:cNvSpPr txBox="1"/>
+          <p:nvPr/>
+        </p:nvSpPr>
+        <p:spPr>
+          <a:xfrm>
+            <a:off x="9180576" y="2377440"/>
+            <a:ext cx="2359152" cy="493776"/>
+          </a:xfrm>
+          <a:prstGeom prst="rect">
+            <a:avLst/>
+          </a:prstGeom>
+          <a:noFill/>
+          <a:ln/>
+        </p:spPr>
+        <p:txBody>
+          <a:bodyPr wrap="square" lIns="0" tIns="0" rIns="0" bIns="0" rtlCol="0" anchor="ctr"/>
+          <a:lstStyle/>
+          <a:p>
+            <a:pPr indent="0" marL="0">
+              <a:lnSpc>
+                <a:spcPts val="1220"/>
+              </a:lnSpc>
+              <a:buNone/>
+            </a:pPr>
+            <a:r>
+              <a:rPr lang="en-US" sz="920" dirty="0">
+                <a:solidFill>
+                  <a:srgbClr val="A9C2DA"/>
+                </a:solidFill>
+                <a:latin typeface="Calibri" pitchFamily="34" charset="0"/>
+                <a:ea typeface="Calibri" pitchFamily="34" charset="-122"/>
+                <a:cs typeface="Calibri" pitchFamily="34" charset="-120"/>
+              </a:rPr>
+              <a:t>Permit and residency on two clocks, two authorities.</a:t>
+            </a:r>
+            <a:endParaRPr lang="en-US" sz="920" dirty="0"/>
+          </a:p>
+        </p:txBody>
+      </p:sp>
+      <p:sp>
+        <p:nvSpPr>
+          <p:cNvPr id="24" name="Shape 22"/>
+          <p:cNvSpPr/>
+          <p:nvPr/>
+        </p:nvSpPr>
+        <p:spPr>
+          <a:xfrm>
+            <a:off x="548640" y="3163824"/>
+            <a:ext cx="2670048" cy="1207008"/>
+          </a:xfrm>
+          <a:prstGeom prst="roundRect">
+            <a:avLst>
+              <a:gd name="adj" fmla="val 6061"/>
+            </a:avLst>
+          </a:prstGeom>
+          <a:solidFill>
+            <a:srgbClr val="16304C"/>
+          </a:solidFill>
+          <a:ln w="10160">
+            <a:solidFill>
+              <a:srgbClr val="27415C"/>
+            </a:solidFill>
+            <a:prstDash val="solid"/>
+          </a:ln>
+        </p:spPr>
+      </p:sp>
+      <p:sp>
+        <p:nvSpPr>
+          <p:cNvPr id="25" name="Text 23"/>
+          <p:cNvSpPr txBox="1"/>
+          <p:nvPr/>
+        </p:nvSpPr>
+        <p:spPr>
+          <a:xfrm>
+            <a:off x="704088" y="3273552"/>
+            <a:ext cx="2359152" cy="237744"/>
+          </a:xfrm>
+          <a:prstGeom prst="rect">
+            <a:avLst/>
+          </a:prstGeom>
+          <a:noFill/>
+          <a:ln/>
+        </p:spPr>
+        <p:txBody>
+          <a:bodyPr wrap="square" lIns="0" tIns="0" rIns="0" bIns="0" rtlCol="0" anchor="ctr"/>
+          <a:lstStyle/>
+          <a:p>
+            <a:pPr indent="0" marL="0">
+              <a:buNone/>
+            </a:pPr>
+            <a:r>
+              <a:rPr lang="en-US" sz="1250" b="1" dirty="0">
+                <a:solidFill>
+                  <a:srgbClr val="FFFFFF"/>
+                </a:solidFill>
+                <a:latin typeface="Arial" pitchFamily="34" charset="0"/>
+                <a:ea typeface="Arial" pitchFamily="34" charset="-122"/>
+                <a:cs typeface="Arial" pitchFamily="34" charset="-120"/>
+              </a:rPr>
+              <a:t>Oman</a:t>
+            </a:r>
+            <a:endParaRPr lang="en-US" sz="1250" dirty="0"/>
+          </a:p>
+        </p:txBody>
+      </p:sp>
+      <p:sp>
+        <p:nvSpPr>
+          <p:cNvPr id="26" name="Text 24"/>
+          <p:cNvSpPr txBox="1"/>
+          <p:nvPr/>
+        </p:nvSpPr>
+        <p:spPr>
+          <a:xfrm>
+            <a:off x="704088" y="3547872"/>
+            <a:ext cx="2359152" cy="201168"/>
+          </a:xfrm>
+          <a:prstGeom prst="rect">
+            <a:avLst/>
+          </a:prstGeom>
+          <a:noFill/>
+          <a:ln/>
+        </p:spPr>
+        <p:txBody>
+          <a:bodyPr wrap="square" lIns="0" tIns="0" rIns="0" bIns="0" rtlCol="0" anchor="ctr"/>
+          <a:lstStyle/>
+          <a:p>
+            <a:pPr indent="0" marL="0">
+              <a:buNone/>
+            </a:pPr>
+            <a:r>
+              <a:rPr lang="en-US" sz="900" dirty="0">
+                <a:solidFill>
+                  <a:srgbClr val="20A098"/>
+                </a:solidFill>
+                <a:latin typeface="Calibri" pitchFamily="34" charset="0"/>
+                <a:ea typeface="Calibri" pitchFamily="34" charset="-122"/>
+                <a:cs typeface="Calibri" pitchFamily="34" charset="-120"/>
+              </a:rPr>
+              <a:t>Ministry of Labour / ROP</a:t>
+            </a:r>
+            <a:endParaRPr lang="en-US" sz="900" dirty="0"/>
+          </a:p>
+        </p:txBody>
+      </p:sp>
+      <p:sp>
+        <p:nvSpPr>
+          <p:cNvPr id="27" name="Text 25"/>
+          <p:cNvSpPr txBox="1"/>
+          <p:nvPr/>
+        </p:nvSpPr>
+        <p:spPr>
+          <a:xfrm>
+            <a:off x="704088" y="3767328"/>
+            <a:ext cx="2359152" cy="493776"/>
+          </a:xfrm>
+          <a:prstGeom prst="rect">
+            <a:avLst/>
+          </a:prstGeom>
+          <a:noFill/>
+          <a:ln/>
+        </p:spPr>
+        <p:txBody>
+          <a:bodyPr wrap="square" lIns="0" tIns="0" rIns="0" bIns="0" rtlCol="0" anchor="ctr"/>
+          <a:lstStyle/>
+          <a:p>
+            <a:pPr indent="0" marL="0">
+              <a:lnSpc>
+                <a:spcPts val="1220"/>
+              </a:lnSpc>
+              <a:buNone/>
+            </a:pPr>
+            <a:r>
+              <a:rPr lang="en-US" sz="920" dirty="0">
+                <a:solidFill>
+                  <a:srgbClr val="A9C2DA"/>
+                </a:solidFill>
+                <a:latin typeface="Calibri" pitchFamily="34" charset="0"/>
+                <a:ea typeface="Calibri" pitchFamily="34" charset="-122"/>
+                <a:cs typeface="Calibri" pitchFamily="34" charset="-120"/>
+              </a:rPr>
+              <a:t>Omanisation gates clearance, as Nitaqat does here.</a:t>
+            </a:r>
+            <a:endParaRPr lang="en-US" sz="920" dirty="0"/>
+          </a:p>
+        </p:txBody>
+      </p:sp>
+      <p:sp>
+        <p:nvSpPr>
+          <p:cNvPr id="28" name="Shape 26"/>
+          <p:cNvSpPr/>
+          <p:nvPr/>
+        </p:nvSpPr>
+        <p:spPr>
+          <a:xfrm>
+            <a:off x="3374136" y="3163824"/>
+            <a:ext cx="2670048" cy="1207008"/>
+          </a:xfrm>
+          <a:prstGeom prst="roundRect">
+            <a:avLst>
+              <a:gd name="adj" fmla="val 6061"/>
+            </a:avLst>
+          </a:prstGeom>
+          <a:solidFill>
+            <a:srgbClr val="16304C"/>
+          </a:solidFill>
+          <a:ln w="10160">
+            <a:solidFill>
+              <a:srgbClr val="27415C"/>
+            </a:solidFill>
+            <a:prstDash val="solid"/>
+          </a:ln>
+        </p:spPr>
+      </p:sp>
+      <p:sp>
+        <p:nvSpPr>
+          <p:cNvPr id="29" name="Text 27"/>
+          <p:cNvSpPr txBox="1"/>
+          <p:nvPr/>
+        </p:nvSpPr>
+        <p:spPr>
+          <a:xfrm>
+            <a:off x="3529584" y="3273552"/>
+            <a:ext cx="2359152" cy="237744"/>
+          </a:xfrm>
+          <a:prstGeom prst="rect">
+            <a:avLst/>
+          </a:prstGeom>
+          <a:noFill/>
+          <a:ln/>
+        </p:spPr>
+        <p:txBody>
+          <a:bodyPr wrap="square" lIns="0" tIns="0" rIns="0" bIns="0" rtlCol="0" anchor="ctr"/>
+          <a:lstStyle/>
+          <a:p>
+            <a:pPr indent="0" marL="0">
+              <a:buNone/>
+            </a:pPr>
+            <a:r>
+              <a:rPr lang="en-US" sz="1250" b="1" dirty="0">
+                <a:solidFill>
+                  <a:srgbClr val="FFFFFF"/>
+                </a:solidFill>
+                <a:latin typeface="Arial" pitchFamily="34" charset="0"/>
+                <a:ea typeface="Arial" pitchFamily="34" charset="-122"/>
+                <a:cs typeface="Arial" pitchFamily="34" charset="-120"/>
+              </a:rPr>
+              <a:t>Bahrain</a:t>
+            </a:r>
+            <a:endParaRPr lang="en-US" sz="1250" dirty="0"/>
+          </a:p>
+        </p:txBody>
+      </p:sp>
+      <p:sp>
+        <p:nvSpPr>
+          <p:cNvPr id="30" name="Text 28"/>
+          <p:cNvSpPr txBox="1"/>
+          <p:nvPr/>
+        </p:nvSpPr>
+        <p:spPr>
+          <a:xfrm>
+            <a:off x="3529584" y="3547872"/>
+            <a:ext cx="2359152" cy="201168"/>
+          </a:xfrm>
+          <a:prstGeom prst="rect">
+            <a:avLst/>
+          </a:prstGeom>
+          <a:noFill/>
+          <a:ln/>
+        </p:spPr>
+        <p:txBody>
+          <a:bodyPr wrap="square" lIns="0" tIns="0" rIns="0" bIns="0" rtlCol="0" anchor="ctr"/>
+          <a:lstStyle/>
+          <a:p>
+            <a:pPr indent="0" marL="0">
+              <a:buNone/>
+            </a:pPr>
+            <a:r>
+              <a:rPr lang="en-US" sz="900" dirty="0">
+                <a:solidFill>
+                  <a:srgbClr val="20A098"/>
+                </a:solidFill>
+                <a:latin typeface="Calibri" pitchFamily="34" charset="0"/>
+                <a:ea typeface="Calibri" pitchFamily="34" charset="-122"/>
+                <a:cs typeface="Calibri" pitchFamily="34" charset="-120"/>
+              </a:rPr>
+              <a:t>LMRA / NPRA / GOSI</a:t>
+            </a:r>
+            <a:endParaRPr lang="en-US" sz="900" dirty="0"/>
+          </a:p>
+        </p:txBody>
+      </p:sp>
+      <p:sp>
+        <p:nvSpPr>
+          <p:cNvPr id="31" name="Text 29"/>
+          <p:cNvSpPr txBox="1"/>
+          <p:nvPr/>
+        </p:nvSpPr>
+        <p:spPr>
+          <a:xfrm>
+            <a:off x="3529584" y="3767328"/>
+            <a:ext cx="2359152" cy="493776"/>
+          </a:xfrm>
+          <a:prstGeom prst="rect">
+            <a:avLst/>
+          </a:prstGeom>
+          <a:noFill/>
+          <a:ln/>
+        </p:spPr>
+        <p:txBody>
+          <a:bodyPr wrap="square" lIns="0" tIns="0" rIns="0" bIns="0" rtlCol="0" anchor="ctr"/>
+          <a:lstStyle/>
+          <a:p>
+            <a:pPr indent="0" marL="0">
+              <a:lnSpc>
+                <a:spcPts val="1220"/>
+              </a:lnSpc>
+              <a:buNone/>
+            </a:pPr>
+            <a:r>
+              <a:rPr lang="en-US" sz="920" dirty="0">
+                <a:solidFill>
+                  <a:srgbClr val="A9C2DA"/>
+                </a:solidFill>
+                <a:latin typeface="Calibri" pitchFamily="34" charset="0"/>
+                <a:ea typeface="Calibri" pitchFamily="34" charset="-122"/>
+                <a:cs typeface="Calibri" pitchFamily="34" charset="-120"/>
+              </a:rPr>
+              <a:t>One authority runs the whole permit. Cleanest API candidate.</a:t>
+            </a:r>
+            <a:endParaRPr lang="en-US" sz="920" dirty="0"/>
+          </a:p>
+        </p:txBody>
+      </p:sp>
+      <p:sp>
+        <p:nvSpPr>
+          <p:cNvPr id="32" name="Shape 30"/>
+          <p:cNvSpPr/>
+          <p:nvPr/>
+        </p:nvSpPr>
+        <p:spPr>
+          <a:xfrm>
+            <a:off x="6199632" y="3163824"/>
+            <a:ext cx="2670048" cy="1207008"/>
+          </a:xfrm>
+          <a:prstGeom prst="roundRect">
+            <a:avLst>
+              <a:gd name="adj" fmla="val 6061"/>
+            </a:avLst>
+          </a:prstGeom>
+          <a:solidFill>
+            <a:srgbClr val="16304C"/>
+          </a:solidFill>
+          <a:ln w="10160">
+            <a:solidFill>
+              <a:srgbClr val="27415C"/>
+            </a:solidFill>
+            <a:prstDash val="solid"/>
+          </a:ln>
+        </p:spPr>
+      </p:sp>
+      <p:sp>
+        <p:nvSpPr>
+          <p:cNvPr id="33" name="Text 31"/>
+          <p:cNvSpPr txBox="1"/>
+          <p:nvPr/>
+        </p:nvSpPr>
+        <p:spPr>
+          <a:xfrm>
+            <a:off x="6355080" y="3273552"/>
+            <a:ext cx="2359152" cy="237744"/>
+          </a:xfrm>
+          <a:prstGeom prst="rect">
+            <a:avLst/>
+          </a:prstGeom>
+          <a:noFill/>
+          <a:ln/>
+        </p:spPr>
+        <p:txBody>
+          <a:bodyPr wrap="square" lIns="0" tIns="0" rIns="0" bIns="0" rtlCol="0" anchor="ctr"/>
+          <a:lstStyle/>
+          <a:p>
+            <a:pPr indent="0" marL="0">
+              <a:buNone/>
+            </a:pPr>
+            <a:r>
+              <a:rPr lang="en-US" sz="1250" b="1" dirty="0">
+                <a:solidFill>
+                  <a:srgbClr val="FFFFFF"/>
+                </a:solidFill>
+                <a:latin typeface="Arial" pitchFamily="34" charset="0"/>
+                <a:ea typeface="Arial" pitchFamily="34" charset="-122"/>
+                <a:cs typeface="Arial" pitchFamily="34" charset="-120"/>
+              </a:rPr>
+              <a:t>Libya</a:t>
+            </a:r>
+            <a:endParaRPr lang="en-US" sz="1250" dirty="0"/>
+          </a:p>
+        </p:txBody>
+      </p:sp>
+      <p:sp>
+        <p:nvSpPr>
+          <p:cNvPr id="34" name="Text 32"/>
+          <p:cNvSpPr txBox="1"/>
+          <p:nvPr/>
+        </p:nvSpPr>
+        <p:spPr>
+          <a:xfrm>
+            <a:off x="6355080" y="3547872"/>
+            <a:ext cx="2359152" cy="201168"/>
+          </a:xfrm>
+          <a:prstGeom prst="rect">
+            <a:avLst/>
+          </a:prstGeom>
+          <a:noFill/>
+          <a:ln/>
+        </p:spPr>
+        <p:txBody>
+          <a:bodyPr wrap="square" lIns="0" tIns="0" rIns="0" bIns="0" rtlCol="0" anchor="ctr"/>
+          <a:lstStyle/>
+          <a:p>
+            <a:pPr indent="0" marL="0">
+              <a:buNone/>
+            </a:pPr>
+            <a:r>
+              <a:rPr lang="en-US" sz="900" dirty="0">
+                <a:solidFill>
+                  <a:srgbClr val="20A098"/>
+                </a:solidFill>
+                <a:latin typeface="Calibri" pitchFamily="34" charset="0"/>
+                <a:ea typeface="Calibri" pitchFamily="34" charset="-122"/>
+                <a:cs typeface="Calibri" pitchFamily="34" charset="-120"/>
+              </a:rPr>
+              <a:t>Ministry of Labour / PNA</a:t>
+            </a:r>
+            <a:endParaRPr lang="en-US" sz="900" dirty="0"/>
+          </a:p>
+        </p:txBody>
+      </p:sp>
+      <p:sp>
+        <p:nvSpPr>
+          <p:cNvPr id="35" name="Text 33"/>
+          <p:cNvSpPr txBox="1"/>
+          <p:nvPr/>
+        </p:nvSpPr>
+        <p:spPr>
+          <a:xfrm>
+            <a:off x="6355080" y="3767328"/>
+            <a:ext cx="2359152" cy="493776"/>
+          </a:xfrm>
+          <a:prstGeom prst="rect">
+            <a:avLst/>
+          </a:prstGeom>
+          <a:noFill/>
+          <a:ln/>
+        </p:spPr>
+        <p:txBody>
+          <a:bodyPr wrap="square" lIns="0" tIns="0" rIns="0" bIns="0" rtlCol="0" anchor="ctr"/>
+          <a:lstStyle/>
+          <a:p>
+            <a:pPr indent="0" marL="0">
+              <a:lnSpc>
+                <a:spcPts val="1220"/>
+              </a:lnSpc>
+              <a:buNone/>
+            </a:pPr>
+            <a:r>
+              <a:rPr lang="en-US" sz="920" dirty="0">
+                <a:solidFill>
+                  <a:srgbClr val="A9C2DA"/>
+                </a:solidFill>
+                <a:latin typeface="Calibri" pitchFamily="34" charset="0"/>
+                <a:ea typeface="Calibri" pitchFamily="34" charset="-122"/>
+                <a:cs typeface="Calibri" pitchFamily="34" charset="-120"/>
+              </a:rPr>
+              <a:t>Rotating crews. Proof matters more than volume.</a:t>
+            </a:r>
+            <a:endParaRPr lang="en-US" sz="920" dirty="0"/>
+          </a:p>
+        </p:txBody>
+      </p:sp>
+      <p:sp>
+        <p:nvSpPr>
+          <p:cNvPr id="36" name="Shape 34"/>
+          <p:cNvSpPr/>
+          <p:nvPr/>
+        </p:nvSpPr>
+        <p:spPr>
+          <a:xfrm>
+            <a:off x="9043416" y="3163824"/>
+            <a:ext cx="2596896" cy="1207008"/>
+          </a:xfrm>
+          <a:prstGeom prst="roundRect">
+            <a:avLst>
+              <a:gd name="adj" fmla="val 6061"/>
+            </a:avLst>
+          </a:prstGeom>
+          <a:solidFill>
+            <a:srgbClr val="12756F"/>
+          </a:solidFill>
+          <a:ln w="15240">
+            <a:solidFill>
+              <a:srgbClr val="20A098"/>
+            </a:solidFill>
+            <a:prstDash val="solid"/>
+          </a:ln>
+        </p:spPr>
+      </p:sp>
+      <p:sp>
+        <p:nvSpPr>
+          <p:cNvPr id="37" name="Text 35"/>
+          <p:cNvSpPr txBox="1"/>
+          <p:nvPr/>
+        </p:nvSpPr>
+        <p:spPr>
+          <a:xfrm>
+            <a:off x="9198864" y="3291840"/>
+            <a:ext cx="2286000" cy="237744"/>
+          </a:xfrm>
+          <a:prstGeom prst="rect">
+            <a:avLst/>
+          </a:prstGeom>
+          <a:noFill/>
+          <a:ln/>
+        </p:spPr>
+        <p:txBody>
+          <a:bodyPr wrap="square" lIns="0" tIns="0" rIns="0" bIns="0" rtlCol="0" anchor="ctr"/>
+          <a:lstStyle/>
+          <a:p>
+            <a:pPr indent="0" marL="0">
+              <a:buNone/>
+            </a:pPr>
+            <a:r>
+              <a:rPr lang="en-US" sz="1400" b="1" dirty="0">
+                <a:solidFill>
+                  <a:srgbClr val="FFFFFF"/>
+                </a:solidFill>
+                <a:latin typeface="Arial" pitchFamily="34" charset="0"/>
+                <a:ea typeface="Arial" pitchFamily="34" charset="-122"/>
+                <a:cs typeface="Arial" pitchFamily="34" charset="-120"/>
+              </a:rPr>
+              <a:t>36 permit types</a:t>
+            </a:r>
+            <a:endParaRPr lang="en-US" sz="1400" dirty="0"/>
+          </a:p>
+        </p:txBody>
+      </p:sp>
+      <p:sp>
+        <p:nvSpPr>
+          <p:cNvPr id="38" name="Text 36"/>
+          <p:cNvSpPr txBox="1"/>
+          <p:nvPr/>
+        </p:nvSpPr>
+        <p:spPr>
+          <a:xfrm>
+            <a:off x="9198864" y="3566160"/>
+            <a:ext cx="2304288" cy="694944"/>
+          </a:xfrm>
+          <a:prstGeom prst="rect">
+            <a:avLst/>
+          </a:prstGeom>
+          <a:noFill/>
+          <a:ln/>
+        </p:spPr>
+        <p:txBody>
+          <a:bodyPr wrap="square" lIns="0" tIns="0" rIns="0" bIns="0" rtlCol="0" anchor="ctr"/>
+          <a:lstStyle/>
+          <a:p>
+            <a:pPr indent="0" marL="0">
+              <a:lnSpc>
+                <a:spcPts val="1240"/>
+              </a:lnSpc>
+              <a:buNone/>
+            </a:pPr>
+            <a:r>
+              <a:rPr lang="en-US" sz="940" dirty="0">
+                <a:solidFill>
+                  <a:srgbClr val="CFEFEB"/>
+                </a:solidFill>
+                <a:latin typeface="Calibri" pitchFamily="34" charset="0"/>
+                <a:ea typeface="Calibri" pitchFamily="34" charset="-122"/>
+                <a:cs typeface="Calibri" pitchFamily="34" charset="-120"/>
+              </a:rPr>
+              <a:t>across seven country packs, on one engine, in one BTP subscription.</a:t>
+            </a:r>
+            <a:endParaRPr lang="en-US" sz="940" dirty="0"/>
+          </a:p>
+        </p:txBody>
+      </p:sp>
+      <p:sp>
+        <p:nvSpPr>
+          <p:cNvPr id="39" name="Shape 37"/>
+          <p:cNvSpPr/>
+          <p:nvPr/>
+        </p:nvSpPr>
+        <p:spPr>
+          <a:xfrm>
+            <a:off x="548640" y="4553712"/>
+            <a:ext cx="3611880" cy="969264"/>
+          </a:xfrm>
+          <a:prstGeom prst="roundRect">
+            <a:avLst>
+              <a:gd name="adj" fmla="val 7547"/>
+            </a:avLst>
+          </a:prstGeom>
+          <a:solidFill>
+            <a:srgbClr val="16304C"/>
+          </a:solidFill>
+          <a:ln w="10160">
+            <a:solidFill>
+              <a:srgbClr val="27415C"/>
+            </a:solidFill>
+            <a:prstDash val="solid"/>
+          </a:ln>
+        </p:spPr>
+      </p:sp>
+      <p:sp>
+        <p:nvSpPr>
+          <p:cNvPr id="40" name="Text 38"/>
+          <p:cNvSpPr txBox="1"/>
+          <p:nvPr/>
+        </p:nvSpPr>
+        <p:spPr>
+          <a:xfrm>
+            <a:off x="713232" y="4663440"/>
+            <a:ext cx="3291840" cy="219456"/>
+          </a:xfrm>
+          <a:prstGeom prst="rect">
+            <a:avLst/>
+          </a:prstGeom>
+          <a:noFill/>
+          <a:ln/>
+        </p:spPr>
+        <p:txBody>
+          <a:bodyPr wrap="square" lIns="0" tIns="0" rIns="0" bIns="0" rtlCol="0" anchor="ctr"/>
+          <a:lstStyle/>
+          <a:p>
+            <a:pPr indent="0" marL="0">
+              <a:buNone/>
+            </a:pPr>
+            <a:r>
+              <a:rPr lang="en-US" sz="1150" b="1" dirty="0">
+                <a:solidFill>
+                  <a:srgbClr val="20A098"/>
+                </a:solidFill>
+                <a:latin typeface="Arial" pitchFamily="34" charset="0"/>
+                <a:ea typeface="Arial" pitchFamily="34" charset="-122"/>
+                <a:cs typeface="Arial" pitchFamily="34" charset="-120"/>
+              </a:rPr>
+              <a:t>One engine</a:t>
+            </a:r>
+            <a:endParaRPr lang="en-US" sz="1150" dirty="0"/>
+          </a:p>
+        </p:txBody>
+      </p:sp>
+      <p:sp>
+        <p:nvSpPr>
+          <p:cNvPr id="41" name="Text 39"/>
+          <p:cNvSpPr txBox="1"/>
+          <p:nvPr/>
+        </p:nvSpPr>
+        <p:spPr>
+          <a:xfrm>
+            <a:off x="713232" y="4901184"/>
+            <a:ext cx="3291840" cy="530352"/>
+          </a:xfrm>
+          <a:prstGeom prst="rect">
+            <a:avLst/>
+          </a:prstGeom>
+          <a:noFill/>
+          <a:ln/>
+        </p:spPr>
+        <p:txBody>
+          <a:bodyPr wrap="square" lIns="0" tIns="0" rIns="0" bIns="0" rtlCol="0" anchor="ctr"/>
+          <a:lstStyle/>
+          <a:p>
+            <a:pPr indent="0" marL="0">
+              <a:lnSpc>
+                <a:spcPts val="1200"/>
+              </a:lnSpc>
+              <a:buNone/>
+            </a:pPr>
+            <a:r>
+              <a:rPr lang="en-US" sz="900" dirty="0">
+                <a:solidFill>
+                  <a:srgbClr val="A9C2DA"/>
+                </a:solidFill>
+                <a:latin typeface="Calibri" pitchFamily="34" charset="0"/>
+                <a:ea typeface="Calibri" pitchFamily="34" charset="-122"/>
+                <a:cs typeface="Calibri" pitchFamily="34" charset="-120"/>
+              </a:rPr>
+              <a:t>Workflow, tasks, payment capture and reporting are identical everywhere. Only the steps, authorities and thresholds change.</a:t>
+            </a:r>
+            <a:endParaRPr lang="en-US" sz="900" dirty="0"/>
+          </a:p>
+        </p:txBody>
+      </p:sp>
+      <p:sp>
+        <p:nvSpPr>
+          <p:cNvPr id="42" name="Shape 40"/>
+          <p:cNvSpPr/>
+          <p:nvPr/>
+        </p:nvSpPr>
+        <p:spPr>
+          <a:xfrm>
+            <a:off x="4288536" y="4553712"/>
+            <a:ext cx="3611880" cy="969264"/>
+          </a:xfrm>
+          <a:prstGeom prst="roundRect">
+            <a:avLst>
+              <a:gd name="adj" fmla="val 7547"/>
+            </a:avLst>
+          </a:prstGeom>
+          <a:solidFill>
+            <a:srgbClr val="16304C"/>
+          </a:solidFill>
+          <a:ln w="10160">
+            <a:solidFill>
+              <a:srgbClr val="27415C"/>
+            </a:solidFill>
+            <a:prstDash val="solid"/>
+          </a:ln>
+        </p:spPr>
+      </p:sp>
+      <p:sp>
+        <p:nvSpPr>
+          <p:cNvPr id="43" name="Text 41"/>
+          <p:cNvSpPr txBox="1"/>
+          <p:nvPr/>
+        </p:nvSpPr>
+        <p:spPr>
+          <a:xfrm>
+            <a:off x="4453128" y="4663440"/>
+            <a:ext cx="3291840" cy="219456"/>
+          </a:xfrm>
+          <a:prstGeom prst="rect">
+            <a:avLst/>
+          </a:prstGeom>
+          <a:noFill/>
+          <a:ln/>
+        </p:spPr>
+        <p:txBody>
+          <a:bodyPr wrap="square" lIns="0" tIns="0" rIns="0" bIns="0" rtlCol="0" anchor="ctr"/>
+          <a:lstStyle/>
+          <a:p>
+            <a:pPr indent="0" marL="0">
+              <a:buNone/>
+            </a:pPr>
+            <a:r>
+              <a:rPr lang="en-US" sz="1150" b="1" dirty="0">
+                <a:solidFill>
+                  <a:srgbClr val="20A098"/>
+                </a:solidFill>
+                <a:latin typeface="Arial" pitchFamily="34" charset="0"/>
+                <a:ea typeface="Arial" pitchFamily="34" charset="-122"/>
+                <a:cs typeface="Arial" pitchFamily="34" charset="-120"/>
+              </a:rPr>
+              <a:t>One training course</a:t>
+            </a:r>
+            <a:endParaRPr lang="en-US" sz="1150" dirty="0"/>
+          </a:p>
+        </p:txBody>
+      </p:sp>
+      <p:sp>
+        <p:nvSpPr>
+          <p:cNvPr id="44" name="Text 42"/>
+          <p:cNvSpPr txBox="1"/>
+          <p:nvPr/>
+        </p:nvSpPr>
+        <p:spPr>
+          <a:xfrm>
+            <a:off x="4453128" y="4901184"/>
+            <a:ext cx="3291840" cy="530352"/>
+          </a:xfrm>
+          <a:prstGeom prst="rect">
+            <a:avLst/>
+          </a:prstGeom>
+          <a:noFill/>
+          <a:ln/>
+        </p:spPr>
+        <p:txBody>
+          <a:bodyPr wrap="square" lIns="0" tIns="0" rIns="0" bIns="0" rtlCol="0" anchor="ctr"/>
+          <a:lstStyle/>
+          <a:p>
+            <a:pPr indent="0" marL="0">
+              <a:lnSpc>
+                <a:spcPts val="1200"/>
+              </a:lnSpc>
+              <a:buNone/>
+            </a:pPr>
+            <a:r>
+              <a:rPr lang="en-US" sz="900" dirty="0">
+                <a:solidFill>
+                  <a:srgbClr val="A9C2DA"/>
+                </a:solidFill>
+                <a:latin typeface="Calibri" pitchFamily="34" charset="0"/>
+                <a:ea typeface="Calibri" pitchFamily="34" charset="-122"/>
+                <a:cs typeface="Calibri" pitchFamily="34" charset="-120"/>
+              </a:rPr>
+              <a:t>A PRO who learns the Saudi screens already knows the Emirati ones. Same queue, same inbox, same escalation.</a:t>
+            </a:r>
+            <a:endParaRPr lang="en-US" sz="900" dirty="0"/>
+          </a:p>
+        </p:txBody>
+      </p:sp>
+      <p:sp>
+        <p:nvSpPr>
+          <p:cNvPr id="45" name="Shape 43"/>
+          <p:cNvSpPr/>
+          <p:nvPr/>
+        </p:nvSpPr>
+        <p:spPr>
+          <a:xfrm>
+            <a:off x="8028432" y="4553712"/>
+            <a:ext cx="3611880" cy="969264"/>
+          </a:xfrm>
+          <a:prstGeom prst="roundRect">
+            <a:avLst>
+              <a:gd name="adj" fmla="val 7547"/>
+            </a:avLst>
+          </a:prstGeom>
+          <a:solidFill>
+            <a:srgbClr val="16304C"/>
+          </a:solidFill>
+          <a:ln w="10160">
+            <a:solidFill>
+              <a:srgbClr val="27415C"/>
+            </a:solidFill>
+            <a:prstDash val="solid"/>
+          </a:ln>
+        </p:spPr>
+      </p:sp>
+      <p:sp>
+        <p:nvSpPr>
+          <p:cNvPr id="46" name="Text 44"/>
+          <p:cNvSpPr txBox="1"/>
+          <p:nvPr/>
+        </p:nvSpPr>
+        <p:spPr>
+          <a:xfrm>
+            <a:off x="8193024" y="4663440"/>
+            <a:ext cx="3291840" cy="219456"/>
+          </a:xfrm>
+          <a:prstGeom prst="rect">
+            <a:avLst/>
+          </a:prstGeom>
+          <a:noFill/>
+          <a:ln/>
+        </p:spPr>
+        <p:txBody>
+          <a:bodyPr wrap="square" lIns="0" tIns="0" rIns="0" bIns="0" rtlCol="0" anchor="ctr"/>
+          <a:lstStyle/>
+          <a:p>
+            <a:pPr indent="0" marL="0">
+              <a:buNone/>
+            </a:pPr>
+            <a:r>
+              <a:rPr lang="en-US" sz="1150" b="1" dirty="0">
+                <a:solidFill>
+                  <a:srgbClr val="20A098"/>
+                </a:solidFill>
+                <a:latin typeface="Arial" pitchFamily="34" charset="0"/>
+                <a:ea typeface="Arial" pitchFamily="34" charset="-122"/>
+                <a:cs typeface="Arial" pitchFamily="34" charset="-120"/>
+              </a:rPr>
+              <a:t>One line in your BTP account</a:t>
+            </a:r>
+            <a:endParaRPr lang="en-US" sz="1150" dirty="0"/>
+          </a:p>
+        </p:txBody>
+      </p:sp>
+      <p:sp>
+        <p:nvSpPr>
+          <p:cNvPr id="47" name="Text 45"/>
+          <p:cNvSpPr txBox="1"/>
+          <p:nvPr/>
+        </p:nvSpPr>
+        <p:spPr>
+          <a:xfrm>
+            <a:off x="8193024" y="4901184"/>
+            <a:ext cx="3291840" cy="530352"/>
+          </a:xfrm>
+          <a:prstGeom prst="rect">
+            <a:avLst/>
+          </a:prstGeom>
+          <a:noFill/>
+          <a:ln/>
+        </p:spPr>
+        <p:txBody>
+          <a:bodyPr wrap="square" lIns="0" tIns="0" rIns="0" bIns="0" rtlCol="0" anchor="ctr"/>
+          <a:lstStyle/>
+          <a:p>
+            <a:pPr indent="0" marL="0">
+              <a:lnSpc>
+                <a:spcPts val="1200"/>
+              </a:lnSpc>
+              <a:buNone/>
+            </a:pPr>
+            <a:r>
+              <a:rPr lang="en-US" sz="900" dirty="0">
+                <a:solidFill>
+                  <a:srgbClr val="A9C2DA"/>
+                </a:solidFill>
+                <a:latin typeface="Calibri" pitchFamily="34" charset="0"/>
+                <a:ea typeface="Calibri" pitchFamily="34" charset="-122"/>
+                <a:cs typeface="Calibri" pitchFamily="34" charset="-120"/>
+              </a:rPr>
+              <a:t>Adding a country does not add a platform, a contract or a separate support model. It adds a pack.</a:t>
+            </a:r>
+            <a:endParaRPr lang="en-US" sz="900" dirty="0"/>
+          </a:p>
+        </p:txBody>
+      </p:sp>
+      <p:sp>
+        <p:nvSpPr>
+          <p:cNvPr id="48" name="Text 46"/>
+          <p:cNvSpPr txBox="1"/>
+          <p:nvPr/>
+        </p:nvSpPr>
+        <p:spPr>
+          <a:xfrm>
+            <a:off x="548640" y="5742432"/>
+            <a:ext cx="6766560" cy="347472"/>
+          </a:xfrm>
+          <a:prstGeom prst="rect">
+            <a:avLst/>
+          </a:prstGeom>
+          <a:noFill/>
+          <a:ln/>
+        </p:spPr>
+        <p:txBody>
+          <a:bodyPr wrap="square" lIns="0" tIns="0" rIns="0" bIns="0" rtlCol="0" anchor="ctr"/>
+          <a:lstStyle/>
+          <a:p>
+            <a:pPr indent="0" marL="0">
+              <a:buNone/>
+            </a:pPr>
+            <a:r>
+              <a:rPr lang="en-US" sz="2100" b="1" dirty="0">
+                <a:solidFill>
+                  <a:srgbClr val="FFFFFF"/>
+                </a:solidFill>
+                <a:latin typeface="Arial" pitchFamily="34" charset="0"/>
+                <a:ea typeface="Arial" pitchFamily="34" charset="-122"/>
+                <a:cs typeface="Arial" pitchFamily="34" charset="-120"/>
+              </a:rPr>
+              <a:t>Built for the Kingdom. Ready for the Gulf.</a:t>
+            </a:r>
+            <a:endParaRPr lang="en-US" sz="2100" dirty="0"/>
+          </a:p>
+        </p:txBody>
+      </p:sp>
+      <p:sp>
+        <p:nvSpPr>
+          <p:cNvPr id="49" name="Text 47"/>
+          <p:cNvSpPr txBox="1"/>
+          <p:nvPr/>
+        </p:nvSpPr>
+        <p:spPr>
+          <a:xfrm>
+            <a:off x="548640" y="6144768"/>
+            <a:ext cx="8229600" cy="274320"/>
           </a:xfrm>
           <a:prstGeom prst="rect">
             <a:avLst/>
@@ -4542,7 +7135,7 @@
                 <a:ea typeface="Calibri" pitchFamily="34" charset="-122"/>
                 <a:cs typeface="Calibri" pitchFamily="34" charset="-120"/>
               </a:rPr>
-              <a:t>Qiwa, Muqeem and Absher in step  ·  Nitaqat calculated before it bites  ·  Exit and re-entry tracked to the day</a:t>
+              <a:t>Qiwa, Muqeem and Absher in step   ·   Nitaqat calculated before it bites   ·   Exit and re-entry tracked to the day</a:t>
             </a:r>
             <a:endParaRPr lang="en-US" sz="1000" dirty="0"/>
           </a:p>
@@ -4550,7 +7143,7 @@
       </p:sp>
       <p:pic>
         <p:nvPicPr>
-          <p:cNvPr id="64" name="Image 0" descr="./img/logo-white.png">    </p:cNvPr>
+          <p:cNvPr id="50" name="Image 0" descr="./img/logo-white.png">    </p:cNvPr>
           <p:cNvPicPr>
             <a:picLocks noChangeAspect="1"/>
           </p:cNvPicPr>
@@ -4564,7 +7157,7 @@
         </p:blipFill>
         <p:spPr>
           <a:xfrm>
-            <a:off x="9464040" y="5797296"/>
+            <a:off x="9464040" y="5760720"/>
             <a:ext cx="1828800" cy="448056"/>
           </a:xfrm>
           <a:prstGeom prst="rect">
@@ -4574,13 +7167,13 @@
       </p:pic>
       <p:sp>
         <p:nvSpPr>
-          <p:cNvPr id="65" name="Text 62"/>
-          <p:cNvSpPr txBox="1"/>
-          <p:nvPr/>
-        </p:nvSpPr>
-        <p:spPr>
-          <a:xfrm>
-            <a:off x="8778240" y="6327648"/>
+          <p:cNvPr id="51" name="Text 48"/>
+          <p:cNvSpPr txBox="1"/>
+          <p:nvPr/>
+        </p:nvSpPr>
+        <p:spPr>
+          <a:xfrm>
+            <a:off x="8778240" y="6291072"/>
             <a:ext cx="2514600" cy="201168"/>
           </a:xfrm>
           <a:prstGeom prst="rect">
@@ -10002,7 +12595,7 @@
                 <a:ea typeface="Calibri" pitchFamily="34" charset="-122"/>
                 <a:cs typeface="Calibri" pitchFamily="34" charset="-120"/>
               </a:rPr>
-              <a:t>PERSONA VIEW</a:t>
+              <a:t>GOVERNMENT PORTALS</a:t>
             </a:r>
             <a:endParaRPr lang="en-US" sz="1100" dirty="0"/>
           </a:p>
@@ -10041,7 +12634,7 @@
                 <a:ea typeface="Arial" pitchFamily="34" charset="-122"/>
                 <a:cs typeface="Arial" pitchFamily="34" charset="-120"/>
               </a:rPr>
-              <a:t>Everyone gets their own to-do list.</a:t>
+              <a:t>Seven portals. One queue.</a:t>
             </a:r>
             <a:endParaRPr lang="en-US" sz="3000" dirty="0"/>
           </a:p>
@@ -10056,7 +12649,7 @@
         <p:spPr>
           <a:xfrm>
             <a:off x="548640" y="1243584"/>
-            <a:ext cx="10424160" cy="420624"/>
+            <a:ext cx="10424160" cy="310896"/>
           </a:xfrm>
           <a:prstGeom prst="rect">
             <a:avLst/>
@@ -10080,7 +12673,7 @@
                 <a:ea typeface="Calibri" pitchFamily="34" charset="-122"/>
                 <a:cs typeface="Calibri" pitchFamily="34" charset="-120"/>
               </a:rPr>
-              <a:t>Each role only sees what is actually theirs, with a due date on it, and the system already knows which Saudi authority each step belongs to.</a:t>
+              <a:t>Every Saudi step lands on one of these. Your PRO should not have to remember which.</a:t>
             </a:r>
             <a:endParaRPr lang="en-US" sz="1300" dirty="0"/>
           </a:p>
@@ -10094,18 +12687,18 @@
         </p:nvSpPr>
         <p:spPr>
           <a:xfrm>
-            <a:off x="548640" y="1828800"/>
-            <a:ext cx="10424160" cy="548640"/>
+            <a:off x="548640" y="1773936"/>
+            <a:ext cx="2670048" cy="1463040"/>
           </a:xfrm>
           <a:prstGeom prst="roundRect">
             <a:avLst>
-              <a:gd name="adj" fmla="val 10000"/>
+              <a:gd name="adj" fmla="val 5000"/>
             </a:avLst>
           </a:prstGeom>
           <a:solidFill>
-            <a:srgbClr val="F4F6F7"/>
+            <a:srgbClr val="EAF2FD"/>
           </a:solidFill>
-          <a:ln w="7620">
+          <a:ln w="9525">
             <a:solidFill>
               <a:srgbClr val="E3E7EA"/>
             </a:solidFill>
@@ -10115,89 +12708,30 @@
       </p:sp>
       <p:sp>
         <p:nvSpPr>
-          <p:cNvPr id="6" name="Shape 4"/>
-          <p:cNvSpPr/>
-          <p:nvPr/>
-        </p:nvSpPr>
-        <p:spPr>
-          <a:xfrm>
-            <a:off x="694944" y="1929384"/>
-            <a:ext cx="347472" cy="347472"/>
-          </a:xfrm>
-          <a:prstGeom prst="ellipse">
-            <a:avLst/>
-          </a:prstGeom>
-          <a:solidFill>
-            <a:srgbClr val="20A098"/>
-          </a:solidFill>
-          <a:ln/>
-        </p:spPr>
-      </p:sp>
-      <p:sp>
-        <p:nvSpPr>
-          <p:cNvPr id="7" name="Text 5"/>
-          <p:cNvSpPr txBox="1"/>
-          <p:nvPr/>
-        </p:nvSpPr>
-        <p:spPr>
-          <a:xfrm>
-            <a:off x="694944" y="1929384"/>
-            <a:ext cx="347472" cy="347472"/>
-          </a:xfrm>
-          <a:prstGeom prst="rect">
-            <a:avLst/>
-          </a:prstGeom>
-          <a:noFill/>
-          <a:ln/>
-        </p:spPr>
-        <p:txBody>
-          <a:bodyPr wrap="square" lIns="0" tIns="0" rIns="0" bIns="0" rtlCol="0" anchor="ctr"/>
-          <a:lstStyle/>
-          <a:p>
-            <a:pPr algn="ctr" indent="0" marL="0">
-              <a:buNone/>
-            </a:pPr>
-            <a:r>
-              <a:rPr lang="en-US" sz="1050" b="1" dirty="0">
-                <a:solidFill>
-                  <a:srgbClr val="FFFFFF"/>
-                </a:solidFill>
-                <a:latin typeface="Calibri" pitchFamily="34" charset="0"/>
-                <a:ea typeface="Calibri" pitchFamily="34" charset="-122"/>
-                <a:cs typeface="Calibri" pitchFamily="34" charset="-120"/>
-              </a:rPr>
-              <a:t>GRO</a:t>
-            </a:r>
-            <a:endParaRPr lang="en-US" sz="1050" dirty="0"/>
-          </a:p>
-        </p:txBody>
-      </p:sp>
-      <p:sp>
-        <p:nvSpPr>
-          <p:cNvPr id="8" name="Text 6"/>
-          <p:cNvSpPr txBox="1"/>
-          <p:nvPr/>
-        </p:nvSpPr>
-        <p:spPr>
-          <a:xfrm>
-            <a:off x="1152144" y="1883664"/>
-            <a:ext cx="1965960" cy="219456"/>
-          </a:xfrm>
-          <a:prstGeom prst="rect">
-            <a:avLst/>
-          </a:prstGeom>
-          <a:noFill/>
-          <a:ln/>
-        </p:spPr>
-        <p:txBody>
-          <a:bodyPr wrap="square" lIns="0" tIns="0" rIns="0" bIns="0" rtlCol="0" anchor="ctr"/>
-          <a:lstStyle/>
-          <a:p>
-            <a:pPr indent="0" marL="0">
-              <a:buNone/>
-            </a:pPr>
-            <a:r>
-              <a:rPr lang="en-US" sz="1100" b="1" dirty="0">
+          <p:cNvPr id="6" name="Text 4"/>
+          <p:cNvSpPr txBox="1"/>
+          <p:nvPr/>
+        </p:nvSpPr>
+        <p:spPr>
+          <a:xfrm>
+            <a:off x="704088" y="1883664"/>
+            <a:ext cx="1115568" cy="256032"/>
+          </a:xfrm>
+          <a:prstGeom prst="rect">
+            <a:avLst/>
+          </a:prstGeom>
+          <a:noFill/>
+          <a:ln/>
+        </p:spPr>
+        <p:txBody>
+          <a:bodyPr wrap="square" lIns="0" tIns="0" rIns="0" bIns="0" rtlCol="0" anchor="ctr"/>
+          <a:lstStyle/>
+          <a:p>
+            <a:pPr indent="0" marL="0">
+              <a:buNone/>
+            </a:pPr>
+            <a:r>
+              <a:rPr lang="en-US" sz="1500" b="1" dirty="0">
                 <a:solidFill>
                   <a:srgbClr val="0C1E33"/>
                 </a:solidFill>
@@ -10205,9 +12739,90 @@
                 <a:ea typeface="Arial" pitchFamily="34" charset="-122"/>
                 <a:cs typeface="Arial" pitchFamily="34" charset="-120"/>
               </a:rPr>
-              <a:t>Government Relations</a:t>
-            </a:r>
-            <a:endParaRPr lang="en-US" sz="1100" dirty="0"/>
+              <a:t>Qiwa</a:t>
+            </a:r>
+            <a:endParaRPr lang="en-US" sz="1500" dirty="0"/>
+          </a:p>
+        </p:txBody>
+      </p:sp>
+      <p:sp>
+        <p:nvSpPr>
+          <p:cNvPr id="7" name="Text 5"/>
+          <p:cNvSpPr txBox="1"/>
+          <p:nvPr/>
+        </p:nvSpPr>
+        <p:spPr>
+          <a:xfrm>
+            <a:off x="1874520" y="1892808"/>
+            <a:ext cx="1188720" cy="310896"/>
+          </a:xfrm>
+          <a:prstGeom prst="rect">
+            <a:avLst/>
+          </a:prstGeom>
+          <a:noFill/>
+          <a:ln/>
+        </p:spPr>
+        <p:txBody>
+          <a:bodyPr wrap="square" lIns="0" tIns="0" rIns="0" bIns="0" rtlCol="0" anchor="ctr"/>
+          <a:lstStyle/>
+          <a:p>
+            <a:pPr algn="r" indent="0" marL="0">
+              <a:lnSpc>
+                <a:spcPts val="1000"/>
+              </a:lnSpc>
+              <a:buNone/>
+            </a:pPr>
+            <a:r>
+              <a:rPr lang="en-US" sz="800" dirty="0">
+                <a:solidFill>
+                  <a:srgbClr val="5A6C82"/>
+                </a:solidFill>
+                <a:latin typeface="Calibri" pitchFamily="34" charset="0"/>
+                <a:ea typeface="Calibri" pitchFamily="34" charset="-122"/>
+                <a:cs typeface="Calibri" pitchFamily="34" charset="-120"/>
+              </a:rPr>
+              <a:t>MHRSD</a:t>
+            </a:r>
+            <a:endParaRPr lang="en-US" sz="800" dirty="0"/>
+          </a:p>
+        </p:txBody>
+      </p:sp>
+      <p:sp>
+        <p:nvSpPr>
+          <p:cNvPr id="8" name="Text 6"/>
+          <p:cNvSpPr txBox="1"/>
+          <p:nvPr/>
+        </p:nvSpPr>
+        <p:spPr>
+          <a:xfrm>
+            <a:off x="704088" y="2157984"/>
+            <a:ext cx="2359152" cy="219456"/>
+          </a:xfrm>
+          <a:prstGeom prst="rect">
+            <a:avLst/>
+          </a:prstGeom>
+          <a:noFill/>
+          <a:ln/>
+        </p:spPr>
+        <p:txBody>
+          <a:bodyPr wrap="square" lIns="0" tIns="0" rIns="0" bIns="0" rtlCol="0" anchor="ctr"/>
+          <a:lstStyle/>
+          <a:p>
+            <a:pPr indent="0" marL="0">
+              <a:buNone/>
+            </a:pPr>
+            <a:r>
+              <a:rPr lang="en-US" sz="1150" b="1" dirty="0">
+                <a:solidFill>
+                  <a:srgbClr val="12756F"/>
+                </a:solidFill>
+                <a:latin typeface="Arial" pitchFamily="34" charset="0"/>
+                <a:ea typeface="Arial" pitchFamily="34" charset="-122"/>
+                <a:cs typeface="Arial" pitchFamily="34" charset="-120"/>
+              </a:rPr>
+              <a:t>The job</a:t>
+            </a:r>
+            <a:endParaRPr lang="en-US" sz="1150" dirty="0"/>
           </a:p>
         </p:txBody>
       </p:sp>
@@ -10219,47 +12834,8 @@
         </p:nvSpPr>
         <p:spPr>
           <a:xfrm>
-            <a:off x="1152144" y="2103120"/>
-            <a:ext cx="1965960" cy="182880"/>
-          </a:xfrm>
-          <a:prstGeom prst="rect">
-            <a:avLst/>
-          </a:prstGeom>
-          <a:noFill/>
-          <a:ln/>
-        </p:spPr>
-        <p:txBody>
-          <a:bodyPr wrap="square" lIns="0" tIns="0" rIns="0" bIns="0" rtlCol="0" anchor="ctr"/>
-          <a:lstStyle/>
-          <a:p>
-            <a:pPr indent="0" marL="0">
-              <a:buNone/>
-            </a:pPr>
-            <a:r>
-              <a:rPr lang="en-US" sz="900" dirty="0">
-                <a:solidFill>
-                  <a:srgbClr val="12756F"/>
-                </a:solidFill>
-                <a:latin typeface="Calibri" pitchFamily="34" charset="0"/>
-                <a:ea typeface="Calibri" pitchFamily="34" charset="-122"/>
-                <a:cs typeface="Calibri" pitchFamily="34" charset="-120"/>
-              </a:rPr>
-              <a:t>PRO desk · Riyadh</a:t>
-            </a:r>
-            <a:endParaRPr lang="en-US" sz="900" dirty="0"/>
-          </a:p>
-        </p:txBody>
-      </p:sp>
-      <p:sp>
-        <p:nvSpPr>
-          <p:cNvPr id="10" name="Text 8"/>
-          <p:cNvSpPr txBox="1"/>
-          <p:nvPr/>
-        </p:nvSpPr>
-        <p:spPr>
-          <a:xfrm>
-            <a:off x="3246120" y="1883664"/>
-            <a:ext cx="4846320" cy="438912"/>
+            <a:off x="704088" y="2395728"/>
+            <a:ext cx="2359152" cy="566928"/>
           </a:xfrm>
           <a:prstGeom prst="rect">
             <a:avLst/>
@@ -10278,7 +12854,7 @@
               <a:buNone/>
             </a:pPr>
             <a:r>
-              <a:rPr lang="en-US" sz="930" dirty="0">
+              <a:rPr lang="en-US" sz="920" dirty="0">
                 <a:solidFill>
                   <a:srgbClr val="5A6C82"/>
                 </a:solidFill>
@@ -10286,11 +12862,33 @@
                 <a:ea typeface="Calibri" pitchFamily="34" charset="-122"/>
                 <a:cs typeface="Calibri" pitchFamily="34" charset="-120"/>
               </a:rPr>
-              <a:t>Requests block visas once the band allows it; authenticates Qiwa contracts; issues Iqamas on Muqeem inside the statutory window; applies for exit re-entry and watches every return-by date.</a:t>
-            </a:r>
-            <a:endParaRPr lang="en-US" sz="930" dirty="0"/>
-          </a:p>
-        </p:txBody>
+              <a:t>Work permits, the authenticated contract, Nitaqat band, transfers</a:t>
+            </a:r>
+            <a:endParaRPr lang="en-US" sz="920" dirty="0"/>
+          </a:p>
+        </p:txBody>
+      </p:sp>
+      <p:sp>
+        <p:nvSpPr>
+          <p:cNvPr id="10" name="Shape 8"/>
+          <p:cNvSpPr/>
+          <p:nvPr/>
+        </p:nvSpPr>
+        <p:spPr>
+          <a:xfrm>
+            <a:off x="704088" y="2999232"/>
+            <a:ext cx="1325880" cy="201168"/>
+          </a:xfrm>
+          <a:prstGeom prst="roundRect">
+            <a:avLst>
+              <a:gd name="adj" fmla="val 50000"/>
+            </a:avLst>
+          </a:prstGeom>
+          <a:solidFill>
+            <a:srgbClr val="B5730F"/>
+          </a:solidFill>
+          <a:ln/>
+        </p:spPr>
       </p:sp>
       <p:sp>
         <p:nvSpPr>
@@ -10300,37 +12898,34 @@
         </p:nvSpPr>
         <p:spPr>
           <a:xfrm>
-            <a:off x="8229600" y="1883664"/>
-            <a:ext cx="2615184" cy="438912"/>
-          </a:xfrm>
-          <a:prstGeom prst="rect">
-            <a:avLst/>
-          </a:prstGeom>
-          <a:noFill/>
-          <a:ln/>
-        </p:spPr>
-        <p:txBody>
-          <a:bodyPr wrap="square" lIns="0" tIns="0" rIns="0" bIns="0" rtlCol="0" anchor="ctr"/>
-          <a:lstStyle/>
-          <a:p>
-            <a:pPr indent="0" marL="0">
-              <a:lnSpc>
-                <a:spcPts val="1240"/>
-              </a:lnSpc>
-              <a:buNone/>
-            </a:pPr>
-            <a:r>
-              <a:rPr lang="en-US" sz="930" b="1" i="1" dirty="0">
-                <a:solidFill>
-                  <a:srgbClr val="17795E"/>
-                </a:solidFill>
-                <a:latin typeface="Calibri" pitchFamily="34" charset="0"/>
-                <a:ea typeface="Calibri" pitchFamily="34" charset="-122"/>
-                <a:cs typeface="Calibri" pitchFamily="34" charset="-120"/>
-              </a:rPr>
-              <a:t>One queue that already knows which authority each step belongs to.</a:t>
-            </a:r>
-            <a:endParaRPr lang="en-US" sz="930" dirty="0"/>
+            <a:off x="704088" y="2999232"/>
+            <a:ext cx="1325880" cy="201168"/>
+          </a:xfrm>
+          <a:prstGeom prst="rect">
+            <a:avLst/>
+          </a:prstGeom>
+          <a:noFill/>
+          <a:ln/>
+        </p:spPr>
+        <p:txBody>
+          <a:bodyPr wrap="square" lIns="0" tIns="0" rIns="0" bIns="0" rtlCol="0" anchor="ctr"/>
+          <a:lstStyle/>
+          <a:p>
+            <a:pPr algn="ctr" indent="0" marL="0">
+              <a:buNone/>
+            </a:pPr>
+            <a:r>
+              <a:rPr lang="en-US" sz="780" b="1" dirty="0">
+                <a:solidFill>
+                  <a:srgbClr val="FFFFFF"/>
+                </a:solidFill>
+                <a:latin typeface="Calibri" pitchFamily="34" charset="0"/>
+                <a:ea typeface="Calibri" pitchFamily="34" charset="-122"/>
+                <a:cs typeface="Calibri" pitchFamily="34" charset="-120"/>
+              </a:rPr>
+              <a:t>Connector ready</a:t>
+            </a:r>
+            <a:endParaRPr lang="en-US" sz="780" dirty="0"/>
           </a:p>
         </p:txBody>
       </p:sp>
@@ -10342,18 +12937,18 @@
         </p:nvSpPr>
         <p:spPr>
           <a:xfrm>
-            <a:off x="548640" y="2414016"/>
-            <a:ext cx="10424160" cy="548640"/>
+            <a:off x="3374136" y="1773936"/>
+            <a:ext cx="2670048" cy="1463040"/>
           </a:xfrm>
           <a:prstGeom prst="roundRect">
             <a:avLst>
-              <a:gd name="adj" fmla="val 10000"/>
+              <a:gd name="adj" fmla="val 5000"/>
             </a:avLst>
           </a:prstGeom>
           <a:solidFill>
-            <a:srgbClr val="FFFFFF"/>
+            <a:srgbClr val="EAF2FD"/>
           </a:solidFill>
-          <a:ln w="7620">
+          <a:ln w="9525">
             <a:solidFill>
               <a:srgbClr val="E3E7EA"/>
             </a:solidFill>
@@ -10363,89 +12958,30 @@
       </p:sp>
       <p:sp>
         <p:nvSpPr>
-          <p:cNvPr id="13" name="Shape 11"/>
-          <p:cNvSpPr/>
-          <p:nvPr/>
-        </p:nvSpPr>
-        <p:spPr>
-          <a:xfrm>
-            <a:off x="694944" y="2514600"/>
-            <a:ext cx="347472" cy="347472"/>
-          </a:xfrm>
-          <a:prstGeom prst="ellipse">
-            <a:avLst/>
-          </a:prstGeom>
-          <a:solidFill>
-            <a:srgbClr val="12756F"/>
-          </a:solidFill>
-          <a:ln/>
-        </p:spPr>
-      </p:sp>
-      <p:sp>
-        <p:nvSpPr>
-          <p:cNvPr id="14" name="Text 12"/>
-          <p:cNvSpPr txBox="1"/>
-          <p:nvPr/>
-        </p:nvSpPr>
-        <p:spPr>
-          <a:xfrm>
-            <a:off x="694944" y="2514600"/>
-            <a:ext cx="347472" cy="347472"/>
-          </a:xfrm>
-          <a:prstGeom prst="rect">
-            <a:avLst/>
-          </a:prstGeom>
-          <a:noFill/>
-          <a:ln/>
-        </p:spPr>
-        <p:txBody>
-          <a:bodyPr wrap="square" lIns="0" tIns="0" rIns="0" bIns="0" rtlCol="0" anchor="ctr"/>
-          <a:lstStyle/>
-          <a:p>
-            <a:pPr algn="ctr" indent="0" marL="0">
-              <a:buNone/>
-            </a:pPr>
-            <a:r>
-              <a:rPr lang="en-US" sz="1050" b="1" dirty="0">
-                <a:solidFill>
-                  <a:srgbClr val="FFFFFF"/>
-                </a:solidFill>
-                <a:latin typeface="Calibri" pitchFamily="34" charset="0"/>
-                <a:ea typeface="Calibri" pitchFamily="34" charset="-122"/>
-                <a:cs typeface="Calibri" pitchFamily="34" charset="-120"/>
-              </a:rPr>
-              <a:t>TA</a:t>
-            </a:r>
-            <a:endParaRPr lang="en-US" sz="1050" dirty="0"/>
-          </a:p>
-        </p:txBody>
-      </p:sp>
-      <p:sp>
-        <p:nvSpPr>
-          <p:cNvPr id="15" name="Text 13"/>
-          <p:cNvSpPr txBox="1"/>
-          <p:nvPr/>
-        </p:nvSpPr>
-        <p:spPr>
-          <a:xfrm>
-            <a:off x="1152144" y="2468880"/>
-            <a:ext cx="1965960" cy="219456"/>
-          </a:xfrm>
-          <a:prstGeom prst="rect">
-            <a:avLst/>
-          </a:prstGeom>
-          <a:noFill/>
-          <a:ln/>
-        </p:spPr>
-        <p:txBody>
-          <a:bodyPr wrap="square" lIns="0" tIns="0" rIns="0" bIns="0" rtlCol="0" anchor="ctr"/>
-          <a:lstStyle/>
-          <a:p>
-            <a:pPr indent="0" marL="0">
-              <a:buNone/>
-            </a:pPr>
-            <a:r>
-              <a:rPr lang="en-US" sz="1100" b="1" dirty="0">
+          <p:cNvPr id="13" name="Text 11"/>
+          <p:cNvSpPr txBox="1"/>
+          <p:nvPr/>
+        </p:nvSpPr>
+        <p:spPr>
+          <a:xfrm>
+            <a:off x="3529584" y="1883664"/>
+            <a:ext cx="1115568" cy="256032"/>
+          </a:xfrm>
+          <a:prstGeom prst="rect">
+            <a:avLst/>
+          </a:prstGeom>
+          <a:noFill/>
+          <a:ln/>
+        </p:spPr>
+        <p:txBody>
+          <a:bodyPr wrap="square" lIns="0" tIns="0" rIns="0" bIns="0" rtlCol="0" anchor="ctr"/>
+          <a:lstStyle/>
+          <a:p>
+            <a:pPr indent="0" marL="0">
+              <a:buNone/>
+            </a:pPr>
+            <a:r>
+              <a:rPr lang="en-US" sz="1500" b="1" dirty="0">
                 <a:solidFill>
                   <a:srgbClr val="0C1E33"/>
                 </a:solidFill>
@@ -10453,9 +12989,90 @@
                 <a:ea typeface="Arial" pitchFamily="34" charset="-122"/>
                 <a:cs typeface="Arial" pitchFamily="34" charset="-120"/>
               </a:rPr>
-              <a:t>Recruiter</a:t>
-            </a:r>
-            <a:endParaRPr lang="en-US" sz="1100" dirty="0"/>
+              <a:t>Muqeem</a:t>
+            </a:r>
+            <a:endParaRPr lang="en-US" sz="1500" dirty="0"/>
+          </a:p>
+        </p:txBody>
+      </p:sp>
+      <p:sp>
+        <p:nvSpPr>
+          <p:cNvPr id="14" name="Text 12"/>
+          <p:cNvSpPr txBox="1"/>
+          <p:nvPr/>
+        </p:nvSpPr>
+        <p:spPr>
+          <a:xfrm>
+            <a:off x="4700016" y="1892808"/>
+            <a:ext cx="1188720" cy="310896"/>
+          </a:xfrm>
+          <a:prstGeom prst="rect">
+            <a:avLst/>
+          </a:prstGeom>
+          <a:noFill/>
+          <a:ln/>
+        </p:spPr>
+        <p:txBody>
+          <a:bodyPr wrap="square" lIns="0" tIns="0" rIns="0" bIns="0" rtlCol="0" anchor="ctr"/>
+          <a:lstStyle/>
+          <a:p>
+            <a:pPr algn="r" indent="0" marL="0">
+              <a:lnSpc>
+                <a:spcPts val="1000"/>
+              </a:lnSpc>
+              <a:buNone/>
+            </a:pPr>
+            <a:r>
+              <a:rPr lang="en-US" sz="800" dirty="0">
+                <a:solidFill>
+                  <a:srgbClr val="5A6C82"/>
+                </a:solidFill>
+                <a:latin typeface="Calibri" pitchFamily="34" charset="0"/>
+                <a:ea typeface="Calibri" pitchFamily="34" charset="-122"/>
+                <a:cs typeface="Calibri" pitchFamily="34" charset="-120"/>
+              </a:rPr>
+              <a:t>Elm</a:t>
+            </a:r>
+            <a:endParaRPr lang="en-US" sz="800" dirty="0"/>
+          </a:p>
+        </p:txBody>
+      </p:sp>
+      <p:sp>
+        <p:nvSpPr>
+          <p:cNvPr id="15" name="Text 13"/>
+          <p:cNvSpPr txBox="1"/>
+          <p:nvPr/>
+        </p:nvSpPr>
+        <p:spPr>
+          <a:xfrm>
+            <a:off x="3529584" y="2157984"/>
+            <a:ext cx="2359152" cy="219456"/>
+          </a:xfrm>
+          <a:prstGeom prst="rect">
+            <a:avLst/>
+          </a:prstGeom>
+          <a:noFill/>
+          <a:ln/>
+        </p:spPr>
+        <p:txBody>
+          <a:bodyPr wrap="square" lIns="0" tIns="0" rIns="0" bIns="0" rtlCol="0" anchor="ctr"/>
+          <a:lstStyle/>
+          <a:p>
+            <a:pPr indent="0" marL="0">
+              <a:buNone/>
+            </a:pPr>
+            <a:r>
+              <a:rPr lang="en-US" sz="1150" b="1" dirty="0">
+                <a:solidFill>
+                  <a:srgbClr val="12756F"/>
+                </a:solidFill>
+                <a:latin typeface="Arial" pitchFamily="34" charset="0"/>
+                <a:ea typeface="Arial" pitchFamily="34" charset="-122"/>
+                <a:cs typeface="Arial" pitchFamily="34" charset="-120"/>
+              </a:rPr>
+              <a:t>The residence</a:t>
+            </a:r>
+            <a:endParaRPr lang="en-US" sz="1150" dirty="0"/>
           </a:p>
         </p:txBody>
       </p:sp>
@@ -10467,47 +13084,8 @@
         </p:nvSpPr>
         <p:spPr>
           <a:xfrm>
-            <a:off x="1152144" y="2688336"/>
-            <a:ext cx="1965960" cy="182880"/>
-          </a:xfrm>
-          <a:prstGeom prst="rect">
-            <a:avLst/>
-          </a:prstGeom>
-          <a:noFill/>
-          <a:ln/>
-        </p:spPr>
-        <p:txBody>
-          <a:bodyPr wrap="square" lIns="0" tIns="0" rIns="0" bIns="0" rtlCol="0" anchor="ctr"/>
-          <a:lstStyle/>
-          <a:p>
-            <a:pPr indent="0" marL="0">
-              <a:buNone/>
-            </a:pPr>
-            <a:r>
-              <a:rPr lang="en-US" sz="900" dirty="0">
-                <a:solidFill>
-                  <a:srgbClr val="12756F"/>
-                </a:solidFill>
-                <a:latin typeface="Calibri" pitchFamily="34" charset="0"/>
-                <a:ea typeface="Calibri" pitchFamily="34" charset="-122"/>
-                <a:cs typeface="Calibri" pitchFamily="34" charset="-120"/>
-              </a:rPr>
-              <a:t>Talent acquisition</a:t>
-            </a:r>
-            <a:endParaRPr lang="en-US" sz="900" dirty="0"/>
-          </a:p>
-        </p:txBody>
-      </p:sp>
-      <p:sp>
-        <p:nvSpPr>
-          <p:cNvPr id="17" name="Text 15"/>
-          <p:cNvSpPr txBox="1"/>
-          <p:nvPr/>
-        </p:nvSpPr>
-        <p:spPr>
-          <a:xfrm>
-            <a:off x="3246120" y="2468880"/>
-            <a:ext cx="4846320" cy="438912"/>
+            <a:off x="3529584" y="2395728"/>
+            <a:ext cx="2359152" cy="566928"/>
           </a:xfrm>
           <a:prstGeom prst="rect">
             <a:avLst/>
@@ -10526,7 +13104,7 @@
               <a:buNone/>
             </a:pPr>
             <a:r>
-              <a:rPr lang="en-US" sz="930" dirty="0">
+              <a:rPr lang="en-US" sz="920" dirty="0">
                 <a:solidFill>
                   <a:srgbClr val="5A6C82"/>
                 </a:solidFill>
@@ -10534,11 +13112,33 @@
                 <a:ea typeface="Calibri" pitchFamily="34" charset="-122"/>
                 <a:cs typeface="Calibri" pitchFamily="34" charset="-120"/>
               </a:rPr>
-              <a:t>Checks block visa availability before making an offer; releases candidates from SF Recruiting; agrees the Qiwa profession code with the PRO before submission.</a:t>
-            </a:r>
-            <a:endParaRPr lang="en-US" sz="930" dirty="0"/>
-          </a:p>
-        </p:txBody>
+              <a:t>Iqama issue and renewal, exit and re-entry, final exit, dependants</a:t>
+            </a:r>
+            <a:endParaRPr lang="en-US" sz="920" dirty="0"/>
+          </a:p>
+        </p:txBody>
+      </p:sp>
+      <p:sp>
+        <p:nvSpPr>
+          <p:cNvPr id="17" name="Shape 15"/>
+          <p:cNvSpPr/>
+          <p:nvPr/>
+        </p:nvSpPr>
+        <p:spPr>
+          <a:xfrm>
+            <a:off x="3529584" y="2999232"/>
+            <a:ext cx="1325880" cy="201168"/>
+          </a:xfrm>
+          <a:prstGeom prst="roundRect">
+            <a:avLst>
+              <a:gd name="adj" fmla="val 50000"/>
+            </a:avLst>
+          </a:prstGeom>
+          <a:solidFill>
+            <a:srgbClr val="B5730F"/>
+          </a:solidFill>
+          <a:ln/>
+        </p:spPr>
       </p:sp>
       <p:sp>
         <p:nvSpPr>
@@ -10548,37 +13148,34 @@
         </p:nvSpPr>
         <p:spPr>
           <a:xfrm>
-            <a:off x="8229600" y="2468880"/>
-            <a:ext cx="2615184" cy="438912"/>
-          </a:xfrm>
-          <a:prstGeom prst="rect">
-            <a:avLst/>
-          </a:prstGeom>
-          <a:noFill/>
-          <a:ln/>
-        </p:spPr>
-        <p:txBody>
-          <a:bodyPr wrap="square" lIns="0" tIns="0" rIns="0" bIns="0" rtlCol="0" anchor="ctr"/>
-          <a:lstStyle/>
-          <a:p>
-            <a:pPr indent="0" marL="0">
-              <a:lnSpc>
-                <a:spcPts val="1240"/>
-              </a:lnSpc>
-              <a:buNone/>
-            </a:pPr>
-            <a:r>
-              <a:rPr lang="en-US" sz="930" b="1" i="1" dirty="0">
-                <a:solidFill>
-                  <a:srgbClr val="17795E"/>
-                </a:solidFill>
-                <a:latin typeface="Calibri" pitchFamily="34" charset="0"/>
-                <a:ea typeface="Calibri" pitchFamily="34" charset="-122"/>
-                <a:cs typeface="Calibri" pitchFamily="34" charset="-120"/>
-              </a:rPr>
-              <a:t>Offers made against visas that actually exist.</a:t>
-            </a:r>
-            <a:endParaRPr lang="en-US" sz="930" dirty="0"/>
+            <a:off x="3529584" y="2999232"/>
+            <a:ext cx="1325880" cy="201168"/>
+          </a:xfrm>
+          <a:prstGeom prst="rect">
+            <a:avLst/>
+          </a:prstGeom>
+          <a:noFill/>
+          <a:ln/>
+        </p:spPr>
+        <p:txBody>
+          <a:bodyPr wrap="square" lIns="0" tIns="0" rIns="0" bIns="0" rtlCol="0" anchor="ctr"/>
+          <a:lstStyle/>
+          <a:p>
+            <a:pPr algn="ctr" indent="0" marL="0">
+              <a:buNone/>
+            </a:pPr>
+            <a:r>
+              <a:rPr lang="en-US" sz="780" b="1" dirty="0">
+                <a:solidFill>
+                  <a:srgbClr val="FFFFFF"/>
+                </a:solidFill>
+                <a:latin typeface="Calibri" pitchFamily="34" charset="0"/>
+                <a:ea typeface="Calibri" pitchFamily="34" charset="-122"/>
+                <a:cs typeface="Calibri" pitchFamily="34" charset="-120"/>
+              </a:rPr>
+              <a:t>Connector ready</a:t>
+            </a:r>
+            <a:endParaRPr lang="en-US" sz="780" dirty="0"/>
           </a:p>
         </p:txBody>
       </p:sp>
@@ -10590,18 +13187,18 @@
         </p:nvSpPr>
         <p:spPr>
           <a:xfrm>
-            <a:off x="548640" y="2999232"/>
-            <a:ext cx="10424160" cy="548640"/>
+            <a:off x="6199632" y="1773936"/>
+            <a:ext cx="2670048" cy="1463040"/>
           </a:xfrm>
           <a:prstGeom prst="roundRect">
             <a:avLst>
-              <a:gd name="adj" fmla="val 10000"/>
+              <a:gd name="adj" fmla="val 5000"/>
             </a:avLst>
           </a:prstGeom>
           <a:solidFill>
-            <a:srgbClr val="F4F6F7"/>
+            <a:srgbClr val="EAF2FD"/>
           </a:solidFill>
-          <a:ln w="7620">
+          <a:ln w="9525">
             <a:solidFill>
               <a:srgbClr val="E3E7EA"/>
             </a:solidFill>
@@ -10611,89 +13208,30 @@
       </p:sp>
       <p:sp>
         <p:nvSpPr>
-          <p:cNvPr id="20" name="Shape 18"/>
-          <p:cNvSpPr/>
-          <p:nvPr/>
-        </p:nvSpPr>
-        <p:spPr>
-          <a:xfrm>
-            <a:off x="694944" y="3099816"/>
-            <a:ext cx="347472" cy="347472"/>
-          </a:xfrm>
-          <a:prstGeom prst="ellipse">
-            <a:avLst/>
-          </a:prstGeom>
-          <a:solidFill>
-            <a:srgbClr val="20A098"/>
-          </a:solidFill>
-          <a:ln/>
-        </p:spPr>
-      </p:sp>
-      <p:sp>
-        <p:nvSpPr>
-          <p:cNvPr id="21" name="Text 19"/>
-          <p:cNvSpPr txBox="1"/>
-          <p:nvPr/>
-        </p:nvSpPr>
-        <p:spPr>
-          <a:xfrm>
-            <a:off x="694944" y="3099816"/>
-            <a:ext cx="347472" cy="347472"/>
-          </a:xfrm>
-          <a:prstGeom prst="rect">
-            <a:avLst/>
-          </a:prstGeom>
-          <a:noFill/>
-          <a:ln/>
-        </p:spPr>
-        <p:txBody>
-          <a:bodyPr wrap="square" lIns="0" tIns="0" rIns="0" bIns="0" rtlCol="0" anchor="ctr"/>
-          <a:lstStyle/>
-          <a:p>
-            <a:pPr algn="ctr" indent="0" marL="0">
-              <a:buNone/>
-            </a:pPr>
-            <a:r>
-              <a:rPr lang="en-US" sz="1050" b="1" dirty="0">
-                <a:solidFill>
-                  <a:srgbClr val="FFFFFF"/>
-                </a:solidFill>
-                <a:latin typeface="Calibri" pitchFamily="34" charset="0"/>
-                <a:ea typeface="Calibri" pitchFamily="34" charset="-122"/>
-                <a:cs typeface="Calibri" pitchFamily="34" charset="-120"/>
-              </a:rPr>
-              <a:t>OB</a:t>
-            </a:r>
-            <a:endParaRPr lang="en-US" sz="1050" dirty="0"/>
-          </a:p>
-        </p:txBody>
-      </p:sp>
-      <p:sp>
-        <p:nvSpPr>
-          <p:cNvPr id="22" name="Text 20"/>
-          <p:cNvSpPr txBox="1"/>
-          <p:nvPr/>
-        </p:nvSpPr>
-        <p:spPr>
-          <a:xfrm>
-            <a:off x="1152144" y="3054096"/>
-            <a:ext cx="1965960" cy="219456"/>
-          </a:xfrm>
-          <a:prstGeom prst="rect">
-            <a:avLst/>
-          </a:prstGeom>
-          <a:noFill/>
-          <a:ln/>
-        </p:spPr>
-        <p:txBody>
-          <a:bodyPr wrap="square" lIns="0" tIns="0" rIns="0" bIns="0" rtlCol="0" anchor="ctr"/>
-          <a:lstStyle/>
-          <a:p>
-            <a:pPr indent="0" marL="0">
-              <a:buNone/>
-            </a:pPr>
-            <a:r>
-              <a:rPr lang="en-US" sz="1100" b="1" dirty="0">
+          <p:cNvPr id="20" name="Text 18"/>
+          <p:cNvSpPr txBox="1"/>
+          <p:nvPr/>
+        </p:nvSpPr>
+        <p:spPr>
+          <a:xfrm>
+            <a:off x="6355080" y="1883664"/>
+            <a:ext cx="1115568" cy="256032"/>
+          </a:xfrm>
+          <a:prstGeom prst="rect">
+            <a:avLst/>
+          </a:prstGeom>
+          <a:noFill/>
+          <a:ln/>
+        </p:spPr>
+        <p:txBody>
+          <a:bodyPr wrap="square" lIns="0" tIns="0" rIns="0" bIns="0" rtlCol="0" anchor="ctr"/>
+          <a:lstStyle/>
+          <a:p>
+            <a:pPr indent="0" marL="0">
+              <a:buNone/>
+            </a:pPr>
+            <a:r>
+              <a:rPr lang="en-US" sz="1500" b="1" dirty="0">
                 <a:solidFill>
                   <a:srgbClr val="0C1E33"/>
                 </a:solidFill>
@@ -10701,9 +13239,90 @@
                 <a:ea typeface="Arial" pitchFamily="34" charset="-122"/>
                 <a:cs typeface="Arial" pitchFamily="34" charset="-120"/>
               </a:rPr>
-              <a:t>Onboarding</a:t>
-            </a:r>
-            <a:endParaRPr lang="en-US" sz="1100" dirty="0"/>
+              <a:t>Absher</a:t>
+            </a:r>
+            <a:endParaRPr lang="en-US" sz="1500" dirty="0"/>
+          </a:p>
+        </p:txBody>
+      </p:sp>
+      <p:sp>
+        <p:nvSpPr>
+          <p:cNvPr id="21" name="Text 19"/>
+          <p:cNvSpPr txBox="1"/>
+          <p:nvPr/>
+        </p:nvSpPr>
+        <p:spPr>
+          <a:xfrm>
+            <a:off x="7525512" y="1892808"/>
+            <a:ext cx="1188720" cy="310896"/>
+          </a:xfrm>
+          <a:prstGeom prst="rect">
+            <a:avLst/>
+          </a:prstGeom>
+          <a:noFill/>
+          <a:ln/>
+        </p:spPr>
+        <p:txBody>
+          <a:bodyPr wrap="square" lIns="0" tIns="0" rIns="0" bIns="0" rtlCol="0" anchor="ctr"/>
+          <a:lstStyle/>
+          <a:p>
+            <a:pPr algn="r" indent="0" marL="0">
+              <a:lnSpc>
+                <a:spcPts val="1000"/>
+              </a:lnSpc>
+              <a:buNone/>
+            </a:pPr>
+            <a:r>
+              <a:rPr lang="en-US" sz="800" dirty="0">
+                <a:solidFill>
+                  <a:srgbClr val="5A6C82"/>
+                </a:solidFill>
+                <a:latin typeface="Calibri" pitchFamily="34" charset="0"/>
+                <a:ea typeface="Calibri" pitchFamily="34" charset="-122"/>
+                <a:cs typeface="Calibri" pitchFamily="34" charset="-120"/>
+              </a:rPr>
+              <a:t>Ministry of Interior</a:t>
+            </a:r>
+            <a:endParaRPr lang="en-US" sz="800" dirty="0"/>
+          </a:p>
+        </p:txBody>
+      </p:sp>
+      <p:sp>
+        <p:nvSpPr>
+          <p:cNvPr id="22" name="Text 20"/>
+          <p:cNvSpPr txBox="1"/>
+          <p:nvPr/>
+        </p:nvSpPr>
+        <p:spPr>
+          <a:xfrm>
+            <a:off x="6355080" y="2157984"/>
+            <a:ext cx="2359152" cy="219456"/>
+          </a:xfrm>
+          <a:prstGeom prst="rect">
+            <a:avLst/>
+          </a:prstGeom>
+          <a:noFill/>
+          <a:ln/>
+        </p:spPr>
+        <p:txBody>
+          <a:bodyPr wrap="square" lIns="0" tIns="0" rIns="0" bIns="0" rtlCol="0" anchor="ctr"/>
+          <a:lstStyle/>
+          <a:p>
+            <a:pPr indent="0" marL="0">
+              <a:buNone/>
+            </a:pPr>
+            <a:r>
+              <a:rPr lang="en-US" sz="1150" b="1" dirty="0">
+                <a:solidFill>
+                  <a:srgbClr val="12756F"/>
+                </a:solidFill>
+                <a:latin typeface="Arial" pitchFamily="34" charset="0"/>
+                <a:ea typeface="Arial" pitchFamily="34" charset="-122"/>
+                <a:cs typeface="Arial" pitchFamily="34" charset="-120"/>
+              </a:rPr>
+              <a:t>What the employee sees</a:t>
+            </a:r>
+            <a:endParaRPr lang="en-US" sz="1150" dirty="0"/>
           </a:p>
         </p:txBody>
       </p:sp>
@@ -10715,47 +13334,8 @@
         </p:nvSpPr>
         <p:spPr>
           <a:xfrm>
-            <a:off x="1152144" y="3273552"/>
-            <a:ext cx="1965960" cy="182880"/>
-          </a:xfrm>
-          <a:prstGeom prst="rect">
-            <a:avLst/>
-          </a:prstGeom>
-          <a:noFill/>
-          <a:ln/>
-        </p:spPr>
-        <p:txBody>
-          <a:bodyPr wrap="square" lIns="0" tIns="0" rIns="0" bIns="0" rtlCol="0" anchor="ctr"/>
-          <a:lstStyle/>
-          <a:p>
-            <a:pPr indent="0" marL="0">
-              <a:buNone/>
-            </a:pPr>
-            <a:r>
-              <a:rPr lang="en-US" sz="900" dirty="0">
-                <a:solidFill>
-                  <a:srgbClr val="12756F"/>
-                </a:solidFill>
-                <a:latin typeface="Calibri" pitchFamily="34" charset="0"/>
-                <a:ea typeface="Calibri" pitchFamily="34" charset="-122"/>
-                <a:cs typeface="Calibri" pitchFamily="34" charset="-120"/>
-              </a:rPr>
-              <a:t>Employee relations</a:t>
-            </a:r>
-            <a:endParaRPr lang="en-US" sz="900" dirty="0"/>
-          </a:p>
-        </p:txBody>
-      </p:sp>
-      <p:sp>
-        <p:nvSpPr>
-          <p:cNvPr id="24" name="Text 22"/>
-          <p:cNvSpPr txBox="1"/>
-          <p:nvPr/>
-        </p:nvSpPr>
-        <p:spPr>
-          <a:xfrm>
-            <a:off x="3246120" y="3054096"/>
-            <a:ext cx="4846320" cy="438912"/>
+            <a:off x="6355080" y="2395728"/>
+            <a:ext cx="2359152" cy="566928"/>
           </a:xfrm>
           <a:prstGeom prst="rect">
             <a:avLst/>
@@ -10774,7 +13354,7 @@
               <a:buNone/>
             </a:pPr>
             <a:r>
-              <a:rPr lang="en-US" sz="930" dirty="0">
+              <a:rPr lang="en-US" sz="920" dirty="0">
                 <a:solidFill>
                   <a:srgbClr val="5A6C82"/>
                 </a:solidFill>
@@ -10782,11 +13362,33 @@
                 <a:ea typeface="Calibri" pitchFamily="34" charset="-122"/>
                 <a:cs typeface="Calibri" pitchFamily="34" charset="-120"/>
               </a:rPr>
-              <a:t>Records the arrival date that starts the statutory Iqama clock; chases medicals and biometrics; registers Saudi hires with GOSI and Mudad.</a:t>
-            </a:r>
-            <a:endParaRPr lang="en-US" sz="930" dirty="0"/>
-          </a:p>
-        </p:txBody>
+              <a:t>Mirrors every Muqeem action, same day. Where disputes start</a:t>
+            </a:r>
+            <a:endParaRPr lang="en-US" sz="920" dirty="0"/>
+          </a:p>
+        </p:txBody>
+      </p:sp>
+      <p:sp>
+        <p:nvSpPr>
+          <p:cNvPr id="24" name="Shape 22"/>
+          <p:cNvSpPr/>
+          <p:nvPr/>
+        </p:nvSpPr>
+        <p:spPr>
+          <a:xfrm>
+            <a:off x="6355080" y="2999232"/>
+            <a:ext cx="1325880" cy="201168"/>
+          </a:xfrm>
+          <a:prstGeom prst="roundRect">
+            <a:avLst>
+              <a:gd name="adj" fmla="val 50000"/>
+            </a:avLst>
+          </a:prstGeom>
+          <a:solidFill>
+            <a:srgbClr val="B5730F"/>
+          </a:solidFill>
+          <a:ln/>
+        </p:spPr>
       </p:sp>
       <p:sp>
         <p:nvSpPr>
@@ -10796,37 +13398,34 @@
         </p:nvSpPr>
         <p:spPr>
           <a:xfrm>
-            <a:off x="8229600" y="3054096"/>
-            <a:ext cx="2615184" cy="438912"/>
-          </a:xfrm>
-          <a:prstGeom prst="rect">
-            <a:avLst/>
-          </a:prstGeom>
-          <a:noFill/>
-          <a:ln/>
-        </p:spPr>
-        <p:txBody>
-          <a:bodyPr wrap="square" lIns="0" tIns="0" rIns="0" bIns="0" rtlCol="0" anchor="ctr"/>
-          <a:lstStyle/>
-          <a:p>
-            <a:pPr indent="0" marL="0">
-              <a:lnSpc>
-                <a:spcPts val="1240"/>
-              </a:lnSpc>
-              <a:buNone/>
-            </a:pPr>
-            <a:r>
-              <a:rPr lang="en-US" sz="930" b="1" i="1" dirty="0">
-                <a:solidFill>
-                  <a:srgbClr val="17795E"/>
-                </a:solidFill>
-                <a:latin typeface="Calibri" pitchFamily="34" charset="0"/>
-                <a:ea typeface="Calibri" pitchFamily="34" charset="-122"/>
-                <a:cs typeface="Calibri" pitchFamily="34" charset="-120"/>
-              </a:rPr>
-              <a:t>Nobody works without the paperwork that makes it legal.</a:t>
-            </a:r>
-            <a:endParaRPr lang="en-US" sz="930" dirty="0"/>
+            <a:off x="6355080" y="2999232"/>
+            <a:ext cx="1325880" cy="201168"/>
+          </a:xfrm>
+          <a:prstGeom prst="rect">
+            <a:avLst/>
+          </a:prstGeom>
+          <a:noFill/>
+          <a:ln/>
+        </p:spPr>
+        <p:txBody>
+          <a:bodyPr wrap="square" lIns="0" tIns="0" rIns="0" bIns="0" rtlCol="0" anchor="ctr"/>
+          <a:lstStyle/>
+          <a:p>
+            <a:pPr algn="ctr" indent="0" marL="0">
+              <a:buNone/>
+            </a:pPr>
+            <a:r>
+              <a:rPr lang="en-US" sz="780" b="1" dirty="0">
+                <a:solidFill>
+                  <a:srgbClr val="FFFFFF"/>
+                </a:solidFill>
+                <a:latin typeface="Calibri" pitchFamily="34" charset="0"/>
+                <a:ea typeface="Calibri" pitchFamily="34" charset="-122"/>
+                <a:cs typeface="Calibri" pitchFamily="34" charset="-120"/>
+              </a:rPr>
+              <a:t>Connector ready</a:t>
+            </a:r>
+            <a:endParaRPr lang="en-US" sz="780" dirty="0"/>
           </a:p>
         </p:txBody>
       </p:sp>
@@ -10838,18 +13437,18 @@
         </p:nvSpPr>
         <p:spPr>
           <a:xfrm>
-            <a:off x="548640" y="3584448"/>
-            <a:ext cx="10424160" cy="548640"/>
+            <a:off x="9025128" y="1773936"/>
+            <a:ext cx="2670048" cy="1463040"/>
           </a:xfrm>
           <a:prstGeom prst="roundRect">
             <a:avLst>
-              <a:gd name="adj" fmla="val 10000"/>
+              <a:gd name="adj" fmla="val 5000"/>
             </a:avLst>
           </a:prstGeom>
           <a:solidFill>
-            <a:srgbClr val="FFFFFF"/>
+            <a:srgbClr val="F4F6F7"/>
           </a:solidFill>
-          <a:ln w="7620">
+          <a:ln w="9525">
             <a:solidFill>
               <a:srgbClr val="E3E7EA"/>
             </a:solidFill>
@@ -10859,89 +13458,30 @@
       </p:sp>
       <p:sp>
         <p:nvSpPr>
-          <p:cNvPr id="27" name="Shape 25"/>
-          <p:cNvSpPr/>
-          <p:nvPr/>
-        </p:nvSpPr>
-        <p:spPr>
-          <a:xfrm>
-            <a:off x="694944" y="3685032"/>
-            <a:ext cx="347472" cy="347472"/>
-          </a:xfrm>
-          <a:prstGeom prst="ellipse">
-            <a:avLst/>
-          </a:prstGeom>
-          <a:solidFill>
-            <a:srgbClr val="12756F"/>
-          </a:solidFill>
-          <a:ln/>
-        </p:spPr>
-      </p:sp>
-      <p:sp>
-        <p:nvSpPr>
-          <p:cNvPr id="28" name="Text 26"/>
-          <p:cNvSpPr txBox="1"/>
-          <p:nvPr/>
-        </p:nvSpPr>
-        <p:spPr>
-          <a:xfrm>
-            <a:off x="694944" y="3685032"/>
-            <a:ext cx="347472" cy="347472"/>
-          </a:xfrm>
-          <a:prstGeom prst="rect">
-            <a:avLst/>
-          </a:prstGeom>
-          <a:noFill/>
-          <a:ln/>
-        </p:spPr>
-        <p:txBody>
-          <a:bodyPr wrap="square" lIns="0" tIns="0" rIns="0" bIns="0" rtlCol="0" anchor="ctr"/>
-          <a:lstStyle/>
-          <a:p>
-            <a:pPr algn="ctr" indent="0" marL="0">
-              <a:buNone/>
-            </a:pPr>
-            <a:r>
-              <a:rPr lang="en-US" sz="1050" b="1" dirty="0">
-                <a:solidFill>
-                  <a:srgbClr val="FFFFFF"/>
-                </a:solidFill>
-                <a:latin typeface="Calibri" pitchFamily="34" charset="0"/>
-                <a:ea typeface="Calibri" pitchFamily="34" charset="-122"/>
-                <a:cs typeface="Calibri" pitchFamily="34" charset="-120"/>
-              </a:rPr>
-              <a:t>BP</a:t>
-            </a:r>
-            <a:endParaRPr lang="en-US" sz="1050" dirty="0"/>
-          </a:p>
-        </p:txBody>
-      </p:sp>
-      <p:sp>
-        <p:nvSpPr>
-          <p:cNvPr id="29" name="Text 27"/>
-          <p:cNvSpPr txBox="1"/>
-          <p:nvPr/>
-        </p:nvSpPr>
-        <p:spPr>
-          <a:xfrm>
-            <a:off x="1152144" y="3639312"/>
-            <a:ext cx="1965960" cy="219456"/>
-          </a:xfrm>
-          <a:prstGeom prst="rect">
-            <a:avLst/>
-          </a:prstGeom>
-          <a:noFill/>
-          <a:ln/>
-        </p:spPr>
-        <p:txBody>
-          <a:bodyPr wrap="square" lIns="0" tIns="0" rIns="0" bIns="0" rtlCol="0" anchor="ctr"/>
-          <a:lstStyle/>
-          <a:p>
-            <a:pPr indent="0" marL="0">
-              <a:buNone/>
-            </a:pPr>
-            <a:r>
-              <a:rPr lang="en-US" sz="1100" b="1" dirty="0">
+          <p:cNvPr id="27" name="Text 25"/>
+          <p:cNvSpPr txBox="1"/>
+          <p:nvPr/>
+        </p:nvSpPr>
+        <p:spPr>
+          <a:xfrm>
+            <a:off x="9180576" y="1883664"/>
+            <a:ext cx="1115568" cy="256032"/>
+          </a:xfrm>
+          <a:prstGeom prst="rect">
+            <a:avLst/>
+          </a:prstGeom>
+          <a:noFill/>
+          <a:ln/>
+        </p:spPr>
+        <p:txBody>
+          <a:bodyPr wrap="square" lIns="0" tIns="0" rIns="0" bIns="0" rtlCol="0" anchor="ctr"/>
+          <a:lstStyle/>
+          <a:p>
+            <a:pPr indent="0" marL="0">
+              <a:buNone/>
+            </a:pPr>
+            <a:r>
+              <a:rPr lang="en-US" sz="1500" b="1" dirty="0">
                 <a:solidFill>
                   <a:srgbClr val="0C1E33"/>
                 </a:solidFill>
@@ -10949,9 +13489,90 @@
                 <a:ea typeface="Arial" pitchFamily="34" charset="-122"/>
                 <a:cs typeface="Arial" pitchFamily="34" charset="-120"/>
               </a:rPr>
-              <a:t>HR Business Partner</a:t>
-            </a:r>
-            <a:endParaRPr lang="en-US" sz="1100" dirty="0"/>
+              <a:t>Enjaz</a:t>
+            </a:r>
+            <a:endParaRPr lang="en-US" sz="1500" dirty="0"/>
+          </a:p>
+        </p:txBody>
+      </p:sp>
+      <p:sp>
+        <p:nvSpPr>
+          <p:cNvPr id="28" name="Text 26"/>
+          <p:cNvSpPr txBox="1"/>
+          <p:nvPr/>
+        </p:nvSpPr>
+        <p:spPr>
+          <a:xfrm>
+            <a:off x="10351008" y="1892808"/>
+            <a:ext cx="1188720" cy="310896"/>
+          </a:xfrm>
+          <a:prstGeom prst="rect">
+            <a:avLst/>
+          </a:prstGeom>
+          <a:noFill/>
+          <a:ln/>
+        </p:spPr>
+        <p:txBody>
+          <a:bodyPr wrap="square" lIns="0" tIns="0" rIns="0" bIns="0" rtlCol="0" anchor="ctr"/>
+          <a:lstStyle/>
+          <a:p>
+            <a:pPr algn="r" indent="0" marL="0">
+              <a:lnSpc>
+                <a:spcPts val="1000"/>
+              </a:lnSpc>
+              <a:buNone/>
+            </a:pPr>
+            <a:r>
+              <a:rPr lang="en-US" sz="800" dirty="0">
+                <a:solidFill>
+                  <a:srgbClr val="5A6C82"/>
+                </a:solidFill>
+                <a:latin typeface="Calibri" pitchFamily="34" charset="0"/>
+                <a:ea typeface="Calibri" pitchFamily="34" charset="-122"/>
+                <a:cs typeface="Calibri" pitchFamily="34" charset="-120"/>
+              </a:rPr>
+              <a:t>MoFA</a:t>
+            </a:r>
+            <a:endParaRPr lang="en-US" sz="800" dirty="0"/>
+          </a:p>
+        </p:txBody>
+      </p:sp>
+      <p:sp>
+        <p:nvSpPr>
+          <p:cNvPr id="29" name="Text 27"/>
+          <p:cNvSpPr txBox="1"/>
+          <p:nvPr/>
+        </p:nvSpPr>
+        <p:spPr>
+          <a:xfrm>
+            <a:off x="9180576" y="2157984"/>
+            <a:ext cx="2359152" cy="219456"/>
+          </a:xfrm>
+          <a:prstGeom prst="rect">
+            <a:avLst/>
+          </a:prstGeom>
+          <a:noFill/>
+          <a:ln/>
+        </p:spPr>
+        <p:txBody>
+          <a:bodyPr wrap="square" lIns="0" tIns="0" rIns="0" bIns="0" rtlCol="0" anchor="ctr"/>
+          <a:lstStyle/>
+          <a:p>
+            <a:pPr indent="0" marL="0">
+              <a:buNone/>
+            </a:pPr>
+            <a:r>
+              <a:rPr lang="en-US" sz="1150" b="1" dirty="0">
+                <a:solidFill>
+                  <a:srgbClr val="12756F"/>
+                </a:solidFill>
+                <a:latin typeface="Arial" pitchFamily="34" charset="0"/>
+                <a:ea typeface="Arial" pitchFamily="34" charset="-122"/>
+                <a:cs typeface="Arial" pitchFamily="34" charset="-120"/>
+              </a:rPr>
+              <a:t>The visa, stamped abroad</a:t>
+            </a:r>
+            <a:endParaRPr lang="en-US" sz="1150" dirty="0"/>
           </a:p>
         </p:txBody>
       </p:sp>
@@ -10963,47 +13584,8 @@
         </p:nvSpPr>
         <p:spPr>
           <a:xfrm>
-            <a:off x="1152144" y="3858768"/>
-            <a:ext cx="1965960" cy="182880"/>
-          </a:xfrm>
-          <a:prstGeom prst="rect">
-            <a:avLst/>
-          </a:prstGeom>
-          <a:noFill/>
-          <a:ln/>
-        </p:spPr>
-        <p:txBody>
-          <a:bodyPr wrap="square" lIns="0" tIns="0" rIns="0" bIns="0" rtlCol="0" anchor="ctr"/>
-          <a:lstStyle/>
-          <a:p>
-            <a:pPr indent="0" marL="0">
-              <a:buNone/>
-            </a:pPr>
-            <a:r>
-              <a:rPr lang="en-US" sz="900" dirty="0">
-                <a:solidFill>
-                  <a:srgbClr val="12756F"/>
-                </a:solidFill>
-                <a:latin typeface="Calibri" pitchFamily="34" charset="0"/>
-                <a:ea typeface="Calibri" pitchFamily="34" charset="-122"/>
-                <a:cs typeface="Calibri" pitchFamily="34" charset="-120"/>
-              </a:rPr>
-              <a:t>Employee relations</a:t>
-            </a:r>
-            <a:endParaRPr lang="en-US" sz="900" dirty="0"/>
-          </a:p>
-        </p:txBody>
-      </p:sp>
-      <p:sp>
-        <p:nvSpPr>
-          <p:cNvPr id="31" name="Text 29"/>
-          <p:cNvSpPr txBox="1"/>
-          <p:nvPr/>
-        </p:nvSpPr>
-        <p:spPr>
-          <a:xfrm>
-            <a:off x="3246120" y="3639312"/>
-            <a:ext cx="4846320" cy="438912"/>
+            <a:off x="9180576" y="2395728"/>
+            <a:ext cx="2359152" cy="566928"/>
           </a:xfrm>
           <a:prstGeom prst="rect">
             <a:avLst/>
@@ -11022,7 +13604,7 @@
               <a:buNone/>
             </a:pPr>
             <a:r>
-              <a:rPr lang="en-US" sz="930" dirty="0">
+              <a:rPr lang="en-US" sz="920" dirty="0">
                 <a:solidFill>
                   <a:srgbClr val="5A6C82"/>
                 </a:solidFill>
@@ -11030,11 +13612,33 @@
                 <a:ea typeface="Calibri" pitchFamily="34" charset="-122"/>
                 <a:cs typeface="Calibri" pitchFamily="34" charset="-120"/>
               </a:rPr>
-              <a:t>Approves exit re-entry against dues and notice; reviews the Nitaqat impact of a resignation before it is actioned; starts final exit once settlement is agreed.</a:t>
-            </a:r>
-            <a:endParaRPr lang="en-US" sz="930" dirty="0"/>
-          </a:p>
-        </p:txBody>
+              <a:t>Application and embassy stamping, tracked to the entry window</a:t>
+            </a:r>
+            <a:endParaRPr lang="en-US" sz="920" dirty="0"/>
+          </a:p>
+        </p:txBody>
+      </p:sp>
+      <p:sp>
+        <p:nvSpPr>
+          <p:cNvPr id="31" name="Shape 29"/>
+          <p:cNvSpPr/>
+          <p:nvPr/>
+        </p:nvSpPr>
+        <p:spPr>
+          <a:xfrm>
+            <a:off x="9180576" y="2999232"/>
+            <a:ext cx="1325880" cy="201168"/>
+          </a:xfrm>
+          <a:prstGeom prst="roundRect">
+            <a:avLst>
+              <a:gd name="adj" fmla="val 50000"/>
+            </a:avLst>
+          </a:prstGeom>
+          <a:solidFill>
+            <a:srgbClr val="B5730F"/>
+          </a:solidFill>
+          <a:ln/>
+        </p:spPr>
       </p:sp>
       <p:sp>
         <p:nvSpPr>
@@ -11044,37 +13648,34 @@
         </p:nvSpPr>
         <p:spPr>
           <a:xfrm>
-            <a:off x="8229600" y="3639312"/>
-            <a:ext cx="2615184" cy="438912"/>
-          </a:xfrm>
-          <a:prstGeom prst="rect">
-            <a:avLst/>
-          </a:prstGeom>
-          <a:noFill/>
-          <a:ln/>
-        </p:spPr>
-        <p:txBody>
-          <a:bodyPr wrap="square" lIns="0" tIns="0" rIns="0" bIns="0" rtlCol="0" anchor="ctr"/>
-          <a:lstStyle/>
-          <a:p>
-            <a:pPr indent="0" marL="0">
-              <a:lnSpc>
-                <a:spcPts val="1240"/>
-              </a:lnSpc>
-              <a:buNone/>
-            </a:pPr>
-            <a:r>
-              <a:rPr lang="en-US" sz="930" b="1" i="1" dirty="0">
-                <a:solidFill>
-                  <a:srgbClr val="17795E"/>
-                </a:solidFill>
-                <a:latin typeface="Calibri" pitchFamily="34" charset="0"/>
-                <a:ea typeface="Calibri" pitchFamily="34" charset="-122"/>
-                <a:cs typeface="Calibri" pitchFamily="34" charset="-120"/>
-              </a:rPr>
-              <a:t>Told before a resignation moves the band, not after.</a:t>
-            </a:r>
-            <a:endParaRPr lang="en-US" sz="930" dirty="0"/>
+            <a:off x="9180576" y="2999232"/>
+            <a:ext cx="1325880" cy="201168"/>
+          </a:xfrm>
+          <a:prstGeom prst="rect">
+            <a:avLst/>
+          </a:prstGeom>
+          <a:noFill/>
+          <a:ln/>
+        </p:spPr>
+        <p:txBody>
+          <a:bodyPr wrap="square" lIns="0" tIns="0" rIns="0" bIns="0" rtlCol="0" anchor="ctr"/>
+          <a:lstStyle/>
+          <a:p>
+            <a:pPr algn="ctr" indent="0" marL="0">
+              <a:buNone/>
+            </a:pPr>
+            <a:r>
+              <a:rPr lang="en-US" sz="780" b="1" dirty="0">
+                <a:solidFill>
+                  <a:srgbClr val="FFFFFF"/>
+                </a:solidFill>
+                <a:latin typeface="Calibri" pitchFamily="34" charset="0"/>
+                <a:ea typeface="Calibri" pitchFamily="34" charset="-122"/>
+                <a:cs typeface="Calibri" pitchFamily="34" charset="-120"/>
+              </a:rPr>
+              <a:t>Connector ready</a:t>
+            </a:r>
+            <a:endParaRPr lang="en-US" sz="780" dirty="0"/>
           </a:p>
         </p:txBody>
       </p:sp>
@@ -11086,18 +13687,18 @@
         </p:nvSpPr>
         <p:spPr>
           <a:xfrm>
-            <a:off x="548640" y="4169664"/>
-            <a:ext cx="10424160" cy="548640"/>
+            <a:off x="548640" y="3401568"/>
+            <a:ext cx="2670048" cy="1463040"/>
           </a:xfrm>
           <a:prstGeom prst="roundRect">
             <a:avLst>
-              <a:gd name="adj" fmla="val 10000"/>
+              <a:gd name="adj" fmla="val 5000"/>
             </a:avLst>
           </a:prstGeom>
           <a:solidFill>
             <a:srgbClr val="F4F6F7"/>
           </a:solidFill>
-          <a:ln w="7620">
+          <a:ln w="9525">
             <a:solidFill>
               <a:srgbClr val="E3E7EA"/>
             </a:solidFill>
@@ -11107,89 +13708,30 @@
       </p:sp>
       <p:sp>
         <p:nvSpPr>
-          <p:cNvPr id="34" name="Shape 32"/>
-          <p:cNvSpPr/>
-          <p:nvPr/>
-        </p:nvSpPr>
-        <p:spPr>
-          <a:xfrm>
-            <a:off x="694944" y="4270248"/>
-            <a:ext cx="347472" cy="347472"/>
-          </a:xfrm>
-          <a:prstGeom prst="ellipse">
-            <a:avLst/>
-          </a:prstGeom>
-          <a:solidFill>
-            <a:srgbClr val="20A098"/>
-          </a:solidFill>
-          <a:ln/>
-        </p:spPr>
-      </p:sp>
-      <p:sp>
-        <p:nvSpPr>
-          <p:cNvPr id="35" name="Text 33"/>
-          <p:cNvSpPr txBox="1"/>
-          <p:nvPr/>
-        </p:nvSpPr>
-        <p:spPr>
-          <a:xfrm>
-            <a:off x="694944" y="4270248"/>
-            <a:ext cx="347472" cy="347472"/>
-          </a:xfrm>
-          <a:prstGeom prst="rect">
-            <a:avLst/>
-          </a:prstGeom>
-          <a:noFill/>
-          <a:ln/>
-        </p:spPr>
-        <p:txBody>
-          <a:bodyPr wrap="square" lIns="0" tIns="0" rIns="0" bIns="0" rtlCol="0" anchor="ctr"/>
-          <a:lstStyle/>
-          <a:p>
-            <a:pPr algn="ctr" indent="0" marL="0">
-              <a:buNone/>
-            </a:pPr>
-            <a:r>
-              <a:rPr lang="en-US" sz="1050" b="1" dirty="0">
-                <a:solidFill>
-                  <a:srgbClr val="FFFFFF"/>
-                </a:solidFill>
-                <a:latin typeface="Calibri" pitchFamily="34" charset="0"/>
-                <a:ea typeface="Calibri" pitchFamily="34" charset="-122"/>
-                <a:cs typeface="Calibri" pitchFamily="34" charset="-120"/>
-              </a:rPr>
-              <a:t>EM</a:t>
-            </a:r>
-            <a:endParaRPr lang="en-US" sz="1050" dirty="0"/>
-          </a:p>
-        </p:txBody>
-      </p:sp>
-      <p:sp>
-        <p:nvSpPr>
-          <p:cNvPr id="36" name="Text 34"/>
-          <p:cNvSpPr txBox="1"/>
-          <p:nvPr/>
-        </p:nvSpPr>
-        <p:spPr>
-          <a:xfrm>
-            <a:off x="1152144" y="4224528"/>
-            <a:ext cx="1965960" cy="219456"/>
-          </a:xfrm>
-          <a:prstGeom prst="rect">
-            <a:avLst/>
-          </a:prstGeom>
-          <a:noFill/>
-          <a:ln/>
-        </p:spPr>
-        <p:txBody>
-          <a:bodyPr wrap="square" lIns="0" tIns="0" rIns="0" bIns="0" rtlCol="0" anchor="ctr"/>
-          <a:lstStyle/>
-          <a:p>
-            <a:pPr indent="0" marL="0">
-              <a:buNone/>
-            </a:pPr>
-            <a:r>
-              <a:rPr lang="en-US" sz="1100" b="1" dirty="0">
+          <p:cNvPr id="34" name="Text 32"/>
+          <p:cNvSpPr txBox="1"/>
+          <p:nvPr/>
+        </p:nvSpPr>
+        <p:spPr>
+          <a:xfrm>
+            <a:off x="704088" y="3511296"/>
+            <a:ext cx="1115568" cy="256032"/>
+          </a:xfrm>
+          <a:prstGeom prst="rect">
+            <a:avLst/>
+          </a:prstGeom>
+          <a:noFill/>
+          <a:ln/>
+        </p:spPr>
+        <p:txBody>
+          <a:bodyPr wrap="square" lIns="0" tIns="0" rIns="0" bIns="0" rtlCol="0" anchor="ctr"/>
+          <a:lstStyle/>
+          <a:p>
+            <a:pPr indent="0" marL="0">
+              <a:buNone/>
+            </a:pPr>
+            <a:r>
+              <a:rPr lang="en-US" sz="1500" b="1" dirty="0">
                 <a:solidFill>
                   <a:srgbClr val="0C1E33"/>
                 </a:solidFill>
@@ -11197,9 +13739,90 @@
                 <a:ea typeface="Arial" pitchFamily="34" charset="-122"/>
                 <a:cs typeface="Arial" pitchFamily="34" charset="-120"/>
               </a:rPr>
-              <a:t>Employee</a:t>
-            </a:r>
-            <a:endParaRPr lang="en-US" sz="1100" dirty="0"/>
+              <a:t>GOSI</a:t>
+            </a:r>
+            <a:endParaRPr lang="en-US" sz="1500" dirty="0"/>
+          </a:p>
+        </p:txBody>
+      </p:sp>
+      <p:sp>
+        <p:nvSpPr>
+          <p:cNvPr id="35" name="Text 33"/>
+          <p:cNvSpPr txBox="1"/>
+          <p:nvPr/>
+        </p:nvSpPr>
+        <p:spPr>
+          <a:xfrm>
+            <a:off x="1874520" y="3520440"/>
+            <a:ext cx="1188720" cy="310896"/>
+          </a:xfrm>
+          <a:prstGeom prst="rect">
+            <a:avLst/>
+          </a:prstGeom>
+          <a:noFill/>
+          <a:ln/>
+        </p:spPr>
+        <p:txBody>
+          <a:bodyPr wrap="square" lIns="0" tIns="0" rIns="0" bIns="0" rtlCol="0" anchor="ctr"/>
+          <a:lstStyle/>
+          <a:p>
+            <a:pPr algn="r" indent="0" marL="0">
+              <a:lnSpc>
+                <a:spcPts val="1000"/>
+              </a:lnSpc>
+              <a:buNone/>
+            </a:pPr>
+            <a:r>
+              <a:rPr lang="en-US" sz="800" dirty="0">
+                <a:solidFill>
+                  <a:srgbClr val="5A6C82"/>
+                </a:solidFill>
+                <a:latin typeface="Calibri" pitchFamily="34" charset="0"/>
+                <a:ea typeface="Calibri" pitchFamily="34" charset="-122"/>
+                <a:cs typeface="Calibri" pitchFamily="34" charset="-120"/>
+              </a:rPr>
+              <a:t>Social Insurance</a:t>
+            </a:r>
+            <a:endParaRPr lang="en-US" sz="800" dirty="0"/>
+          </a:p>
+        </p:txBody>
+      </p:sp>
+      <p:sp>
+        <p:nvSpPr>
+          <p:cNvPr id="36" name="Text 34"/>
+          <p:cNvSpPr txBox="1"/>
+          <p:nvPr/>
+        </p:nvSpPr>
+        <p:spPr>
+          <a:xfrm>
+            <a:off x="704088" y="3785616"/>
+            <a:ext cx="2359152" cy="219456"/>
+          </a:xfrm>
+          <a:prstGeom prst="rect">
+            <a:avLst/>
+          </a:prstGeom>
+          <a:noFill/>
+          <a:ln/>
+        </p:spPr>
+        <p:txBody>
+          <a:bodyPr wrap="square" lIns="0" tIns="0" rIns="0" bIns="0" rtlCol="0" anchor="ctr"/>
+          <a:lstStyle/>
+          <a:p>
+            <a:pPr indent="0" marL="0">
+              <a:buNone/>
+            </a:pPr>
+            <a:r>
+              <a:rPr lang="en-US" sz="1150" b="1" dirty="0">
+                <a:solidFill>
+                  <a:srgbClr val="12756F"/>
+                </a:solidFill>
+                <a:latin typeface="Arial" pitchFamily="34" charset="0"/>
+                <a:ea typeface="Arial" pitchFamily="34" charset="-122"/>
+                <a:cs typeface="Arial" pitchFamily="34" charset="-120"/>
+              </a:rPr>
+              <a:t>Who counts as Saudi</a:t>
+            </a:r>
+            <a:endParaRPr lang="en-US" sz="1150" dirty="0"/>
           </a:p>
         </p:txBody>
       </p:sp>
@@ -11211,47 +13834,8 @@
         </p:nvSpPr>
         <p:spPr>
           <a:xfrm>
-            <a:off x="1152144" y="4443984"/>
-            <a:ext cx="1965960" cy="182880"/>
-          </a:xfrm>
-          <a:prstGeom prst="rect">
-            <a:avLst/>
-          </a:prstGeom>
-          <a:noFill/>
-          <a:ln/>
-        </p:spPr>
-        <p:txBody>
-          <a:bodyPr wrap="square" lIns="0" tIns="0" rIns="0" bIns="0" rtlCol="0" anchor="ctr"/>
-          <a:lstStyle/>
-          <a:p>
-            <a:pPr indent="0" marL="0">
-              <a:buNone/>
-            </a:pPr>
-            <a:r>
-              <a:rPr lang="en-US" sz="900" dirty="0">
-                <a:solidFill>
-                  <a:srgbClr val="12756F"/>
-                </a:solidFill>
-                <a:latin typeface="Calibri" pitchFamily="34" charset="0"/>
-                <a:ea typeface="Calibri" pitchFamily="34" charset="-122"/>
-                <a:cs typeface="Calibri" pitchFamily="34" charset="-120"/>
-              </a:rPr>
-              <a:t>Self-service</a:t>
-            </a:r>
-            <a:endParaRPr lang="en-US" sz="900" dirty="0"/>
-          </a:p>
-        </p:txBody>
-      </p:sp>
-      <p:sp>
-        <p:nvSpPr>
-          <p:cNvPr id="38" name="Text 36"/>
-          <p:cNvSpPr txBox="1"/>
-          <p:nvPr/>
-        </p:nvSpPr>
-        <p:spPr>
-          <a:xfrm>
-            <a:off x="3246120" y="4224528"/>
-            <a:ext cx="4846320" cy="438912"/>
+            <a:off x="704088" y="4023360"/>
+            <a:ext cx="2359152" cy="566928"/>
           </a:xfrm>
           <a:prstGeom prst="rect">
             <a:avLst/>
@@ -11270,7 +13854,7 @@
               <a:buNone/>
             </a:pPr>
             <a:r>
-              <a:rPr lang="en-US" sz="930" dirty="0">
+              <a:rPr lang="en-US" sz="920" dirty="0">
                 <a:solidFill>
                   <a:srgbClr val="5A6C82"/>
                 </a:solidFill>
@@ -11278,11 +13862,33 @@
                 <a:ea typeface="Calibri" pitchFamily="34" charset="-122"/>
                 <a:cs typeface="Calibri" pitchFamily="34" charset="-120"/>
               </a:rPr>
-              <a:t>Requests exit re-entry with travel dates; confirms medical and biometrics; signs the Qiwa contract; confirms receipt of the renewed Iqama.</a:t>
-            </a:r>
-            <a:endParaRPr lang="en-US" sz="930" dirty="0"/>
-          </a:p>
-        </p:txBody>
+              <a:t>Registration and contributory wage. Feeds the Nitaqat headcount</a:t>
+            </a:r>
+            <a:endParaRPr lang="en-US" sz="920" dirty="0"/>
+          </a:p>
+        </p:txBody>
+      </p:sp>
+      <p:sp>
+        <p:nvSpPr>
+          <p:cNvPr id="38" name="Shape 36"/>
+          <p:cNvSpPr/>
+          <p:nvPr/>
+        </p:nvSpPr>
+        <p:spPr>
+          <a:xfrm>
+            <a:off x="704088" y="4626864"/>
+            <a:ext cx="1325880" cy="201168"/>
+          </a:xfrm>
+          <a:prstGeom prst="roundRect">
+            <a:avLst>
+              <a:gd name="adj" fmla="val 50000"/>
+            </a:avLst>
+          </a:prstGeom>
+          <a:solidFill>
+            <a:srgbClr val="17795E"/>
+          </a:solidFill>
+          <a:ln/>
+        </p:spPr>
       </p:sp>
       <p:sp>
         <p:nvSpPr>
@@ -11292,37 +13898,34 @@
         </p:nvSpPr>
         <p:spPr>
           <a:xfrm>
-            <a:off x="8229600" y="4224528"/>
-            <a:ext cx="2615184" cy="438912"/>
-          </a:xfrm>
-          <a:prstGeom prst="rect">
-            <a:avLst/>
-          </a:prstGeom>
-          <a:noFill/>
-          <a:ln/>
-        </p:spPr>
-        <p:txBody>
-          <a:bodyPr wrap="square" lIns="0" tIns="0" rIns="0" bIns="0" rtlCol="0" anchor="ctr"/>
-          <a:lstStyle/>
-          <a:p>
-            <a:pPr indent="0" marL="0">
-              <a:lnSpc>
-                <a:spcPts val="1240"/>
-              </a:lnSpc>
-              <a:buNone/>
-            </a:pPr>
-            <a:r>
-              <a:rPr lang="en-US" sz="930" b="1" i="1" dirty="0">
-                <a:solidFill>
-                  <a:srgbClr val="17795E"/>
-                </a:solidFill>
-                <a:latin typeface="Calibri" pitchFamily="34" charset="0"/>
-                <a:ea typeface="Calibri" pitchFamily="34" charset="-122"/>
-                <a:cs typeface="Calibri" pitchFamily="34" charset="-120"/>
-              </a:rPr>
-              <a:t>Sees their own Iqama expiry and their return-by date.</a:t>
-            </a:r>
-            <a:endParaRPr lang="en-US" sz="930" dirty="0"/>
+            <a:off x="704088" y="4626864"/>
+            <a:ext cx="1325880" cy="201168"/>
+          </a:xfrm>
+          <a:prstGeom prst="rect">
+            <a:avLst/>
+          </a:prstGeom>
+          <a:noFill/>
+          <a:ln/>
+        </p:spPr>
+        <p:txBody>
+          <a:bodyPr wrap="square" lIns="0" tIns="0" rIns="0" bIns="0" rtlCol="0" anchor="ctr"/>
+          <a:lstStyle/>
+          <a:p>
+            <a:pPr algn="ctr" indent="0" marL="0">
+              <a:buNone/>
+            </a:pPr>
+            <a:r>
+              <a:rPr lang="en-US" sz="780" b="1" dirty="0">
+                <a:solidFill>
+                  <a:srgbClr val="FFFFFF"/>
+                </a:solidFill>
+                <a:latin typeface="Calibri" pitchFamily="34" charset="0"/>
+                <a:ea typeface="Calibri" pitchFamily="34" charset="-122"/>
+                <a:cs typeface="Calibri" pitchFamily="34" charset="-120"/>
+              </a:rPr>
+              <a:t>Live lookup</a:t>
+            </a:r>
+            <a:endParaRPr lang="en-US" sz="780" dirty="0"/>
           </a:p>
         </p:txBody>
       </p:sp>
@@ -11334,18 +13937,18 @@
         </p:nvSpPr>
         <p:spPr>
           <a:xfrm>
-            <a:off x="548640" y="4754880"/>
-            <a:ext cx="10424160" cy="548640"/>
+            <a:off x="3374136" y="3401568"/>
+            <a:ext cx="2670048" cy="1463040"/>
           </a:xfrm>
           <a:prstGeom prst="roundRect">
             <a:avLst>
-              <a:gd name="adj" fmla="val 10000"/>
+              <a:gd name="adj" fmla="val 5000"/>
             </a:avLst>
           </a:prstGeom>
           <a:solidFill>
-            <a:srgbClr val="FFFFFF"/>
+            <a:srgbClr val="F4F6F7"/>
           </a:solidFill>
-          <a:ln w="7620">
+          <a:ln w="9525">
             <a:solidFill>
               <a:srgbClr val="E3E7EA"/>
             </a:solidFill>
@@ -11355,89 +13958,30 @@
       </p:sp>
       <p:sp>
         <p:nvSpPr>
-          <p:cNvPr id="41" name="Shape 39"/>
-          <p:cNvSpPr/>
-          <p:nvPr/>
-        </p:nvSpPr>
-        <p:spPr>
-          <a:xfrm>
-            <a:off x="694944" y="4855464"/>
-            <a:ext cx="347472" cy="347472"/>
-          </a:xfrm>
-          <a:prstGeom prst="ellipse">
-            <a:avLst/>
-          </a:prstGeom>
-          <a:solidFill>
-            <a:srgbClr val="12756F"/>
-          </a:solidFill>
-          <a:ln/>
-        </p:spPr>
-      </p:sp>
-      <p:sp>
-        <p:nvSpPr>
-          <p:cNvPr id="42" name="Text 40"/>
-          <p:cNvSpPr txBox="1"/>
-          <p:nvPr/>
-        </p:nvSpPr>
-        <p:spPr>
-          <a:xfrm>
-            <a:off x="694944" y="4855464"/>
-            <a:ext cx="347472" cy="347472"/>
-          </a:xfrm>
-          <a:prstGeom prst="rect">
-            <a:avLst/>
-          </a:prstGeom>
-          <a:noFill/>
-          <a:ln/>
-        </p:spPr>
-        <p:txBody>
-          <a:bodyPr wrap="square" lIns="0" tIns="0" rIns="0" bIns="0" rtlCol="0" anchor="ctr"/>
-          <a:lstStyle/>
-          <a:p>
-            <a:pPr algn="ctr" indent="0" marL="0">
-              <a:buNone/>
-            </a:pPr>
-            <a:r>
-              <a:rPr lang="en-US" sz="1050" b="1" dirty="0">
-                <a:solidFill>
-                  <a:srgbClr val="FFFFFF"/>
-                </a:solidFill>
-                <a:latin typeface="Calibri" pitchFamily="34" charset="0"/>
-                <a:ea typeface="Calibri" pitchFamily="34" charset="-122"/>
-                <a:cs typeface="Calibri" pitchFamily="34" charset="-120"/>
-              </a:rPr>
-              <a:t>FI</a:t>
-            </a:r>
-            <a:endParaRPr lang="en-US" sz="1050" dirty="0"/>
-          </a:p>
-        </p:txBody>
-      </p:sp>
-      <p:sp>
-        <p:nvSpPr>
-          <p:cNvPr id="43" name="Text 41"/>
-          <p:cNvSpPr txBox="1"/>
-          <p:nvPr/>
-        </p:nvSpPr>
-        <p:spPr>
-          <a:xfrm>
-            <a:off x="1152144" y="4809744"/>
-            <a:ext cx="1965960" cy="219456"/>
-          </a:xfrm>
-          <a:prstGeom prst="rect">
-            <a:avLst/>
-          </a:prstGeom>
-          <a:noFill/>
-          <a:ln/>
-        </p:spPr>
-        <p:txBody>
-          <a:bodyPr wrap="square" lIns="0" tIns="0" rIns="0" bIns="0" rtlCol="0" anchor="ctr"/>
-          <a:lstStyle/>
-          <a:p>
-            <a:pPr indent="0" marL="0">
-              <a:buNone/>
-            </a:pPr>
-            <a:r>
-              <a:rPr lang="en-US" sz="1100" b="1" dirty="0">
+          <p:cNvPr id="41" name="Text 39"/>
+          <p:cNvSpPr txBox="1"/>
+          <p:nvPr/>
+        </p:nvSpPr>
+        <p:spPr>
+          <a:xfrm>
+            <a:off x="3529584" y="3511296"/>
+            <a:ext cx="1115568" cy="256032"/>
+          </a:xfrm>
+          <a:prstGeom prst="rect">
+            <a:avLst/>
+          </a:prstGeom>
+          <a:noFill/>
+          <a:ln/>
+        </p:spPr>
+        <p:txBody>
+          <a:bodyPr wrap="square" lIns="0" tIns="0" rIns="0" bIns="0" rtlCol="0" anchor="ctr"/>
+          <a:lstStyle/>
+          <a:p>
+            <a:pPr indent="0" marL="0">
+              <a:buNone/>
+            </a:pPr>
+            <a:r>
+              <a:rPr lang="en-US" sz="1500" b="1" dirty="0">
                 <a:solidFill>
                   <a:srgbClr val="0C1E33"/>
                 </a:solidFill>
@@ -11445,9 +13989,90 @@
                 <a:ea typeface="Arial" pitchFamily="34" charset="-122"/>
                 <a:cs typeface="Arial" pitchFamily="34" charset="-120"/>
               </a:rPr>
-              <a:t>Finance Controller</a:t>
-            </a:r>
-            <a:endParaRPr lang="en-US" sz="1100" dirty="0"/>
+              <a:t>Mudad</a:t>
+            </a:r>
+            <a:endParaRPr lang="en-US" sz="1500" dirty="0"/>
+          </a:p>
+        </p:txBody>
+      </p:sp>
+      <p:sp>
+        <p:nvSpPr>
+          <p:cNvPr id="42" name="Text 40"/>
+          <p:cNvSpPr txBox="1"/>
+          <p:nvPr/>
+        </p:nvSpPr>
+        <p:spPr>
+          <a:xfrm>
+            <a:off x="4700016" y="3520440"/>
+            <a:ext cx="1188720" cy="310896"/>
+          </a:xfrm>
+          <a:prstGeom prst="rect">
+            <a:avLst/>
+          </a:prstGeom>
+          <a:noFill/>
+          <a:ln/>
+        </p:spPr>
+        <p:txBody>
+          <a:bodyPr wrap="square" lIns="0" tIns="0" rIns="0" bIns="0" rtlCol="0" anchor="ctr"/>
+          <a:lstStyle/>
+          <a:p>
+            <a:pPr algn="r" indent="0" marL="0">
+              <a:lnSpc>
+                <a:spcPts val="1000"/>
+              </a:lnSpc>
+              <a:buNone/>
+            </a:pPr>
+            <a:r>
+              <a:rPr lang="en-US" sz="800" dirty="0">
+                <a:solidFill>
+                  <a:srgbClr val="5A6C82"/>
+                </a:solidFill>
+                <a:latin typeface="Calibri" pitchFamily="34" charset="0"/>
+                <a:ea typeface="Calibri" pitchFamily="34" charset="-122"/>
+                <a:cs typeface="Calibri" pitchFamily="34" charset="-120"/>
+              </a:rPr>
+              <a:t>Wage protection</a:t>
+            </a:r>
+            <a:endParaRPr lang="en-US" sz="800" dirty="0"/>
+          </a:p>
+        </p:txBody>
+      </p:sp>
+      <p:sp>
+        <p:nvSpPr>
+          <p:cNvPr id="43" name="Text 41"/>
+          <p:cNvSpPr txBox="1"/>
+          <p:nvPr/>
+        </p:nvSpPr>
+        <p:spPr>
+          <a:xfrm>
+            <a:off x="3529584" y="3785616"/>
+            <a:ext cx="2359152" cy="219456"/>
+          </a:xfrm>
+          <a:prstGeom prst="rect">
+            <a:avLst/>
+          </a:prstGeom>
+          <a:noFill/>
+          <a:ln/>
+        </p:spPr>
+        <p:txBody>
+          <a:bodyPr wrap="square" lIns="0" tIns="0" rIns="0" bIns="0" rtlCol="0" anchor="ctr"/>
+          <a:lstStyle/>
+          <a:p>
+            <a:pPr indent="0" marL="0">
+              <a:buNone/>
+            </a:pPr>
+            <a:r>
+              <a:rPr lang="en-US" sz="1150" b="1" dirty="0">
+                <a:solidFill>
+                  <a:srgbClr val="12756F"/>
+                </a:solidFill>
+                <a:latin typeface="Arial" pitchFamily="34" charset="0"/>
+                <a:ea typeface="Arial" pitchFamily="34" charset="-122"/>
+                <a:cs typeface="Arial" pitchFamily="34" charset="-120"/>
+              </a:rPr>
+              <a:t>Does pay match the contract</a:t>
+            </a:r>
+            <a:endParaRPr lang="en-US" sz="1150" dirty="0"/>
           </a:p>
         </p:txBody>
       </p:sp>
@@ -11459,47 +14084,8 @@
         </p:nvSpPr>
         <p:spPr>
           <a:xfrm>
-            <a:off x="1152144" y="5029200"/>
-            <a:ext cx="1965960" cy="182880"/>
-          </a:xfrm>
-          <a:prstGeom prst="rect">
-            <a:avLst/>
-          </a:prstGeom>
-          <a:noFill/>
-          <a:ln/>
-        </p:spPr>
-        <p:txBody>
-          <a:bodyPr wrap="square" lIns="0" tIns="0" rIns="0" bIns="0" rtlCol="0" anchor="ctr"/>
-          <a:lstStyle/>
-          <a:p>
-            <a:pPr indent="0" marL="0">
-              <a:buNone/>
-            </a:pPr>
-            <a:r>
-              <a:rPr lang="en-US" sz="900" dirty="0">
-                <a:solidFill>
-                  <a:srgbClr val="12756F"/>
-                </a:solidFill>
-                <a:latin typeface="Calibri" pitchFamily="34" charset="0"/>
-                <a:ea typeface="Calibri" pitchFamily="34" charset="-122"/>
-                <a:cs typeface="Calibri" pitchFamily="34" charset="-120"/>
-              </a:rPr>
-              <a:t>Payments and GL</a:t>
-            </a:r>
-            <a:endParaRPr lang="en-US" sz="900" dirty="0"/>
-          </a:p>
-        </p:txBody>
-      </p:sp>
-      <p:sp>
-        <p:nvSpPr>
-          <p:cNvPr id="45" name="Text 43"/>
-          <p:cNvSpPr txBox="1"/>
-          <p:nvPr/>
-        </p:nvSpPr>
-        <p:spPr>
-          <a:xfrm>
-            <a:off x="3246120" y="4809744"/>
-            <a:ext cx="4846320" cy="438912"/>
+            <a:off x="3529584" y="4023360"/>
+            <a:ext cx="2359152" cy="566928"/>
           </a:xfrm>
           <a:prstGeom prst="rect">
             <a:avLst/>
@@ -11518,7 +14104,7 @@
               <a:buNone/>
             </a:pPr>
             <a:r>
-              <a:rPr lang="en-US" sz="930" dirty="0">
+              <a:rPr lang="en-US" sz="920" dirty="0">
                 <a:solidFill>
                   <a:srgbClr val="5A6C82"/>
                 </a:solidFill>
@@ -11526,11 +14112,33 @@
                 <a:ea typeface="Calibri" pitchFamily="34" charset="-122"/>
                 <a:cs typeface="Calibri" pitchFamily="34" charset="-120"/>
               </a:rPr>
-              <a:t>Reconciles SADAD payments against receipts; posts to GL; forecasts expat levy against the renewal calendar.</a:t>
-            </a:r>
-            <a:endParaRPr lang="en-US" sz="930" dirty="0"/>
-          </a:p>
-        </p:txBody>
+              <a:t>Payroll enrolment, salary checked against Qiwa</a:t>
+            </a:r>
+            <a:endParaRPr lang="en-US" sz="920" dirty="0"/>
+          </a:p>
+        </p:txBody>
+      </p:sp>
+      <p:sp>
+        <p:nvSpPr>
+          <p:cNvPr id="45" name="Shape 43"/>
+          <p:cNvSpPr/>
+          <p:nvPr/>
+        </p:nvSpPr>
+        <p:spPr>
+          <a:xfrm>
+            <a:off x="3529584" y="4626864"/>
+            <a:ext cx="1325880" cy="201168"/>
+          </a:xfrm>
+          <a:prstGeom prst="roundRect">
+            <a:avLst>
+              <a:gd name="adj" fmla="val 50000"/>
+            </a:avLst>
+          </a:prstGeom>
+          <a:solidFill>
+            <a:srgbClr val="17795E"/>
+          </a:solidFill>
+          <a:ln/>
+        </p:spPr>
       </p:sp>
       <p:sp>
         <p:nvSpPr>
@@ -11540,37 +14148,34 @@
         </p:nvSpPr>
         <p:spPr>
           <a:xfrm>
-            <a:off x="8229600" y="4809744"/>
-            <a:ext cx="2615184" cy="438912"/>
-          </a:xfrm>
-          <a:prstGeom prst="rect">
-            <a:avLst/>
-          </a:prstGeom>
-          <a:noFill/>
-          <a:ln/>
-        </p:spPr>
-        <p:txBody>
-          <a:bodyPr wrap="square" lIns="0" tIns="0" rIns="0" bIns="0" rtlCol="0" anchor="ctr"/>
-          <a:lstStyle/>
-          <a:p>
-            <a:pPr indent="0" marL="0">
-              <a:lnSpc>
-                <a:spcPts val="1240"/>
-              </a:lnSpc>
-              <a:buNone/>
-            </a:pPr>
-            <a:r>
-              <a:rPr lang="en-US" sz="930" b="1" i="1" dirty="0">
-                <a:solidFill>
-                  <a:srgbClr val="17795E"/>
-                </a:solidFill>
-                <a:latin typeface="Calibri" pitchFamily="34" charset="0"/>
-                <a:ea typeface="Calibri" pitchFamily="34" charset="-122"/>
-                <a:cs typeface="Calibri" pitchFamily="34" charset="-120"/>
-              </a:rPr>
-              <a:t>The levy stops being a surprise.</a:t>
-            </a:r>
-            <a:endParaRPr lang="en-US" sz="930" dirty="0"/>
+            <a:off x="3529584" y="4626864"/>
+            <a:ext cx="1325880" cy="201168"/>
+          </a:xfrm>
+          <a:prstGeom prst="rect">
+            <a:avLst/>
+          </a:prstGeom>
+          <a:noFill/>
+          <a:ln/>
+        </p:spPr>
+        <p:txBody>
+          <a:bodyPr wrap="square" lIns="0" tIns="0" rIns="0" bIns="0" rtlCol="0" anchor="ctr"/>
+          <a:lstStyle/>
+          <a:p>
+            <a:pPr algn="ctr" indent="0" marL="0">
+              <a:buNone/>
+            </a:pPr>
+            <a:r>
+              <a:rPr lang="en-US" sz="780" b="1" dirty="0">
+                <a:solidFill>
+                  <a:srgbClr val="FFFFFF"/>
+                </a:solidFill>
+                <a:latin typeface="Calibri" pitchFamily="34" charset="0"/>
+                <a:ea typeface="Calibri" pitchFamily="34" charset="-122"/>
+                <a:cs typeface="Calibri" pitchFamily="34" charset="-120"/>
+              </a:rPr>
+              <a:t>Live lookup</a:t>
+            </a:r>
+            <a:endParaRPr lang="en-US" sz="780" dirty="0"/>
           </a:p>
         </p:txBody>
       </p:sp>
@@ -11582,18 +14187,18 @@
         </p:nvSpPr>
         <p:spPr>
           <a:xfrm>
-            <a:off x="548640" y="5340096"/>
-            <a:ext cx="10424160" cy="548640"/>
+            <a:off x="6199632" y="3401568"/>
+            <a:ext cx="2670048" cy="1463040"/>
           </a:xfrm>
           <a:prstGeom prst="roundRect">
             <a:avLst>
-              <a:gd name="adj" fmla="val 10000"/>
+              <a:gd name="adj" fmla="val 5000"/>
             </a:avLst>
           </a:prstGeom>
           <a:solidFill>
             <a:srgbClr val="F4F6F7"/>
           </a:solidFill>
-          <a:ln w="7620">
+          <a:ln w="9525">
             <a:solidFill>
               <a:srgbClr val="E3E7EA"/>
             </a:solidFill>
@@ -11603,89 +14208,30 @@
       </p:sp>
       <p:sp>
         <p:nvSpPr>
-          <p:cNvPr id="48" name="Shape 46"/>
-          <p:cNvSpPr/>
-          <p:nvPr/>
-        </p:nvSpPr>
-        <p:spPr>
-          <a:xfrm>
-            <a:off x="694944" y="5440680"/>
-            <a:ext cx="347472" cy="347472"/>
-          </a:xfrm>
-          <a:prstGeom prst="ellipse">
-            <a:avLst/>
-          </a:prstGeom>
-          <a:solidFill>
-            <a:srgbClr val="16304C"/>
-          </a:solidFill>
-          <a:ln/>
-        </p:spPr>
-      </p:sp>
-      <p:sp>
-        <p:nvSpPr>
-          <p:cNvPr id="49" name="Text 47"/>
-          <p:cNvSpPr txBox="1"/>
-          <p:nvPr/>
-        </p:nvSpPr>
-        <p:spPr>
-          <a:xfrm>
-            <a:off x="694944" y="5440680"/>
-            <a:ext cx="347472" cy="347472"/>
-          </a:xfrm>
-          <a:prstGeom prst="rect">
-            <a:avLst/>
-          </a:prstGeom>
-          <a:noFill/>
-          <a:ln/>
-        </p:spPr>
-        <p:txBody>
-          <a:bodyPr wrap="square" lIns="0" tIns="0" rIns="0" bIns="0" rtlCol="0" anchor="ctr"/>
-          <a:lstStyle/>
-          <a:p>
-            <a:pPr algn="ctr" indent="0" marL="0">
-              <a:buNone/>
-            </a:pPr>
-            <a:r>
-              <a:rPr lang="en-US" sz="1050" b="1" dirty="0">
-                <a:solidFill>
-                  <a:srgbClr val="FFFFFF"/>
-                </a:solidFill>
-                <a:latin typeface="Calibri" pitchFamily="34" charset="0"/>
-                <a:ea typeface="Calibri" pitchFamily="34" charset="-122"/>
-                <a:cs typeface="Calibri" pitchFamily="34" charset="-120"/>
-              </a:rPr>
-              <a:t>HR</a:t>
-            </a:r>
-            <a:endParaRPr lang="en-US" sz="1050" dirty="0"/>
-          </a:p>
-        </p:txBody>
-      </p:sp>
-      <p:sp>
-        <p:nvSpPr>
-          <p:cNvPr id="50" name="Text 48"/>
-          <p:cNvSpPr txBox="1"/>
-          <p:nvPr/>
-        </p:nvSpPr>
-        <p:spPr>
-          <a:xfrm>
-            <a:off x="1152144" y="5394960"/>
-            <a:ext cx="1965960" cy="219456"/>
-          </a:xfrm>
-          <a:prstGeom prst="rect">
-            <a:avLst/>
-          </a:prstGeom>
-          <a:noFill/>
-          <a:ln/>
-        </p:spPr>
-        <p:txBody>
-          <a:bodyPr wrap="square" lIns="0" tIns="0" rIns="0" bIns="0" rtlCol="0" anchor="ctr"/>
-          <a:lstStyle/>
-          <a:p>
-            <a:pPr indent="0" marL="0">
-              <a:buNone/>
-            </a:pPr>
-            <a:r>
-              <a:rPr lang="en-US" sz="1100" b="1" dirty="0">
+          <p:cNvPr id="48" name="Text 46"/>
+          <p:cNvSpPr txBox="1"/>
+          <p:nvPr/>
+        </p:nvSpPr>
+        <p:spPr>
+          <a:xfrm>
+            <a:off x="6355080" y="3511296"/>
+            <a:ext cx="1115568" cy="256032"/>
+          </a:xfrm>
+          <a:prstGeom prst="rect">
+            <a:avLst/>
+          </a:prstGeom>
+          <a:noFill/>
+          <a:ln/>
+        </p:spPr>
+        <p:txBody>
+          <a:bodyPr wrap="square" lIns="0" tIns="0" rIns="0" bIns="0" rtlCol="0" anchor="ctr"/>
+          <a:lstStyle/>
+          <a:p>
+            <a:pPr indent="0" marL="0">
+              <a:buNone/>
+            </a:pPr>
+            <a:r>
+              <a:rPr lang="en-US" sz="1500" b="1" dirty="0">
                 <a:solidFill>
                   <a:srgbClr val="0C1E33"/>
                 </a:solidFill>
@@ -11693,9 +14239,90 @@
                 <a:ea typeface="Arial" pitchFamily="34" charset="-122"/>
                 <a:cs typeface="Arial" pitchFamily="34" charset="-120"/>
               </a:rPr>
-              <a:t>Head of HR</a:t>
-            </a:r>
-            <a:endParaRPr lang="en-US" sz="1100" dirty="0"/>
+              <a:t>CCHI</a:t>
+            </a:r>
+            <a:endParaRPr lang="en-US" sz="1500" dirty="0"/>
+          </a:p>
+        </p:txBody>
+      </p:sp>
+      <p:sp>
+        <p:nvSpPr>
+          <p:cNvPr id="49" name="Text 47"/>
+          <p:cNvSpPr txBox="1"/>
+          <p:nvPr/>
+        </p:nvSpPr>
+        <p:spPr>
+          <a:xfrm>
+            <a:off x="7525512" y="3520440"/>
+            <a:ext cx="1188720" cy="310896"/>
+          </a:xfrm>
+          <a:prstGeom prst="rect">
+            <a:avLst/>
+          </a:prstGeom>
+          <a:noFill/>
+          <a:ln/>
+        </p:spPr>
+        <p:txBody>
+          <a:bodyPr wrap="square" lIns="0" tIns="0" rIns="0" bIns="0" rtlCol="0" anchor="ctr"/>
+          <a:lstStyle/>
+          <a:p>
+            <a:pPr algn="r" indent="0" marL="0">
+              <a:lnSpc>
+                <a:spcPts val="1000"/>
+              </a:lnSpc>
+              <a:buNone/>
+            </a:pPr>
+            <a:r>
+              <a:rPr lang="en-US" sz="800" dirty="0">
+                <a:solidFill>
+                  <a:srgbClr val="5A6C82"/>
+                </a:solidFill>
+                <a:latin typeface="Calibri" pitchFamily="34" charset="0"/>
+                <a:ea typeface="Calibri" pitchFamily="34" charset="-122"/>
+                <a:cs typeface="Calibri" pitchFamily="34" charset="-120"/>
+              </a:rPr>
+              <a:t>Health insurance council</a:t>
+            </a:r>
+            <a:endParaRPr lang="en-US" sz="800" dirty="0"/>
+          </a:p>
+        </p:txBody>
+      </p:sp>
+      <p:sp>
+        <p:nvSpPr>
+          <p:cNvPr id="50" name="Text 48"/>
+          <p:cNvSpPr txBox="1"/>
+          <p:nvPr/>
+        </p:nvSpPr>
+        <p:spPr>
+          <a:xfrm>
+            <a:off x="6355080" y="3785616"/>
+            <a:ext cx="2359152" cy="219456"/>
+          </a:xfrm>
+          <a:prstGeom prst="rect">
+            <a:avLst/>
+          </a:prstGeom>
+          <a:noFill/>
+          <a:ln/>
+        </p:spPr>
+        <p:txBody>
+          <a:bodyPr wrap="square" lIns="0" tIns="0" rIns="0" bIns="0" rtlCol="0" anchor="ctr"/>
+          <a:lstStyle/>
+          <a:p>
+            <a:pPr indent="0" marL="0">
+              <a:buNone/>
+            </a:pPr>
+            <a:r>
+              <a:rPr lang="en-US" sz="1150" b="1" dirty="0">
+                <a:solidFill>
+                  <a:srgbClr val="12756F"/>
+                </a:solidFill>
+                <a:latin typeface="Arial" pitchFamily="34" charset="0"/>
+                <a:ea typeface="Arial" pitchFamily="34" charset="-122"/>
+                <a:cs typeface="Arial" pitchFamily="34" charset="-120"/>
+              </a:rPr>
+              <a:t>No cover, no Iqama</a:t>
+            </a:r>
+            <a:endParaRPr lang="en-US" sz="1150" dirty="0"/>
           </a:p>
         </p:txBody>
       </p:sp>
@@ -11707,47 +14334,8 @@
         </p:nvSpPr>
         <p:spPr>
           <a:xfrm>
-            <a:off x="1152144" y="5614416"/>
-            <a:ext cx="1965960" cy="182880"/>
-          </a:xfrm>
-          <a:prstGeom prst="rect">
-            <a:avLst/>
-          </a:prstGeom>
-          <a:noFill/>
-          <a:ln/>
-        </p:spPr>
-        <p:txBody>
-          <a:bodyPr wrap="square" lIns="0" tIns="0" rIns="0" bIns="0" rtlCol="0" anchor="ctr"/>
-          <a:lstStyle/>
-          <a:p>
-            <a:pPr indent="0" marL="0">
-              <a:buNone/>
-            </a:pPr>
-            <a:r>
-              <a:rPr lang="en-US" sz="900" dirty="0">
-                <a:solidFill>
-                  <a:srgbClr val="12756F"/>
-                </a:solidFill>
-                <a:latin typeface="Calibri" pitchFamily="34" charset="0"/>
-                <a:ea typeface="Calibri" pitchFamily="34" charset="-122"/>
-                <a:cs typeface="Calibri" pitchFamily="34" charset="-120"/>
-              </a:rPr>
-              <a:t>Governance and risk</a:t>
-            </a:r>
-            <a:endParaRPr lang="en-US" sz="900" dirty="0"/>
-          </a:p>
-        </p:txBody>
-      </p:sp>
-      <p:sp>
-        <p:nvSpPr>
-          <p:cNvPr id="52" name="Text 50"/>
-          <p:cNvSpPr txBox="1"/>
-          <p:nvPr/>
-        </p:nvSpPr>
-        <p:spPr>
-          <a:xfrm>
-            <a:off x="3246120" y="5394960"/>
-            <a:ext cx="4846320" cy="438912"/>
+            <a:off x="6355080" y="4023360"/>
+            <a:ext cx="2359152" cy="566928"/>
           </a:xfrm>
           <a:prstGeom prst="rect">
             <a:avLst/>
@@ -11766,7 +14354,7 @@
               <a:buNone/>
             </a:pPr>
             <a:r>
-              <a:rPr lang="en-US" sz="930" dirty="0">
+              <a:rPr lang="en-US" sz="920" dirty="0">
                 <a:solidFill>
                   <a:srgbClr val="5A6C82"/>
                 </a:solidFill>
@@ -11774,11 +14362,33 @@
                 <a:ea typeface="Calibri" pitchFamily="34" charset="-122"/>
                 <a:cs typeface="Calibri" pitchFamily="34" charset="-120"/>
               </a:rPr>
-              <a:t>Watches band position per establishment; reviews Saudization against Vision 2030 commitments; signs off the localisation hiring plan.</a:t>
-            </a:r>
-            <a:endParaRPr lang="en-US" sz="930" dirty="0"/>
-          </a:p>
-        </p:txBody>
+              <a:t>Policy validity per employee. Blocks issue and renewal</a:t>
+            </a:r>
+            <a:endParaRPr lang="en-US" sz="920" dirty="0"/>
+          </a:p>
+        </p:txBody>
+      </p:sp>
+      <p:sp>
+        <p:nvSpPr>
+          <p:cNvPr id="52" name="Shape 50"/>
+          <p:cNvSpPr/>
+          <p:nvPr/>
+        </p:nvSpPr>
+        <p:spPr>
+          <a:xfrm>
+            <a:off x="6355080" y="4626864"/>
+            <a:ext cx="1325880" cy="201168"/>
+          </a:xfrm>
+          <a:prstGeom prst="roundRect">
+            <a:avLst>
+              <a:gd name="adj" fmla="val 50000"/>
+            </a:avLst>
+          </a:prstGeom>
+          <a:solidFill>
+            <a:srgbClr val="17795E"/>
+          </a:solidFill>
+          <a:ln/>
+        </p:spPr>
       </p:sp>
       <p:sp>
         <p:nvSpPr>
@@ -11788,8 +14398,113 @@
         </p:nvSpPr>
         <p:spPr>
           <a:xfrm>
-            <a:off x="8229600" y="5394960"/>
-            <a:ext cx="2615184" cy="438912"/>
+            <a:off x="6355080" y="4626864"/>
+            <a:ext cx="1325880" cy="201168"/>
+          </a:xfrm>
+          <a:prstGeom prst="rect">
+            <a:avLst/>
+          </a:prstGeom>
+          <a:noFill/>
+          <a:ln/>
+        </p:spPr>
+        <p:txBody>
+          <a:bodyPr wrap="square" lIns="0" tIns="0" rIns="0" bIns="0" rtlCol="0" anchor="ctr"/>
+          <a:lstStyle/>
+          <a:p>
+            <a:pPr algn="ctr" indent="0" marL="0">
+              <a:buNone/>
+            </a:pPr>
+            <a:r>
+              <a:rPr lang="en-US" sz="780" b="1" dirty="0">
+                <a:solidFill>
+                  <a:srgbClr val="FFFFFF"/>
+                </a:solidFill>
+                <a:latin typeface="Calibri" pitchFamily="34" charset="0"/>
+                <a:ea typeface="Calibri" pitchFamily="34" charset="-122"/>
+                <a:cs typeface="Calibri" pitchFamily="34" charset="-120"/>
+              </a:rPr>
+              <a:t>Live lookup</a:t>
+            </a:r>
+            <a:endParaRPr lang="en-US" sz="780" dirty="0"/>
+          </a:p>
+        </p:txBody>
+      </p:sp>
+      <p:sp>
+        <p:nvSpPr>
+          <p:cNvPr id="54" name="Shape 52"/>
+          <p:cNvSpPr/>
+          <p:nvPr/>
+        </p:nvSpPr>
+        <p:spPr>
+          <a:xfrm>
+            <a:off x="9043416" y="3401568"/>
+            <a:ext cx="2596896" cy="1463040"/>
+          </a:xfrm>
+          <a:prstGeom prst="roundRect">
+            <a:avLst>
+              <a:gd name="adj" fmla="val 5000"/>
+            </a:avLst>
+          </a:prstGeom>
+          <a:solidFill>
+            <a:srgbClr val="FCF6E4"/>
+          </a:solidFill>
+          <a:ln w="12700">
+            <a:solidFill>
+              <a:srgbClr val="C9A227"/>
+            </a:solidFill>
+            <a:prstDash val="solid"/>
+          </a:ln>
+        </p:spPr>
+      </p:sp>
+      <p:sp>
+        <p:nvSpPr>
+          <p:cNvPr id="55" name="Text 53"/>
+          <p:cNvSpPr txBox="1"/>
+          <p:nvPr/>
+        </p:nvSpPr>
+        <p:spPr>
+          <a:xfrm>
+            <a:off x="9198864" y="3511296"/>
+            <a:ext cx="2286000" cy="219456"/>
+          </a:xfrm>
+          <a:prstGeom prst="rect">
+            <a:avLst/>
+          </a:prstGeom>
+          <a:noFill/>
+          <a:ln/>
+        </p:spPr>
+        <p:txBody>
+          <a:bodyPr wrap="square" lIns="0" tIns="0" rIns="0" bIns="0" rtlCol="0" anchor="ctr"/>
+          <a:lstStyle/>
+          <a:p>
+            <a:pPr indent="0" marL="0">
+              <a:buNone/>
+            </a:pPr>
+            <a:r>
+              <a:rPr lang="en-US" sz="1200" b="1" dirty="0">
+                <a:solidFill>
+                  <a:srgbClr val="7A6410"/>
+                </a:solidFill>
+                <a:latin typeface="Arial" pitchFamily="34" charset="0"/>
+                <a:ea typeface="Arial" pitchFamily="34" charset="-122"/>
+                <a:cs typeface="Arial" pitchFamily="34" charset="-120"/>
+              </a:rPr>
+              <a:t>How amber goes green</a:t>
+            </a:r>
+            <a:endParaRPr lang="en-US" sz="1200" dirty="0"/>
+          </a:p>
+        </p:txBody>
+      </p:sp>
+      <p:sp>
+        <p:nvSpPr>
+          <p:cNvPr id="56" name="Text 54"/>
+          <p:cNvSpPr txBox="1"/>
+          <p:nvPr/>
+        </p:nvSpPr>
+        <p:spPr>
+          <a:xfrm>
+            <a:off x="9198864" y="3767328"/>
+            <a:ext cx="2304288" cy="987552"/>
           </a:xfrm>
           <a:prstGeom prst="rect">
             <a:avLst/>
@@ -11803,145 +14518,167 @@
           <a:p>
             <a:pPr indent="0" marL="0">
               <a:lnSpc>
-                <a:spcPts val="1240"/>
+                <a:spcPts val="1180"/>
               </a:lnSpc>
               <a:buNone/>
             </a:pPr>
             <a:r>
-              <a:rPr lang="en-US" sz="930" b="1" i="1" dirty="0">
-                <a:solidFill>
-                  <a:srgbClr val="17795E"/>
-                </a:solidFill>
-                <a:latin typeface="Calibri" pitchFamily="34" charset="0"/>
-                <a:ea typeface="Calibri" pitchFamily="34" charset="-122"/>
-                <a:cs typeface="Calibri" pitchFamily="34" charset="-120"/>
-              </a:rPr>
-              <a:t>Nitaqat exposure answerable from one screen.</a:t>
-            </a:r>
-            <a:endParaRPr lang="en-US" sz="930" dirty="0"/>
-          </a:p>
-        </p:txBody>
-      </p:sp>
-      <p:sp>
-        <p:nvSpPr>
-          <p:cNvPr id="54" name="Text 52"/>
-          <p:cNvSpPr txBox="1"/>
-          <p:nvPr/>
-        </p:nvSpPr>
-        <p:spPr>
-          <a:xfrm>
-            <a:off x="1152144" y="1609344"/>
-            <a:ext cx="1920240" cy="182880"/>
-          </a:xfrm>
-          <a:prstGeom prst="rect">
-            <a:avLst/>
-          </a:prstGeom>
-          <a:noFill/>
-          <a:ln/>
-        </p:spPr>
-        <p:txBody>
-          <a:bodyPr wrap="square" lIns="0" tIns="0" rIns="0" bIns="0" rtlCol="0" anchor="ctr"/>
-          <a:lstStyle/>
-          <a:p>
-            <a:pPr indent="0" marL="0">
-              <a:buNone/>
-            </a:pPr>
-            <a:r>
-              <a:rPr lang="en-US" sz="850" b="1" spc="140" kern="0" dirty="0">
-                <a:solidFill>
-                  <a:srgbClr val="96A3AE"/>
-                </a:solidFill>
-                <a:latin typeface="Calibri" pitchFamily="34" charset="0"/>
-                <a:ea typeface="Calibri" pitchFamily="34" charset="-122"/>
-                <a:cs typeface="Calibri" pitchFamily="34" charset="-120"/>
-              </a:rPr>
-              <a:t>ROLE</a:t>
-            </a:r>
-            <a:endParaRPr lang="en-US" sz="850" dirty="0"/>
-          </a:p>
-        </p:txBody>
-      </p:sp>
-      <p:sp>
-        <p:nvSpPr>
-          <p:cNvPr id="55" name="Text 53"/>
-          <p:cNvSpPr txBox="1"/>
-          <p:nvPr/>
-        </p:nvSpPr>
-        <p:spPr>
-          <a:xfrm>
-            <a:off x="3246120" y="1609344"/>
-            <a:ext cx="4846320" cy="182880"/>
-          </a:xfrm>
-          <a:prstGeom prst="rect">
-            <a:avLst/>
-          </a:prstGeom>
-          <a:noFill/>
-          <a:ln/>
-        </p:spPr>
-        <p:txBody>
-          <a:bodyPr wrap="square" lIns="0" tIns="0" rIns="0" bIns="0" rtlCol="0" anchor="ctr"/>
-          <a:lstStyle/>
-          <a:p>
-            <a:pPr indent="0" marL="0">
-              <a:buNone/>
-            </a:pPr>
-            <a:r>
-              <a:rPr lang="en-US" sz="850" b="1" spc="140" kern="0" dirty="0">
-                <a:solidFill>
-                  <a:srgbClr val="96A3AE"/>
-                </a:solidFill>
-                <a:latin typeface="Calibri" pitchFamily="34" charset="0"/>
-                <a:ea typeface="Calibri" pitchFamily="34" charset="-122"/>
-                <a:cs typeface="Calibri" pitchFamily="34" charset="-120"/>
-              </a:rPr>
-              <a:t>WHAT THEY DO IN THE SYSTEM</a:t>
-            </a:r>
-            <a:endParaRPr lang="en-US" sz="850" dirty="0"/>
-          </a:p>
-        </p:txBody>
-      </p:sp>
-      <p:sp>
-        <p:nvSpPr>
-          <p:cNvPr id="56" name="Text 54"/>
-          <p:cNvSpPr txBox="1"/>
-          <p:nvPr/>
-        </p:nvSpPr>
-        <p:spPr>
-          <a:xfrm>
-            <a:off x="8229600" y="1609344"/>
-            <a:ext cx="2615184" cy="182880"/>
-          </a:xfrm>
-          <a:prstGeom prst="rect">
-            <a:avLst/>
-          </a:prstGeom>
-          <a:noFill/>
-          <a:ln/>
-        </p:spPr>
-        <p:txBody>
-          <a:bodyPr wrap="square" lIns="0" tIns="0" rIns="0" bIns="0" rtlCol="0" anchor="ctr"/>
-          <a:lstStyle/>
-          <a:p>
-            <a:pPr indent="0" marL="0">
-              <a:buNone/>
-            </a:pPr>
-            <a:r>
-              <a:rPr lang="en-US" sz="850" b="1" spc="140" kern="0" dirty="0">
-                <a:solidFill>
-                  <a:srgbClr val="96A3AE"/>
-                </a:solidFill>
-                <a:latin typeface="Calibri" pitchFamily="34" charset="0"/>
-                <a:ea typeface="Calibri" pitchFamily="34" charset="-122"/>
-                <a:cs typeface="Calibri" pitchFamily="34" charset="-120"/>
-              </a:rPr>
-              <a:t>WHAT THEY GET</a:t>
-            </a:r>
-            <a:endParaRPr lang="en-US" sz="850" dirty="0"/>
-          </a:p>
-        </p:txBody>
-      </p:sp>
-      <p:sp>
-        <p:nvSpPr>
-          <p:cNvPr id="57" name="Text 55"/>
+              <a:rPr lang="en-US" sz="880" dirty="0">
+                <a:solidFill>
+                  <a:srgbClr val="5A6C82"/>
+                </a:solidFill>
+                <a:latin typeface="Calibri" pitchFamily="34" charset="0"/>
+                <a:ea typeface="Calibri" pitchFamily="34" charset="-122"/>
+                <a:cs typeface="Calibri" pitchFamily="34" charset="-120"/>
+              </a:rPr>
+              <a:t>Qiwa and Muqeem grant API access to the employer, under your own establishment registration. Never to a vendor. You request credentials, we plug them into connectors already built.</a:t>
+            </a:r>
+            <a:endParaRPr lang="en-US" sz="880" dirty="0"/>
+          </a:p>
+        </p:txBody>
+      </p:sp>
+      <p:sp>
+        <p:nvSpPr>
+          <p:cNvPr id="57" name="Shape 55"/>
+          <p:cNvSpPr/>
+          <p:nvPr/>
+        </p:nvSpPr>
+        <p:spPr>
+          <a:xfrm>
+            <a:off x="548640" y="5029200"/>
+            <a:ext cx="11091672" cy="1261872"/>
+          </a:xfrm>
+          <a:prstGeom prst="roundRect">
+            <a:avLst>
+              <a:gd name="adj" fmla="val 5797"/>
+            </a:avLst>
+          </a:prstGeom>
+          <a:solidFill>
+            <a:srgbClr val="E4F5F3"/>
+          </a:solidFill>
+          <a:ln w="11430">
+            <a:solidFill>
+              <a:srgbClr val="20A098"/>
+            </a:solidFill>
+            <a:prstDash val="solid"/>
+          </a:ln>
+        </p:spPr>
+      </p:sp>
+      <p:sp>
+        <p:nvSpPr>
+          <p:cNvPr id="58" name="Text 56"/>
+          <p:cNvSpPr txBox="1"/>
+          <p:nvPr/>
+        </p:nvSpPr>
+        <p:spPr>
+          <a:xfrm>
+            <a:off x="777240" y="5157216"/>
+            <a:ext cx="5120640" cy="237744"/>
+          </a:xfrm>
+          <a:prstGeom prst="rect">
+            <a:avLst/>
+          </a:prstGeom>
+          <a:noFill/>
+          <a:ln/>
+        </p:spPr>
+        <p:txBody>
+          <a:bodyPr wrap="square" lIns="0" tIns="0" rIns="0" bIns="0" rtlCol="0" anchor="ctr"/>
+          <a:lstStyle/>
+          <a:p>
+            <a:pPr indent="0" marL="0">
+              <a:buNone/>
+            </a:pPr>
+            <a:r>
+              <a:rPr lang="en-US" sz="1300" b="1" dirty="0">
+                <a:solidFill>
+                  <a:srgbClr val="12756F"/>
+                </a:solidFill>
+                <a:latin typeface="Arial" pitchFamily="34" charset="0"/>
+                <a:ea typeface="Arial" pitchFamily="34" charset="-122"/>
+                <a:cs typeface="Arial" pitchFamily="34" charset="-120"/>
+              </a:rPr>
+              <a:t>Three live today. Four await your credentials.</a:t>
+            </a:r>
+            <a:endParaRPr lang="en-US" sz="1300" dirty="0"/>
+          </a:p>
+        </p:txBody>
+      </p:sp>
+      <p:sp>
+        <p:nvSpPr>
+          <p:cNvPr id="59" name="Text 57"/>
+          <p:cNvSpPr txBox="1"/>
+          <p:nvPr/>
+        </p:nvSpPr>
+        <p:spPr>
+          <a:xfrm>
+            <a:off x="777240" y="5431536"/>
+            <a:ext cx="5486400" cy="749808"/>
+          </a:xfrm>
+          <a:prstGeom prst="rect">
+            <a:avLst/>
+          </a:prstGeom>
+          <a:noFill/>
+          <a:ln/>
+        </p:spPr>
+        <p:txBody>
+          <a:bodyPr wrap="square" lIns="0" tIns="0" rIns="0" bIns="0" rtlCol="0" anchor="ctr"/>
+          <a:lstStyle/>
+          <a:p>
+            <a:pPr indent="0" marL="0">
+              <a:lnSpc>
+                <a:spcPts val="1300"/>
+              </a:lnSpc>
+              <a:buNone/>
+            </a:pPr>
+            <a:r>
+              <a:rPr lang="en-US" sz="960" dirty="0">
+                <a:solidFill>
+                  <a:srgbClr val="0C1E33"/>
+                </a:solidFill>
+                <a:latin typeface="Calibri" pitchFamily="34" charset="0"/>
+                <a:ea typeface="Calibri" pitchFamily="34" charset="-122"/>
+                <a:cs typeface="Calibri" pitchFamily="34" charset="-120"/>
+              </a:rPr>
+              <a:t>Until a connector goes live the step is manual, but it is still tracked. The reference number, the receipt and the status are captured exactly as they would be automatically, so nothing about the process changes on the day the switch is flipped. That is the difference between being API-ready and being API-dependent.</a:t>
+            </a:r>
+            <a:endParaRPr lang="en-US" sz="960" dirty="0"/>
+          </a:p>
+        </p:txBody>
+      </p:sp>
+      <p:pic>
+        <p:nvPicPr>
+          <p:cNvPr id="60" name="Image 0" descr="./img/integrations.jpg">    </p:cNvPr>
+          <p:cNvPicPr>
+            <a:picLocks noChangeAspect="1"/>
+          </p:cNvPicPr>
+          <p:nvPr/>
+        </p:nvPicPr>
+        <p:blipFill>
+          <a:blip r:embed="rId1"/>
+          <a:stretch>
+            <a:fillRect/>
+          </a:stretch>
+        </p:blipFill>
+        <p:spPr>
+          <a:xfrm>
+            <a:off x="6492240" y="5102352"/>
+            <a:ext cx="5029200" cy="914400"/>
+          </a:xfrm>
+          <a:prstGeom prst="rect">
+            <a:avLst/>
+          </a:prstGeom>
+          <a:effectLst>
+            <a:outerShdw sx="100000" sy="100000" kx="0" ky="0" algn="bl" rotWithShape="0" blurRad="177800" dist="38100" dir="5400000">
+              <a:srgbClr val="000000">
+                <a:alpha val="20000"/>
+              </a:srgbClr>
+            </a:outerShdw>
+          </a:effectLst>
+        </p:spPr>
+      </p:pic>
+      <p:sp>
+        <p:nvSpPr>
+          <p:cNvPr id="61" name="Text 58"/>
           <p:cNvSpPr txBox="1"/>
           <p:nvPr/>
         </p:nvSpPr>
@@ -11980,7 +14717,7 @@
       </p:sp>
       <p:sp>
         <p:nvSpPr>
-          <p:cNvPr id="58" name="Text 56"/>
+          <p:cNvPr id="62" name="Text 59"/>
           <p:cNvSpPr txBox="1"/>
           <p:nvPr/>
         </p:nvSpPr>
@@ -12082,7 +14819,7 @@
                 <a:ea typeface="Calibri" pitchFamily="34" charset="-122"/>
                 <a:cs typeface="Calibri" pitchFamily="34" charset="-120"/>
               </a:rPr>
-              <a:t>ACCOUNTABILITY &amp; COST CONTROL</a:t>
+              <a:t>PERSONA VIEW</a:t>
             </a:r>
             <a:endParaRPr lang="en-US" sz="1100" dirty="0"/>
           </a:p>
@@ -12121,7 +14858,7 @@
                 <a:ea typeface="Arial" pitchFamily="34" charset="-122"/>
                 <a:cs typeface="Arial" pitchFamily="34" charset="-120"/>
               </a:rPr>
-              <a:t>Every step owned. Every riyal accounted for.</a:t>
+              <a:t>Everyone gets their own to-do list.</a:t>
             </a:r>
             <a:endParaRPr lang="en-US" sz="3000" dirty="0"/>
           </a:p>
@@ -12136,7 +14873,7 @@
         <p:spPr>
           <a:xfrm>
             <a:off x="548640" y="1243584"/>
-            <a:ext cx="10424160" cy="310896"/>
+            <a:ext cx="10424160" cy="420624"/>
           </a:xfrm>
           <a:prstGeom prst="rect">
             <a:avLst/>
@@ -12160,7 +14897,7 @@
                 <a:ea typeface="Calibri" pitchFamily="34" charset="-122"/>
                 <a:cs typeface="Calibri" pitchFamily="34" charset="-120"/>
               </a:rPr>
-              <a:t>Statutory deadlines need named owners, and Saudi permit costs are large enough that finance has to see them coming.</a:t>
+              <a:t>Each role only sees what is actually theirs, with a due date on it, and the system already knows which Saudi authority each step belongs to.</a:t>
             </a:r>
             <a:endParaRPr lang="en-US" sz="1300" dirty="0"/>
           </a:p>
@@ -12174,18 +14911,18 @@
         </p:nvSpPr>
         <p:spPr>
           <a:xfrm>
-            <a:off x="548640" y="1792224"/>
-            <a:ext cx="5394960" cy="676656"/>
+            <a:off x="548640" y="1828800"/>
+            <a:ext cx="10424160" cy="548640"/>
           </a:xfrm>
           <a:prstGeom prst="roundRect">
             <a:avLst>
-              <a:gd name="adj" fmla="val 10811"/>
+              <a:gd name="adj" fmla="val 10000"/>
             </a:avLst>
           </a:prstGeom>
           <a:solidFill>
             <a:srgbClr val="F4F6F7"/>
           </a:solidFill>
-          <a:ln w="9525">
+          <a:ln w="7620">
             <a:solidFill>
               <a:srgbClr val="E3E7EA"/>
             </a:solidFill>
@@ -12201,8 +14938,8 @@
         </p:nvSpPr>
         <p:spPr>
           <a:xfrm>
-            <a:off x="731520" y="1956816"/>
-            <a:ext cx="365760" cy="365760"/>
+            <a:off x="694944" y="1929384"/>
+            <a:ext cx="347472" cy="347472"/>
           </a:xfrm>
           <a:prstGeom prst="ellipse">
             <a:avLst/>
@@ -12221,8 +14958,8 @@
         </p:nvSpPr>
         <p:spPr>
           <a:xfrm>
-            <a:off x="731520" y="1956816"/>
-            <a:ext cx="365760" cy="365760"/>
+            <a:off x="694944" y="1929384"/>
+            <a:ext cx="347472" cy="347472"/>
           </a:xfrm>
           <a:prstGeom prst="rect">
             <a:avLst/>
@@ -12238,7 +14975,7 @@
               <a:buNone/>
             </a:pPr>
             <a:r>
-              <a:rPr lang="en-US" sz="1200" b="1" dirty="0">
+              <a:rPr lang="en-US" sz="1050" b="1" dirty="0">
                 <a:solidFill>
                   <a:srgbClr val="FFFFFF"/>
                 </a:solidFill>
@@ -12246,9 +14983,9 @@
                 <a:ea typeface="Calibri" pitchFamily="34" charset="-122"/>
                 <a:cs typeface="Calibri" pitchFamily="34" charset="-120"/>
               </a:rPr>
-              <a:t>1</a:t>
-            </a:r>
-            <a:endParaRPr lang="en-US" sz="1200" dirty="0"/>
+              <a:t>GRO</a:t>
+            </a:r>
+            <a:endParaRPr lang="en-US" sz="1050" dirty="0"/>
           </a:p>
         </p:txBody>
       </p:sp>
@@ -12260,24 +14997,24 @@
         </p:nvSpPr>
         <p:spPr>
           <a:xfrm>
-            <a:off x="1225296" y="1874520"/>
-            <a:ext cx="4480560" cy="219456"/>
-          </a:xfrm>
-          <a:prstGeom prst="rect">
-            <a:avLst/>
-          </a:prstGeom>
-          <a:noFill/>
-          <a:ln/>
-        </p:spPr>
-        <p:txBody>
-          <a:bodyPr wrap="square" lIns="0" tIns="0" rIns="0" bIns="0" rtlCol="0" anchor="ctr"/>
-          <a:lstStyle/>
-          <a:p>
-            <a:pPr indent="0" marL="0">
-              <a:buNone/>
-            </a:pPr>
-            <a:r>
-              <a:rPr lang="en-US" sz="1250" b="1" dirty="0">
+            <a:off x="1152144" y="1883664"/>
+            <a:ext cx="1965960" cy="219456"/>
+          </a:xfrm>
+          <a:prstGeom prst="rect">
+            <a:avLst/>
+          </a:prstGeom>
+          <a:noFill/>
+          <a:ln/>
+        </p:spPr>
+        <p:txBody>
+          <a:bodyPr wrap="square" lIns="0" tIns="0" rIns="0" bIns="0" rtlCol="0" anchor="ctr"/>
+          <a:lstStyle/>
+          <a:p>
+            <a:pPr indent="0" marL="0">
+              <a:buNone/>
+            </a:pPr>
+            <a:r>
+              <a:rPr lang="en-US" sz="1100" b="1" dirty="0">
                 <a:solidFill>
                   <a:srgbClr val="0C1E33"/>
                 </a:solidFill>
@@ -12285,9 +15022,9 @@
                 <a:ea typeface="Arial" pitchFamily="34" charset="-122"/>
                 <a:cs typeface="Arial" pitchFamily="34" charset="-120"/>
               </a:rPr>
-              <a:t>Assign</a:t>
-            </a:r>
-            <a:endParaRPr lang="en-US" sz="1250" dirty="0"/>
+              <a:t>Government Relations</a:t>
+            </a:r>
+            <a:endParaRPr lang="en-US" sz="1100" dirty="0"/>
           </a:p>
         </p:txBody>
       </p:sp>
@@ -12299,8 +15036,47 @@
         </p:nvSpPr>
         <p:spPr>
           <a:xfrm>
-            <a:off x="1225296" y="2103120"/>
-            <a:ext cx="4526280" cy="310896"/>
+            <a:off x="1152144" y="2103120"/>
+            <a:ext cx="1965960" cy="182880"/>
+          </a:xfrm>
+          <a:prstGeom prst="rect">
+            <a:avLst/>
+          </a:prstGeom>
+          <a:noFill/>
+          <a:ln/>
+        </p:spPr>
+        <p:txBody>
+          <a:bodyPr wrap="square" lIns="0" tIns="0" rIns="0" bIns="0" rtlCol="0" anchor="ctr"/>
+          <a:lstStyle/>
+          <a:p>
+            <a:pPr indent="0" marL="0">
+              <a:buNone/>
+            </a:pPr>
+            <a:r>
+              <a:rPr lang="en-US" sz="900" dirty="0">
+                <a:solidFill>
+                  <a:srgbClr val="12756F"/>
+                </a:solidFill>
+                <a:latin typeface="Calibri" pitchFamily="34" charset="0"/>
+                <a:ea typeface="Calibri" pitchFamily="34" charset="-122"/>
+                <a:cs typeface="Calibri" pitchFamily="34" charset="-120"/>
+              </a:rPr>
+              <a:t>PRO desk · Riyadh</a:t>
+            </a:r>
+            <a:endParaRPr lang="en-US" sz="900" dirty="0"/>
+          </a:p>
+        </p:txBody>
+      </p:sp>
+      <p:sp>
+        <p:nvSpPr>
+          <p:cNvPr id="10" name="Text 8"/>
+          <p:cNvSpPr txBox="1"/>
+          <p:nvPr/>
+        </p:nvSpPr>
+        <p:spPr>
+          <a:xfrm>
+            <a:off x="3246120" y="1883664"/>
+            <a:ext cx="4846320" cy="438912"/>
           </a:xfrm>
           <a:prstGeom prst="rect">
             <a:avLst/>
@@ -12314,12 +15090,12 @@
           <a:p>
             <a:pPr indent="0" marL="0">
               <a:lnSpc>
-                <a:spcPts val="1250"/>
+                <a:spcPts val="1240"/>
               </a:lnSpc>
               <a:buNone/>
             </a:pPr>
             <a:r>
-              <a:rPr lang="en-US" sz="940" dirty="0">
+              <a:rPr lang="en-US" sz="930" dirty="0">
                 <a:solidFill>
                   <a:srgbClr val="5A6C82"/>
                 </a:solidFill>
@@ -12327,32 +15103,74 @@
                 <a:ea typeface="Calibri" pitchFamily="34" charset="-122"/>
                 <a:cs typeface="Calibri" pitchFamily="34" charset="-120"/>
               </a:rPr>
-              <a:t>Routed to a role, claimed by a named officer. Due dates come from the statutory deadline, not a guess.</a:t>
-            </a:r>
-            <a:endParaRPr lang="en-US" sz="940" dirty="0"/>
-          </a:p>
-        </p:txBody>
-      </p:sp>
-      <p:sp>
-        <p:nvSpPr>
-          <p:cNvPr id="10" name="Shape 8"/>
+              <a:t>Requests block visas once the band allows it; authenticates Qiwa contracts; issues Iqamas on Muqeem inside the statutory window; applies for exit re-entry and watches every return-by date.</a:t>
+            </a:r>
+            <a:endParaRPr lang="en-US" sz="930" dirty="0"/>
+          </a:p>
+        </p:txBody>
+      </p:sp>
+      <p:sp>
+        <p:nvSpPr>
+          <p:cNvPr id="11" name="Text 9"/>
+          <p:cNvSpPr txBox="1"/>
+          <p:nvPr/>
+        </p:nvSpPr>
+        <p:spPr>
+          <a:xfrm>
+            <a:off x="8229600" y="1883664"/>
+            <a:ext cx="2615184" cy="438912"/>
+          </a:xfrm>
+          <a:prstGeom prst="rect">
+            <a:avLst/>
+          </a:prstGeom>
+          <a:noFill/>
+          <a:ln/>
+        </p:spPr>
+        <p:txBody>
+          <a:bodyPr wrap="square" lIns="0" tIns="0" rIns="0" bIns="0" rtlCol="0" anchor="ctr"/>
+          <a:lstStyle/>
+          <a:p>
+            <a:pPr indent="0" marL="0">
+              <a:lnSpc>
+                <a:spcPts val="1240"/>
+              </a:lnSpc>
+              <a:buNone/>
+            </a:pPr>
+            <a:r>
+              <a:rPr lang="en-US" sz="930" b="1" i="1" dirty="0">
+                <a:solidFill>
+                  <a:srgbClr val="17795E"/>
+                </a:solidFill>
+                <a:latin typeface="Calibri" pitchFamily="34" charset="0"/>
+                <a:ea typeface="Calibri" pitchFamily="34" charset="-122"/>
+                <a:cs typeface="Calibri" pitchFamily="34" charset="-120"/>
+              </a:rPr>
+              <a:t>One queue that already knows which authority each step belongs to.</a:t>
+            </a:r>
+            <a:endParaRPr lang="en-US" sz="930" dirty="0"/>
+          </a:p>
+        </p:txBody>
+      </p:sp>
+      <p:sp>
+        <p:nvSpPr>
+          <p:cNvPr id="12" name="Shape 10"/>
           <p:cNvSpPr/>
           <p:nvPr/>
         </p:nvSpPr>
         <p:spPr>
           <a:xfrm>
-            <a:off x="548640" y="2569464"/>
-            <a:ext cx="5394960" cy="676656"/>
+            <a:off x="548640" y="2414016"/>
+            <a:ext cx="10424160" cy="548640"/>
           </a:xfrm>
           <a:prstGeom prst="roundRect">
             <a:avLst>
-              <a:gd name="adj" fmla="val 10811"/>
+              <a:gd name="adj" fmla="val 10000"/>
             </a:avLst>
           </a:prstGeom>
           <a:solidFill>
             <a:srgbClr val="FFFFFF"/>
           </a:solidFill>
-          <a:ln w="9525">
+          <a:ln w="7620">
             <a:solidFill>
               <a:srgbClr val="E3E7EA"/>
             </a:solidFill>
@@ -12362,34 +15180,34 @@
       </p:sp>
       <p:sp>
         <p:nvSpPr>
-          <p:cNvPr id="11" name="Shape 9"/>
+          <p:cNvPr id="13" name="Shape 11"/>
           <p:cNvSpPr/>
           <p:nvPr/>
         </p:nvSpPr>
         <p:spPr>
           <a:xfrm>
-            <a:off x="731520" y="2734056"/>
-            <a:ext cx="365760" cy="365760"/>
+            <a:off x="694944" y="2514600"/>
+            <a:ext cx="347472" cy="347472"/>
           </a:xfrm>
           <a:prstGeom prst="ellipse">
             <a:avLst/>
           </a:prstGeom>
           <a:solidFill>
-            <a:srgbClr val="B5730F"/>
+            <a:srgbClr val="12756F"/>
           </a:solidFill>
           <a:ln/>
         </p:spPr>
       </p:sp>
       <p:sp>
         <p:nvSpPr>
-          <p:cNvPr id="12" name="Text 10"/>
-          <p:cNvSpPr txBox="1"/>
-          <p:nvPr/>
-        </p:nvSpPr>
-        <p:spPr>
-          <a:xfrm>
-            <a:off x="731520" y="2734056"/>
-            <a:ext cx="365760" cy="365760"/>
+          <p:cNvPr id="14" name="Text 12"/>
+          <p:cNvSpPr txBox="1"/>
+          <p:nvPr/>
+        </p:nvSpPr>
+        <p:spPr>
+          <a:xfrm>
+            <a:off x="694944" y="2514600"/>
+            <a:ext cx="347472" cy="347472"/>
           </a:xfrm>
           <a:prstGeom prst="rect">
             <a:avLst/>
@@ -12405,7 +15223,7 @@
               <a:buNone/>
             </a:pPr>
             <a:r>
-              <a:rPr lang="en-US" sz="1200" b="1" dirty="0">
+              <a:rPr lang="en-US" sz="1050" b="1" dirty="0">
                 <a:solidFill>
                   <a:srgbClr val="FFFFFF"/>
                 </a:solidFill>
@@ -12413,38 +15231,38 @@
                 <a:ea typeface="Calibri" pitchFamily="34" charset="-122"/>
                 <a:cs typeface="Calibri" pitchFamily="34" charset="-120"/>
               </a:rPr>
-              <a:t>2</a:t>
-            </a:r>
-            <a:endParaRPr lang="en-US" sz="1200" dirty="0"/>
-          </a:p>
-        </p:txBody>
-      </p:sp>
-      <p:sp>
-        <p:nvSpPr>
-          <p:cNvPr id="13" name="Text 11"/>
-          <p:cNvSpPr txBox="1"/>
-          <p:nvPr/>
-        </p:nvSpPr>
-        <p:spPr>
-          <a:xfrm>
-            <a:off x="1225296" y="2651760"/>
-            <a:ext cx="4480560" cy="219456"/>
-          </a:xfrm>
-          <a:prstGeom prst="rect">
-            <a:avLst/>
-          </a:prstGeom>
-          <a:noFill/>
-          <a:ln/>
-        </p:spPr>
-        <p:txBody>
-          <a:bodyPr wrap="square" lIns="0" tIns="0" rIns="0" bIns="0" rtlCol="0" anchor="ctr"/>
-          <a:lstStyle/>
-          <a:p>
-            <a:pPr indent="0" marL="0">
-              <a:buNone/>
-            </a:pPr>
-            <a:r>
-              <a:rPr lang="en-US" sz="1250" b="1" dirty="0">
+              <a:t>TA</a:t>
+            </a:r>
+            <a:endParaRPr lang="en-US" sz="1050" dirty="0"/>
+          </a:p>
+        </p:txBody>
+      </p:sp>
+      <p:sp>
+        <p:nvSpPr>
+          <p:cNvPr id="15" name="Text 13"/>
+          <p:cNvSpPr txBox="1"/>
+          <p:nvPr/>
+        </p:nvSpPr>
+        <p:spPr>
+          <a:xfrm>
+            <a:off x="1152144" y="2468880"/>
+            <a:ext cx="1965960" cy="219456"/>
+          </a:xfrm>
+          <a:prstGeom prst="rect">
+            <a:avLst/>
+          </a:prstGeom>
+          <a:noFill/>
+          <a:ln/>
+        </p:spPr>
+        <p:txBody>
+          <a:bodyPr wrap="square" lIns="0" tIns="0" rIns="0" bIns="0" rtlCol="0" anchor="ctr"/>
+          <a:lstStyle/>
+          <a:p>
+            <a:pPr indent="0" marL="0">
+              <a:buNone/>
+            </a:pPr>
+            <a:r>
+              <a:rPr lang="en-US" sz="1100" b="1" dirty="0">
                 <a:solidFill>
                   <a:srgbClr val="0C1E33"/>
                 </a:solidFill>
@@ -12452,22 +15270,61 @@
                 <a:ea typeface="Arial" pitchFamily="34" charset="-122"/>
                 <a:cs typeface="Arial" pitchFamily="34" charset="-120"/>
               </a:rPr>
-              <a:t>Nudge</a:t>
-            </a:r>
-            <a:endParaRPr lang="en-US" sz="1250" dirty="0"/>
-          </a:p>
-        </p:txBody>
-      </p:sp>
-      <p:sp>
-        <p:nvSpPr>
-          <p:cNvPr id="14" name="Text 12"/>
-          <p:cNvSpPr txBox="1"/>
-          <p:nvPr/>
-        </p:nvSpPr>
-        <p:spPr>
-          <a:xfrm>
-            <a:off x="1225296" y="2880360"/>
-            <a:ext cx="4526280" cy="310896"/>
+              <a:t>Recruiter</a:t>
+            </a:r>
+            <a:endParaRPr lang="en-US" sz="1100" dirty="0"/>
+          </a:p>
+        </p:txBody>
+      </p:sp>
+      <p:sp>
+        <p:nvSpPr>
+          <p:cNvPr id="16" name="Text 14"/>
+          <p:cNvSpPr txBox="1"/>
+          <p:nvPr/>
+        </p:nvSpPr>
+        <p:spPr>
+          <a:xfrm>
+            <a:off x="1152144" y="2688336"/>
+            <a:ext cx="1965960" cy="182880"/>
+          </a:xfrm>
+          <a:prstGeom prst="rect">
+            <a:avLst/>
+          </a:prstGeom>
+          <a:noFill/>
+          <a:ln/>
+        </p:spPr>
+        <p:txBody>
+          <a:bodyPr wrap="square" lIns="0" tIns="0" rIns="0" bIns="0" rtlCol="0" anchor="ctr"/>
+          <a:lstStyle/>
+          <a:p>
+            <a:pPr indent="0" marL="0">
+              <a:buNone/>
+            </a:pPr>
+            <a:r>
+              <a:rPr lang="en-US" sz="900" dirty="0">
+                <a:solidFill>
+                  <a:srgbClr val="12756F"/>
+                </a:solidFill>
+                <a:latin typeface="Calibri" pitchFamily="34" charset="0"/>
+                <a:ea typeface="Calibri" pitchFamily="34" charset="-122"/>
+                <a:cs typeface="Calibri" pitchFamily="34" charset="-120"/>
+              </a:rPr>
+              <a:t>Talent acquisition</a:t>
+            </a:r>
+            <a:endParaRPr lang="en-US" sz="900" dirty="0"/>
+          </a:p>
+        </p:txBody>
+      </p:sp>
+      <p:sp>
+        <p:nvSpPr>
+          <p:cNvPr id="17" name="Text 15"/>
+          <p:cNvSpPr txBox="1"/>
+          <p:nvPr/>
+        </p:nvSpPr>
+        <p:spPr>
+          <a:xfrm>
+            <a:off x="3246120" y="2468880"/>
+            <a:ext cx="4846320" cy="438912"/>
           </a:xfrm>
           <a:prstGeom prst="rect">
             <a:avLst/>
@@ -12481,12 +15338,12 @@
           <a:p>
             <a:pPr indent="0" marL="0">
               <a:lnSpc>
-                <a:spcPts val="1250"/>
+                <a:spcPts val="1240"/>
               </a:lnSpc>
               <a:buNone/>
             </a:pPr>
             <a:r>
-              <a:rPr lang="en-US" sz="940" dirty="0">
+              <a:rPr lang="en-US" sz="930" dirty="0">
                 <a:solidFill>
                   <a:srgbClr val="5A6C82"/>
                 </a:solidFill>
@@ -12494,32 +15351,74 @@
                 <a:ea typeface="Calibri" pitchFamily="34" charset="-122"/>
                 <a:cs typeface="Calibri" pitchFamily="34" charset="-120"/>
               </a:rPr>
-              <a:t>Every 2 days while open. Iqama expiries six weeks out, exit re-entry returns at 14, 7 and 2 days.</a:t>
-            </a:r>
-            <a:endParaRPr lang="en-US" sz="940" dirty="0"/>
-          </a:p>
-        </p:txBody>
-      </p:sp>
-      <p:sp>
-        <p:nvSpPr>
-          <p:cNvPr id="15" name="Shape 13"/>
+              <a:t>Checks block visa availability before making an offer; releases candidates from SF Recruiting; agrees the Qiwa profession code with the PRO before submission.</a:t>
+            </a:r>
+            <a:endParaRPr lang="en-US" sz="930" dirty="0"/>
+          </a:p>
+        </p:txBody>
+      </p:sp>
+      <p:sp>
+        <p:nvSpPr>
+          <p:cNvPr id="18" name="Text 16"/>
+          <p:cNvSpPr txBox="1"/>
+          <p:nvPr/>
+        </p:nvSpPr>
+        <p:spPr>
+          <a:xfrm>
+            <a:off x="8229600" y="2468880"/>
+            <a:ext cx="2615184" cy="438912"/>
+          </a:xfrm>
+          <a:prstGeom prst="rect">
+            <a:avLst/>
+          </a:prstGeom>
+          <a:noFill/>
+          <a:ln/>
+        </p:spPr>
+        <p:txBody>
+          <a:bodyPr wrap="square" lIns="0" tIns="0" rIns="0" bIns="0" rtlCol="0" anchor="ctr"/>
+          <a:lstStyle/>
+          <a:p>
+            <a:pPr indent="0" marL="0">
+              <a:lnSpc>
+                <a:spcPts val="1240"/>
+              </a:lnSpc>
+              <a:buNone/>
+            </a:pPr>
+            <a:r>
+              <a:rPr lang="en-US" sz="930" b="1" i="1" dirty="0">
+                <a:solidFill>
+                  <a:srgbClr val="17795E"/>
+                </a:solidFill>
+                <a:latin typeface="Calibri" pitchFamily="34" charset="0"/>
+                <a:ea typeface="Calibri" pitchFamily="34" charset="-122"/>
+                <a:cs typeface="Calibri" pitchFamily="34" charset="-120"/>
+              </a:rPr>
+              <a:t>Offers made against visas that actually exist.</a:t>
+            </a:r>
+            <a:endParaRPr lang="en-US" sz="930" dirty="0"/>
+          </a:p>
+        </p:txBody>
+      </p:sp>
+      <p:sp>
+        <p:nvSpPr>
+          <p:cNvPr id="19" name="Shape 17"/>
           <p:cNvSpPr/>
           <p:nvPr/>
         </p:nvSpPr>
         <p:spPr>
           <a:xfrm>
-            <a:off x="548640" y="3346704"/>
-            <a:ext cx="5394960" cy="676656"/>
+            <a:off x="548640" y="2999232"/>
+            <a:ext cx="10424160" cy="548640"/>
           </a:xfrm>
           <a:prstGeom prst="roundRect">
             <a:avLst>
-              <a:gd name="adj" fmla="val 10811"/>
+              <a:gd name="adj" fmla="val 10000"/>
             </a:avLst>
           </a:prstGeom>
           <a:solidFill>
             <a:srgbClr val="F4F6F7"/>
           </a:solidFill>
-          <a:ln w="9525">
+          <a:ln w="7620">
             <a:solidFill>
               <a:srgbClr val="E3E7EA"/>
             </a:solidFill>
@@ -12529,34 +15428,34 @@
       </p:sp>
       <p:sp>
         <p:nvSpPr>
-          <p:cNvPr id="16" name="Shape 14"/>
+          <p:cNvPr id="20" name="Shape 18"/>
           <p:cNvSpPr/>
           <p:nvPr/>
         </p:nvSpPr>
         <p:spPr>
           <a:xfrm>
-            <a:off x="731520" y="3511296"/>
-            <a:ext cx="365760" cy="365760"/>
+            <a:off x="694944" y="3099816"/>
+            <a:ext cx="347472" cy="347472"/>
           </a:xfrm>
           <a:prstGeom prst="ellipse">
             <a:avLst/>
           </a:prstGeom>
           <a:solidFill>
-            <a:srgbClr val="B23A2F"/>
+            <a:srgbClr val="20A098"/>
           </a:solidFill>
           <a:ln/>
         </p:spPr>
       </p:sp>
       <p:sp>
         <p:nvSpPr>
-          <p:cNvPr id="17" name="Text 15"/>
-          <p:cNvSpPr txBox="1"/>
-          <p:nvPr/>
-        </p:nvSpPr>
-        <p:spPr>
-          <a:xfrm>
-            <a:off x="731520" y="3511296"/>
-            <a:ext cx="365760" cy="365760"/>
+          <p:cNvPr id="21" name="Text 19"/>
+          <p:cNvSpPr txBox="1"/>
+          <p:nvPr/>
+        </p:nvSpPr>
+        <p:spPr>
+          <a:xfrm>
+            <a:off x="694944" y="3099816"/>
+            <a:ext cx="347472" cy="347472"/>
           </a:xfrm>
           <a:prstGeom prst="rect">
             <a:avLst/>
@@ -12572,7 +15471,7 @@
               <a:buNone/>
             </a:pPr>
             <a:r>
-              <a:rPr lang="en-US" sz="1200" b="1" dirty="0">
+              <a:rPr lang="en-US" sz="1050" b="1" dirty="0">
                 <a:solidFill>
                   <a:srgbClr val="FFFFFF"/>
                 </a:solidFill>
@@ -12580,38 +15479,38 @@
                 <a:ea typeface="Calibri" pitchFamily="34" charset="-122"/>
                 <a:cs typeface="Calibri" pitchFamily="34" charset="-120"/>
               </a:rPr>
-              <a:t>3</a:t>
-            </a:r>
-            <a:endParaRPr lang="en-US" sz="1200" dirty="0"/>
-          </a:p>
-        </p:txBody>
-      </p:sp>
-      <p:sp>
-        <p:nvSpPr>
-          <p:cNvPr id="18" name="Text 16"/>
-          <p:cNvSpPr txBox="1"/>
-          <p:nvPr/>
-        </p:nvSpPr>
-        <p:spPr>
-          <a:xfrm>
-            <a:off x="1225296" y="3429000"/>
-            <a:ext cx="4480560" cy="219456"/>
-          </a:xfrm>
-          <a:prstGeom prst="rect">
-            <a:avLst/>
-          </a:prstGeom>
-          <a:noFill/>
-          <a:ln/>
-        </p:spPr>
-        <p:txBody>
-          <a:bodyPr wrap="square" lIns="0" tIns="0" rIns="0" bIns="0" rtlCol="0" anchor="ctr"/>
-          <a:lstStyle/>
-          <a:p>
-            <a:pPr indent="0" marL="0">
-              <a:buNone/>
-            </a:pPr>
-            <a:r>
-              <a:rPr lang="en-US" sz="1250" b="1" dirty="0">
+              <a:t>OB</a:t>
+            </a:r>
+            <a:endParaRPr lang="en-US" sz="1050" dirty="0"/>
+          </a:p>
+        </p:txBody>
+      </p:sp>
+      <p:sp>
+        <p:nvSpPr>
+          <p:cNvPr id="22" name="Text 20"/>
+          <p:cNvSpPr txBox="1"/>
+          <p:nvPr/>
+        </p:nvSpPr>
+        <p:spPr>
+          <a:xfrm>
+            <a:off x="1152144" y="3054096"/>
+            <a:ext cx="1965960" cy="219456"/>
+          </a:xfrm>
+          <a:prstGeom prst="rect">
+            <a:avLst/>
+          </a:prstGeom>
+          <a:noFill/>
+          <a:ln/>
+        </p:spPr>
+        <p:txBody>
+          <a:bodyPr wrap="square" lIns="0" tIns="0" rIns="0" bIns="0" rtlCol="0" anchor="ctr"/>
+          <a:lstStyle/>
+          <a:p>
+            <a:pPr indent="0" marL="0">
+              <a:buNone/>
+            </a:pPr>
+            <a:r>
+              <a:rPr lang="en-US" sz="1100" b="1" dirty="0">
                 <a:solidFill>
                   <a:srgbClr val="0C1E33"/>
                 </a:solidFill>
@@ -12619,22 +15518,61 @@
                 <a:ea typeface="Arial" pitchFamily="34" charset="-122"/>
                 <a:cs typeface="Arial" pitchFamily="34" charset="-120"/>
               </a:rPr>
-              <a:t>Escalate</a:t>
-            </a:r>
-            <a:endParaRPr lang="en-US" sz="1250" dirty="0"/>
-          </a:p>
-        </p:txBody>
-      </p:sp>
-      <p:sp>
-        <p:nvSpPr>
-          <p:cNvPr id="19" name="Text 17"/>
-          <p:cNvSpPr txBox="1"/>
-          <p:nvPr/>
-        </p:nvSpPr>
-        <p:spPr>
-          <a:xfrm>
-            <a:off x="1225296" y="3657600"/>
-            <a:ext cx="4526280" cy="310896"/>
+              <a:t>Onboarding</a:t>
+            </a:r>
+            <a:endParaRPr lang="en-US" sz="1100" dirty="0"/>
+          </a:p>
+        </p:txBody>
+      </p:sp>
+      <p:sp>
+        <p:nvSpPr>
+          <p:cNvPr id="23" name="Text 21"/>
+          <p:cNvSpPr txBox="1"/>
+          <p:nvPr/>
+        </p:nvSpPr>
+        <p:spPr>
+          <a:xfrm>
+            <a:off x="1152144" y="3273552"/>
+            <a:ext cx="1965960" cy="182880"/>
+          </a:xfrm>
+          <a:prstGeom prst="rect">
+            <a:avLst/>
+          </a:prstGeom>
+          <a:noFill/>
+          <a:ln/>
+        </p:spPr>
+        <p:txBody>
+          <a:bodyPr wrap="square" lIns="0" tIns="0" rIns="0" bIns="0" rtlCol="0" anchor="ctr"/>
+          <a:lstStyle/>
+          <a:p>
+            <a:pPr indent="0" marL="0">
+              <a:buNone/>
+            </a:pPr>
+            <a:r>
+              <a:rPr lang="en-US" sz="900" dirty="0">
+                <a:solidFill>
+                  <a:srgbClr val="12756F"/>
+                </a:solidFill>
+                <a:latin typeface="Calibri" pitchFamily="34" charset="0"/>
+                <a:ea typeface="Calibri" pitchFamily="34" charset="-122"/>
+                <a:cs typeface="Calibri" pitchFamily="34" charset="-120"/>
+              </a:rPr>
+              <a:t>Employee relations</a:t>
+            </a:r>
+            <a:endParaRPr lang="en-US" sz="900" dirty="0"/>
+          </a:p>
+        </p:txBody>
+      </p:sp>
+      <p:sp>
+        <p:nvSpPr>
+          <p:cNvPr id="24" name="Text 22"/>
+          <p:cNvSpPr txBox="1"/>
+          <p:nvPr/>
+        </p:nvSpPr>
+        <p:spPr>
+          <a:xfrm>
+            <a:off x="3246120" y="3054096"/>
+            <a:ext cx="4846320" cy="438912"/>
           </a:xfrm>
           <a:prstGeom prst="rect">
             <a:avLst/>
@@ -12648,12 +15586,12 @@
           <a:p>
             <a:pPr indent="0" marL="0">
               <a:lnSpc>
-                <a:spcPts val="1250"/>
+                <a:spcPts val="1240"/>
               </a:lnSpc>
               <a:buNone/>
             </a:pPr>
             <a:r>
-              <a:rPr lang="en-US" sz="940" dirty="0">
+              <a:rPr lang="en-US" sz="930" dirty="0">
                 <a:solidFill>
                   <a:srgbClr val="5A6C82"/>
                 </a:solidFill>
@@ -12661,32 +15599,74 @@
                 <a:ea typeface="Calibri" pitchFamily="34" charset="-122"/>
                 <a:cs typeface="Calibri" pitchFamily="34" charset="-120"/>
               </a:rPr>
-              <a:t>Past the due date it reaches the line manager and HRBP on its own, while something can still be done.</a:t>
-            </a:r>
-            <a:endParaRPr lang="en-US" sz="940" dirty="0"/>
-          </a:p>
-        </p:txBody>
-      </p:sp>
-      <p:sp>
-        <p:nvSpPr>
-          <p:cNvPr id="20" name="Shape 18"/>
+              <a:t>Records the arrival date that starts the statutory Iqama clock; chases medicals and biometrics; registers Saudi hires with GOSI and Mudad.</a:t>
+            </a:r>
+            <a:endParaRPr lang="en-US" sz="930" dirty="0"/>
+          </a:p>
+        </p:txBody>
+      </p:sp>
+      <p:sp>
+        <p:nvSpPr>
+          <p:cNvPr id="25" name="Text 23"/>
+          <p:cNvSpPr txBox="1"/>
+          <p:nvPr/>
+        </p:nvSpPr>
+        <p:spPr>
+          <a:xfrm>
+            <a:off x="8229600" y="3054096"/>
+            <a:ext cx="2615184" cy="438912"/>
+          </a:xfrm>
+          <a:prstGeom prst="rect">
+            <a:avLst/>
+          </a:prstGeom>
+          <a:noFill/>
+          <a:ln/>
+        </p:spPr>
+        <p:txBody>
+          <a:bodyPr wrap="square" lIns="0" tIns="0" rIns="0" bIns="0" rtlCol="0" anchor="ctr"/>
+          <a:lstStyle/>
+          <a:p>
+            <a:pPr indent="0" marL="0">
+              <a:lnSpc>
+                <a:spcPts val="1240"/>
+              </a:lnSpc>
+              <a:buNone/>
+            </a:pPr>
+            <a:r>
+              <a:rPr lang="en-US" sz="930" b="1" i="1" dirty="0">
+                <a:solidFill>
+                  <a:srgbClr val="17795E"/>
+                </a:solidFill>
+                <a:latin typeface="Calibri" pitchFamily="34" charset="0"/>
+                <a:ea typeface="Calibri" pitchFamily="34" charset="-122"/>
+                <a:cs typeface="Calibri" pitchFamily="34" charset="-120"/>
+              </a:rPr>
+              <a:t>Nobody works without the paperwork that makes it legal.</a:t>
+            </a:r>
+            <a:endParaRPr lang="en-US" sz="930" dirty="0"/>
+          </a:p>
+        </p:txBody>
+      </p:sp>
+      <p:sp>
+        <p:nvSpPr>
+          <p:cNvPr id="26" name="Shape 24"/>
           <p:cNvSpPr/>
           <p:nvPr/>
         </p:nvSpPr>
         <p:spPr>
           <a:xfrm>
-            <a:off x="548640" y="4123944"/>
-            <a:ext cx="5394960" cy="676656"/>
+            <a:off x="548640" y="3584448"/>
+            <a:ext cx="10424160" cy="548640"/>
           </a:xfrm>
           <a:prstGeom prst="roundRect">
             <a:avLst>
-              <a:gd name="adj" fmla="val 10811"/>
+              <a:gd name="adj" fmla="val 10000"/>
             </a:avLst>
           </a:prstGeom>
           <a:solidFill>
             <a:srgbClr val="FFFFFF"/>
           </a:solidFill>
-          <a:ln w="9525">
+          <a:ln w="7620">
             <a:solidFill>
               <a:srgbClr val="E3E7EA"/>
             </a:solidFill>
@@ -12696,34 +15676,34 @@
       </p:sp>
       <p:sp>
         <p:nvSpPr>
-          <p:cNvPr id="21" name="Shape 19"/>
+          <p:cNvPr id="27" name="Shape 25"/>
           <p:cNvSpPr/>
           <p:nvPr/>
         </p:nvSpPr>
         <p:spPr>
           <a:xfrm>
-            <a:off x="731520" y="4288536"/>
-            <a:ext cx="365760" cy="365760"/>
+            <a:off x="694944" y="3685032"/>
+            <a:ext cx="347472" cy="347472"/>
           </a:xfrm>
           <a:prstGeom prst="ellipse">
             <a:avLst/>
           </a:prstGeom>
           <a:solidFill>
-            <a:srgbClr val="17795E"/>
+            <a:srgbClr val="12756F"/>
           </a:solidFill>
           <a:ln/>
         </p:spPr>
       </p:sp>
       <p:sp>
         <p:nvSpPr>
-          <p:cNvPr id="22" name="Text 20"/>
-          <p:cNvSpPr txBox="1"/>
-          <p:nvPr/>
-        </p:nvSpPr>
-        <p:spPr>
-          <a:xfrm>
-            <a:off x="731520" y="4288536"/>
-            <a:ext cx="365760" cy="365760"/>
+          <p:cNvPr id="28" name="Text 26"/>
+          <p:cNvSpPr txBox="1"/>
+          <p:nvPr/>
+        </p:nvSpPr>
+        <p:spPr>
+          <a:xfrm>
+            <a:off x="694944" y="3685032"/>
+            <a:ext cx="347472" cy="347472"/>
           </a:xfrm>
           <a:prstGeom prst="rect">
             <a:avLst/>
@@ -12739,7 +15719,7 @@
               <a:buNone/>
             </a:pPr>
             <a:r>
-              <a:rPr lang="en-US" sz="1200" b="1" dirty="0">
+              <a:rPr lang="en-US" sz="1050" b="1" dirty="0">
                 <a:solidFill>
                   <a:srgbClr val="FFFFFF"/>
                 </a:solidFill>
@@ -12747,38 +15727,38 @@
                 <a:ea typeface="Calibri" pitchFamily="34" charset="-122"/>
                 <a:cs typeface="Calibri" pitchFamily="34" charset="-120"/>
               </a:rPr>
-              <a:t>4</a:t>
-            </a:r>
-            <a:endParaRPr lang="en-US" sz="1200" dirty="0"/>
-          </a:p>
-        </p:txBody>
-      </p:sp>
-      <p:sp>
-        <p:nvSpPr>
-          <p:cNvPr id="23" name="Text 21"/>
-          <p:cNvSpPr txBox="1"/>
-          <p:nvPr/>
-        </p:nvSpPr>
-        <p:spPr>
-          <a:xfrm>
-            <a:off x="1225296" y="4206240"/>
-            <a:ext cx="4480560" cy="219456"/>
-          </a:xfrm>
-          <a:prstGeom prst="rect">
-            <a:avLst/>
-          </a:prstGeom>
-          <a:noFill/>
-          <a:ln/>
-        </p:spPr>
-        <p:txBody>
-          <a:bodyPr wrap="square" lIns="0" tIns="0" rIns="0" bIns="0" rtlCol="0" anchor="ctr"/>
-          <a:lstStyle/>
-          <a:p>
-            <a:pPr indent="0" marL="0">
-              <a:buNone/>
-            </a:pPr>
-            <a:r>
-              <a:rPr lang="en-US" sz="1250" b="1" dirty="0">
+              <a:t>BP</a:t>
+            </a:r>
+            <a:endParaRPr lang="en-US" sz="1050" dirty="0"/>
+          </a:p>
+        </p:txBody>
+      </p:sp>
+      <p:sp>
+        <p:nvSpPr>
+          <p:cNvPr id="29" name="Text 27"/>
+          <p:cNvSpPr txBox="1"/>
+          <p:nvPr/>
+        </p:nvSpPr>
+        <p:spPr>
+          <a:xfrm>
+            <a:off x="1152144" y="3639312"/>
+            <a:ext cx="1965960" cy="219456"/>
+          </a:xfrm>
+          <a:prstGeom prst="rect">
+            <a:avLst/>
+          </a:prstGeom>
+          <a:noFill/>
+          <a:ln/>
+        </p:spPr>
+        <p:txBody>
+          <a:bodyPr wrap="square" lIns="0" tIns="0" rIns="0" bIns="0" rtlCol="0" anchor="ctr"/>
+          <a:lstStyle/>
+          <a:p>
+            <a:pPr indent="0" marL="0">
+              <a:buNone/>
+            </a:pPr>
+            <a:r>
+              <a:rPr lang="en-US" sz="1100" b="1" dirty="0">
                 <a:solidFill>
                   <a:srgbClr val="0C1E33"/>
                 </a:solidFill>
@@ -12786,22 +15766,61 @@
                 <a:ea typeface="Arial" pitchFamily="34" charset="-122"/>
                 <a:cs typeface="Arial" pitchFamily="34" charset="-120"/>
               </a:rPr>
-              <a:t>Prove</a:t>
-            </a:r>
-            <a:endParaRPr lang="en-US" sz="1250" dirty="0"/>
-          </a:p>
-        </p:txBody>
-      </p:sp>
-      <p:sp>
-        <p:nvSpPr>
-          <p:cNvPr id="24" name="Text 22"/>
-          <p:cNvSpPr txBox="1"/>
-          <p:nvPr/>
-        </p:nvSpPr>
-        <p:spPr>
-          <a:xfrm>
-            <a:off x="1225296" y="4434840"/>
-            <a:ext cx="4526280" cy="310896"/>
+              <a:t>HR Business Partner</a:t>
+            </a:r>
+            <a:endParaRPr lang="en-US" sz="1100" dirty="0"/>
+          </a:p>
+        </p:txBody>
+      </p:sp>
+      <p:sp>
+        <p:nvSpPr>
+          <p:cNvPr id="30" name="Text 28"/>
+          <p:cNvSpPr txBox="1"/>
+          <p:nvPr/>
+        </p:nvSpPr>
+        <p:spPr>
+          <a:xfrm>
+            <a:off x="1152144" y="3858768"/>
+            <a:ext cx="1965960" cy="182880"/>
+          </a:xfrm>
+          <a:prstGeom prst="rect">
+            <a:avLst/>
+          </a:prstGeom>
+          <a:noFill/>
+          <a:ln/>
+        </p:spPr>
+        <p:txBody>
+          <a:bodyPr wrap="square" lIns="0" tIns="0" rIns="0" bIns="0" rtlCol="0" anchor="ctr"/>
+          <a:lstStyle/>
+          <a:p>
+            <a:pPr indent="0" marL="0">
+              <a:buNone/>
+            </a:pPr>
+            <a:r>
+              <a:rPr lang="en-US" sz="900" dirty="0">
+                <a:solidFill>
+                  <a:srgbClr val="12756F"/>
+                </a:solidFill>
+                <a:latin typeface="Calibri" pitchFamily="34" charset="0"/>
+                <a:ea typeface="Calibri" pitchFamily="34" charset="-122"/>
+                <a:cs typeface="Calibri" pitchFamily="34" charset="-120"/>
+              </a:rPr>
+              <a:t>Employee relations</a:t>
+            </a:r>
+            <a:endParaRPr lang="en-US" sz="900" dirty="0"/>
+          </a:p>
+        </p:txBody>
+      </p:sp>
+      <p:sp>
+        <p:nvSpPr>
+          <p:cNvPr id="31" name="Text 29"/>
+          <p:cNvSpPr txBox="1"/>
+          <p:nvPr/>
+        </p:nvSpPr>
+        <p:spPr>
+          <a:xfrm>
+            <a:off x="3246120" y="3639312"/>
+            <a:ext cx="4846320" cy="438912"/>
           </a:xfrm>
           <a:prstGeom prst="rect">
             <a:avLst/>
@@ -12815,12 +15834,12 @@
           <a:p>
             <a:pPr indent="0" marL="0">
               <a:lnSpc>
-                <a:spcPts val="1250"/>
+                <a:spcPts val="1240"/>
               </a:lnSpc>
               <a:buNone/>
             </a:pPr>
             <a:r>
-              <a:rPr lang="en-US" sz="940" dirty="0">
+              <a:rPr lang="en-US" sz="930" dirty="0">
                 <a:solidFill>
                   <a:srgbClr val="5A6C82"/>
                 </a:solidFill>
@@ -12828,34 +15847,76 @@
                 <a:ea typeface="Calibri" pitchFamily="34" charset="-122"/>
                 <a:cs typeface="Calibri" pitchFamily="34" charset="-120"/>
               </a:rPr>
-              <a:t>Who had it, when they were reminded, what they uploaded. A Qiwa or GOSI inspection becomes a report.</a:t>
-            </a:r>
-            <a:endParaRPr lang="en-US" sz="940" dirty="0"/>
-          </a:p>
-        </p:txBody>
-      </p:sp>
-      <p:sp>
-        <p:nvSpPr>
-          <p:cNvPr id="25" name="Shape 23"/>
+              <a:t>Approves exit re-entry against dues and notice; reviews the Nitaqat impact of a resignation before it is actioned; starts final exit once settlement is agreed.</a:t>
+            </a:r>
+            <a:endParaRPr lang="en-US" sz="930" dirty="0"/>
+          </a:p>
+        </p:txBody>
+      </p:sp>
+      <p:sp>
+        <p:nvSpPr>
+          <p:cNvPr id="32" name="Text 30"/>
+          <p:cNvSpPr txBox="1"/>
+          <p:nvPr/>
+        </p:nvSpPr>
+        <p:spPr>
+          <a:xfrm>
+            <a:off x="8229600" y="3639312"/>
+            <a:ext cx="2615184" cy="438912"/>
+          </a:xfrm>
+          <a:prstGeom prst="rect">
+            <a:avLst/>
+          </a:prstGeom>
+          <a:noFill/>
+          <a:ln/>
+        </p:spPr>
+        <p:txBody>
+          <a:bodyPr wrap="square" lIns="0" tIns="0" rIns="0" bIns="0" rtlCol="0" anchor="ctr"/>
+          <a:lstStyle/>
+          <a:p>
+            <a:pPr indent="0" marL="0">
+              <a:lnSpc>
+                <a:spcPts val="1240"/>
+              </a:lnSpc>
+              <a:buNone/>
+            </a:pPr>
+            <a:r>
+              <a:rPr lang="en-US" sz="930" b="1" i="1" dirty="0">
+                <a:solidFill>
+                  <a:srgbClr val="17795E"/>
+                </a:solidFill>
+                <a:latin typeface="Calibri" pitchFamily="34" charset="0"/>
+                <a:ea typeface="Calibri" pitchFamily="34" charset="-122"/>
+                <a:cs typeface="Calibri" pitchFamily="34" charset="-120"/>
+              </a:rPr>
+              <a:t>Told before a resignation moves the band, not after.</a:t>
+            </a:r>
+            <a:endParaRPr lang="en-US" sz="930" dirty="0"/>
+          </a:p>
+        </p:txBody>
+      </p:sp>
+      <p:sp>
+        <p:nvSpPr>
+          <p:cNvPr id="33" name="Shape 31"/>
           <p:cNvSpPr/>
           <p:nvPr/>
         </p:nvSpPr>
         <p:spPr>
           <a:xfrm>
-            <a:off x="548640" y="4956048"/>
-            <a:ext cx="5394960" cy="1335024"/>
+            <a:off x="548640" y="4169664"/>
+            <a:ext cx="10424160" cy="548640"/>
           </a:xfrm>
           <a:prstGeom prst="roundRect">
             <a:avLst>
-              <a:gd name="adj" fmla="val 5479"/>
+              <a:gd name="adj" fmla="val 10000"/>
             </a:avLst>
           </a:prstGeom>
           <a:solidFill>
-            <a:srgbClr val="E4F5F3"/>
+            <a:srgbClr val="F4F6F7"/>
           </a:solidFill>
-          <a:ln w="11430">
+          <a:ln w="7620">
             <a:solidFill>
-              <a:srgbClr val="20A098"/>
+              <a:srgbClr val="E3E7EA"/>
             </a:solidFill>
             <a:prstDash val="solid"/>
           </a:ln>
@@ -12863,53 +15924,151 @@
       </p:sp>
       <p:sp>
         <p:nvSpPr>
-          <p:cNvPr id="26" name="Text 24"/>
-          <p:cNvSpPr txBox="1"/>
-          <p:nvPr/>
-        </p:nvSpPr>
-        <p:spPr>
-          <a:xfrm>
-            <a:off x="749808" y="5065776"/>
-            <a:ext cx="5029200" cy="219456"/>
-          </a:xfrm>
-          <a:prstGeom prst="rect">
-            <a:avLst/>
-          </a:prstGeom>
-          <a:noFill/>
-          <a:ln/>
-        </p:spPr>
-        <p:txBody>
-          <a:bodyPr wrap="square" lIns="0" tIns="0" rIns="0" bIns="0" rtlCol="0" anchor="ctr"/>
-          <a:lstStyle/>
-          <a:p>
-            <a:pPr indent="0" marL="0">
-              <a:buNone/>
-            </a:pPr>
-            <a:r>
-              <a:rPr lang="en-US" sz="1150" b="1" dirty="0">
-                <a:solidFill>
-                  <a:srgbClr val="12756F"/>
+          <p:cNvPr id="34" name="Shape 32"/>
+          <p:cNvSpPr/>
+          <p:nvPr/>
+        </p:nvSpPr>
+        <p:spPr>
+          <a:xfrm>
+            <a:off x="694944" y="4270248"/>
+            <a:ext cx="347472" cy="347472"/>
+          </a:xfrm>
+          <a:prstGeom prst="ellipse">
+            <a:avLst/>
+          </a:prstGeom>
+          <a:solidFill>
+            <a:srgbClr val="20A098"/>
+          </a:solidFill>
+          <a:ln/>
+        </p:spPr>
+      </p:sp>
+      <p:sp>
+        <p:nvSpPr>
+          <p:cNvPr id="35" name="Text 33"/>
+          <p:cNvSpPr txBox="1"/>
+          <p:nvPr/>
+        </p:nvSpPr>
+        <p:spPr>
+          <a:xfrm>
+            <a:off x="694944" y="4270248"/>
+            <a:ext cx="347472" cy="347472"/>
+          </a:xfrm>
+          <a:prstGeom prst="rect">
+            <a:avLst/>
+          </a:prstGeom>
+          <a:noFill/>
+          <a:ln/>
+        </p:spPr>
+        <p:txBody>
+          <a:bodyPr wrap="square" lIns="0" tIns="0" rIns="0" bIns="0" rtlCol="0" anchor="ctr"/>
+          <a:lstStyle/>
+          <a:p>
+            <a:pPr algn="ctr" indent="0" marL="0">
+              <a:buNone/>
+            </a:pPr>
+            <a:r>
+              <a:rPr lang="en-US" sz="1050" b="1" dirty="0">
+                <a:solidFill>
+                  <a:srgbClr val="FFFFFF"/>
+                </a:solidFill>
+                <a:latin typeface="Calibri" pitchFamily="34" charset="0"/>
+                <a:ea typeface="Calibri" pitchFamily="34" charset="-122"/>
+                <a:cs typeface="Calibri" pitchFamily="34" charset="-120"/>
+              </a:rPr>
+              <a:t>EM</a:t>
+            </a:r>
+            <a:endParaRPr lang="en-US" sz="1050" dirty="0"/>
+          </a:p>
+        </p:txBody>
+      </p:sp>
+      <p:sp>
+        <p:nvSpPr>
+          <p:cNvPr id="36" name="Text 34"/>
+          <p:cNvSpPr txBox="1"/>
+          <p:nvPr/>
+        </p:nvSpPr>
+        <p:spPr>
+          <a:xfrm>
+            <a:off x="1152144" y="4224528"/>
+            <a:ext cx="1965960" cy="219456"/>
+          </a:xfrm>
+          <a:prstGeom prst="rect">
+            <a:avLst/>
+          </a:prstGeom>
+          <a:noFill/>
+          <a:ln/>
+        </p:spPr>
+        <p:txBody>
+          <a:bodyPr wrap="square" lIns="0" tIns="0" rIns="0" bIns="0" rtlCol="0" anchor="ctr"/>
+          <a:lstStyle/>
+          <a:p>
+            <a:pPr indent="0" marL="0">
+              <a:buNone/>
+            </a:pPr>
+            <a:r>
+              <a:rPr lang="en-US" sz="1100" b="1" dirty="0">
+                <a:solidFill>
+                  <a:srgbClr val="0C1E33"/>
                 </a:solidFill>
                 <a:latin typeface="Arial" pitchFamily="34" charset="0"/>
                 <a:ea typeface="Arial" pitchFamily="34" charset="-122"/>
                 <a:cs typeface="Arial" pitchFamily="34" charset="-120"/>
               </a:rPr>
-              <a:t>The Saudi cost line finance actually worries about</a:t>
-            </a:r>
-            <a:endParaRPr lang="en-US" sz="1150" dirty="0"/>
-          </a:p>
-        </p:txBody>
-      </p:sp>
-      <p:sp>
-        <p:nvSpPr>
-          <p:cNvPr id="27" name="Text 25"/>
-          <p:cNvSpPr txBox="1"/>
-          <p:nvPr/>
-        </p:nvSpPr>
-        <p:spPr>
-          <a:xfrm>
-            <a:off x="749808" y="5321808"/>
-            <a:ext cx="5029200" cy="859536"/>
+              <a:t>Employee</a:t>
+            </a:r>
+            <a:endParaRPr lang="en-US" sz="1100" dirty="0"/>
+          </a:p>
+        </p:txBody>
+      </p:sp>
+      <p:sp>
+        <p:nvSpPr>
+          <p:cNvPr id="37" name="Text 35"/>
+          <p:cNvSpPr txBox="1"/>
+          <p:nvPr/>
+        </p:nvSpPr>
+        <p:spPr>
+          <a:xfrm>
+            <a:off x="1152144" y="4443984"/>
+            <a:ext cx="1965960" cy="182880"/>
+          </a:xfrm>
+          <a:prstGeom prst="rect">
+            <a:avLst/>
+          </a:prstGeom>
+          <a:noFill/>
+          <a:ln/>
+        </p:spPr>
+        <p:txBody>
+          <a:bodyPr wrap="square" lIns="0" tIns="0" rIns="0" bIns="0" rtlCol="0" anchor="ctr"/>
+          <a:lstStyle/>
+          <a:p>
+            <a:pPr indent="0" marL="0">
+              <a:buNone/>
+            </a:pPr>
+            <a:r>
+              <a:rPr lang="en-US" sz="900" dirty="0">
+                <a:solidFill>
+                  <a:srgbClr val="12756F"/>
+                </a:solidFill>
+                <a:latin typeface="Calibri" pitchFamily="34" charset="0"/>
+                <a:ea typeface="Calibri" pitchFamily="34" charset="-122"/>
+                <a:cs typeface="Calibri" pitchFamily="34" charset="-120"/>
+              </a:rPr>
+              <a:t>Self-service</a:t>
+            </a:r>
+            <a:endParaRPr lang="en-US" sz="900" dirty="0"/>
+          </a:p>
+        </p:txBody>
+      </p:sp>
+      <p:sp>
+        <p:nvSpPr>
+          <p:cNvPr id="38" name="Text 36"/>
+          <p:cNvSpPr txBox="1"/>
+          <p:nvPr/>
+        </p:nvSpPr>
+        <p:spPr>
+          <a:xfrm>
+            <a:off x="3246120" y="4224528"/>
+            <a:ext cx="4846320" cy="438912"/>
           </a:xfrm>
           <a:prstGeom prst="rect">
             <a:avLst/>
@@ -12923,66 +16082,241 @@
           <a:p>
             <a:pPr indent="0" marL="0">
               <a:lnSpc>
-                <a:spcPts val="1300"/>
+                <a:spcPts val="1240"/>
               </a:lnSpc>
               <a:buNone/>
             </a:pPr>
             <a:r>
-              <a:rPr lang="en-US" sz="960" dirty="0">
+              <a:rPr lang="en-US" sz="930" dirty="0">
+                <a:solidFill>
+                  <a:srgbClr val="5A6C82"/>
+                </a:solidFill>
+                <a:latin typeface="Calibri" pitchFamily="34" charset="0"/>
+                <a:ea typeface="Calibri" pitchFamily="34" charset="-122"/>
+                <a:cs typeface="Calibri" pitchFamily="34" charset="-120"/>
+              </a:rPr>
+              <a:t>Requests exit re-entry with travel dates; confirms medical and biometrics; signs the Qiwa contract; confirms receipt of the renewed Iqama.</a:t>
+            </a:r>
+            <a:endParaRPr lang="en-US" sz="930" dirty="0"/>
+          </a:p>
+        </p:txBody>
+      </p:sp>
+      <p:sp>
+        <p:nvSpPr>
+          <p:cNvPr id="39" name="Text 37"/>
+          <p:cNvSpPr txBox="1"/>
+          <p:nvPr/>
+        </p:nvSpPr>
+        <p:spPr>
+          <a:xfrm>
+            <a:off x="8229600" y="4224528"/>
+            <a:ext cx="2615184" cy="438912"/>
+          </a:xfrm>
+          <a:prstGeom prst="rect">
+            <a:avLst/>
+          </a:prstGeom>
+          <a:noFill/>
+          <a:ln/>
+        </p:spPr>
+        <p:txBody>
+          <a:bodyPr wrap="square" lIns="0" tIns="0" rIns="0" bIns="0" rtlCol="0" anchor="ctr"/>
+          <a:lstStyle/>
+          <a:p>
+            <a:pPr indent="0" marL="0">
+              <a:lnSpc>
+                <a:spcPts val="1240"/>
+              </a:lnSpc>
+              <a:buNone/>
+            </a:pPr>
+            <a:r>
+              <a:rPr lang="en-US" sz="930" b="1" i="1" dirty="0">
+                <a:solidFill>
+                  <a:srgbClr val="17795E"/>
+                </a:solidFill>
+                <a:latin typeface="Calibri" pitchFamily="34" charset="0"/>
+                <a:ea typeface="Calibri" pitchFamily="34" charset="-122"/>
+                <a:cs typeface="Calibri" pitchFamily="34" charset="-120"/>
+              </a:rPr>
+              <a:t>Sees their own Iqama expiry and their return-by date.</a:t>
+            </a:r>
+            <a:endParaRPr lang="en-US" sz="930" dirty="0"/>
+          </a:p>
+        </p:txBody>
+      </p:sp>
+      <p:sp>
+        <p:nvSpPr>
+          <p:cNvPr id="40" name="Shape 38"/>
+          <p:cNvSpPr/>
+          <p:nvPr/>
+        </p:nvSpPr>
+        <p:spPr>
+          <a:xfrm>
+            <a:off x="548640" y="4754880"/>
+            <a:ext cx="10424160" cy="548640"/>
+          </a:xfrm>
+          <a:prstGeom prst="roundRect">
+            <a:avLst>
+              <a:gd name="adj" fmla="val 10000"/>
+            </a:avLst>
+          </a:prstGeom>
+          <a:solidFill>
+            <a:srgbClr val="FFFFFF"/>
+          </a:solidFill>
+          <a:ln w="7620">
+            <a:solidFill>
+              <a:srgbClr val="E3E7EA"/>
+            </a:solidFill>
+            <a:prstDash val="solid"/>
+          </a:ln>
+        </p:spPr>
+      </p:sp>
+      <p:sp>
+        <p:nvSpPr>
+          <p:cNvPr id="41" name="Shape 39"/>
+          <p:cNvSpPr/>
+          <p:nvPr/>
+        </p:nvSpPr>
+        <p:spPr>
+          <a:xfrm>
+            <a:off x="694944" y="4855464"/>
+            <a:ext cx="347472" cy="347472"/>
+          </a:xfrm>
+          <a:prstGeom prst="ellipse">
+            <a:avLst/>
+          </a:prstGeom>
+          <a:solidFill>
+            <a:srgbClr val="12756F"/>
+          </a:solidFill>
+          <a:ln/>
+        </p:spPr>
+      </p:sp>
+      <p:sp>
+        <p:nvSpPr>
+          <p:cNvPr id="42" name="Text 40"/>
+          <p:cNvSpPr txBox="1"/>
+          <p:nvPr/>
+        </p:nvSpPr>
+        <p:spPr>
+          <a:xfrm>
+            <a:off x="694944" y="4855464"/>
+            <a:ext cx="347472" cy="347472"/>
+          </a:xfrm>
+          <a:prstGeom prst="rect">
+            <a:avLst/>
+          </a:prstGeom>
+          <a:noFill/>
+          <a:ln/>
+        </p:spPr>
+        <p:txBody>
+          <a:bodyPr wrap="square" lIns="0" tIns="0" rIns="0" bIns="0" rtlCol="0" anchor="ctr"/>
+          <a:lstStyle/>
+          <a:p>
+            <a:pPr algn="ctr" indent="0" marL="0">
+              <a:buNone/>
+            </a:pPr>
+            <a:r>
+              <a:rPr lang="en-US" sz="1050" b="1" dirty="0">
+                <a:solidFill>
+                  <a:srgbClr val="FFFFFF"/>
+                </a:solidFill>
+                <a:latin typeface="Calibri" pitchFamily="34" charset="0"/>
+                <a:ea typeface="Calibri" pitchFamily="34" charset="-122"/>
+                <a:cs typeface="Calibri" pitchFamily="34" charset="-120"/>
+              </a:rPr>
+              <a:t>FI</a:t>
+            </a:r>
+            <a:endParaRPr lang="en-US" sz="1050" dirty="0"/>
+          </a:p>
+        </p:txBody>
+      </p:sp>
+      <p:sp>
+        <p:nvSpPr>
+          <p:cNvPr id="43" name="Text 41"/>
+          <p:cNvSpPr txBox="1"/>
+          <p:nvPr/>
+        </p:nvSpPr>
+        <p:spPr>
+          <a:xfrm>
+            <a:off x="1152144" y="4809744"/>
+            <a:ext cx="1965960" cy="219456"/>
+          </a:xfrm>
+          <a:prstGeom prst="rect">
+            <a:avLst/>
+          </a:prstGeom>
+          <a:noFill/>
+          <a:ln/>
+        </p:spPr>
+        <p:txBody>
+          <a:bodyPr wrap="square" lIns="0" tIns="0" rIns="0" bIns="0" rtlCol="0" anchor="ctr"/>
+          <a:lstStyle/>
+          <a:p>
+            <a:pPr indent="0" marL="0">
+              <a:buNone/>
+            </a:pPr>
+            <a:r>
+              <a:rPr lang="en-US" sz="1100" b="1" dirty="0">
                 <a:solidFill>
                   <a:srgbClr val="0C1E33"/>
                 </a:solidFill>
-                <a:latin typeface="Calibri" pitchFamily="34" charset="0"/>
-                <a:ea typeface="Calibri" pitchFamily="34" charset="-122"/>
-                <a:cs typeface="Calibri" pitchFamily="34" charset="-120"/>
-              </a:rPr>
-              <a:t>The expat levy is charged per employee per year and renewals cluster around hiring dates. We forecast levy and fees against the renewal calendar, so a heavy quarter is budgeted rather than absorbed. Every payment carries a SADAD reference, a receipt and a GL account.</a:t>
-            </a:r>
-            <a:endParaRPr lang="en-US" sz="960" dirty="0"/>
-          </a:p>
-        </p:txBody>
-      </p:sp>
-      <p:pic>
-        <p:nvPicPr>
-          <p:cNvPr id="28" name="Image 0" descr="./img/report-payment.jpg">    </p:cNvPr>
-          <p:cNvPicPr>
-            <a:picLocks noChangeAspect="1"/>
-          </p:cNvPicPr>
-          <p:nvPr/>
-        </p:nvPicPr>
-        <p:blipFill>
-          <a:blip r:embed="rId1"/>
-          <a:stretch>
-            <a:fillRect/>
-          </a:stretch>
-        </p:blipFill>
-        <p:spPr>
-          <a:xfrm>
-            <a:off x="6172200" y="1792224"/>
-            <a:ext cx="5440680" cy="914400"/>
-          </a:xfrm>
-          <a:prstGeom prst="rect">
-            <a:avLst/>
-          </a:prstGeom>
-          <a:effectLst>
-            <a:outerShdw sx="100000" sy="100000" kx="0" ky="0" algn="bl" rotWithShape="0" blurRad="177800" dist="38100" dir="5400000">
-              <a:srgbClr val="000000">
-                <a:alpha val="20000"/>
-              </a:srgbClr>
-            </a:outerShdw>
-          </a:effectLst>
-        </p:spPr>
-      </p:pic>
-      <p:sp>
-        <p:nvSpPr>
-          <p:cNvPr id="29" name="Text 26"/>
-          <p:cNvSpPr txBox="1"/>
-          <p:nvPr/>
-        </p:nvSpPr>
-        <p:spPr>
-          <a:xfrm>
-            <a:off x="6172200" y="5230368"/>
-            <a:ext cx="5440680" cy="457200"/>
+                <a:latin typeface="Arial" pitchFamily="34" charset="0"/>
+                <a:ea typeface="Arial" pitchFamily="34" charset="-122"/>
+                <a:cs typeface="Arial" pitchFamily="34" charset="-120"/>
+              </a:rPr>
+              <a:t>Finance Controller</a:t>
+            </a:r>
+            <a:endParaRPr lang="en-US" sz="1100" dirty="0"/>
+          </a:p>
+        </p:txBody>
+      </p:sp>
+      <p:sp>
+        <p:nvSpPr>
+          <p:cNvPr id="44" name="Text 42"/>
+          <p:cNvSpPr txBox="1"/>
+          <p:nvPr/>
+        </p:nvSpPr>
+        <p:spPr>
+          <a:xfrm>
+            <a:off x="1152144" y="5029200"/>
+            <a:ext cx="1965960" cy="182880"/>
+          </a:xfrm>
+          <a:prstGeom prst="rect">
+            <a:avLst/>
+          </a:prstGeom>
+          <a:noFill/>
+          <a:ln/>
+        </p:spPr>
+        <p:txBody>
+          <a:bodyPr wrap="square" lIns="0" tIns="0" rIns="0" bIns="0" rtlCol="0" anchor="ctr"/>
+          <a:lstStyle/>
+          <a:p>
+            <a:pPr indent="0" marL="0">
+              <a:buNone/>
+            </a:pPr>
+            <a:r>
+              <a:rPr lang="en-US" sz="900" dirty="0">
+                <a:solidFill>
+                  <a:srgbClr val="12756F"/>
+                </a:solidFill>
+                <a:latin typeface="Calibri" pitchFamily="34" charset="0"/>
+                <a:ea typeface="Calibri" pitchFamily="34" charset="-122"/>
+                <a:cs typeface="Calibri" pitchFamily="34" charset="-120"/>
+              </a:rPr>
+              <a:t>Payments and GL</a:t>
+            </a:r>
+            <a:endParaRPr lang="en-US" sz="900" dirty="0"/>
+          </a:p>
+        </p:txBody>
+      </p:sp>
+      <p:sp>
+        <p:nvSpPr>
+          <p:cNvPr id="45" name="Text 43"/>
+          <p:cNvSpPr txBox="1"/>
+          <p:nvPr/>
+        </p:nvSpPr>
+        <p:spPr>
+          <a:xfrm>
+            <a:off x="3246120" y="4809744"/>
+            <a:ext cx="4846320" cy="438912"/>
           </a:xfrm>
           <a:prstGeom prst="rect">
             <a:avLst/>
@@ -12996,12 +16330,12 @@
           <a:p>
             <a:pPr indent="0" marL="0">
               <a:lnSpc>
-                <a:spcPts val="1350"/>
+                <a:spcPts val="1240"/>
               </a:lnSpc>
               <a:buNone/>
             </a:pPr>
             <a:r>
-              <a:rPr lang="en-US" sz="1000" i="1" dirty="0">
+              <a:rPr lang="en-US" sz="930" dirty="0">
                 <a:solidFill>
                   <a:srgbClr val="5A6C82"/>
                 </a:solidFill>
@@ -13009,15 +16343,422 @@
                 <a:ea typeface="Calibri" pitchFamily="34" charset="-122"/>
                 <a:cs typeface="Calibri" pitchFamily="34" charset="-120"/>
               </a:rPr>
-              <a:t>Qiwa contract fee, expat levy, Iqama issue fee, exit re-entry, transfer fee, medical insurance. Each with its own GL account and its own receipt, one click away.</a:t>
-            </a:r>
-            <a:endParaRPr lang="en-US" sz="1000" dirty="0"/>
-          </a:p>
-        </p:txBody>
-      </p:sp>
-      <p:sp>
-        <p:nvSpPr>
-          <p:cNvPr id="30" name="Text 27"/>
+              <a:t>Reconciles SADAD payments against receipts; posts to GL; forecasts expat levy against the renewal calendar.</a:t>
+            </a:r>
+            <a:endParaRPr lang="en-US" sz="930" dirty="0"/>
+          </a:p>
+        </p:txBody>
+      </p:sp>
+      <p:sp>
+        <p:nvSpPr>
+          <p:cNvPr id="46" name="Text 44"/>
+          <p:cNvSpPr txBox="1"/>
+          <p:nvPr/>
+        </p:nvSpPr>
+        <p:spPr>
+          <a:xfrm>
+            <a:off x="8229600" y="4809744"/>
+            <a:ext cx="2615184" cy="438912"/>
+          </a:xfrm>
+          <a:prstGeom prst="rect">
+            <a:avLst/>
+          </a:prstGeom>
+          <a:noFill/>
+          <a:ln/>
+        </p:spPr>
+        <p:txBody>
+          <a:bodyPr wrap="square" lIns="0" tIns="0" rIns="0" bIns="0" rtlCol="0" anchor="ctr"/>
+          <a:lstStyle/>
+          <a:p>
+            <a:pPr indent="0" marL="0">
+              <a:lnSpc>
+                <a:spcPts val="1240"/>
+              </a:lnSpc>
+              <a:buNone/>
+            </a:pPr>
+            <a:r>
+              <a:rPr lang="en-US" sz="930" b="1" i="1" dirty="0">
+                <a:solidFill>
+                  <a:srgbClr val="17795E"/>
+                </a:solidFill>
+                <a:latin typeface="Calibri" pitchFamily="34" charset="0"/>
+                <a:ea typeface="Calibri" pitchFamily="34" charset="-122"/>
+                <a:cs typeface="Calibri" pitchFamily="34" charset="-120"/>
+              </a:rPr>
+              <a:t>The levy stops being a surprise.</a:t>
+            </a:r>
+            <a:endParaRPr lang="en-US" sz="930" dirty="0"/>
+          </a:p>
+        </p:txBody>
+      </p:sp>
+      <p:sp>
+        <p:nvSpPr>
+          <p:cNvPr id="47" name="Shape 45"/>
+          <p:cNvSpPr/>
+          <p:nvPr/>
+        </p:nvSpPr>
+        <p:spPr>
+          <a:xfrm>
+            <a:off x="548640" y="5340096"/>
+            <a:ext cx="10424160" cy="548640"/>
+          </a:xfrm>
+          <a:prstGeom prst="roundRect">
+            <a:avLst>
+              <a:gd name="adj" fmla="val 10000"/>
+            </a:avLst>
+          </a:prstGeom>
+          <a:solidFill>
+            <a:srgbClr val="F4F6F7"/>
+          </a:solidFill>
+          <a:ln w="7620">
+            <a:solidFill>
+              <a:srgbClr val="E3E7EA"/>
+            </a:solidFill>
+            <a:prstDash val="solid"/>
+          </a:ln>
+        </p:spPr>
+      </p:sp>
+      <p:sp>
+        <p:nvSpPr>
+          <p:cNvPr id="48" name="Shape 46"/>
+          <p:cNvSpPr/>
+          <p:nvPr/>
+        </p:nvSpPr>
+        <p:spPr>
+          <a:xfrm>
+            <a:off x="694944" y="5440680"/>
+            <a:ext cx="347472" cy="347472"/>
+          </a:xfrm>
+          <a:prstGeom prst="ellipse">
+            <a:avLst/>
+          </a:prstGeom>
+          <a:solidFill>
+            <a:srgbClr val="16304C"/>
+          </a:solidFill>
+          <a:ln/>
+        </p:spPr>
+      </p:sp>
+      <p:sp>
+        <p:nvSpPr>
+          <p:cNvPr id="49" name="Text 47"/>
+          <p:cNvSpPr txBox="1"/>
+          <p:nvPr/>
+        </p:nvSpPr>
+        <p:spPr>
+          <a:xfrm>
+            <a:off x="694944" y="5440680"/>
+            <a:ext cx="347472" cy="347472"/>
+          </a:xfrm>
+          <a:prstGeom prst="rect">
+            <a:avLst/>
+          </a:prstGeom>
+          <a:noFill/>
+          <a:ln/>
+        </p:spPr>
+        <p:txBody>
+          <a:bodyPr wrap="square" lIns="0" tIns="0" rIns="0" bIns="0" rtlCol="0" anchor="ctr"/>
+          <a:lstStyle/>
+          <a:p>
+            <a:pPr algn="ctr" indent="0" marL="0">
+              <a:buNone/>
+            </a:pPr>
+            <a:r>
+              <a:rPr lang="en-US" sz="1050" b="1" dirty="0">
+                <a:solidFill>
+                  <a:srgbClr val="FFFFFF"/>
+                </a:solidFill>
+                <a:latin typeface="Calibri" pitchFamily="34" charset="0"/>
+                <a:ea typeface="Calibri" pitchFamily="34" charset="-122"/>
+                <a:cs typeface="Calibri" pitchFamily="34" charset="-120"/>
+              </a:rPr>
+              <a:t>HR</a:t>
+            </a:r>
+            <a:endParaRPr lang="en-US" sz="1050" dirty="0"/>
+          </a:p>
+        </p:txBody>
+      </p:sp>
+      <p:sp>
+        <p:nvSpPr>
+          <p:cNvPr id="50" name="Text 48"/>
+          <p:cNvSpPr txBox="1"/>
+          <p:nvPr/>
+        </p:nvSpPr>
+        <p:spPr>
+          <a:xfrm>
+            <a:off x="1152144" y="5394960"/>
+            <a:ext cx="1965960" cy="219456"/>
+          </a:xfrm>
+          <a:prstGeom prst="rect">
+            <a:avLst/>
+          </a:prstGeom>
+          <a:noFill/>
+          <a:ln/>
+        </p:spPr>
+        <p:txBody>
+          <a:bodyPr wrap="square" lIns="0" tIns="0" rIns="0" bIns="0" rtlCol="0" anchor="ctr"/>
+          <a:lstStyle/>
+          <a:p>
+            <a:pPr indent="0" marL="0">
+              <a:buNone/>
+            </a:pPr>
+            <a:r>
+              <a:rPr lang="en-US" sz="1100" b="1" dirty="0">
+                <a:solidFill>
+                  <a:srgbClr val="0C1E33"/>
+                </a:solidFill>
+                <a:latin typeface="Arial" pitchFamily="34" charset="0"/>
+                <a:ea typeface="Arial" pitchFamily="34" charset="-122"/>
+                <a:cs typeface="Arial" pitchFamily="34" charset="-120"/>
+              </a:rPr>
+              <a:t>Head of HR</a:t>
+            </a:r>
+            <a:endParaRPr lang="en-US" sz="1100" dirty="0"/>
+          </a:p>
+        </p:txBody>
+      </p:sp>
+      <p:sp>
+        <p:nvSpPr>
+          <p:cNvPr id="51" name="Text 49"/>
+          <p:cNvSpPr txBox="1"/>
+          <p:nvPr/>
+        </p:nvSpPr>
+        <p:spPr>
+          <a:xfrm>
+            <a:off x="1152144" y="5614416"/>
+            <a:ext cx="1965960" cy="182880"/>
+          </a:xfrm>
+          <a:prstGeom prst="rect">
+            <a:avLst/>
+          </a:prstGeom>
+          <a:noFill/>
+          <a:ln/>
+        </p:spPr>
+        <p:txBody>
+          <a:bodyPr wrap="square" lIns="0" tIns="0" rIns="0" bIns="0" rtlCol="0" anchor="ctr"/>
+          <a:lstStyle/>
+          <a:p>
+            <a:pPr indent="0" marL="0">
+              <a:buNone/>
+            </a:pPr>
+            <a:r>
+              <a:rPr lang="en-US" sz="900" dirty="0">
+                <a:solidFill>
+                  <a:srgbClr val="12756F"/>
+                </a:solidFill>
+                <a:latin typeface="Calibri" pitchFamily="34" charset="0"/>
+                <a:ea typeface="Calibri" pitchFamily="34" charset="-122"/>
+                <a:cs typeface="Calibri" pitchFamily="34" charset="-120"/>
+              </a:rPr>
+              <a:t>Governance and risk</a:t>
+            </a:r>
+            <a:endParaRPr lang="en-US" sz="900" dirty="0"/>
+          </a:p>
+        </p:txBody>
+      </p:sp>
+      <p:sp>
+        <p:nvSpPr>
+          <p:cNvPr id="52" name="Text 50"/>
+          <p:cNvSpPr txBox="1"/>
+          <p:nvPr/>
+        </p:nvSpPr>
+        <p:spPr>
+          <a:xfrm>
+            <a:off x="3246120" y="5394960"/>
+            <a:ext cx="4846320" cy="438912"/>
+          </a:xfrm>
+          <a:prstGeom prst="rect">
+            <a:avLst/>
+          </a:prstGeom>
+          <a:noFill/>
+          <a:ln/>
+        </p:spPr>
+        <p:txBody>
+          <a:bodyPr wrap="square" lIns="0" tIns="0" rIns="0" bIns="0" rtlCol="0" anchor="ctr"/>
+          <a:lstStyle/>
+          <a:p>
+            <a:pPr indent="0" marL="0">
+              <a:lnSpc>
+                <a:spcPts val="1240"/>
+              </a:lnSpc>
+              <a:buNone/>
+            </a:pPr>
+            <a:r>
+              <a:rPr lang="en-US" sz="930" dirty="0">
+                <a:solidFill>
+                  <a:srgbClr val="5A6C82"/>
+                </a:solidFill>
+                <a:latin typeface="Calibri" pitchFamily="34" charset="0"/>
+                <a:ea typeface="Calibri" pitchFamily="34" charset="-122"/>
+                <a:cs typeface="Calibri" pitchFamily="34" charset="-120"/>
+              </a:rPr>
+              <a:t>Watches band position per establishment; reviews Saudization against Vision 2030 commitments; signs off the localisation hiring plan.</a:t>
+            </a:r>
+            <a:endParaRPr lang="en-US" sz="930" dirty="0"/>
+          </a:p>
+        </p:txBody>
+      </p:sp>
+      <p:sp>
+        <p:nvSpPr>
+          <p:cNvPr id="53" name="Text 51"/>
+          <p:cNvSpPr txBox="1"/>
+          <p:nvPr/>
+        </p:nvSpPr>
+        <p:spPr>
+          <a:xfrm>
+            <a:off x="8229600" y="5394960"/>
+            <a:ext cx="2615184" cy="438912"/>
+          </a:xfrm>
+          <a:prstGeom prst="rect">
+            <a:avLst/>
+          </a:prstGeom>
+          <a:noFill/>
+          <a:ln/>
+        </p:spPr>
+        <p:txBody>
+          <a:bodyPr wrap="square" lIns="0" tIns="0" rIns="0" bIns="0" rtlCol="0" anchor="ctr"/>
+          <a:lstStyle/>
+          <a:p>
+            <a:pPr indent="0" marL="0">
+              <a:lnSpc>
+                <a:spcPts val="1240"/>
+              </a:lnSpc>
+              <a:buNone/>
+            </a:pPr>
+            <a:r>
+              <a:rPr lang="en-US" sz="930" b="1" i="1" dirty="0">
+                <a:solidFill>
+                  <a:srgbClr val="17795E"/>
+                </a:solidFill>
+                <a:latin typeface="Calibri" pitchFamily="34" charset="0"/>
+                <a:ea typeface="Calibri" pitchFamily="34" charset="-122"/>
+                <a:cs typeface="Calibri" pitchFamily="34" charset="-120"/>
+              </a:rPr>
+              <a:t>Nitaqat exposure answerable from one screen.</a:t>
+            </a:r>
+            <a:endParaRPr lang="en-US" sz="930" dirty="0"/>
+          </a:p>
+        </p:txBody>
+      </p:sp>
+      <p:sp>
+        <p:nvSpPr>
+          <p:cNvPr id="54" name="Text 52"/>
+          <p:cNvSpPr txBox="1"/>
+          <p:nvPr/>
+        </p:nvSpPr>
+        <p:spPr>
+          <a:xfrm>
+            <a:off x="1152144" y="1609344"/>
+            <a:ext cx="1920240" cy="182880"/>
+          </a:xfrm>
+          <a:prstGeom prst="rect">
+            <a:avLst/>
+          </a:prstGeom>
+          <a:noFill/>
+          <a:ln/>
+        </p:spPr>
+        <p:txBody>
+          <a:bodyPr wrap="square" lIns="0" tIns="0" rIns="0" bIns="0" rtlCol="0" anchor="ctr"/>
+          <a:lstStyle/>
+          <a:p>
+            <a:pPr indent="0" marL="0">
+              <a:buNone/>
+            </a:pPr>
+            <a:r>
+              <a:rPr lang="en-US" sz="850" b="1" spc="140" kern="0" dirty="0">
+                <a:solidFill>
+                  <a:srgbClr val="96A3AE"/>
+                </a:solidFill>
+                <a:latin typeface="Calibri" pitchFamily="34" charset="0"/>
+                <a:ea typeface="Calibri" pitchFamily="34" charset="-122"/>
+                <a:cs typeface="Calibri" pitchFamily="34" charset="-120"/>
+              </a:rPr>
+              <a:t>ROLE</a:t>
+            </a:r>
+            <a:endParaRPr lang="en-US" sz="850" dirty="0"/>
+          </a:p>
+        </p:txBody>
+      </p:sp>
+      <p:sp>
+        <p:nvSpPr>
+          <p:cNvPr id="55" name="Text 53"/>
+          <p:cNvSpPr txBox="1"/>
+          <p:nvPr/>
+        </p:nvSpPr>
+        <p:spPr>
+          <a:xfrm>
+            <a:off x="3246120" y="1609344"/>
+            <a:ext cx="4846320" cy="182880"/>
+          </a:xfrm>
+          <a:prstGeom prst="rect">
+            <a:avLst/>
+          </a:prstGeom>
+          <a:noFill/>
+          <a:ln/>
+        </p:spPr>
+        <p:txBody>
+          <a:bodyPr wrap="square" lIns="0" tIns="0" rIns="0" bIns="0" rtlCol="0" anchor="ctr"/>
+          <a:lstStyle/>
+          <a:p>
+            <a:pPr indent="0" marL="0">
+              <a:buNone/>
+            </a:pPr>
+            <a:r>
+              <a:rPr lang="en-US" sz="850" b="1" spc="140" kern="0" dirty="0">
+                <a:solidFill>
+                  <a:srgbClr val="96A3AE"/>
+                </a:solidFill>
+                <a:latin typeface="Calibri" pitchFamily="34" charset="0"/>
+                <a:ea typeface="Calibri" pitchFamily="34" charset="-122"/>
+                <a:cs typeface="Calibri" pitchFamily="34" charset="-120"/>
+              </a:rPr>
+              <a:t>WHAT THEY DO IN THE SYSTEM</a:t>
+            </a:r>
+            <a:endParaRPr lang="en-US" sz="850" dirty="0"/>
+          </a:p>
+        </p:txBody>
+      </p:sp>
+      <p:sp>
+        <p:nvSpPr>
+          <p:cNvPr id="56" name="Text 54"/>
+          <p:cNvSpPr txBox="1"/>
+          <p:nvPr/>
+        </p:nvSpPr>
+        <p:spPr>
+          <a:xfrm>
+            <a:off x="8229600" y="1609344"/>
+            <a:ext cx="2615184" cy="182880"/>
+          </a:xfrm>
+          <a:prstGeom prst="rect">
+            <a:avLst/>
+          </a:prstGeom>
+          <a:noFill/>
+          <a:ln/>
+        </p:spPr>
+        <p:txBody>
+          <a:bodyPr wrap="square" lIns="0" tIns="0" rIns="0" bIns="0" rtlCol="0" anchor="ctr"/>
+          <a:lstStyle/>
+          <a:p>
+            <a:pPr indent="0" marL="0">
+              <a:buNone/>
+            </a:pPr>
+            <a:r>
+              <a:rPr lang="en-US" sz="850" b="1" spc="140" kern="0" dirty="0">
+                <a:solidFill>
+                  <a:srgbClr val="96A3AE"/>
+                </a:solidFill>
+                <a:latin typeface="Calibri" pitchFamily="34" charset="0"/>
+                <a:ea typeface="Calibri" pitchFamily="34" charset="-122"/>
+                <a:cs typeface="Calibri" pitchFamily="34" charset="-120"/>
+              </a:rPr>
+              <a:t>WHAT THEY GET</a:t>
+            </a:r>
+            <a:endParaRPr lang="en-US" sz="850" dirty="0"/>
+          </a:p>
+        </p:txBody>
+      </p:sp>
+      <p:sp>
+        <p:nvSpPr>
+          <p:cNvPr id="57" name="Text 55"/>
           <p:cNvSpPr txBox="1"/>
           <p:nvPr/>
         </p:nvSpPr>
@@ -13056,7 +16797,7 @@
       </p:sp>
       <p:sp>
         <p:nvSpPr>
-          <p:cNvPr id="31" name="Text 28"/>
+          <p:cNvPr id="58" name="Text 56"/>
           <p:cNvSpPr txBox="1"/>
           <p:nvPr/>
         </p:nvSpPr>
@@ -13158,7 +16899,7 @@
                 <a:ea typeface="Calibri" pitchFamily="34" charset="-122"/>
                 <a:cs typeface="Calibri" pitchFamily="34" charset="-120"/>
               </a:rPr>
-              <a:t>SOLUTION ARCHITECTURE</a:t>
+              <a:t>ACCOUNTABILITY &amp; COST CONTROL</a:t>
             </a:r>
             <a:endParaRPr lang="en-US" sz="1100" dirty="0"/>
           </a:p>
@@ -13197,15 +16938,830 @@
                 <a:ea typeface="Arial" pitchFamily="34" charset="-122"/>
                 <a:cs typeface="Arial" pitchFamily="34" charset="-120"/>
               </a:rPr>
-              <a:t>Every system, and what moves between them.</a:t>
+              <a:t>Every step owned. Every riyal accounted for.</a:t>
             </a:r>
             <a:endParaRPr lang="en-US" sz="3000" dirty="0"/>
+          </a:p>
+        </p:txBody>
+      </p:sp>
+      <p:sp>
+        <p:nvSpPr>
+          <p:cNvPr id="4" name="Text 2"/>
+          <p:cNvSpPr txBox="1"/>
+          <p:nvPr/>
+        </p:nvSpPr>
+        <p:spPr>
+          <a:xfrm>
+            <a:off x="548640" y="1243584"/>
+            <a:ext cx="10424160" cy="310896"/>
+          </a:xfrm>
+          <a:prstGeom prst="rect">
+            <a:avLst/>
+          </a:prstGeom>
+          <a:noFill/>
+          <a:ln/>
+        </p:spPr>
+        <p:txBody>
+          <a:bodyPr wrap="square" lIns="0" tIns="0" rIns="0" bIns="0" rtlCol="0" anchor="ctr"/>
+          <a:lstStyle/>
+          <a:p>
+            <a:pPr indent="0" marL="0">
+              <a:buNone/>
+            </a:pPr>
+            <a:r>
+              <a:rPr lang="en-US" sz="1300" dirty="0">
+                <a:solidFill>
+                  <a:srgbClr val="5A6C82"/>
+                </a:solidFill>
+                <a:latin typeface="Calibri" pitchFamily="34" charset="0"/>
+                <a:ea typeface="Calibri" pitchFamily="34" charset="-122"/>
+                <a:cs typeface="Calibri" pitchFamily="34" charset="-120"/>
+              </a:rPr>
+              <a:t>Statutory deadlines need named owners, and Saudi permit costs are large enough that finance has to see them coming.</a:t>
+            </a:r>
+            <a:endParaRPr lang="en-US" sz="1300" dirty="0"/>
+          </a:p>
+        </p:txBody>
+      </p:sp>
+      <p:sp>
+        <p:nvSpPr>
+          <p:cNvPr id="5" name="Shape 3"/>
+          <p:cNvSpPr/>
+          <p:nvPr/>
+        </p:nvSpPr>
+        <p:spPr>
+          <a:xfrm>
+            <a:off x="548640" y="1792224"/>
+            <a:ext cx="5394960" cy="676656"/>
+          </a:xfrm>
+          <a:prstGeom prst="roundRect">
+            <a:avLst>
+              <a:gd name="adj" fmla="val 10811"/>
+            </a:avLst>
+          </a:prstGeom>
+          <a:solidFill>
+            <a:srgbClr val="F4F6F7"/>
+          </a:solidFill>
+          <a:ln w="9525">
+            <a:solidFill>
+              <a:srgbClr val="E3E7EA"/>
+            </a:solidFill>
+            <a:prstDash val="solid"/>
+          </a:ln>
+        </p:spPr>
+      </p:sp>
+      <p:sp>
+        <p:nvSpPr>
+          <p:cNvPr id="6" name="Shape 4"/>
+          <p:cNvSpPr/>
+          <p:nvPr/>
+        </p:nvSpPr>
+        <p:spPr>
+          <a:xfrm>
+            <a:off x="731520" y="1956816"/>
+            <a:ext cx="365760" cy="365760"/>
+          </a:xfrm>
+          <a:prstGeom prst="ellipse">
+            <a:avLst/>
+          </a:prstGeom>
+          <a:solidFill>
+            <a:srgbClr val="20A098"/>
+          </a:solidFill>
+          <a:ln/>
+        </p:spPr>
+      </p:sp>
+      <p:sp>
+        <p:nvSpPr>
+          <p:cNvPr id="7" name="Text 5"/>
+          <p:cNvSpPr txBox="1"/>
+          <p:nvPr/>
+        </p:nvSpPr>
+        <p:spPr>
+          <a:xfrm>
+            <a:off x="731520" y="1956816"/>
+            <a:ext cx="365760" cy="365760"/>
+          </a:xfrm>
+          <a:prstGeom prst="rect">
+            <a:avLst/>
+          </a:prstGeom>
+          <a:noFill/>
+          <a:ln/>
+        </p:spPr>
+        <p:txBody>
+          <a:bodyPr wrap="square" lIns="0" tIns="0" rIns="0" bIns="0" rtlCol="0" anchor="ctr"/>
+          <a:lstStyle/>
+          <a:p>
+            <a:pPr algn="ctr" indent="0" marL="0">
+              <a:buNone/>
+            </a:pPr>
+            <a:r>
+              <a:rPr lang="en-US" sz="1200" b="1" dirty="0">
+                <a:solidFill>
+                  <a:srgbClr val="FFFFFF"/>
+                </a:solidFill>
+                <a:latin typeface="Calibri" pitchFamily="34" charset="0"/>
+                <a:ea typeface="Calibri" pitchFamily="34" charset="-122"/>
+                <a:cs typeface="Calibri" pitchFamily="34" charset="-120"/>
+              </a:rPr>
+              <a:t>1</a:t>
+            </a:r>
+            <a:endParaRPr lang="en-US" sz="1200" dirty="0"/>
+          </a:p>
+        </p:txBody>
+      </p:sp>
+      <p:sp>
+        <p:nvSpPr>
+          <p:cNvPr id="8" name="Text 6"/>
+          <p:cNvSpPr txBox="1"/>
+          <p:nvPr/>
+        </p:nvSpPr>
+        <p:spPr>
+          <a:xfrm>
+            <a:off x="1225296" y="1874520"/>
+            <a:ext cx="4480560" cy="219456"/>
+          </a:xfrm>
+          <a:prstGeom prst="rect">
+            <a:avLst/>
+          </a:prstGeom>
+          <a:noFill/>
+          <a:ln/>
+        </p:spPr>
+        <p:txBody>
+          <a:bodyPr wrap="square" lIns="0" tIns="0" rIns="0" bIns="0" rtlCol="0" anchor="ctr"/>
+          <a:lstStyle/>
+          <a:p>
+            <a:pPr indent="0" marL="0">
+              <a:buNone/>
+            </a:pPr>
+            <a:r>
+              <a:rPr lang="en-US" sz="1250" b="1" dirty="0">
+                <a:solidFill>
+                  <a:srgbClr val="0C1E33"/>
+                </a:solidFill>
+                <a:latin typeface="Arial" pitchFamily="34" charset="0"/>
+                <a:ea typeface="Arial" pitchFamily="34" charset="-122"/>
+                <a:cs typeface="Arial" pitchFamily="34" charset="-120"/>
+              </a:rPr>
+              <a:t>Assign</a:t>
+            </a:r>
+            <a:endParaRPr lang="en-US" sz="1250" dirty="0"/>
+          </a:p>
+        </p:txBody>
+      </p:sp>
+      <p:sp>
+        <p:nvSpPr>
+          <p:cNvPr id="9" name="Text 7"/>
+          <p:cNvSpPr txBox="1"/>
+          <p:nvPr/>
+        </p:nvSpPr>
+        <p:spPr>
+          <a:xfrm>
+            <a:off x="1225296" y="2103120"/>
+            <a:ext cx="4526280" cy="310896"/>
+          </a:xfrm>
+          <a:prstGeom prst="rect">
+            <a:avLst/>
+          </a:prstGeom>
+          <a:noFill/>
+          <a:ln/>
+        </p:spPr>
+        <p:txBody>
+          <a:bodyPr wrap="square" lIns="0" tIns="0" rIns="0" bIns="0" rtlCol="0" anchor="ctr"/>
+          <a:lstStyle/>
+          <a:p>
+            <a:pPr indent="0" marL="0">
+              <a:lnSpc>
+                <a:spcPts val="1250"/>
+              </a:lnSpc>
+              <a:buNone/>
+            </a:pPr>
+            <a:r>
+              <a:rPr lang="en-US" sz="940" dirty="0">
+                <a:solidFill>
+                  <a:srgbClr val="5A6C82"/>
+                </a:solidFill>
+                <a:latin typeface="Calibri" pitchFamily="34" charset="0"/>
+                <a:ea typeface="Calibri" pitchFamily="34" charset="-122"/>
+                <a:cs typeface="Calibri" pitchFamily="34" charset="-120"/>
+              </a:rPr>
+              <a:t>Routed to a role, claimed by a named officer. Due dates come from the statutory deadline, not a guess.</a:t>
+            </a:r>
+            <a:endParaRPr lang="en-US" sz="940" dirty="0"/>
+          </a:p>
+        </p:txBody>
+      </p:sp>
+      <p:sp>
+        <p:nvSpPr>
+          <p:cNvPr id="10" name="Shape 8"/>
+          <p:cNvSpPr/>
+          <p:nvPr/>
+        </p:nvSpPr>
+        <p:spPr>
+          <a:xfrm>
+            <a:off x="548640" y="2569464"/>
+            <a:ext cx="5394960" cy="676656"/>
+          </a:xfrm>
+          <a:prstGeom prst="roundRect">
+            <a:avLst>
+              <a:gd name="adj" fmla="val 10811"/>
+            </a:avLst>
+          </a:prstGeom>
+          <a:solidFill>
+            <a:srgbClr val="FFFFFF"/>
+          </a:solidFill>
+          <a:ln w="9525">
+            <a:solidFill>
+              <a:srgbClr val="E3E7EA"/>
+            </a:solidFill>
+            <a:prstDash val="solid"/>
+          </a:ln>
+        </p:spPr>
+      </p:sp>
+      <p:sp>
+        <p:nvSpPr>
+          <p:cNvPr id="11" name="Shape 9"/>
+          <p:cNvSpPr/>
+          <p:nvPr/>
+        </p:nvSpPr>
+        <p:spPr>
+          <a:xfrm>
+            <a:off x="731520" y="2734056"/>
+            <a:ext cx="365760" cy="365760"/>
+          </a:xfrm>
+          <a:prstGeom prst="ellipse">
+            <a:avLst/>
+          </a:prstGeom>
+          <a:solidFill>
+            <a:srgbClr val="B5730F"/>
+          </a:solidFill>
+          <a:ln/>
+        </p:spPr>
+      </p:sp>
+      <p:sp>
+        <p:nvSpPr>
+          <p:cNvPr id="12" name="Text 10"/>
+          <p:cNvSpPr txBox="1"/>
+          <p:nvPr/>
+        </p:nvSpPr>
+        <p:spPr>
+          <a:xfrm>
+            <a:off x="731520" y="2734056"/>
+            <a:ext cx="365760" cy="365760"/>
+          </a:xfrm>
+          <a:prstGeom prst="rect">
+            <a:avLst/>
+          </a:prstGeom>
+          <a:noFill/>
+          <a:ln/>
+        </p:spPr>
+        <p:txBody>
+          <a:bodyPr wrap="square" lIns="0" tIns="0" rIns="0" bIns="0" rtlCol="0" anchor="ctr"/>
+          <a:lstStyle/>
+          <a:p>
+            <a:pPr algn="ctr" indent="0" marL="0">
+              <a:buNone/>
+            </a:pPr>
+            <a:r>
+              <a:rPr lang="en-US" sz="1200" b="1" dirty="0">
+                <a:solidFill>
+                  <a:srgbClr val="FFFFFF"/>
+                </a:solidFill>
+                <a:latin typeface="Calibri" pitchFamily="34" charset="0"/>
+                <a:ea typeface="Calibri" pitchFamily="34" charset="-122"/>
+                <a:cs typeface="Calibri" pitchFamily="34" charset="-120"/>
+              </a:rPr>
+              <a:t>2</a:t>
+            </a:r>
+            <a:endParaRPr lang="en-US" sz="1200" dirty="0"/>
+          </a:p>
+        </p:txBody>
+      </p:sp>
+      <p:sp>
+        <p:nvSpPr>
+          <p:cNvPr id="13" name="Text 11"/>
+          <p:cNvSpPr txBox="1"/>
+          <p:nvPr/>
+        </p:nvSpPr>
+        <p:spPr>
+          <a:xfrm>
+            <a:off x="1225296" y="2651760"/>
+            <a:ext cx="4480560" cy="219456"/>
+          </a:xfrm>
+          <a:prstGeom prst="rect">
+            <a:avLst/>
+          </a:prstGeom>
+          <a:noFill/>
+          <a:ln/>
+        </p:spPr>
+        <p:txBody>
+          <a:bodyPr wrap="square" lIns="0" tIns="0" rIns="0" bIns="0" rtlCol="0" anchor="ctr"/>
+          <a:lstStyle/>
+          <a:p>
+            <a:pPr indent="0" marL="0">
+              <a:buNone/>
+            </a:pPr>
+            <a:r>
+              <a:rPr lang="en-US" sz="1250" b="1" dirty="0">
+                <a:solidFill>
+                  <a:srgbClr val="0C1E33"/>
+                </a:solidFill>
+                <a:latin typeface="Arial" pitchFamily="34" charset="0"/>
+                <a:ea typeface="Arial" pitchFamily="34" charset="-122"/>
+                <a:cs typeface="Arial" pitchFamily="34" charset="-120"/>
+              </a:rPr>
+              <a:t>Nudge</a:t>
+            </a:r>
+            <a:endParaRPr lang="en-US" sz="1250" dirty="0"/>
+          </a:p>
+        </p:txBody>
+      </p:sp>
+      <p:sp>
+        <p:nvSpPr>
+          <p:cNvPr id="14" name="Text 12"/>
+          <p:cNvSpPr txBox="1"/>
+          <p:nvPr/>
+        </p:nvSpPr>
+        <p:spPr>
+          <a:xfrm>
+            <a:off x="1225296" y="2880360"/>
+            <a:ext cx="4526280" cy="310896"/>
+          </a:xfrm>
+          <a:prstGeom prst="rect">
+            <a:avLst/>
+          </a:prstGeom>
+          <a:noFill/>
+          <a:ln/>
+        </p:spPr>
+        <p:txBody>
+          <a:bodyPr wrap="square" lIns="0" tIns="0" rIns="0" bIns="0" rtlCol="0" anchor="ctr"/>
+          <a:lstStyle/>
+          <a:p>
+            <a:pPr indent="0" marL="0">
+              <a:lnSpc>
+                <a:spcPts val="1250"/>
+              </a:lnSpc>
+              <a:buNone/>
+            </a:pPr>
+            <a:r>
+              <a:rPr lang="en-US" sz="940" dirty="0">
+                <a:solidFill>
+                  <a:srgbClr val="5A6C82"/>
+                </a:solidFill>
+                <a:latin typeface="Calibri" pitchFamily="34" charset="0"/>
+                <a:ea typeface="Calibri" pitchFamily="34" charset="-122"/>
+                <a:cs typeface="Calibri" pitchFamily="34" charset="-120"/>
+              </a:rPr>
+              <a:t>Every 2 days while open. Iqama expiries six weeks out, exit re-entry returns at 14, 7 and 2 days.</a:t>
+            </a:r>
+            <a:endParaRPr lang="en-US" sz="940" dirty="0"/>
+          </a:p>
+        </p:txBody>
+      </p:sp>
+      <p:sp>
+        <p:nvSpPr>
+          <p:cNvPr id="15" name="Shape 13"/>
+          <p:cNvSpPr/>
+          <p:nvPr/>
+        </p:nvSpPr>
+        <p:spPr>
+          <a:xfrm>
+            <a:off x="548640" y="3346704"/>
+            <a:ext cx="5394960" cy="676656"/>
+          </a:xfrm>
+          <a:prstGeom prst="roundRect">
+            <a:avLst>
+              <a:gd name="adj" fmla="val 10811"/>
+            </a:avLst>
+          </a:prstGeom>
+          <a:solidFill>
+            <a:srgbClr val="F4F6F7"/>
+          </a:solidFill>
+          <a:ln w="9525">
+            <a:solidFill>
+              <a:srgbClr val="E3E7EA"/>
+            </a:solidFill>
+            <a:prstDash val="solid"/>
+          </a:ln>
+        </p:spPr>
+      </p:sp>
+      <p:sp>
+        <p:nvSpPr>
+          <p:cNvPr id="16" name="Shape 14"/>
+          <p:cNvSpPr/>
+          <p:nvPr/>
+        </p:nvSpPr>
+        <p:spPr>
+          <a:xfrm>
+            <a:off x="731520" y="3511296"/>
+            <a:ext cx="365760" cy="365760"/>
+          </a:xfrm>
+          <a:prstGeom prst="ellipse">
+            <a:avLst/>
+          </a:prstGeom>
+          <a:solidFill>
+            <a:srgbClr val="B23A2F"/>
+          </a:solidFill>
+          <a:ln/>
+        </p:spPr>
+      </p:sp>
+      <p:sp>
+        <p:nvSpPr>
+          <p:cNvPr id="17" name="Text 15"/>
+          <p:cNvSpPr txBox="1"/>
+          <p:nvPr/>
+        </p:nvSpPr>
+        <p:spPr>
+          <a:xfrm>
+            <a:off x="731520" y="3511296"/>
+            <a:ext cx="365760" cy="365760"/>
+          </a:xfrm>
+          <a:prstGeom prst="rect">
+            <a:avLst/>
+          </a:prstGeom>
+          <a:noFill/>
+          <a:ln/>
+        </p:spPr>
+        <p:txBody>
+          <a:bodyPr wrap="square" lIns="0" tIns="0" rIns="0" bIns="0" rtlCol="0" anchor="ctr"/>
+          <a:lstStyle/>
+          <a:p>
+            <a:pPr algn="ctr" indent="0" marL="0">
+              <a:buNone/>
+            </a:pPr>
+            <a:r>
+              <a:rPr lang="en-US" sz="1200" b="1" dirty="0">
+                <a:solidFill>
+                  <a:srgbClr val="FFFFFF"/>
+                </a:solidFill>
+                <a:latin typeface="Calibri" pitchFamily="34" charset="0"/>
+                <a:ea typeface="Calibri" pitchFamily="34" charset="-122"/>
+                <a:cs typeface="Calibri" pitchFamily="34" charset="-120"/>
+              </a:rPr>
+              <a:t>3</a:t>
+            </a:r>
+            <a:endParaRPr lang="en-US" sz="1200" dirty="0"/>
+          </a:p>
+        </p:txBody>
+      </p:sp>
+      <p:sp>
+        <p:nvSpPr>
+          <p:cNvPr id="18" name="Text 16"/>
+          <p:cNvSpPr txBox="1"/>
+          <p:nvPr/>
+        </p:nvSpPr>
+        <p:spPr>
+          <a:xfrm>
+            <a:off x="1225296" y="3429000"/>
+            <a:ext cx="4480560" cy="219456"/>
+          </a:xfrm>
+          <a:prstGeom prst="rect">
+            <a:avLst/>
+          </a:prstGeom>
+          <a:noFill/>
+          <a:ln/>
+        </p:spPr>
+        <p:txBody>
+          <a:bodyPr wrap="square" lIns="0" tIns="0" rIns="0" bIns="0" rtlCol="0" anchor="ctr"/>
+          <a:lstStyle/>
+          <a:p>
+            <a:pPr indent="0" marL="0">
+              <a:buNone/>
+            </a:pPr>
+            <a:r>
+              <a:rPr lang="en-US" sz="1250" b="1" dirty="0">
+                <a:solidFill>
+                  <a:srgbClr val="0C1E33"/>
+                </a:solidFill>
+                <a:latin typeface="Arial" pitchFamily="34" charset="0"/>
+                <a:ea typeface="Arial" pitchFamily="34" charset="-122"/>
+                <a:cs typeface="Arial" pitchFamily="34" charset="-120"/>
+              </a:rPr>
+              <a:t>Escalate</a:t>
+            </a:r>
+            <a:endParaRPr lang="en-US" sz="1250" dirty="0"/>
+          </a:p>
+        </p:txBody>
+      </p:sp>
+      <p:sp>
+        <p:nvSpPr>
+          <p:cNvPr id="19" name="Text 17"/>
+          <p:cNvSpPr txBox="1"/>
+          <p:nvPr/>
+        </p:nvSpPr>
+        <p:spPr>
+          <a:xfrm>
+            <a:off x="1225296" y="3657600"/>
+            <a:ext cx="4526280" cy="310896"/>
+          </a:xfrm>
+          <a:prstGeom prst="rect">
+            <a:avLst/>
+          </a:prstGeom>
+          <a:noFill/>
+          <a:ln/>
+        </p:spPr>
+        <p:txBody>
+          <a:bodyPr wrap="square" lIns="0" tIns="0" rIns="0" bIns="0" rtlCol="0" anchor="ctr"/>
+          <a:lstStyle/>
+          <a:p>
+            <a:pPr indent="0" marL="0">
+              <a:lnSpc>
+                <a:spcPts val="1250"/>
+              </a:lnSpc>
+              <a:buNone/>
+            </a:pPr>
+            <a:r>
+              <a:rPr lang="en-US" sz="940" dirty="0">
+                <a:solidFill>
+                  <a:srgbClr val="5A6C82"/>
+                </a:solidFill>
+                <a:latin typeface="Calibri" pitchFamily="34" charset="0"/>
+                <a:ea typeface="Calibri" pitchFamily="34" charset="-122"/>
+                <a:cs typeface="Calibri" pitchFamily="34" charset="-120"/>
+              </a:rPr>
+              <a:t>Past the due date it reaches the line manager and HRBP on its own, while something can still be done.</a:t>
+            </a:r>
+            <a:endParaRPr lang="en-US" sz="940" dirty="0"/>
+          </a:p>
+        </p:txBody>
+      </p:sp>
+      <p:sp>
+        <p:nvSpPr>
+          <p:cNvPr id="20" name="Shape 18"/>
+          <p:cNvSpPr/>
+          <p:nvPr/>
+        </p:nvSpPr>
+        <p:spPr>
+          <a:xfrm>
+            <a:off x="548640" y="4123944"/>
+            <a:ext cx="5394960" cy="676656"/>
+          </a:xfrm>
+          <a:prstGeom prst="roundRect">
+            <a:avLst>
+              <a:gd name="adj" fmla="val 10811"/>
+            </a:avLst>
+          </a:prstGeom>
+          <a:solidFill>
+            <a:srgbClr val="FFFFFF"/>
+          </a:solidFill>
+          <a:ln w="9525">
+            <a:solidFill>
+              <a:srgbClr val="E3E7EA"/>
+            </a:solidFill>
+            <a:prstDash val="solid"/>
+          </a:ln>
+        </p:spPr>
+      </p:sp>
+      <p:sp>
+        <p:nvSpPr>
+          <p:cNvPr id="21" name="Shape 19"/>
+          <p:cNvSpPr/>
+          <p:nvPr/>
+        </p:nvSpPr>
+        <p:spPr>
+          <a:xfrm>
+            <a:off x="731520" y="4288536"/>
+            <a:ext cx="365760" cy="365760"/>
+          </a:xfrm>
+          <a:prstGeom prst="ellipse">
+            <a:avLst/>
+          </a:prstGeom>
+          <a:solidFill>
+            <a:srgbClr val="17795E"/>
+          </a:solidFill>
+          <a:ln/>
+        </p:spPr>
+      </p:sp>
+      <p:sp>
+        <p:nvSpPr>
+          <p:cNvPr id="22" name="Text 20"/>
+          <p:cNvSpPr txBox="1"/>
+          <p:nvPr/>
+        </p:nvSpPr>
+        <p:spPr>
+          <a:xfrm>
+            <a:off x="731520" y="4288536"/>
+            <a:ext cx="365760" cy="365760"/>
+          </a:xfrm>
+          <a:prstGeom prst="rect">
+            <a:avLst/>
+          </a:prstGeom>
+          <a:noFill/>
+          <a:ln/>
+        </p:spPr>
+        <p:txBody>
+          <a:bodyPr wrap="square" lIns="0" tIns="0" rIns="0" bIns="0" rtlCol="0" anchor="ctr"/>
+          <a:lstStyle/>
+          <a:p>
+            <a:pPr algn="ctr" indent="0" marL="0">
+              <a:buNone/>
+            </a:pPr>
+            <a:r>
+              <a:rPr lang="en-US" sz="1200" b="1" dirty="0">
+                <a:solidFill>
+                  <a:srgbClr val="FFFFFF"/>
+                </a:solidFill>
+                <a:latin typeface="Calibri" pitchFamily="34" charset="0"/>
+                <a:ea typeface="Calibri" pitchFamily="34" charset="-122"/>
+                <a:cs typeface="Calibri" pitchFamily="34" charset="-120"/>
+              </a:rPr>
+              <a:t>4</a:t>
+            </a:r>
+            <a:endParaRPr lang="en-US" sz="1200" dirty="0"/>
+          </a:p>
+        </p:txBody>
+      </p:sp>
+      <p:sp>
+        <p:nvSpPr>
+          <p:cNvPr id="23" name="Text 21"/>
+          <p:cNvSpPr txBox="1"/>
+          <p:nvPr/>
+        </p:nvSpPr>
+        <p:spPr>
+          <a:xfrm>
+            <a:off x="1225296" y="4206240"/>
+            <a:ext cx="4480560" cy="219456"/>
+          </a:xfrm>
+          <a:prstGeom prst="rect">
+            <a:avLst/>
+          </a:prstGeom>
+          <a:noFill/>
+          <a:ln/>
+        </p:spPr>
+        <p:txBody>
+          <a:bodyPr wrap="square" lIns="0" tIns="0" rIns="0" bIns="0" rtlCol="0" anchor="ctr"/>
+          <a:lstStyle/>
+          <a:p>
+            <a:pPr indent="0" marL="0">
+              <a:buNone/>
+            </a:pPr>
+            <a:r>
+              <a:rPr lang="en-US" sz="1250" b="1" dirty="0">
+                <a:solidFill>
+                  <a:srgbClr val="0C1E33"/>
+                </a:solidFill>
+                <a:latin typeface="Arial" pitchFamily="34" charset="0"/>
+                <a:ea typeface="Arial" pitchFamily="34" charset="-122"/>
+                <a:cs typeface="Arial" pitchFamily="34" charset="-120"/>
+              </a:rPr>
+              <a:t>Prove</a:t>
+            </a:r>
+            <a:endParaRPr lang="en-US" sz="1250" dirty="0"/>
+          </a:p>
+        </p:txBody>
+      </p:sp>
+      <p:sp>
+        <p:nvSpPr>
+          <p:cNvPr id="24" name="Text 22"/>
+          <p:cNvSpPr txBox="1"/>
+          <p:nvPr/>
+        </p:nvSpPr>
+        <p:spPr>
+          <a:xfrm>
+            <a:off x="1225296" y="4434840"/>
+            <a:ext cx="4526280" cy="310896"/>
+          </a:xfrm>
+          <a:prstGeom prst="rect">
+            <a:avLst/>
+          </a:prstGeom>
+          <a:noFill/>
+          <a:ln/>
+        </p:spPr>
+        <p:txBody>
+          <a:bodyPr wrap="square" lIns="0" tIns="0" rIns="0" bIns="0" rtlCol="0" anchor="ctr"/>
+          <a:lstStyle/>
+          <a:p>
+            <a:pPr indent="0" marL="0">
+              <a:lnSpc>
+                <a:spcPts val="1250"/>
+              </a:lnSpc>
+              <a:buNone/>
+            </a:pPr>
+            <a:r>
+              <a:rPr lang="en-US" sz="940" dirty="0">
+                <a:solidFill>
+                  <a:srgbClr val="5A6C82"/>
+                </a:solidFill>
+                <a:latin typeface="Calibri" pitchFamily="34" charset="0"/>
+                <a:ea typeface="Calibri" pitchFamily="34" charset="-122"/>
+                <a:cs typeface="Calibri" pitchFamily="34" charset="-120"/>
+              </a:rPr>
+              <a:t>Who had it, when they were reminded, what they uploaded. A Qiwa or GOSI inspection becomes a report.</a:t>
+            </a:r>
+            <a:endParaRPr lang="en-US" sz="940" dirty="0"/>
+          </a:p>
+        </p:txBody>
+      </p:sp>
+      <p:sp>
+        <p:nvSpPr>
+          <p:cNvPr id="25" name="Shape 23"/>
+          <p:cNvSpPr/>
+          <p:nvPr/>
+        </p:nvSpPr>
+        <p:spPr>
+          <a:xfrm>
+            <a:off x="548640" y="4956048"/>
+            <a:ext cx="5394960" cy="1335024"/>
+          </a:xfrm>
+          <a:prstGeom prst="roundRect">
+            <a:avLst>
+              <a:gd name="adj" fmla="val 5479"/>
+            </a:avLst>
+          </a:prstGeom>
+          <a:solidFill>
+            <a:srgbClr val="E4F5F3"/>
+          </a:solidFill>
+          <a:ln w="11430">
+            <a:solidFill>
+              <a:srgbClr val="20A098"/>
+            </a:solidFill>
+            <a:prstDash val="solid"/>
+          </a:ln>
+        </p:spPr>
+      </p:sp>
+      <p:sp>
+        <p:nvSpPr>
+          <p:cNvPr id="26" name="Text 24"/>
+          <p:cNvSpPr txBox="1"/>
+          <p:nvPr/>
+        </p:nvSpPr>
+        <p:spPr>
+          <a:xfrm>
+            <a:off x="749808" y="5065776"/>
+            <a:ext cx="5029200" cy="219456"/>
+          </a:xfrm>
+          <a:prstGeom prst="rect">
+            <a:avLst/>
+          </a:prstGeom>
+          <a:noFill/>
+          <a:ln/>
+        </p:spPr>
+        <p:txBody>
+          <a:bodyPr wrap="square" lIns="0" tIns="0" rIns="0" bIns="0" rtlCol="0" anchor="ctr"/>
+          <a:lstStyle/>
+          <a:p>
+            <a:pPr indent="0" marL="0">
+              <a:buNone/>
+            </a:pPr>
+            <a:r>
+              <a:rPr lang="en-US" sz="1150" b="1" dirty="0">
+                <a:solidFill>
+                  <a:srgbClr val="12756F"/>
+                </a:solidFill>
+                <a:latin typeface="Arial" pitchFamily="34" charset="0"/>
+                <a:ea typeface="Arial" pitchFamily="34" charset="-122"/>
+                <a:cs typeface="Arial" pitchFamily="34" charset="-120"/>
+              </a:rPr>
+              <a:t>The Saudi cost line finance actually worries about</a:t>
+            </a:r>
+            <a:endParaRPr lang="en-US" sz="1150" dirty="0"/>
+          </a:p>
+        </p:txBody>
+      </p:sp>
+      <p:sp>
+        <p:nvSpPr>
+          <p:cNvPr id="27" name="Text 25"/>
+          <p:cNvSpPr txBox="1"/>
+          <p:nvPr/>
+        </p:nvSpPr>
+        <p:spPr>
+          <a:xfrm>
+            <a:off x="749808" y="5321808"/>
+            <a:ext cx="5029200" cy="859536"/>
+          </a:xfrm>
+          <a:prstGeom prst="rect">
+            <a:avLst/>
+          </a:prstGeom>
+          <a:noFill/>
+          <a:ln/>
+        </p:spPr>
+        <p:txBody>
+          <a:bodyPr wrap="square" lIns="0" tIns="0" rIns="0" bIns="0" rtlCol="0" anchor="ctr"/>
+          <a:lstStyle/>
+          <a:p>
+            <a:pPr indent="0" marL="0">
+              <a:lnSpc>
+                <a:spcPts val="1300"/>
+              </a:lnSpc>
+              <a:buNone/>
+            </a:pPr>
+            <a:r>
+              <a:rPr lang="en-US" sz="960" dirty="0">
+                <a:solidFill>
+                  <a:srgbClr val="0C1E33"/>
+                </a:solidFill>
+                <a:latin typeface="Calibri" pitchFamily="34" charset="0"/>
+                <a:ea typeface="Calibri" pitchFamily="34" charset="-122"/>
+                <a:cs typeface="Calibri" pitchFamily="34" charset="-120"/>
+              </a:rPr>
+              <a:t>The expat levy is charged per employee per year and renewals cluster around hiring dates. We forecast levy and fees against the renewal calendar, so a heavy quarter is budgeted rather than absorbed. Every payment carries a SADAD reference, a receipt and a GL account.</a:t>
+            </a:r>
+            <a:endParaRPr lang="en-US" sz="960" dirty="0"/>
           </a:p>
         </p:txBody>
       </p:sp>
       <p:pic>
         <p:nvPicPr>
-          <p:cNvPr id="4" name="Image 0" descr="./img/architecture.png">    </p:cNvPr>
+          <p:cNvPr id="28" name="Image 0" descr="./img/report-payment.jpg">    </p:cNvPr>
           <p:cNvPicPr>
             <a:picLocks noChangeAspect="1"/>
           </p:cNvPicPr>
@@ -13219,90 +17775,31 @@
         </p:blipFill>
         <p:spPr>
           <a:xfrm>
-            <a:off x="548640" y="1152144"/>
-            <a:ext cx="7543800" cy="5120640"/>
-          </a:xfrm>
-          <a:prstGeom prst="rect">
-            <a:avLst/>
-          </a:prstGeom>
+            <a:off x="6172200" y="1792224"/>
+            <a:ext cx="5440680" cy="914400"/>
+          </a:xfrm>
+          <a:prstGeom prst="rect">
+            <a:avLst/>
+          </a:prstGeom>
+          <a:effectLst>
+            <a:outerShdw sx="100000" sy="100000" kx="0" ky="0" algn="bl" rotWithShape="0" blurRad="177800" dist="38100" dir="5400000">
+              <a:srgbClr val="000000">
+                <a:alpha val="20000"/>
+              </a:srgbClr>
+            </a:outerShdw>
+          </a:effectLst>
         </p:spPr>
       </p:pic>
       <p:sp>
         <p:nvSpPr>
-          <p:cNvPr id="5" name="Shape 2"/>
-          <p:cNvSpPr/>
-          <p:nvPr/>
-        </p:nvSpPr>
-        <p:spPr>
-          <a:xfrm>
-            <a:off x="8275320" y="1152144"/>
-            <a:ext cx="3364992" cy="1188720"/>
-          </a:xfrm>
-          <a:prstGeom prst="roundRect">
-            <a:avLst>
-              <a:gd name="adj" fmla="val 5385"/>
-            </a:avLst>
-          </a:prstGeom>
-          <a:solidFill>
-            <a:srgbClr val="F4F6F7"/>
-          </a:solidFill>
-          <a:ln w="11430">
-            <a:solidFill>
-              <a:srgbClr val="E3E7EA"/>
-            </a:solidFill>
-            <a:prstDash val="solid"/>
-          </a:ln>
-        </p:spPr>
-      </p:sp>
-      <p:sp>
-        <p:nvSpPr>
-          <p:cNvPr id="6" name="Text 3"/>
-          <p:cNvSpPr txBox="1"/>
-          <p:nvPr/>
-        </p:nvSpPr>
-        <p:spPr>
-          <a:xfrm>
-            <a:off x="8449056" y="1252728"/>
-            <a:ext cx="3017520" cy="219456"/>
-          </a:xfrm>
-          <a:prstGeom prst="rect">
-            <a:avLst/>
-          </a:prstGeom>
-          <a:noFill/>
-          <a:ln/>
-        </p:spPr>
-        <p:txBody>
-          <a:bodyPr wrap="square" lIns="0" tIns="0" rIns="0" bIns="0" rtlCol="0" anchor="ctr"/>
-          <a:lstStyle/>
-          <a:p>
-            <a:pPr indent="0" marL="0">
-              <a:buNone/>
-            </a:pPr>
-            <a:r>
-              <a:rPr lang="en-US" sz="1150" b="1" dirty="0">
-                <a:solidFill>
-                  <a:srgbClr val="0C1E33"/>
-                </a:solidFill>
-                <a:latin typeface="Arial" pitchFamily="34" charset="0"/>
-                <a:ea typeface="Arial" pitchFamily="34" charset="-122"/>
-                <a:cs typeface="Arial" pitchFamily="34" charset="-120"/>
-              </a:rPr>
-              <a:t>What flows in</a:t>
-            </a:r>
-            <a:endParaRPr lang="en-US" sz="1150" dirty="0"/>
-          </a:p>
-        </p:txBody>
-      </p:sp>
-      <p:sp>
-        <p:nvSpPr>
-          <p:cNvPr id="7" name="Text 4"/>
-          <p:cNvSpPr txBox="1"/>
-          <p:nvPr/>
-        </p:nvSpPr>
-        <p:spPr>
-          <a:xfrm>
-            <a:off x="8449056" y="1481328"/>
-            <a:ext cx="3035808" cy="786384"/>
+          <p:cNvPr id="29" name="Text 26"/>
+          <p:cNvSpPr txBox="1"/>
+          <p:nvPr/>
+        </p:nvSpPr>
+        <p:spPr>
+          <a:xfrm>
+            <a:off x="6172200" y="5230368"/>
+            <a:ext cx="5440680" cy="457200"/>
           </a:xfrm>
           <a:prstGeom prst="rect">
             <a:avLst/>
@@ -13316,12 +17813,12 @@
           <a:p>
             <a:pPr indent="0" marL="0">
               <a:lnSpc>
-                <a:spcPts val="1140"/>
+                <a:spcPts val="1350"/>
               </a:lnSpc>
               <a:buNone/>
             </a:pPr>
             <a:r>
-              <a:rPr lang="en-US" sz="850" dirty="0">
+              <a:rPr lang="en-US" sz="1000" i="1" dirty="0">
                 <a:solidFill>
                   <a:srgbClr val="5A6C82"/>
                 </a:solidFill>
@@ -13329,339 +17826,15 @@
                 <a:ea typeface="Calibri" pitchFamily="34" charset="-122"/>
                 <a:cs typeface="Calibri" pitchFamily="34" charset="-120"/>
               </a:rPr>
-              <a:t>Candidates who accepted an offer, the employee master, separations and the Iqama expiry dates that start a renewal. All through SAP Integration Suite, monitored and retried like any other SAP integration.</a:t>
-            </a:r>
-            <a:endParaRPr lang="en-US" sz="850" dirty="0"/>
-          </a:p>
-        </p:txBody>
-      </p:sp>
-      <p:sp>
-        <p:nvSpPr>
-          <p:cNvPr id="8" name="Shape 5"/>
-          <p:cNvSpPr/>
-          <p:nvPr/>
-        </p:nvSpPr>
-        <p:spPr>
-          <a:xfrm>
-            <a:off x="8275320" y="2450592"/>
-            <a:ext cx="3364992" cy="1188720"/>
-          </a:xfrm>
-          <a:prstGeom prst="roundRect">
-            <a:avLst>
-              <a:gd name="adj" fmla="val 5385"/>
-            </a:avLst>
-          </a:prstGeom>
-          <a:solidFill>
-            <a:srgbClr val="F4F6F7"/>
-          </a:solidFill>
-          <a:ln w="11430">
-            <a:solidFill>
-              <a:srgbClr val="E3E7EA"/>
-            </a:solidFill>
-            <a:prstDash val="solid"/>
-          </a:ln>
-        </p:spPr>
-      </p:sp>
-      <p:sp>
-        <p:nvSpPr>
-          <p:cNvPr id="9" name="Text 6"/>
-          <p:cNvSpPr txBox="1"/>
-          <p:nvPr/>
-        </p:nvSpPr>
-        <p:spPr>
-          <a:xfrm>
-            <a:off x="8449056" y="2551176"/>
-            <a:ext cx="3017520" cy="219456"/>
-          </a:xfrm>
-          <a:prstGeom prst="rect">
-            <a:avLst/>
-          </a:prstGeom>
-          <a:noFill/>
-          <a:ln/>
-        </p:spPr>
-        <p:txBody>
-          <a:bodyPr wrap="square" lIns="0" tIns="0" rIns="0" bIns="0" rtlCol="0" anchor="ctr"/>
-          <a:lstStyle/>
-          <a:p>
-            <a:pPr indent="0" marL="0">
-              <a:buNone/>
-            </a:pPr>
-            <a:r>
-              <a:rPr lang="en-US" sz="1150" b="1" dirty="0">
-                <a:solidFill>
-                  <a:srgbClr val="0C1E33"/>
-                </a:solidFill>
-                <a:latin typeface="Arial" pitchFamily="34" charset="0"/>
-                <a:ea typeface="Arial" pitchFamily="34" charset="-122"/>
-                <a:cs typeface="Arial" pitchFamily="34" charset="-120"/>
-              </a:rPr>
-              <a:t>What flows back</a:t>
-            </a:r>
-            <a:endParaRPr lang="en-US" sz="1150" dirty="0"/>
-          </a:p>
-        </p:txBody>
-      </p:sp>
-      <p:sp>
-        <p:nvSpPr>
-          <p:cNvPr id="10" name="Text 7"/>
-          <p:cNvSpPr txBox="1"/>
-          <p:nvPr/>
-        </p:nvSpPr>
-        <p:spPr>
-          <a:xfrm>
-            <a:off x="8449056" y="2779776"/>
-            <a:ext cx="3035808" cy="786384"/>
-          </a:xfrm>
-          <a:prstGeom prst="rect">
-            <a:avLst/>
-          </a:prstGeom>
-          <a:noFill/>
-          <a:ln/>
-        </p:spPr>
-        <p:txBody>
-          <a:bodyPr wrap="square" lIns="0" tIns="0" rIns="0" bIns="0" rtlCol="0" anchor="ctr"/>
-          <a:lstStyle/>
-          <a:p>
-            <a:pPr indent="0" marL="0">
-              <a:lnSpc>
-                <a:spcPts val="1140"/>
-              </a:lnSpc>
-              <a:buNone/>
-            </a:pPr>
-            <a:r>
-              <a:rPr lang="en-US" sz="850" dirty="0">
-                <a:solidFill>
-                  <a:srgbClr val="5A6C82"/>
-                </a:solidFill>
-                <a:latin typeface="Calibri" pitchFamily="34" charset="0"/>
-                <a:ea typeface="Calibri" pitchFamily="34" charset="-122"/>
-                <a:cs typeface="Calibri" pitchFamily="34" charset="-120"/>
-              </a:rPr>
-              <a:t>Iqama number, expiry, profession as registered in Qiwa and work permit status, straight into Employee Central. Nobody re-types anything.</a:t>
-            </a:r>
-            <a:endParaRPr lang="en-US" sz="850" dirty="0"/>
-          </a:p>
-        </p:txBody>
-      </p:sp>
-      <p:sp>
-        <p:nvSpPr>
-          <p:cNvPr id="11" name="Shape 8"/>
-          <p:cNvSpPr/>
-          <p:nvPr/>
-        </p:nvSpPr>
-        <p:spPr>
-          <a:xfrm>
-            <a:off x="8275320" y="3749040"/>
-            <a:ext cx="3364992" cy="1188720"/>
-          </a:xfrm>
-          <a:prstGeom prst="roundRect">
-            <a:avLst>
-              <a:gd name="adj" fmla="val 5385"/>
-            </a:avLst>
-          </a:prstGeom>
-          <a:solidFill>
-            <a:srgbClr val="F4F6F7"/>
-          </a:solidFill>
-          <a:ln w="11430">
-            <a:solidFill>
-              <a:srgbClr val="E3E7EA"/>
-            </a:solidFill>
-            <a:prstDash val="solid"/>
-          </a:ln>
-        </p:spPr>
-      </p:sp>
-      <p:sp>
-        <p:nvSpPr>
-          <p:cNvPr id="12" name="Text 9"/>
-          <p:cNvSpPr txBox="1"/>
-          <p:nvPr/>
-        </p:nvSpPr>
-        <p:spPr>
-          <a:xfrm>
-            <a:off x="8449056" y="3849624"/>
-            <a:ext cx="3017520" cy="219456"/>
-          </a:xfrm>
-          <a:prstGeom prst="rect">
-            <a:avLst/>
-          </a:prstGeom>
-          <a:noFill/>
-          <a:ln/>
-        </p:spPr>
-        <p:txBody>
-          <a:bodyPr wrap="square" lIns="0" tIns="0" rIns="0" bIns="0" rtlCol="0" anchor="ctr"/>
-          <a:lstStyle/>
-          <a:p>
-            <a:pPr indent="0" marL="0">
-              <a:buNone/>
-            </a:pPr>
-            <a:r>
-              <a:rPr lang="en-US" sz="1150" b="1" dirty="0">
-                <a:solidFill>
-                  <a:srgbClr val="0C1E33"/>
-                </a:solidFill>
-                <a:latin typeface="Arial" pitchFamily="34" charset="0"/>
-                <a:ea typeface="Arial" pitchFamily="34" charset="-122"/>
-                <a:cs typeface="Arial" pitchFamily="34" charset="-120"/>
-              </a:rPr>
-              <a:t>What flows down</a:t>
-            </a:r>
-            <a:endParaRPr lang="en-US" sz="1150" dirty="0"/>
-          </a:p>
-        </p:txBody>
-      </p:sp>
-      <p:sp>
-        <p:nvSpPr>
-          <p:cNvPr id="13" name="Text 10"/>
-          <p:cNvSpPr txBox="1"/>
-          <p:nvPr/>
-        </p:nvSpPr>
-        <p:spPr>
-          <a:xfrm>
-            <a:off x="8449056" y="4078224"/>
-            <a:ext cx="3035808" cy="786384"/>
-          </a:xfrm>
-          <a:prstGeom prst="rect">
-            <a:avLst/>
-          </a:prstGeom>
-          <a:noFill/>
-          <a:ln/>
-        </p:spPr>
-        <p:txBody>
-          <a:bodyPr wrap="square" lIns="0" tIns="0" rIns="0" bIns="0" rtlCol="0" anchor="ctr"/>
-          <a:lstStyle/>
-          <a:p>
-            <a:pPr indent="0" marL="0">
-              <a:lnSpc>
-                <a:spcPts val="1140"/>
-              </a:lnSpc>
-              <a:buNone/>
-            </a:pPr>
-            <a:r>
-              <a:rPr lang="en-US" sz="850" dirty="0">
-                <a:solidFill>
-                  <a:srgbClr val="5A6C82"/>
-                </a:solidFill>
-                <a:latin typeface="Calibri" pitchFamily="34" charset="0"/>
-                <a:ea typeface="Calibri" pitchFamily="34" charset="-122"/>
-                <a:cs typeface="Calibri" pitchFamily="34" charset="-120"/>
-              </a:rPr>
-              <a:t>Every payment with its amount, VAT, SADAD reference, receipt and GL account, posted to S/4HANA as a journal. Levy accruals included.</a:t>
-            </a:r>
-            <a:endParaRPr lang="en-US" sz="850" dirty="0"/>
-          </a:p>
-        </p:txBody>
-      </p:sp>
-      <p:sp>
-        <p:nvSpPr>
-          <p:cNvPr id="14" name="Shape 11"/>
-          <p:cNvSpPr/>
-          <p:nvPr/>
-        </p:nvSpPr>
-        <p:spPr>
-          <a:xfrm>
-            <a:off x="8275320" y="5047488"/>
-            <a:ext cx="3364992" cy="1188720"/>
-          </a:xfrm>
-          <a:prstGeom prst="roundRect">
-            <a:avLst>
-              <a:gd name="adj" fmla="val 5385"/>
-            </a:avLst>
-          </a:prstGeom>
-          <a:solidFill>
-            <a:srgbClr val="FCF6E4"/>
-          </a:solidFill>
-          <a:ln w="11430">
-            <a:solidFill>
-              <a:srgbClr val="C9A227"/>
-            </a:solidFill>
-            <a:prstDash val="solid"/>
-          </a:ln>
-        </p:spPr>
-      </p:sp>
-      <p:sp>
-        <p:nvSpPr>
-          <p:cNvPr id="15" name="Text 12"/>
-          <p:cNvSpPr txBox="1"/>
-          <p:nvPr/>
-        </p:nvSpPr>
-        <p:spPr>
-          <a:xfrm>
-            <a:off x="8449056" y="5148072"/>
-            <a:ext cx="3017520" cy="219456"/>
-          </a:xfrm>
-          <a:prstGeom prst="rect">
-            <a:avLst/>
-          </a:prstGeom>
-          <a:noFill/>
-          <a:ln/>
-        </p:spPr>
-        <p:txBody>
-          <a:bodyPr wrap="square" lIns="0" tIns="0" rIns="0" bIns="0" rtlCol="0" anchor="ctr"/>
-          <a:lstStyle/>
-          <a:p>
-            <a:pPr indent="0" marL="0">
-              <a:buNone/>
-            </a:pPr>
-            <a:r>
-              <a:rPr lang="en-US" sz="1150" b="1" dirty="0">
-                <a:solidFill>
-                  <a:srgbClr val="7A6410"/>
-                </a:solidFill>
-                <a:latin typeface="Arial" pitchFamily="34" charset="0"/>
-                <a:ea typeface="Arial" pitchFamily="34" charset="-122"/>
-                <a:cs typeface="Arial" pitchFamily="34" charset="-120"/>
-              </a:rPr>
-              <a:t>The dashed arrows</a:t>
-            </a:r>
-            <a:endParaRPr lang="en-US" sz="1150" dirty="0"/>
-          </a:p>
-        </p:txBody>
-      </p:sp>
-      <p:sp>
-        <p:nvSpPr>
-          <p:cNvPr id="16" name="Text 13"/>
-          <p:cNvSpPr txBox="1"/>
-          <p:nvPr/>
-        </p:nvSpPr>
-        <p:spPr>
-          <a:xfrm>
-            <a:off x="8449056" y="5376672"/>
-            <a:ext cx="3035808" cy="786384"/>
-          </a:xfrm>
-          <a:prstGeom prst="rect">
-            <a:avLst/>
-          </a:prstGeom>
-          <a:noFill/>
-          <a:ln/>
-        </p:spPr>
-        <p:txBody>
-          <a:bodyPr wrap="square" lIns="0" tIns="0" rIns="0" bIns="0" rtlCol="0" anchor="ctr"/>
-          <a:lstStyle/>
-          <a:p>
-            <a:pPr indent="0" marL="0">
-              <a:lnSpc>
-                <a:spcPts val="1140"/>
-              </a:lnSpc>
-              <a:buNone/>
-            </a:pPr>
-            <a:r>
-              <a:rPr lang="en-US" sz="850" dirty="0">
-                <a:solidFill>
-                  <a:srgbClr val="5A6C82"/>
-                </a:solidFill>
-                <a:latin typeface="Calibri" pitchFamily="34" charset="0"/>
-                <a:ea typeface="Calibri" pitchFamily="34" charset="-122"/>
-                <a:cs typeface="Calibri" pitchFamily="34" charset="-120"/>
-              </a:rPr>
-              <a:t>Qiwa and Muqeem grant API access to the employer under their own establishment registration, never to a software vendor. Those credentials come from you. The connectors are already built.</a:t>
-            </a:r>
-            <a:endParaRPr lang="en-US" sz="850" dirty="0"/>
-          </a:p>
-        </p:txBody>
-      </p:sp>
-      <p:sp>
-        <p:nvSpPr>
-          <p:cNvPr id="17" name="Text 14"/>
+              <a:t>Qiwa contract fee, expat levy, Iqama issue fee, exit re-entry, transfer fee, medical insurance. Each with its own GL account and its own receipt, one click away.</a:t>
+            </a:r>
+            <a:endParaRPr lang="en-US" sz="1000" dirty="0"/>
+          </a:p>
+        </p:txBody>
+      </p:sp>
+      <p:sp>
+        <p:nvSpPr>
+          <p:cNvPr id="30" name="Text 27"/>
           <p:cNvSpPr txBox="1"/>
           <p:nvPr/>
         </p:nvSpPr>
@@ -13700,7 +17873,7 @@
       </p:sp>
       <p:sp>
         <p:nvSpPr>
-          <p:cNvPr id="18" name="Text 15"/>
+          <p:cNvPr id="31" name="Text 28"/>
           <p:cNvSpPr txBox="1"/>
           <p:nvPr/>
         </p:nvSpPr>

--- a/ksadeck/INK_IT_Visa_and_Permits_KSA.pptx
+++ b/ksadeck/INK_IT_Visa_and_Permits_KSA.pptx
@@ -2997,7 +2997,7 @@
         <p:spPr>
           <a:xfrm>
             <a:off x="548640" y="1243584"/>
-            <a:ext cx="10424160" cy="420624"/>
+            <a:ext cx="10424160" cy="274320"/>
           </a:xfrm>
           <a:prstGeom prst="rect">
             <a:avLst/>
@@ -3021,7 +3021,7 @@
                 <a:ea typeface="Calibri" pitchFamily="34" charset="-122"/>
                 <a:cs typeface="Calibri" pitchFamily="34" charset="-120"/>
               </a:rPr>
-              <a:t>Each role only sees what is actually theirs, with a due date on it, and the system already knows which Saudi authority each step belongs to.</a:t>
+              <a:t>Each role sees only what is theirs, with a due date on it. The system already knows which authority owns each step.</a:t>
             </a:r>
             <a:endParaRPr lang="en-US" sz="1300" dirty="0"/>
           </a:p>
@@ -3036,11 +3036,11 @@
         <p:spPr>
           <a:xfrm>
             <a:off x="548640" y="1828800"/>
-            <a:ext cx="10424160" cy="548640"/>
+            <a:ext cx="10424160" cy="603504"/>
           </a:xfrm>
           <a:prstGeom prst="roundRect">
             <a:avLst>
-              <a:gd name="adj" fmla="val 10000"/>
+              <a:gd name="adj" fmla="val 9091"/>
             </a:avLst>
           </a:prstGeom>
           <a:solidFill>
@@ -3199,27 +3199,28 @@
         </p:nvSpPr>
         <p:spPr>
           <a:xfrm>
-            <a:off x="3246120" y="1883664"/>
-            <a:ext cx="4846320" cy="438912"/>
-          </a:xfrm>
-          <a:prstGeom prst="rect">
-            <a:avLst/>
-          </a:prstGeom>
-          <a:noFill/>
-          <a:ln/>
-        </p:spPr>
-        <p:txBody>
-          <a:bodyPr wrap="square" lIns="0" tIns="0" rIns="0" bIns="0" rtlCol="0" anchor="ctr"/>
-          <a:lstStyle/>
-          <a:p>
-            <a:pPr indent="0" marL="0">
+            <a:off x="3200400" y="1897380"/>
+            <a:ext cx="4956048" cy="475488"/>
+          </a:xfrm>
+          <a:prstGeom prst="rect">
+            <a:avLst/>
+          </a:prstGeom>
+          <a:noFill/>
+          <a:ln/>
+        </p:spPr>
+        <p:txBody>
+          <a:bodyPr wrap="square" lIns="0" tIns="0" rIns="0" bIns="0" rtlCol="0" anchor="ctr"/>
+          <a:lstStyle/>
+          <a:p>
+            <a:pPr marL="342900" indent="-342900">
               <a:lnSpc>
-                <a:spcPts val="1240"/>
+                <a:spcPts val="1100"/>
               </a:lnSpc>
-              <a:buNone/>
-            </a:pPr>
-            <a:r>
-              <a:rPr lang="en-US" sz="930" dirty="0">
+              <a:buSzPct val="100000"/>
+              <a:buChar char="•"/>
+            </a:pPr>
+            <a:r>
+              <a:rPr lang="en-US" sz="860" dirty="0">
                 <a:solidFill>
                   <a:srgbClr val="5A6C82"/>
                 </a:solidFill>
@@ -3227,9 +3228,51 @@
                 <a:ea typeface="Calibri" pitchFamily="34" charset="-122"/>
                 <a:cs typeface="Calibri" pitchFamily="34" charset="-120"/>
               </a:rPr>
-              <a:t>Requests block visas once the band allows it; authenticates Qiwa contracts; issues Iqamas on Muqeem inside the statutory window; applies for exit re-entry and watches every return-by date.</a:t>
-            </a:r>
-            <a:endParaRPr lang="en-US" sz="930" dirty="0"/>
+              <a:t>Requests block visas the moment the band allows it</a:t>
+            </a:r>
+            <a:endParaRPr lang="en-US" sz="860" dirty="0"/>
+          </a:p>
+          <a:p>
+            <a:pPr marL="342900" indent="-342900">
+              <a:lnSpc>
+                <a:spcPts val="1100"/>
+              </a:lnSpc>
+              <a:buSzPct val="100000"/>
+              <a:buChar char="•"/>
+            </a:pPr>
+            <a:r>
+              <a:rPr lang="en-US" sz="860" dirty="0">
+                <a:solidFill>
+                  <a:srgbClr val="5A6C82"/>
+                </a:solidFill>
+                <a:latin typeface="Calibri" pitchFamily="34" charset="0"/>
+                <a:ea typeface="Calibri" pitchFamily="34" charset="-122"/>
+                <a:cs typeface="Calibri" pitchFamily="34" charset="-120"/>
+              </a:rPr>
+              <a:t>Authenticates contracts on Qiwa, issues Iqamas on Muqeem</a:t>
+            </a:r>
+            <a:endParaRPr lang="en-US" sz="860" dirty="0"/>
+          </a:p>
+          <a:p>
+            <a:pPr marL="342900" indent="-342900">
+              <a:lnSpc>
+                <a:spcPts val="1100"/>
+              </a:lnSpc>
+              <a:buSzPct val="100000"/>
+              <a:buChar char="•"/>
+            </a:pPr>
+            <a:r>
+              <a:rPr lang="en-US" sz="860" dirty="0">
+                <a:solidFill>
+                  <a:srgbClr val="5A6C82"/>
+                </a:solidFill>
+                <a:latin typeface="Calibri" pitchFamily="34" charset="0"/>
+                <a:ea typeface="Calibri" pitchFamily="34" charset="-122"/>
+                <a:cs typeface="Calibri" pitchFamily="34" charset="-120"/>
+              </a:rPr>
+              <a:t>Applies for exit re-entry and watches every return-by date</a:t>
+            </a:r>
+            <a:endParaRPr lang="en-US" sz="860" dirty="0"/>
           </a:p>
         </p:txBody>
       </p:sp>
@@ -3241,8 +3284,8 @@
         </p:nvSpPr>
         <p:spPr>
           <a:xfrm>
-            <a:off x="8229600" y="1883664"/>
-            <a:ext cx="2615184" cy="438912"/>
+            <a:off x="8229600" y="1897380"/>
+            <a:ext cx="2615184" cy="475488"/>
           </a:xfrm>
           <a:prstGeom prst="rect">
             <a:avLst/>
@@ -3256,7 +3299,7 @@
           <a:p>
             <a:pPr indent="0" marL="0">
               <a:lnSpc>
-                <a:spcPts val="1240"/>
+                <a:spcPts val="1160"/>
               </a:lnSpc>
               <a:buNone/>
             </a:pPr>
@@ -3269,7 +3312,7 @@
                 <a:ea typeface="Calibri" pitchFamily="34" charset="-122"/>
                 <a:cs typeface="Calibri" pitchFamily="34" charset="-120"/>
               </a:rPr>
-              <a:t>One queue that already knows which authority each step belongs to.</a:t>
+              <a:t>One queue that knows which authority each step belongs to.</a:t>
             </a:r>
             <a:endParaRPr lang="en-US" sz="930" dirty="0"/>
           </a:p>
@@ -3283,12 +3326,12 @@
         </p:nvSpPr>
         <p:spPr>
           <a:xfrm>
-            <a:off x="548640" y="2414016"/>
-            <a:ext cx="10424160" cy="548640"/>
+            <a:off x="548640" y="2473452"/>
+            <a:ext cx="10424160" cy="603504"/>
           </a:xfrm>
           <a:prstGeom prst="roundRect">
             <a:avLst>
-              <a:gd name="adj" fmla="val 10000"/>
+              <a:gd name="adj" fmla="val 9091"/>
             </a:avLst>
           </a:prstGeom>
           <a:solidFill>
@@ -3310,7 +3353,7 @@
         </p:nvSpPr>
         <p:spPr>
           <a:xfrm>
-            <a:off x="694944" y="2514600"/>
+            <a:off x="694944" y="2574036"/>
             <a:ext cx="347472" cy="347472"/>
           </a:xfrm>
           <a:prstGeom prst="ellipse">
@@ -3330,7 +3373,7 @@
         </p:nvSpPr>
         <p:spPr>
           <a:xfrm>
-            <a:off x="694944" y="2514600"/>
+            <a:off x="694944" y="2574036"/>
             <a:ext cx="347472" cy="347472"/>
           </a:xfrm>
           <a:prstGeom prst="rect">
@@ -3369,7 +3412,7 @@
         </p:nvSpPr>
         <p:spPr>
           <a:xfrm>
-            <a:off x="1152144" y="2468880"/>
+            <a:off x="1152144" y="2528316"/>
             <a:ext cx="1965960" cy="219456"/>
           </a:xfrm>
           <a:prstGeom prst="rect">
@@ -3408,7 +3451,7 @@
         </p:nvSpPr>
         <p:spPr>
           <a:xfrm>
-            <a:off x="1152144" y="2688336"/>
+            <a:off x="1152144" y="2747772"/>
             <a:ext cx="1965960" cy="182880"/>
           </a:xfrm>
           <a:prstGeom prst="rect">
@@ -3447,27 +3490,28 @@
         </p:nvSpPr>
         <p:spPr>
           <a:xfrm>
-            <a:off x="3246120" y="2468880"/>
-            <a:ext cx="4846320" cy="438912"/>
-          </a:xfrm>
-          <a:prstGeom prst="rect">
-            <a:avLst/>
-          </a:prstGeom>
-          <a:noFill/>
-          <a:ln/>
-        </p:spPr>
-        <p:txBody>
-          <a:bodyPr wrap="square" lIns="0" tIns="0" rIns="0" bIns="0" rtlCol="0" anchor="ctr"/>
-          <a:lstStyle/>
-          <a:p>
-            <a:pPr indent="0" marL="0">
+            <a:off x="3200400" y="2542032"/>
+            <a:ext cx="4956048" cy="475488"/>
+          </a:xfrm>
+          <a:prstGeom prst="rect">
+            <a:avLst/>
+          </a:prstGeom>
+          <a:noFill/>
+          <a:ln/>
+        </p:spPr>
+        <p:txBody>
+          <a:bodyPr wrap="square" lIns="0" tIns="0" rIns="0" bIns="0" rtlCol="0" anchor="ctr"/>
+          <a:lstStyle/>
+          <a:p>
+            <a:pPr marL="342900" indent="-342900">
               <a:lnSpc>
-                <a:spcPts val="1240"/>
+                <a:spcPts val="1100"/>
               </a:lnSpc>
-              <a:buNone/>
-            </a:pPr>
-            <a:r>
-              <a:rPr lang="en-US" sz="930" dirty="0">
+              <a:buSzPct val="100000"/>
+              <a:buChar char="•"/>
+            </a:pPr>
+            <a:r>
+              <a:rPr lang="en-US" sz="860" dirty="0">
                 <a:solidFill>
                   <a:srgbClr val="5A6C82"/>
                 </a:solidFill>
@@ -3475,9 +3519,51 @@
                 <a:ea typeface="Calibri" pitchFamily="34" charset="-122"/>
                 <a:cs typeface="Calibri" pitchFamily="34" charset="-120"/>
               </a:rPr>
-              <a:t>Checks block visa availability before making an offer; releases candidates from SF Recruiting; agrees the Qiwa profession code with the PRO before submission.</a:t>
-            </a:r>
-            <a:endParaRPr lang="en-US" sz="930" dirty="0"/>
+              <a:t>Checks visa availability before an offer goes out</a:t>
+            </a:r>
+            <a:endParaRPr lang="en-US" sz="860" dirty="0"/>
+          </a:p>
+          <a:p>
+            <a:pPr marL="342900" indent="-342900">
+              <a:lnSpc>
+                <a:spcPts val="1100"/>
+              </a:lnSpc>
+              <a:buSzPct val="100000"/>
+              <a:buChar char="•"/>
+            </a:pPr>
+            <a:r>
+              <a:rPr lang="en-US" sz="860" dirty="0">
+                <a:solidFill>
+                  <a:srgbClr val="5A6C82"/>
+                </a:solidFill>
+                <a:latin typeface="Calibri" pitchFamily="34" charset="0"/>
+                <a:ea typeface="Calibri" pitchFamily="34" charset="-122"/>
+                <a:cs typeface="Calibri" pitchFamily="34" charset="-120"/>
+              </a:rPr>
+              <a:t>Releases accepted candidates from SF Recruiting</a:t>
+            </a:r>
+            <a:endParaRPr lang="en-US" sz="860" dirty="0"/>
+          </a:p>
+          <a:p>
+            <a:pPr marL="342900" indent="-342900">
+              <a:lnSpc>
+                <a:spcPts val="1100"/>
+              </a:lnSpc>
+              <a:buSzPct val="100000"/>
+              <a:buChar char="•"/>
+            </a:pPr>
+            <a:r>
+              <a:rPr lang="en-US" sz="860" dirty="0">
+                <a:solidFill>
+                  <a:srgbClr val="5A6C82"/>
+                </a:solidFill>
+                <a:latin typeface="Calibri" pitchFamily="34" charset="0"/>
+                <a:ea typeface="Calibri" pitchFamily="34" charset="-122"/>
+                <a:cs typeface="Calibri" pitchFamily="34" charset="-120"/>
+              </a:rPr>
+              <a:t>Agrees the Qiwa profession code with the PRO</a:t>
+            </a:r>
+            <a:endParaRPr lang="en-US" sz="860" dirty="0"/>
           </a:p>
         </p:txBody>
       </p:sp>
@@ -3489,8 +3575,8 @@
         </p:nvSpPr>
         <p:spPr>
           <a:xfrm>
-            <a:off x="8229600" y="2468880"/>
-            <a:ext cx="2615184" cy="438912"/>
+            <a:off x="8229600" y="2542032"/>
+            <a:ext cx="2615184" cy="475488"/>
           </a:xfrm>
           <a:prstGeom prst="rect">
             <a:avLst/>
@@ -3504,7 +3590,7 @@
           <a:p>
             <a:pPr indent="0" marL="0">
               <a:lnSpc>
-                <a:spcPts val="1240"/>
+                <a:spcPts val="1160"/>
               </a:lnSpc>
               <a:buNone/>
             </a:pPr>
@@ -3531,12 +3617,12 @@
         </p:nvSpPr>
         <p:spPr>
           <a:xfrm>
-            <a:off x="548640" y="2999232"/>
-            <a:ext cx="10424160" cy="548640"/>
+            <a:off x="548640" y="3118104"/>
+            <a:ext cx="10424160" cy="603504"/>
           </a:xfrm>
           <a:prstGeom prst="roundRect">
             <a:avLst>
-              <a:gd name="adj" fmla="val 10000"/>
+              <a:gd name="adj" fmla="val 9091"/>
             </a:avLst>
           </a:prstGeom>
           <a:solidFill>
@@ -3558,7 +3644,7 @@
         </p:nvSpPr>
         <p:spPr>
           <a:xfrm>
-            <a:off x="694944" y="3099816"/>
+            <a:off x="694944" y="3218688"/>
             <a:ext cx="347472" cy="347472"/>
           </a:xfrm>
           <a:prstGeom prst="ellipse">
@@ -3578,7 +3664,7 @@
         </p:nvSpPr>
         <p:spPr>
           <a:xfrm>
-            <a:off x="694944" y="3099816"/>
+            <a:off x="694944" y="3218688"/>
             <a:ext cx="347472" cy="347472"/>
           </a:xfrm>
           <a:prstGeom prst="rect">
@@ -3617,7 +3703,7 @@
         </p:nvSpPr>
         <p:spPr>
           <a:xfrm>
-            <a:off x="1152144" y="3054096"/>
+            <a:off x="1152144" y="3172968"/>
             <a:ext cx="1965960" cy="219456"/>
           </a:xfrm>
           <a:prstGeom prst="rect">
@@ -3656,7 +3742,7 @@
         </p:nvSpPr>
         <p:spPr>
           <a:xfrm>
-            <a:off x="1152144" y="3273552"/>
+            <a:off x="1152144" y="3392424"/>
             <a:ext cx="1965960" cy="182880"/>
           </a:xfrm>
           <a:prstGeom prst="rect">
@@ -3695,27 +3781,28 @@
         </p:nvSpPr>
         <p:spPr>
           <a:xfrm>
-            <a:off x="3246120" y="3054096"/>
-            <a:ext cx="4846320" cy="438912"/>
-          </a:xfrm>
-          <a:prstGeom prst="rect">
-            <a:avLst/>
-          </a:prstGeom>
-          <a:noFill/>
-          <a:ln/>
-        </p:spPr>
-        <p:txBody>
-          <a:bodyPr wrap="square" lIns="0" tIns="0" rIns="0" bIns="0" rtlCol="0" anchor="ctr"/>
-          <a:lstStyle/>
-          <a:p>
-            <a:pPr indent="0" marL="0">
+            <a:off x="3200400" y="3186684"/>
+            <a:ext cx="4956048" cy="475488"/>
+          </a:xfrm>
+          <a:prstGeom prst="rect">
+            <a:avLst/>
+          </a:prstGeom>
+          <a:noFill/>
+          <a:ln/>
+        </p:spPr>
+        <p:txBody>
+          <a:bodyPr wrap="square" lIns="0" tIns="0" rIns="0" bIns="0" rtlCol="0" anchor="ctr"/>
+          <a:lstStyle/>
+          <a:p>
+            <a:pPr marL="342900" indent="-342900">
               <a:lnSpc>
-                <a:spcPts val="1240"/>
+                <a:spcPts val="1100"/>
               </a:lnSpc>
-              <a:buNone/>
-            </a:pPr>
-            <a:r>
-              <a:rPr lang="en-US" sz="930" dirty="0">
+              <a:buSzPct val="100000"/>
+              <a:buChar char="•"/>
+            </a:pPr>
+            <a:r>
+              <a:rPr lang="en-US" sz="860" dirty="0">
                 <a:solidFill>
                   <a:srgbClr val="5A6C82"/>
                 </a:solidFill>
@@ -3723,9 +3810,51 @@
                 <a:ea typeface="Calibri" pitchFamily="34" charset="-122"/>
                 <a:cs typeface="Calibri" pitchFamily="34" charset="-120"/>
               </a:rPr>
-              <a:t>Records the arrival date that starts the statutory Iqama clock; chases medicals and biometrics; registers Saudi hires with GOSI and Mudad.</a:t>
-            </a:r>
-            <a:endParaRPr lang="en-US" sz="930" dirty="0"/>
+              <a:t>Records the arrival date that starts the Iqama clock</a:t>
+            </a:r>
+            <a:endParaRPr lang="en-US" sz="860" dirty="0"/>
+          </a:p>
+          <a:p>
+            <a:pPr marL="342900" indent="-342900">
+              <a:lnSpc>
+                <a:spcPts val="1100"/>
+              </a:lnSpc>
+              <a:buSzPct val="100000"/>
+              <a:buChar char="•"/>
+            </a:pPr>
+            <a:r>
+              <a:rPr lang="en-US" sz="860" dirty="0">
+                <a:solidFill>
+                  <a:srgbClr val="5A6C82"/>
+                </a:solidFill>
+                <a:latin typeface="Calibri" pitchFamily="34" charset="0"/>
+                <a:ea typeface="Calibri" pitchFamily="34" charset="-122"/>
+                <a:cs typeface="Calibri" pitchFamily="34" charset="-120"/>
+              </a:rPr>
+              <a:t>Chases medicals and biometrics</a:t>
+            </a:r>
+            <a:endParaRPr lang="en-US" sz="860" dirty="0"/>
+          </a:p>
+          <a:p>
+            <a:pPr marL="342900" indent="-342900">
+              <a:lnSpc>
+                <a:spcPts val="1100"/>
+              </a:lnSpc>
+              <a:buSzPct val="100000"/>
+              <a:buChar char="•"/>
+            </a:pPr>
+            <a:r>
+              <a:rPr lang="en-US" sz="860" dirty="0">
+                <a:solidFill>
+                  <a:srgbClr val="5A6C82"/>
+                </a:solidFill>
+                <a:latin typeface="Calibri" pitchFamily="34" charset="0"/>
+                <a:ea typeface="Calibri" pitchFamily="34" charset="-122"/>
+                <a:cs typeface="Calibri" pitchFamily="34" charset="-120"/>
+              </a:rPr>
+              <a:t>Registers Saudi hires with GOSI and Mudad</a:t>
+            </a:r>
+            <a:endParaRPr lang="en-US" sz="860" dirty="0"/>
           </a:p>
         </p:txBody>
       </p:sp>
@@ -3737,8 +3866,8 @@
         </p:nvSpPr>
         <p:spPr>
           <a:xfrm>
-            <a:off x="8229600" y="3054096"/>
-            <a:ext cx="2615184" cy="438912"/>
+            <a:off x="8229600" y="3186684"/>
+            <a:ext cx="2615184" cy="475488"/>
           </a:xfrm>
           <a:prstGeom prst="rect">
             <a:avLst/>
@@ -3752,7 +3881,7 @@
           <a:p>
             <a:pPr indent="0" marL="0">
               <a:lnSpc>
-                <a:spcPts val="1240"/>
+                <a:spcPts val="1160"/>
               </a:lnSpc>
               <a:buNone/>
             </a:pPr>
@@ -3779,12 +3908,12 @@
         </p:nvSpPr>
         <p:spPr>
           <a:xfrm>
-            <a:off x="548640" y="3584448"/>
-            <a:ext cx="10424160" cy="548640"/>
+            <a:off x="548640" y="3762756"/>
+            <a:ext cx="10424160" cy="603504"/>
           </a:xfrm>
           <a:prstGeom prst="roundRect">
             <a:avLst>
-              <a:gd name="adj" fmla="val 10000"/>
+              <a:gd name="adj" fmla="val 9091"/>
             </a:avLst>
           </a:prstGeom>
           <a:solidFill>
@@ -3806,7 +3935,7 @@
         </p:nvSpPr>
         <p:spPr>
           <a:xfrm>
-            <a:off x="694944" y="3685032"/>
+            <a:off x="694944" y="3863340"/>
             <a:ext cx="347472" cy="347472"/>
           </a:xfrm>
           <a:prstGeom prst="ellipse">
@@ -3826,7 +3955,7 @@
         </p:nvSpPr>
         <p:spPr>
           <a:xfrm>
-            <a:off x="694944" y="3685032"/>
+            <a:off x="694944" y="3863340"/>
             <a:ext cx="347472" cy="347472"/>
           </a:xfrm>
           <a:prstGeom prst="rect">
@@ -3865,7 +3994,7 @@
         </p:nvSpPr>
         <p:spPr>
           <a:xfrm>
-            <a:off x="1152144" y="3639312"/>
+            <a:off x="1152144" y="3817620"/>
             <a:ext cx="1965960" cy="219456"/>
           </a:xfrm>
           <a:prstGeom prst="rect">
@@ -3904,7 +4033,7 @@
         </p:nvSpPr>
         <p:spPr>
           <a:xfrm>
-            <a:off x="1152144" y="3858768"/>
+            <a:off x="1152144" y="4037076"/>
             <a:ext cx="1965960" cy="182880"/>
           </a:xfrm>
           <a:prstGeom prst="rect">
@@ -3943,27 +4072,28 @@
         </p:nvSpPr>
         <p:spPr>
           <a:xfrm>
-            <a:off x="3246120" y="3639312"/>
-            <a:ext cx="4846320" cy="438912"/>
-          </a:xfrm>
-          <a:prstGeom prst="rect">
-            <a:avLst/>
-          </a:prstGeom>
-          <a:noFill/>
-          <a:ln/>
-        </p:spPr>
-        <p:txBody>
-          <a:bodyPr wrap="square" lIns="0" tIns="0" rIns="0" bIns="0" rtlCol="0" anchor="ctr"/>
-          <a:lstStyle/>
-          <a:p>
-            <a:pPr indent="0" marL="0">
+            <a:off x="3200400" y="3831336"/>
+            <a:ext cx="4956048" cy="475488"/>
+          </a:xfrm>
+          <a:prstGeom prst="rect">
+            <a:avLst/>
+          </a:prstGeom>
+          <a:noFill/>
+          <a:ln/>
+        </p:spPr>
+        <p:txBody>
+          <a:bodyPr wrap="square" lIns="0" tIns="0" rIns="0" bIns="0" rtlCol="0" anchor="ctr"/>
+          <a:lstStyle/>
+          <a:p>
+            <a:pPr marL="342900" indent="-342900">
               <a:lnSpc>
-                <a:spcPts val="1240"/>
+                <a:spcPts val="1100"/>
               </a:lnSpc>
-              <a:buNone/>
-            </a:pPr>
-            <a:r>
-              <a:rPr lang="en-US" sz="930" dirty="0">
+              <a:buSzPct val="100000"/>
+              <a:buChar char="•"/>
+            </a:pPr>
+            <a:r>
+              <a:rPr lang="en-US" sz="860" dirty="0">
                 <a:solidFill>
                   <a:srgbClr val="5A6C82"/>
                 </a:solidFill>
@@ -3971,9 +4101,51 @@
                 <a:ea typeface="Calibri" pitchFamily="34" charset="-122"/>
                 <a:cs typeface="Calibri" pitchFamily="34" charset="-120"/>
               </a:rPr>
-              <a:t>Approves exit re-entry against dues and notice; reviews the Nitaqat impact of a resignation before it is actioned; starts final exit once settlement is agreed.</a:t>
-            </a:r>
-            <a:endParaRPr lang="en-US" sz="930" dirty="0"/>
+              <a:t>Approves exit re-entry against dues and notice</a:t>
+            </a:r>
+            <a:endParaRPr lang="en-US" sz="860" dirty="0"/>
+          </a:p>
+          <a:p>
+            <a:pPr marL="342900" indent="-342900">
+              <a:lnSpc>
+                <a:spcPts val="1100"/>
+              </a:lnSpc>
+              <a:buSzPct val="100000"/>
+              <a:buChar char="•"/>
+            </a:pPr>
+            <a:r>
+              <a:rPr lang="en-US" sz="860" dirty="0">
+                <a:solidFill>
+                  <a:srgbClr val="5A6C82"/>
+                </a:solidFill>
+                <a:latin typeface="Calibri" pitchFamily="34" charset="0"/>
+                <a:ea typeface="Calibri" pitchFamily="34" charset="-122"/>
+                <a:cs typeface="Calibri" pitchFamily="34" charset="-120"/>
+              </a:rPr>
+              <a:t>Sees the Nitaqat impact of a resignation before actioning it</a:t>
+            </a:r>
+            <a:endParaRPr lang="en-US" sz="860" dirty="0"/>
+          </a:p>
+          <a:p>
+            <a:pPr marL="342900" indent="-342900">
+              <a:lnSpc>
+                <a:spcPts val="1100"/>
+              </a:lnSpc>
+              <a:buSzPct val="100000"/>
+              <a:buChar char="•"/>
+            </a:pPr>
+            <a:r>
+              <a:rPr lang="en-US" sz="860" dirty="0">
+                <a:solidFill>
+                  <a:srgbClr val="5A6C82"/>
+                </a:solidFill>
+                <a:latin typeface="Calibri" pitchFamily="34" charset="0"/>
+                <a:ea typeface="Calibri" pitchFamily="34" charset="-122"/>
+                <a:cs typeface="Calibri" pitchFamily="34" charset="-120"/>
+              </a:rPr>
+              <a:t>Starts final exit once settlement is agreed</a:t>
+            </a:r>
+            <a:endParaRPr lang="en-US" sz="860" dirty="0"/>
           </a:p>
         </p:txBody>
       </p:sp>
@@ -3985,8 +4157,8 @@
         </p:nvSpPr>
         <p:spPr>
           <a:xfrm>
-            <a:off x="8229600" y="3639312"/>
-            <a:ext cx="2615184" cy="438912"/>
+            <a:off x="8229600" y="3831336"/>
+            <a:ext cx="2615184" cy="475488"/>
           </a:xfrm>
           <a:prstGeom prst="rect">
             <a:avLst/>
@@ -4000,7 +4172,7 @@
           <a:p>
             <a:pPr indent="0" marL="0">
               <a:lnSpc>
-                <a:spcPts val="1240"/>
+                <a:spcPts val="1160"/>
               </a:lnSpc>
               <a:buNone/>
             </a:pPr>
@@ -4027,12 +4199,12 @@
         </p:nvSpPr>
         <p:spPr>
           <a:xfrm>
-            <a:off x="548640" y="4169664"/>
-            <a:ext cx="10424160" cy="548640"/>
+            <a:off x="548640" y="4407408"/>
+            <a:ext cx="10424160" cy="603504"/>
           </a:xfrm>
           <a:prstGeom prst="roundRect">
             <a:avLst>
-              <a:gd name="adj" fmla="val 10000"/>
+              <a:gd name="adj" fmla="val 9091"/>
             </a:avLst>
           </a:prstGeom>
           <a:solidFill>
@@ -4054,7 +4226,7 @@
         </p:nvSpPr>
         <p:spPr>
           <a:xfrm>
-            <a:off x="694944" y="4270248"/>
+            <a:off x="694944" y="4507992"/>
             <a:ext cx="347472" cy="347472"/>
           </a:xfrm>
           <a:prstGeom prst="ellipse">
@@ -4074,7 +4246,7 @@
         </p:nvSpPr>
         <p:spPr>
           <a:xfrm>
-            <a:off x="694944" y="4270248"/>
+            <a:off x="694944" y="4507992"/>
             <a:ext cx="347472" cy="347472"/>
           </a:xfrm>
           <a:prstGeom prst="rect">
@@ -4113,7 +4285,7 @@
         </p:nvSpPr>
         <p:spPr>
           <a:xfrm>
-            <a:off x="1152144" y="4224528"/>
+            <a:off x="1152144" y="4462272"/>
             <a:ext cx="1965960" cy="219456"/>
           </a:xfrm>
           <a:prstGeom prst="rect">
@@ -4152,7 +4324,7 @@
         </p:nvSpPr>
         <p:spPr>
           <a:xfrm>
-            <a:off x="1152144" y="4443984"/>
+            <a:off x="1152144" y="4681728"/>
             <a:ext cx="1965960" cy="182880"/>
           </a:xfrm>
           <a:prstGeom prst="rect">
@@ -4191,27 +4363,28 @@
         </p:nvSpPr>
         <p:spPr>
           <a:xfrm>
-            <a:off x="3246120" y="4224528"/>
-            <a:ext cx="4846320" cy="438912"/>
-          </a:xfrm>
-          <a:prstGeom prst="rect">
-            <a:avLst/>
-          </a:prstGeom>
-          <a:noFill/>
-          <a:ln/>
-        </p:spPr>
-        <p:txBody>
-          <a:bodyPr wrap="square" lIns="0" tIns="0" rIns="0" bIns="0" rtlCol="0" anchor="ctr"/>
-          <a:lstStyle/>
-          <a:p>
-            <a:pPr indent="0" marL="0">
+            <a:off x="3200400" y="4475988"/>
+            <a:ext cx="4956048" cy="475488"/>
+          </a:xfrm>
+          <a:prstGeom prst="rect">
+            <a:avLst/>
+          </a:prstGeom>
+          <a:noFill/>
+          <a:ln/>
+        </p:spPr>
+        <p:txBody>
+          <a:bodyPr wrap="square" lIns="0" tIns="0" rIns="0" bIns="0" rtlCol="0" anchor="ctr"/>
+          <a:lstStyle/>
+          <a:p>
+            <a:pPr marL="342900" indent="-342900">
               <a:lnSpc>
-                <a:spcPts val="1240"/>
+                <a:spcPts val="1100"/>
               </a:lnSpc>
-              <a:buNone/>
-            </a:pPr>
-            <a:r>
-              <a:rPr lang="en-US" sz="930" dirty="0">
+              <a:buSzPct val="100000"/>
+              <a:buChar char="•"/>
+            </a:pPr>
+            <a:r>
+              <a:rPr lang="en-US" sz="860" dirty="0">
                 <a:solidFill>
                   <a:srgbClr val="5A6C82"/>
                 </a:solidFill>
@@ -4219,9 +4392,51 @@
                 <a:ea typeface="Calibri" pitchFamily="34" charset="-122"/>
                 <a:cs typeface="Calibri" pitchFamily="34" charset="-120"/>
               </a:rPr>
-              <a:t>Requests exit re-entry with travel dates; confirms medical and biometrics; signs the Qiwa contract; confirms receipt of the renewed Iqama.</a:t>
-            </a:r>
-            <a:endParaRPr lang="en-US" sz="930" dirty="0"/>
+              <a:t>Requests exit re-entry with travel dates</a:t>
+            </a:r>
+            <a:endParaRPr lang="en-US" sz="860" dirty="0"/>
+          </a:p>
+          <a:p>
+            <a:pPr marL="342900" indent="-342900">
+              <a:lnSpc>
+                <a:spcPts val="1100"/>
+              </a:lnSpc>
+              <a:buSzPct val="100000"/>
+              <a:buChar char="•"/>
+            </a:pPr>
+            <a:r>
+              <a:rPr lang="en-US" sz="860" dirty="0">
+                <a:solidFill>
+                  <a:srgbClr val="5A6C82"/>
+                </a:solidFill>
+                <a:latin typeface="Calibri" pitchFamily="34" charset="0"/>
+                <a:ea typeface="Calibri" pitchFamily="34" charset="-122"/>
+                <a:cs typeface="Calibri" pitchFamily="34" charset="-120"/>
+              </a:rPr>
+              <a:t>Signs the Qiwa contract, confirms medical and biometrics</a:t>
+            </a:r>
+            <a:endParaRPr lang="en-US" sz="860" dirty="0"/>
+          </a:p>
+          <a:p>
+            <a:pPr marL="342900" indent="-342900">
+              <a:lnSpc>
+                <a:spcPts val="1100"/>
+              </a:lnSpc>
+              <a:buSzPct val="100000"/>
+              <a:buChar char="•"/>
+            </a:pPr>
+            <a:r>
+              <a:rPr lang="en-US" sz="860" dirty="0">
+                <a:solidFill>
+                  <a:srgbClr val="5A6C82"/>
+                </a:solidFill>
+                <a:latin typeface="Calibri" pitchFamily="34" charset="0"/>
+                <a:ea typeface="Calibri" pitchFamily="34" charset="-122"/>
+                <a:cs typeface="Calibri" pitchFamily="34" charset="-120"/>
+              </a:rPr>
+              <a:t>Confirms the renewed Iqama has reached them</a:t>
+            </a:r>
+            <a:endParaRPr lang="en-US" sz="860" dirty="0"/>
           </a:p>
         </p:txBody>
       </p:sp>
@@ -4233,8 +4448,8 @@
         </p:nvSpPr>
         <p:spPr>
           <a:xfrm>
-            <a:off x="8229600" y="4224528"/>
-            <a:ext cx="2615184" cy="438912"/>
+            <a:off x="8229600" y="4475988"/>
+            <a:ext cx="2615184" cy="475488"/>
           </a:xfrm>
           <a:prstGeom prst="rect">
             <a:avLst/>
@@ -4248,7 +4463,7 @@
           <a:p>
             <a:pPr indent="0" marL="0">
               <a:lnSpc>
-                <a:spcPts val="1240"/>
+                <a:spcPts val="1160"/>
               </a:lnSpc>
               <a:buNone/>
             </a:pPr>
@@ -4275,12 +4490,12 @@
         </p:nvSpPr>
         <p:spPr>
           <a:xfrm>
-            <a:off x="548640" y="4754880"/>
-            <a:ext cx="10424160" cy="548640"/>
+            <a:off x="548640" y="5052060"/>
+            <a:ext cx="10424160" cy="603504"/>
           </a:xfrm>
           <a:prstGeom prst="roundRect">
             <a:avLst>
-              <a:gd name="adj" fmla="val 10000"/>
+              <a:gd name="adj" fmla="val 9091"/>
             </a:avLst>
           </a:prstGeom>
           <a:solidFill>
@@ -4302,7 +4517,7 @@
         </p:nvSpPr>
         <p:spPr>
           <a:xfrm>
-            <a:off x="694944" y="4855464"/>
+            <a:off x="694944" y="5152644"/>
             <a:ext cx="347472" cy="347472"/>
           </a:xfrm>
           <a:prstGeom prst="ellipse">
@@ -4322,7 +4537,7 @@
         </p:nvSpPr>
         <p:spPr>
           <a:xfrm>
-            <a:off x="694944" y="4855464"/>
+            <a:off x="694944" y="5152644"/>
             <a:ext cx="347472" cy="347472"/>
           </a:xfrm>
           <a:prstGeom prst="rect">
@@ -4361,7 +4576,7 @@
         </p:nvSpPr>
         <p:spPr>
           <a:xfrm>
-            <a:off x="1152144" y="4809744"/>
+            <a:off x="1152144" y="5106924"/>
             <a:ext cx="1965960" cy="219456"/>
           </a:xfrm>
           <a:prstGeom prst="rect">
@@ -4400,7 +4615,7 @@
         </p:nvSpPr>
         <p:spPr>
           <a:xfrm>
-            <a:off x="1152144" y="5029200"/>
+            <a:off x="1152144" y="5326380"/>
             <a:ext cx="1965960" cy="182880"/>
           </a:xfrm>
           <a:prstGeom prst="rect">
@@ -4439,27 +4654,28 @@
         </p:nvSpPr>
         <p:spPr>
           <a:xfrm>
-            <a:off x="3246120" y="4809744"/>
-            <a:ext cx="4846320" cy="438912"/>
-          </a:xfrm>
-          <a:prstGeom prst="rect">
-            <a:avLst/>
-          </a:prstGeom>
-          <a:noFill/>
-          <a:ln/>
-        </p:spPr>
-        <p:txBody>
-          <a:bodyPr wrap="square" lIns="0" tIns="0" rIns="0" bIns="0" rtlCol="0" anchor="ctr"/>
-          <a:lstStyle/>
-          <a:p>
-            <a:pPr indent="0" marL="0">
+            <a:off x="3200400" y="5120640"/>
+            <a:ext cx="4956048" cy="475488"/>
+          </a:xfrm>
+          <a:prstGeom prst="rect">
+            <a:avLst/>
+          </a:prstGeom>
+          <a:noFill/>
+          <a:ln/>
+        </p:spPr>
+        <p:txBody>
+          <a:bodyPr wrap="square" lIns="0" tIns="0" rIns="0" bIns="0" rtlCol="0" anchor="ctr"/>
+          <a:lstStyle/>
+          <a:p>
+            <a:pPr marL="342900" indent="-342900">
               <a:lnSpc>
-                <a:spcPts val="1240"/>
+                <a:spcPts val="1100"/>
               </a:lnSpc>
-              <a:buNone/>
-            </a:pPr>
-            <a:r>
-              <a:rPr lang="en-US" sz="930" dirty="0">
+              <a:buSzPct val="100000"/>
+              <a:buChar char="•"/>
+            </a:pPr>
+            <a:r>
+              <a:rPr lang="en-US" sz="860" dirty="0">
                 <a:solidFill>
                   <a:srgbClr val="5A6C82"/>
                 </a:solidFill>
@@ -4467,9 +4683,51 @@
                 <a:ea typeface="Calibri" pitchFamily="34" charset="-122"/>
                 <a:cs typeface="Calibri" pitchFamily="34" charset="-120"/>
               </a:rPr>
-              <a:t>Reconciles SADAD payments against receipts; posts to GL; forecasts expat levy against the renewal calendar.</a:t>
-            </a:r>
-            <a:endParaRPr lang="en-US" sz="930" dirty="0"/>
+              <a:t>Reconciles SADAD payments against receipts</a:t>
+            </a:r>
+            <a:endParaRPr lang="en-US" sz="860" dirty="0"/>
+          </a:p>
+          <a:p>
+            <a:pPr marL="342900" indent="-342900">
+              <a:lnSpc>
+                <a:spcPts val="1100"/>
+              </a:lnSpc>
+              <a:buSzPct val="100000"/>
+              <a:buChar char="•"/>
+            </a:pPr>
+            <a:r>
+              <a:rPr lang="en-US" sz="860" dirty="0">
+                <a:solidFill>
+                  <a:srgbClr val="5A6C82"/>
+                </a:solidFill>
+                <a:latin typeface="Calibri" pitchFamily="34" charset="0"/>
+                <a:ea typeface="Calibri" pitchFamily="34" charset="-122"/>
+                <a:cs typeface="Calibri" pitchFamily="34" charset="-120"/>
+              </a:rPr>
+              <a:t>Posts permit and levy cost to the right GL account</a:t>
+            </a:r>
+            <a:endParaRPr lang="en-US" sz="860" dirty="0"/>
+          </a:p>
+          <a:p>
+            <a:pPr marL="342900" indent="-342900">
+              <a:lnSpc>
+                <a:spcPts val="1100"/>
+              </a:lnSpc>
+              <a:buSzPct val="100000"/>
+              <a:buChar char="•"/>
+            </a:pPr>
+            <a:r>
+              <a:rPr lang="en-US" sz="860" dirty="0">
+                <a:solidFill>
+                  <a:srgbClr val="5A6C82"/>
+                </a:solidFill>
+                <a:latin typeface="Calibri" pitchFamily="34" charset="0"/>
+                <a:ea typeface="Calibri" pitchFamily="34" charset="-122"/>
+                <a:cs typeface="Calibri" pitchFamily="34" charset="-120"/>
+              </a:rPr>
+              <a:t>Forecasts expat levy against the renewal calendar</a:t>
+            </a:r>
+            <a:endParaRPr lang="en-US" sz="860" dirty="0"/>
           </a:p>
         </p:txBody>
       </p:sp>
@@ -4481,8 +4739,8 @@
         </p:nvSpPr>
         <p:spPr>
           <a:xfrm>
-            <a:off x="8229600" y="4809744"/>
-            <a:ext cx="2615184" cy="438912"/>
+            <a:off x="8229600" y="5120640"/>
+            <a:ext cx="2615184" cy="475488"/>
           </a:xfrm>
           <a:prstGeom prst="rect">
             <a:avLst/>
@@ -4496,7 +4754,7 @@
           <a:p>
             <a:pPr indent="0" marL="0">
               <a:lnSpc>
-                <a:spcPts val="1240"/>
+                <a:spcPts val="1160"/>
               </a:lnSpc>
               <a:buNone/>
             </a:pPr>
@@ -4523,12 +4781,12 @@
         </p:nvSpPr>
         <p:spPr>
           <a:xfrm>
-            <a:off x="548640" y="5340096"/>
-            <a:ext cx="10424160" cy="548640"/>
+            <a:off x="548640" y="5696712"/>
+            <a:ext cx="10424160" cy="603504"/>
           </a:xfrm>
           <a:prstGeom prst="roundRect">
             <a:avLst>
-              <a:gd name="adj" fmla="val 10000"/>
+              <a:gd name="adj" fmla="val 9091"/>
             </a:avLst>
           </a:prstGeom>
           <a:solidFill>
@@ -4550,7 +4808,7 @@
         </p:nvSpPr>
         <p:spPr>
           <a:xfrm>
-            <a:off x="694944" y="5440680"/>
+            <a:off x="694944" y="5797296"/>
             <a:ext cx="347472" cy="347472"/>
           </a:xfrm>
           <a:prstGeom prst="ellipse">
@@ -4570,7 +4828,7 @@
         </p:nvSpPr>
         <p:spPr>
           <a:xfrm>
-            <a:off x="694944" y="5440680"/>
+            <a:off x="694944" y="5797296"/>
             <a:ext cx="347472" cy="347472"/>
           </a:xfrm>
           <a:prstGeom prst="rect">
@@ -4609,7 +4867,7 @@
         </p:nvSpPr>
         <p:spPr>
           <a:xfrm>
-            <a:off x="1152144" y="5394960"/>
+            <a:off x="1152144" y="5751576"/>
             <a:ext cx="1965960" cy="219456"/>
           </a:xfrm>
           <a:prstGeom prst="rect">
@@ -4648,7 +4906,7 @@
         </p:nvSpPr>
         <p:spPr>
           <a:xfrm>
-            <a:off x="1152144" y="5614416"/>
+            <a:off x="1152144" y="5971032"/>
             <a:ext cx="1965960" cy="182880"/>
           </a:xfrm>
           <a:prstGeom prst="rect">
@@ -4687,27 +4945,28 @@
         </p:nvSpPr>
         <p:spPr>
           <a:xfrm>
-            <a:off x="3246120" y="5394960"/>
-            <a:ext cx="4846320" cy="438912"/>
-          </a:xfrm>
-          <a:prstGeom prst="rect">
-            <a:avLst/>
-          </a:prstGeom>
-          <a:noFill/>
-          <a:ln/>
-        </p:spPr>
-        <p:txBody>
-          <a:bodyPr wrap="square" lIns="0" tIns="0" rIns="0" bIns="0" rtlCol="0" anchor="ctr"/>
-          <a:lstStyle/>
-          <a:p>
-            <a:pPr indent="0" marL="0">
+            <a:off x="3200400" y="5765292"/>
+            <a:ext cx="4956048" cy="475488"/>
+          </a:xfrm>
+          <a:prstGeom prst="rect">
+            <a:avLst/>
+          </a:prstGeom>
+          <a:noFill/>
+          <a:ln/>
+        </p:spPr>
+        <p:txBody>
+          <a:bodyPr wrap="square" lIns="0" tIns="0" rIns="0" bIns="0" rtlCol="0" anchor="ctr"/>
+          <a:lstStyle/>
+          <a:p>
+            <a:pPr marL="342900" indent="-342900">
               <a:lnSpc>
-                <a:spcPts val="1240"/>
+                <a:spcPts val="1100"/>
               </a:lnSpc>
-              <a:buNone/>
-            </a:pPr>
-            <a:r>
-              <a:rPr lang="en-US" sz="930" dirty="0">
+              <a:buSzPct val="100000"/>
+              <a:buChar char="•"/>
+            </a:pPr>
+            <a:r>
+              <a:rPr lang="en-US" sz="860" dirty="0">
                 <a:solidFill>
                   <a:srgbClr val="5A6C82"/>
                 </a:solidFill>
@@ -4715,9 +4974,51 @@
                 <a:ea typeface="Calibri" pitchFamily="34" charset="-122"/>
                 <a:cs typeface="Calibri" pitchFamily="34" charset="-120"/>
               </a:rPr>
-              <a:t>Watches band position per establishment; reviews Saudization against Vision 2030 commitments; signs off the localisation hiring plan.</a:t>
-            </a:r>
-            <a:endParaRPr lang="en-US" sz="930" dirty="0"/>
+              <a:t>Watches band position for every establishment</a:t>
+            </a:r>
+            <a:endParaRPr lang="en-US" sz="860" dirty="0"/>
+          </a:p>
+          <a:p>
+            <a:pPr marL="342900" indent="-342900">
+              <a:lnSpc>
+                <a:spcPts val="1100"/>
+              </a:lnSpc>
+              <a:buSzPct val="100000"/>
+              <a:buChar char="•"/>
+            </a:pPr>
+            <a:r>
+              <a:rPr lang="en-US" sz="860" dirty="0">
+                <a:solidFill>
+                  <a:srgbClr val="5A6C82"/>
+                </a:solidFill>
+                <a:latin typeface="Calibri" pitchFamily="34" charset="0"/>
+                <a:ea typeface="Calibri" pitchFamily="34" charset="-122"/>
+                <a:cs typeface="Calibri" pitchFamily="34" charset="-120"/>
+              </a:rPr>
+              <a:t>Reviews Saudization against Vision 2030 commitments</a:t>
+            </a:r>
+            <a:endParaRPr lang="en-US" sz="860" dirty="0"/>
+          </a:p>
+          <a:p>
+            <a:pPr marL="342900" indent="-342900">
+              <a:lnSpc>
+                <a:spcPts val="1100"/>
+              </a:lnSpc>
+              <a:buSzPct val="100000"/>
+              <a:buChar char="•"/>
+            </a:pPr>
+            <a:r>
+              <a:rPr lang="en-US" sz="860" dirty="0">
+                <a:solidFill>
+                  <a:srgbClr val="5A6C82"/>
+                </a:solidFill>
+                <a:latin typeface="Calibri" pitchFamily="34" charset="0"/>
+                <a:ea typeface="Calibri" pitchFamily="34" charset="-122"/>
+                <a:cs typeface="Calibri" pitchFamily="34" charset="-120"/>
+              </a:rPr>
+              <a:t>Signs off the localisation hiring plan</a:t>
+            </a:r>
+            <a:endParaRPr lang="en-US" sz="860" dirty="0"/>
           </a:p>
         </p:txBody>
       </p:sp>
@@ -4729,8 +5030,8 @@
         </p:nvSpPr>
         <p:spPr>
           <a:xfrm>
-            <a:off x="8229600" y="5394960"/>
-            <a:ext cx="2615184" cy="438912"/>
+            <a:off x="8229600" y="5765292"/>
+            <a:ext cx="2615184" cy="475488"/>
           </a:xfrm>
           <a:prstGeom prst="rect">
             <a:avLst/>
@@ -4744,7 +5045,7 @@
           <a:p>
             <a:pPr indent="0" marL="0">
               <a:lnSpc>
-                <a:spcPts val="1240"/>
+                <a:spcPts val="1160"/>
               </a:lnSpc>
               <a:buNone/>
             </a:pPr>
@@ -17795,7 +18096,7 @@
                 <a:ea typeface="Calibri" pitchFamily="34" charset="-122"/>
                 <a:cs typeface="Calibri" pitchFamily="34" charset="-120"/>
               </a:rPr>
-              <a:t>Nitaqat scores every establishment on the share of Saudi nationals it employs and puts it in a band. The band is not a report card, it is a switch.</a:t>
+              <a:t>Nitaqat bands every establishment on the share of Saudis it employs. The band is not a report card, it is a switch.</a:t>
             </a:r>
             <a:endParaRPr lang="en-US" sz="1250" dirty="0"/>
           </a:p>
@@ -19024,7 +19325,7 @@
         <p:spPr>
           <a:xfrm>
             <a:off x="1874520" y="1892808"/>
-            <a:ext cx="1188720" cy="310896"/>
+            <a:ext cx="1188720" cy="219456"/>
           </a:xfrm>
           <a:prstGeom prst="rect">
             <a:avLst/>
@@ -19274,7 +19575,7 @@
         <p:spPr>
           <a:xfrm>
             <a:off x="4700016" y="1892808"/>
-            <a:ext cx="1188720" cy="310896"/>
+            <a:ext cx="1188720" cy="219456"/>
           </a:xfrm>
           <a:prstGeom prst="rect">
             <a:avLst/>
@@ -19524,7 +19825,7 @@
         <p:spPr>
           <a:xfrm>
             <a:off x="7525512" y="1892808"/>
-            <a:ext cx="1188720" cy="310896"/>
+            <a:ext cx="1188720" cy="219456"/>
           </a:xfrm>
           <a:prstGeom prst="rect">
             <a:avLst/>
@@ -19774,7 +20075,7 @@
         <p:spPr>
           <a:xfrm>
             <a:off x="10351008" y="1892808"/>
-            <a:ext cx="1188720" cy="310896"/>
+            <a:ext cx="1188720" cy="219456"/>
           </a:xfrm>
           <a:prstGeom prst="rect">
             <a:avLst/>
@@ -20024,7 +20325,7 @@
         <p:spPr>
           <a:xfrm>
             <a:off x="1874520" y="3520440"/>
-            <a:ext cx="1188720" cy="310896"/>
+            <a:ext cx="1188720" cy="219456"/>
           </a:xfrm>
           <a:prstGeom prst="rect">
             <a:avLst/>
@@ -20274,7 +20575,7 @@
         <p:spPr>
           <a:xfrm>
             <a:off x="4700016" y="3520440"/>
-            <a:ext cx="1188720" cy="310896"/>
+            <a:ext cx="1188720" cy="219456"/>
           </a:xfrm>
           <a:prstGeom prst="rect">
             <a:avLst/>
@@ -20524,7 +20825,7 @@
         <p:spPr>
           <a:xfrm>
             <a:off x="7525512" y="3520440"/>
-            <a:ext cx="1188720" cy="310896"/>
+            <a:ext cx="1188720" cy="219456"/>
           </a:xfrm>
           <a:prstGeom prst="rect">
             <a:avLst/>
@@ -20551,7 +20852,7 @@
                 <a:ea typeface="Calibri" pitchFamily="34" charset="-122"/>
                 <a:cs typeface="Calibri" pitchFamily="34" charset="-120"/>
               </a:rPr>
-              <a:t>Health insurance council</a:t>
+              <a:t>Health insurance</a:t>
             </a:r>
             <a:endParaRPr lang="en-US" sz="800" dirty="0"/>
           </a:p>

--- a/ksadeck/INK_IT_Visa_and_Permits_KSA.pptx
+++ b/ksadeck/INK_IT_Visa_and_Permits_KSA.pptx
@@ -606,7 +606,7 @@
           <a:lstStyle/>
           <a:p>
             <a:r>
-              <a:t>[70s · Risk reframe · cumulative 15:20 of 20:00]</a:t>
+              <a:t>[70s · Who uses it · cumulative 15:20 of 20:00]</a:t>
             </a:r>
           </a:p>
           <a:p/>
@@ -698,7 +698,7 @@
           <a:lstStyle/>
           <a:p>
             <a:r>
-              <a:t>[65s · Who uses it · cumulative 16:25 of 20:00]</a:t>
+              <a:t>[65s · Accountability and cost · cumulative 16:25 of 20:00]</a:t>
             </a:r>
           </a:p>
           <a:p/>
@@ -790,7 +790,7 @@
           <a:lstStyle/>
           <a:p>
             <a:r>
-              <a:t>[70s · Accountability and cost · cumulative 17:35 of 20:00]</a:t>
+              <a:t>[70s · Technical credibility · cumulative 17:35 of 20:00]</a:t>
             </a:r>
           </a:p>
           <a:p/>
@@ -882,7 +882,7 @@
           <a:lstStyle/>
           <a:p>
             <a:r>
-              <a:t>[85s · Technical credibility · cumulative 19:00 of 20:00]</a:t>
+              <a:t>[85s · What you provision · cumulative 19:00 of 20:00]</a:t>
             </a:r>
           </a:p>
           <a:p/>
@@ -1434,7 +1434,7 @@
           <a:lstStyle/>
           <a:p>
             <a:r>
-              <a:t>[140s · Demo the walkthrough · cumulative 8:30 of 20:00]</a:t>
+              <a:t>[140s · Walk the permit that hurts · cumulative 8:30 of 20:00]</a:t>
             </a:r>
           </a:p>
           <a:p/>
@@ -1526,7 +1526,7 @@
           <a:lstStyle/>
           <a:p>
             <a:r>
-              <a:t>[115s · The story they recognise · cumulative 10:25 of 20:00]</a:t>
+              <a:t>[115s · Where the deal widens · cumulative 10:25 of 20:00]</a:t>
             </a:r>
           </a:p>
           <a:p/>
@@ -1618,7 +1618,7 @@
           <a:lstStyle/>
           <a:p>
             <a:r>
-              <a:t>[145s · Where the deal widens · cumulative 12:50 of 20:00]</a:t>
+              <a:t>[145s · Integration answer · cumulative 12:50 of 20:00]</a:t>
             </a:r>
           </a:p>
           <a:p/>
@@ -1710,7 +1710,7 @@
           <a:lstStyle/>
           <a:p>
             <a:r>
-              <a:t>[80s · Integration answer · cumulative 14:10 of 20:00]</a:t>
+              <a:t>[80s · Risk reframe · cumulative 14:10 of 20:00]</a:t>
             </a:r>
           </a:p>
           <a:p/>
